--- a/presentation/Mish-Senior-Pitch.pptx
+++ b/presentation/Mish-Senior-Pitch.pptx
@@ -1480,7 +1480,7 @@
     <p:bg>
       <p:bgPr>
         <a:solidFill>
-          <a:srgbClr val="F4F2EE"/>
+          <a:srgbClr val="F4F7F6"/>
         </a:solidFill>
       </p:bgPr>
     </p:bg>
@@ -1506,18 +1506,20 @@
         </p:nvSpPr>
         <p:spPr>
           <a:xfrm>
-            <a:off x="731520" y="320040"/>
-            <a:ext cx="1141054" cy="502920"/>
-          </a:xfrm>
-          <a:prstGeom prst="rect">
-            <a:avLst/>
-          </a:prstGeom>
-          <a:solidFill>
-            <a:srgbClr val="111111"/>
-          </a:solidFill>
-          <a:ln w="25400">
+            <a:off x="758952" y="320040"/>
+            <a:ext cx="1086190" cy="502920"/>
+          </a:xfrm>
+          <a:prstGeom prst="roundRect">
+            <a:avLst>
+              <a:gd name="adj" fmla="val 21818"/>
+            </a:avLst>
+          </a:prstGeom>
+          <a:solidFill>
+            <a:srgbClr val="0B3D2C"/>
+          </a:solidFill>
+          <a:ln w="12700">
             <a:solidFill>
-              <a:srgbClr val="F4F2EE"/>
+              <a:srgbClr val="F4F7F6"/>
             </a:solidFill>
             <a:prstDash val="solid"/>
           </a:ln>
@@ -1552,9 +1554,9 @@
                 <a:solidFill>
                   <a:srgbClr val="FFFFFF"/>
                 </a:solidFill>
-                <a:latin typeface="Courier New" pitchFamily="34" charset="0"/>
-                <a:ea typeface="Courier New" pitchFamily="34" charset="-122"/>
-                <a:cs typeface="Courier New" pitchFamily="34" charset="-120"/>
+                <a:latin typeface="Arial" pitchFamily="34" charset="0"/>
+                <a:ea typeface="Arial" pitchFamily="34" charset="-122"/>
+                <a:cs typeface="Arial" pitchFamily="34" charset="-120"/>
               </a:rPr>
               <a:t>01</a:t>
             </a:r>
@@ -1570,13 +1572,15 @@
         </p:nvSpPr>
         <p:spPr>
           <a:xfrm>
-            <a:off x="758952" y="347472"/>
-            <a:ext cx="1086190" cy="448056"/>
-          </a:xfrm>
-          <a:prstGeom prst="rect">
-            <a:avLst/>
-          </a:prstGeom>
-          <a:ln w="31750">
+            <a:off x="804672" y="365760"/>
+            <a:ext cx="994750" cy="411480"/>
+          </a:xfrm>
+          <a:prstGeom prst="roundRect">
+            <a:avLst>
+              <a:gd name="adj" fmla="val 22222"/>
+            </a:avLst>
+          </a:prstGeom>
+          <a:ln w="25400">
             <a:solidFill>
               <a:srgbClr val="FFFFFF"/>
             </a:solidFill>
@@ -1592,18 +1596,20 @@
         </p:nvSpPr>
         <p:spPr>
           <a:xfrm>
-            <a:off x="1872574" y="320040"/>
-            <a:ext cx="1141054" cy="502920"/>
-          </a:xfrm>
-          <a:prstGeom prst="rect">
-            <a:avLst/>
-          </a:prstGeom>
-          <a:solidFill>
-            <a:srgbClr val="3A3A3A"/>
-          </a:solidFill>
-          <a:ln w="25400">
+            <a:off x="1900006" y="320040"/>
+            <a:ext cx="1086190" cy="502920"/>
+          </a:xfrm>
+          <a:prstGeom prst="roundRect">
+            <a:avLst>
+              <a:gd name="adj" fmla="val 21818"/>
+            </a:avLst>
+          </a:prstGeom>
+          <a:solidFill>
+            <a:srgbClr val="0B8A5E"/>
+          </a:solidFill>
+          <a:ln w="12700">
             <a:solidFill>
-              <a:srgbClr val="F4F2EE"/>
+              <a:srgbClr val="F4F7F6"/>
             </a:solidFill>
             <a:prstDash val="solid"/>
           </a:ln>
@@ -1638,9 +1644,9 @@
                 <a:solidFill>
                   <a:srgbClr val="FFFFFF"/>
                 </a:solidFill>
-                <a:latin typeface="Courier New" pitchFamily="34" charset="0"/>
-                <a:ea typeface="Courier New" pitchFamily="34" charset="-122"/>
-                <a:cs typeface="Courier New" pitchFamily="34" charset="-120"/>
+                <a:latin typeface="Arial" pitchFamily="34" charset="0"/>
+                <a:ea typeface="Arial" pitchFamily="34" charset="-122"/>
+                <a:cs typeface="Arial" pitchFamily="34" charset="-120"/>
               </a:rPr>
               <a:t>02</a:t>
             </a:r>
@@ -1656,18 +1662,20 @@
         </p:nvSpPr>
         <p:spPr>
           <a:xfrm>
-            <a:off x="3013629" y="320040"/>
-            <a:ext cx="1141054" cy="502920"/>
-          </a:xfrm>
-          <a:prstGeom prst="rect">
-            <a:avLst/>
-          </a:prstGeom>
-          <a:solidFill>
-            <a:srgbClr val="1D1D1D"/>
-          </a:solidFill>
-          <a:ln w="25400">
+            <a:off x="3041061" y="320040"/>
+            <a:ext cx="1086190" cy="502920"/>
+          </a:xfrm>
+          <a:prstGeom prst="roundRect">
+            <a:avLst>
+              <a:gd name="adj" fmla="val 21818"/>
+            </a:avLst>
+          </a:prstGeom>
+          <a:solidFill>
+            <a:srgbClr val="0F9F6E"/>
+          </a:solidFill>
+          <a:ln w="12700">
             <a:solidFill>
-              <a:srgbClr val="F4F2EE"/>
+              <a:srgbClr val="F4F7F6"/>
             </a:solidFill>
             <a:prstDash val="solid"/>
           </a:ln>
@@ -1702,9 +1710,9 @@
                 <a:solidFill>
                   <a:srgbClr val="FFFFFF"/>
                 </a:solidFill>
-                <a:latin typeface="Courier New" pitchFamily="34" charset="0"/>
-                <a:ea typeface="Courier New" pitchFamily="34" charset="-122"/>
-                <a:cs typeface="Courier New" pitchFamily="34" charset="-120"/>
+                <a:latin typeface="Arial" pitchFamily="34" charset="0"/>
+                <a:ea typeface="Arial" pitchFamily="34" charset="-122"/>
+                <a:cs typeface="Arial" pitchFamily="34" charset="-120"/>
               </a:rPr>
               <a:t>03</a:t>
             </a:r>
@@ -1720,18 +1728,20 @@
         </p:nvSpPr>
         <p:spPr>
           <a:xfrm>
-            <a:off x="4154683" y="320040"/>
-            <a:ext cx="2738531" cy="502920"/>
-          </a:xfrm>
-          <a:prstGeom prst="rect">
-            <a:avLst/>
-          </a:prstGeom>
-          <a:solidFill>
-            <a:srgbClr val="E8201C"/>
-          </a:solidFill>
-          <a:ln w="25400">
+            <a:off x="4182115" y="320040"/>
+            <a:ext cx="2683667" cy="502920"/>
+          </a:xfrm>
+          <a:prstGeom prst="roundRect">
+            <a:avLst>
+              <a:gd name="adj" fmla="val 21818"/>
+            </a:avLst>
+          </a:prstGeom>
+          <a:solidFill>
+            <a:srgbClr val="17B57F"/>
+          </a:solidFill>
+          <a:ln w="12700">
             <a:solidFill>
-              <a:srgbClr val="F4F2EE"/>
+              <a:srgbClr val="F4F7F6"/>
             </a:solidFill>
             <a:prstDash val="solid"/>
           </a:ln>
@@ -1766,9 +1776,9 @@
                 <a:solidFill>
                   <a:srgbClr val="FFFFFF"/>
                 </a:solidFill>
-                <a:latin typeface="Courier New" pitchFamily="34" charset="0"/>
-                <a:ea typeface="Courier New" pitchFamily="34" charset="-122"/>
-                <a:cs typeface="Courier New" pitchFamily="34" charset="-120"/>
+                <a:latin typeface="Arial" pitchFamily="34" charset="0"/>
+                <a:ea typeface="Arial" pitchFamily="34" charset="-122"/>
+                <a:cs typeface="Arial" pitchFamily="34" charset="-120"/>
               </a:rPr>
               <a:t>04 // DEMO · 60S</a:t>
             </a:r>
@@ -1784,18 +1794,20 @@
         </p:nvSpPr>
         <p:spPr>
           <a:xfrm>
-            <a:off x="6893214" y="320040"/>
-            <a:ext cx="1141054" cy="502920"/>
-          </a:xfrm>
-          <a:prstGeom prst="rect">
-            <a:avLst/>
-          </a:prstGeom>
-          <a:solidFill>
-            <a:srgbClr val="1D1D1D"/>
-          </a:solidFill>
-          <a:ln w="25400">
+            <a:off x="6920646" y="320040"/>
+            <a:ext cx="1086190" cy="502920"/>
+          </a:xfrm>
+          <a:prstGeom prst="roundRect">
+            <a:avLst>
+              <a:gd name="adj" fmla="val 21818"/>
+            </a:avLst>
+          </a:prstGeom>
+          <a:solidFill>
+            <a:srgbClr val="0F9F6E"/>
+          </a:solidFill>
+          <a:ln w="12700">
             <a:solidFill>
-              <a:srgbClr val="F4F2EE"/>
+              <a:srgbClr val="F4F7F6"/>
             </a:solidFill>
             <a:prstDash val="solid"/>
           </a:ln>
@@ -1830,9 +1842,9 @@
                 <a:solidFill>
                   <a:srgbClr val="FFFFFF"/>
                 </a:solidFill>
-                <a:latin typeface="Courier New" pitchFamily="34" charset="0"/>
-                <a:ea typeface="Courier New" pitchFamily="34" charset="-122"/>
-                <a:cs typeface="Courier New" pitchFamily="34" charset="-120"/>
+                <a:latin typeface="Arial" pitchFamily="34" charset="0"/>
+                <a:ea typeface="Arial" pitchFamily="34" charset="-122"/>
+                <a:cs typeface="Arial" pitchFamily="34" charset="-120"/>
               </a:rPr>
               <a:t>05</a:t>
             </a:r>
@@ -1848,18 +1860,20 @@
         </p:nvSpPr>
         <p:spPr>
           <a:xfrm>
-            <a:off x="8034269" y="320040"/>
-            <a:ext cx="1141054" cy="502920"/>
-          </a:xfrm>
-          <a:prstGeom prst="rect">
-            <a:avLst/>
-          </a:prstGeom>
-          <a:solidFill>
-            <a:srgbClr val="3A3A3A"/>
-          </a:solidFill>
-          <a:ln w="25400">
+            <a:off x="8061701" y="320040"/>
+            <a:ext cx="1086190" cy="502920"/>
+          </a:xfrm>
+          <a:prstGeom prst="roundRect">
+            <a:avLst>
+              <a:gd name="adj" fmla="val 21818"/>
+            </a:avLst>
+          </a:prstGeom>
+          <a:solidFill>
+            <a:srgbClr val="0B8A5E"/>
+          </a:solidFill>
+          <a:ln w="12700">
             <a:solidFill>
-              <a:srgbClr val="F4F2EE"/>
+              <a:srgbClr val="F4F7F6"/>
             </a:solidFill>
             <a:prstDash val="solid"/>
           </a:ln>
@@ -1894,9 +1908,9 @@
                 <a:solidFill>
                   <a:srgbClr val="FFFFFF"/>
                 </a:solidFill>
-                <a:latin typeface="Courier New" pitchFamily="34" charset="0"/>
-                <a:ea typeface="Courier New" pitchFamily="34" charset="-122"/>
-                <a:cs typeface="Courier New" pitchFamily="34" charset="-120"/>
+                <a:latin typeface="Arial" pitchFamily="34" charset="0"/>
+                <a:ea typeface="Arial" pitchFamily="34" charset="-122"/>
+                <a:cs typeface="Arial" pitchFamily="34" charset="-120"/>
               </a:rPr>
               <a:t>06</a:t>
             </a:r>
@@ -1912,18 +1926,20 @@
         </p:nvSpPr>
         <p:spPr>
           <a:xfrm>
-            <a:off x="9175323" y="320040"/>
-            <a:ext cx="1141054" cy="502920"/>
-          </a:xfrm>
-          <a:prstGeom prst="rect">
-            <a:avLst/>
-          </a:prstGeom>
-          <a:solidFill>
-            <a:srgbClr val="111111"/>
-          </a:solidFill>
-          <a:ln w="25400">
+            <a:off x="9202755" y="320040"/>
+            <a:ext cx="1086190" cy="502920"/>
+          </a:xfrm>
+          <a:prstGeom prst="roundRect">
+            <a:avLst>
+              <a:gd name="adj" fmla="val 21818"/>
+            </a:avLst>
+          </a:prstGeom>
+          <a:solidFill>
+            <a:srgbClr val="0B3D2C"/>
+          </a:solidFill>
+          <a:ln w="12700">
             <a:solidFill>
-              <a:srgbClr val="F4F2EE"/>
+              <a:srgbClr val="F4F7F6"/>
             </a:solidFill>
             <a:prstDash val="solid"/>
           </a:ln>
@@ -1958,9 +1974,9 @@
                 <a:solidFill>
                   <a:srgbClr val="FFFFFF"/>
                 </a:solidFill>
-                <a:latin typeface="Courier New" pitchFamily="34" charset="0"/>
-                <a:ea typeface="Courier New" pitchFamily="34" charset="-122"/>
-                <a:cs typeface="Courier New" pitchFamily="34" charset="-120"/>
+                <a:latin typeface="Arial" pitchFamily="34" charset="0"/>
+                <a:ea typeface="Arial" pitchFamily="34" charset="-122"/>
+                <a:cs typeface="Arial" pitchFamily="34" charset="-120"/>
               </a:rPr>
               <a:t>07</a:t>
             </a:r>
@@ -1976,18 +1992,20 @@
         </p:nvSpPr>
         <p:spPr>
           <a:xfrm>
-            <a:off x="10316378" y="320040"/>
-            <a:ext cx="1141054" cy="502920"/>
-          </a:xfrm>
-          <a:prstGeom prst="rect">
-            <a:avLst/>
-          </a:prstGeom>
-          <a:solidFill>
-            <a:srgbClr val="FF2D2D"/>
-          </a:solidFill>
-          <a:ln w="25400">
+            <a:off x="10343810" y="320040"/>
+            <a:ext cx="1086190" cy="502920"/>
+          </a:xfrm>
+          <a:prstGeom prst="roundRect">
+            <a:avLst>
+              <a:gd name="adj" fmla="val 21818"/>
+            </a:avLst>
+          </a:prstGeom>
+          <a:solidFill>
+            <a:srgbClr val="22C58B"/>
+          </a:solidFill>
+          <a:ln w="12700">
             <a:solidFill>
-              <a:srgbClr val="F4F2EE"/>
+              <a:srgbClr val="F4F7F6"/>
             </a:solidFill>
             <a:prstDash val="solid"/>
           </a:ln>
@@ -2022,9 +2040,9 @@
                 <a:solidFill>
                   <a:srgbClr val="FFFFFF"/>
                 </a:solidFill>
-                <a:latin typeface="Courier New" pitchFamily="34" charset="0"/>
-                <a:ea typeface="Courier New" pitchFamily="34" charset="-122"/>
-                <a:cs typeface="Courier New" pitchFamily="34" charset="-120"/>
+                <a:latin typeface="Arial" pitchFamily="34" charset="0"/>
+                <a:ea typeface="Arial" pitchFamily="34" charset="-122"/>
+                <a:cs typeface="Arial" pitchFamily="34" charset="-120"/>
               </a:rPr>
               <a:t>08</a:t>
             </a:r>
@@ -2040,34 +2058,38 @@
         </p:nvSpPr>
         <p:spPr>
           <a:xfrm>
-            <a:off x="731520" y="1143000"/>
-            <a:ext cx="10058400" cy="320040"/>
-          </a:xfrm>
-          <a:prstGeom prst="rect">
-            <a:avLst/>
-          </a:prstGeom>
-          <a:noFill/>
-          <a:ln/>
-        </p:spPr>
-        <p:txBody>
-          <a:bodyPr wrap="square" rtlCol="0" anchor="ctr"/>
-          <a:lstStyle/>
-          <a:p>
-            <a:pPr indent="0" marL="0">
-              <a:buNone/>
-            </a:pPr>
-            <a:r>
-              <a:rPr lang="en-US" sz="1300" b="1" spc="200" kern="0" dirty="0">
-                <a:solidFill>
-                  <a:srgbClr val="E8201C"/>
-                </a:solidFill>
-                <a:latin typeface="Courier New" pitchFamily="34" charset="0"/>
-                <a:ea typeface="Courier New" pitchFamily="34" charset="-122"/>
-                <a:cs typeface="Courier New" pitchFamily="34" charset="-120"/>
+            <a:off x="731520" y="1097280"/>
+            <a:ext cx="5029200" cy="365760"/>
+          </a:xfrm>
+          <a:prstGeom prst="roundRect">
+            <a:avLst>
+              <a:gd name="adj" fmla="val 50000"/>
+            </a:avLst>
+          </a:prstGeom>
+          <a:solidFill>
+            <a:srgbClr val="E8F7F0"/>
+          </a:solidFill>
+          <a:ln/>
+        </p:spPr>
+        <p:txBody>
+          <a:bodyPr wrap="square" rtlCol="0" anchor="ctr"/>
+          <a:lstStyle/>
+          <a:p>
+            <a:pPr algn="ctr" indent="0" marL="0">
+              <a:buNone/>
+            </a:pPr>
+            <a:r>
+              <a:rPr lang="en-US" sz="1200" b="1" spc="200" kern="0" dirty="0">
+                <a:solidFill>
+                  <a:srgbClr val="0B8A5E"/>
+                </a:solidFill>
+                <a:latin typeface="Arial" pitchFamily="34" charset="0"/>
+                <a:ea typeface="Arial" pitchFamily="34" charset="-122"/>
+                <a:cs typeface="Arial" pitchFamily="34" charset="-120"/>
               </a:rPr>
               <a:t>01 // PROBLEM · 20 SEC</a:t>
             </a:r>
-            <a:endParaRPr lang="en-US" sz="1300" dirty="0"/>
+            <a:endParaRPr lang="en-US" sz="1200" dirty="0"/>
           </a:p>
         </p:txBody>
       </p:sp>
@@ -2098,11 +2120,11 @@
             <a:r>
               <a:rPr lang="en-US" sz="1000" dirty="0">
                 <a:solidFill>
-                  <a:srgbClr val="6B6B6B"/>
-                </a:solidFill>
-                <a:latin typeface="Courier New" pitchFamily="34" charset="0"/>
-                <a:ea typeface="Courier New" pitchFamily="34" charset="-122"/>
-                <a:cs typeface="Courier New" pitchFamily="34" charset="-120"/>
+                  <a:srgbClr val="5F6F68"/>
+                </a:solidFill>
+                <a:latin typeface="Arial" pitchFamily="34" charset="0"/>
+                <a:ea typeface="Arial" pitchFamily="34" charset="-122"/>
+                <a:cs typeface="Arial" pitchFamily="34" charset="-120"/>
               </a:rPr>
               <a:t>MISH SENIOR</a:t>
             </a:r>
@@ -2137,11 +2159,11 @@
             <a:r>
               <a:rPr lang="en-US" sz="1000" dirty="0">
                 <a:solidFill>
-                  <a:srgbClr val="6B6B6B"/>
-                </a:solidFill>
-                <a:latin typeface="Courier New" pitchFamily="34" charset="0"/>
-                <a:ea typeface="Courier New" pitchFamily="34" charset="-122"/>
-                <a:cs typeface="Courier New" pitchFamily="34" charset="-120"/>
+                  <a:srgbClr val="5F6F68"/>
+                </a:solidFill>
+                <a:latin typeface="Arial" pitchFamily="34" charset="0"/>
+                <a:ea typeface="Arial" pitchFamily="34" charset="-122"/>
+                <a:cs typeface="Arial" pitchFamily="34" charset="-120"/>
               </a:rPr>
               <a:t>01 / 08</a:t>
             </a:r>
@@ -2176,7 +2198,7 @@
             <a:r>
               <a:rPr lang="en-US" sz="4400" b="1" dirty="0">
                 <a:solidFill>
-                  <a:srgbClr val="0D0D0D"/>
+                  <a:srgbClr val="0F1F1A"/>
                 </a:solidFill>
                 <a:latin typeface="Arial" pitchFamily="34" charset="0"/>
                 <a:ea typeface="Arial" pitchFamily="34" charset="-122"/>
@@ -2203,9 +2225,9 @@
             <a:avLst/>
           </a:prstGeom>
           <a:noFill/>
-          <a:ln w="31750">
+          <a:ln w="19050">
             <a:solidFill>
-              <a:srgbClr val="0D0D0D"/>
+              <a:srgbClr val="CBD5D0"/>
             </a:solidFill>
             <a:prstDash val="solid"/>
           </a:ln>
@@ -2220,17 +2242,17 @@
         <p:spPr>
           <a:xfrm>
             <a:off x="777240" y="3172968"/>
-            <a:ext cx="182880" cy="182880"/>
-          </a:xfrm>
-          <a:prstGeom prst="rect">
-            <a:avLst/>
-          </a:prstGeom>
-          <a:solidFill>
-            <a:srgbClr val="E8201C"/>
+            <a:ext cx="201168" cy="201168"/>
+          </a:xfrm>
+          <a:prstGeom prst="ellipse">
+            <a:avLst/>
+          </a:prstGeom>
+          <a:solidFill>
+            <a:srgbClr val="0F9F6E"/>
           </a:solidFill>
           <a:ln w="12700">
             <a:solidFill>
-              <a:srgbClr val="E8201C"/>
+              <a:srgbClr val="0F9F6E"/>
             </a:solidFill>
             <a:prstDash val="solid"/>
           </a:ln>
@@ -2263,7 +2285,7 @@
             <a:r>
               <a:rPr lang="en-US" sz="2600" dirty="0">
                 <a:solidFill>
-                  <a:srgbClr val="0D0D0D"/>
+                  <a:srgbClr val="0F1F1A"/>
                 </a:solidFill>
                 <a:latin typeface="Arial" pitchFamily="34" charset="0"/>
                 <a:ea typeface="Arial" pitchFamily="34" charset="-122"/>
@@ -2284,17 +2306,17 @@
         <p:spPr>
           <a:xfrm>
             <a:off x="777240" y="4041648"/>
-            <a:ext cx="182880" cy="182880"/>
-          </a:xfrm>
-          <a:prstGeom prst="rect">
-            <a:avLst/>
-          </a:prstGeom>
-          <a:solidFill>
-            <a:srgbClr val="E8201C"/>
+            <a:ext cx="201168" cy="201168"/>
+          </a:xfrm>
+          <a:prstGeom prst="ellipse">
+            <a:avLst/>
+          </a:prstGeom>
+          <a:solidFill>
+            <a:srgbClr val="0F9F6E"/>
           </a:solidFill>
           <a:ln w="12700">
             <a:solidFill>
-              <a:srgbClr val="E8201C"/>
+              <a:srgbClr val="0F9F6E"/>
             </a:solidFill>
             <a:prstDash val="solid"/>
           </a:ln>
@@ -2327,7 +2349,7 @@
             <a:r>
               <a:rPr lang="en-US" sz="2600" dirty="0">
                 <a:solidFill>
-                  <a:srgbClr val="0D0D0D"/>
+                  <a:srgbClr val="0F1F1A"/>
                 </a:solidFill>
                 <a:latin typeface="Arial" pitchFamily="34" charset="0"/>
                 <a:ea typeface="Arial" pitchFamily="34" charset="-122"/>
@@ -2348,17 +2370,17 @@
         <p:spPr>
           <a:xfrm>
             <a:off x="777240" y="4910328"/>
-            <a:ext cx="182880" cy="182880"/>
-          </a:xfrm>
-          <a:prstGeom prst="rect">
-            <a:avLst/>
-          </a:prstGeom>
-          <a:solidFill>
-            <a:srgbClr val="E8201C"/>
+            <a:ext cx="201168" cy="201168"/>
+          </a:xfrm>
+          <a:prstGeom prst="ellipse">
+            <a:avLst/>
+          </a:prstGeom>
+          <a:solidFill>
+            <a:srgbClr val="0F9F6E"/>
           </a:solidFill>
           <a:ln w="12700">
             <a:solidFill>
-              <a:srgbClr val="E8201C"/>
+              <a:srgbClr val="0F9F6E"/>
             </a:solidFill>
             <a:prstDash val="solid"/>
           </a:ln>
@@ -2391,7 +2413,7 @@
             <a:r>
               <a:rPr lang="en-US" sz="2600" dirty="0">
                 <a:solidFill>
-                  <a:srgbClr val="0D0D0D"/>
+                  <a:srgbClr val="0F1F1A"/>
                 </a:solidFill>
                 <a:latin typeface="Arial" pitchFamily="34" charset="0"/>
                 <a:ea typeface="Arial" pitchFamily="34" charset="-122"/>
@@ -2417,7 +2439,7 @@
     <p:bg>
       <p:bgPr>
         <a:solidFill>
-          <a:srgbClr val="F4F2EE"/>
+          <a:srgbClr val="F4F7F6"/>
         </a:solidFill>
       </p:bgPr>
     </p:bg>
@@ -2443,18 +2465,20 @@
         </p:nvSpPr>
         <p:spPr>
           <a:xfrm>
-            <a:off x="731520" y="320040"/>
-            <a:ext cx="1141054" cy="502920"/>
-          </a:xfrm>
-          <a:prstGeom prst="rect">
-            <a:avLst/>
-          </a:prstGeom>
-          <a:solidFill>
-            <a:srgbClr val="111111"/>
-          </a:solidFill>
-          <a:ln w="25400">
+            <a:off x="758952" y="320040"/>
+            <a:ext cx="1086190" cy="502920"/>
+          </a:xfrm>
+          <a:prstGeom prst="roundRect">
+            <a:avLst>
+              <a:gd name="adj" fmla="val 21818"/>
+            </a:avLst>
+          </a:prstGeom>
+          <a:solidFill>
+            <a:srgbClr val="0B3D2C"/>
+          </a:solidFill>
+          <a:ln w="12700">
             <a:solidFill>
-              <a:srgbClr val="F4F2EE"/>
+              <a:srgbClr val="F4F7F6"/>
             </a:solidFill>
             <a:prstDash val="solid"/>
           </a:ln>
@@ -2489,9 +2513,9 @@
                 <a:solidFill>
                   <a:srgbClr val="FFFFFF"/>
                 </a:solidFill>
-                <a:latin typeface="Courier New" pitchFamily="34" charset="0"/>
-                <a:ea typeface="Courier New" pitchFamily="34" charset="-122"/>
-                <a:cs typeface="Courier New" pitchFamily="34" charset="-120"/>
+                <a:latin typeface="Arial" pitchFamily="34" charset="0"/>
+                <a:ea typeface="Arial" pitchFamily="34" charset="-122"/>
+                <a:cs typeface="Arial" pitchFamily="34" charset="-120"/>
               </a:rPr>
               <a:t>01</a:t>
             </a:r>
@@ -2507,18 +2531,20 @@
         </p:nvSpPr>
         <p:spPr>
           <a:xfrm>
-            <a:off x="1872574" y="320040"/>
-            <a:ext cx="1141054" cy="502920"/>
-          </a:xfrm>
-          <a:prstGeom prst="rect">
-            <a:avLst/>
-          </a:prstGeom>
-          <a:solidFill>
-            <a:srgbClr val="3A3A3A"/>
-          </a:solidFill>
-          <a:ln w="25400">
+            <a:off x="1900006" y="320040"/>
+            <a:ext cx="1086190" cy="502920"/>
+          </a:xfrm>
+          <a:prstGeom prst="roundRect">
+            <a:avLst>
+              <a:gd name="adj" fmla="val 21818"/>
+            </a:avLst>
+          </a:prstGeom>
+          <a:solidFill>
+            <a:srgbClr val="0B8A5E"/>
+          </a:solidFill>
+          <a:ln w="12700">
             <a:solidFill>
-              <a:srgbClr val="F4F2EE"/>
+              <a:srgbClr val="F4F7F6"/>
             </a:solidFill>
             <a:prstDash val="solid"/>
           </a:ln>
@@ -2553,9 +2579,9 @@
                 <a:solidFill>
                   <a:srgbClr val="FFFFFF"/>
                 </a:solidFill>
-                <a:latin typeface="Courier New" pitchFamily="34" charset="0"/>
-                <a:ea typeface="Courier New" pitchFamily="34" charset="-122"/>
-                <a:cs typeface="Courier New" pitchFamily="34" charset="-120"/>
+                <a:latin typeface="Arial" pitchFamily="34" charset="0"/>
+                <a:ea typeface="Arial" pitchFamily="34" charset="-122"/>
+                <a:cs typeface="Arial" pitchFamily="34" charset="-120"/>
               </a:rPr>
               <a:t>02</a:t>
             </a:r>
@@ -2571,13 +2597,15 @@
         </p:nvSpPr>
         <p:spPr>
           <a:xfrm>
-            <a:off x="1900006" y="347472"/>
-            <a:ext cx="1086190" cy="448056"/>
-          </a:xfrm>
-          <a:prstGeom prst="rect">
-            <a:avLst/>
-          </a:prstGeom>
-          <a:ln w="31750">
+            <a:off x="1945726" y="365760"/>
+            <a:ext cx="994750" cy="411480"/>
+          </a:xfrm>
+          <a:prstGeom prst="roundRect">
+            <a:avLst>
+              <a:gd name="adj" fmla="val 22222"/>
+            </a:avLst>
+          </a:prstGeom>
+          <a:ln w="25400">
             <a:solidFill>
               <a:srgbClr val="FFFFFF"/>
             </a:solidFill>
@@ -2593,18 +2621,20 @@
         </p:nvSpPr>
         <p:spPr>
           <a:xfrm>
-            <a:off x="3013629" y="320040"/>
-            <a:ext cx="1141054" cy="502920"/>
-          </a:xfrm>
-          <a:prstGeom prst="rect">
-            <a:avLst/>
-          </a:prstGeom>
-          <a:solidFill>
-            <a:srgbClr val="1D1D1D"/>
-          </a:solidFill>
-          <a:ln w="25400">
+            <a:off x="3041061" y="320040"/>
+            <a:ext cx="1086190" cy="502920"/>
+          </a:xfrm>
+          <a:prstGeom prst="roundRect">
+            <a:avLst>
+              <a:gd name="adj" fmla="val 21818"/>
+            </a:avLst>
+          </a:prstGeom>
+          <a:solidFill>
+            <a:srgbClr val="0F9F6E"/>
+          </a:solidFill>
+          <a:ln w="12700">
             <a:solidFill>
-              <a:srgbClr val="F4F2EE"/>
+              <a:srgbClr val="F4F7F6"/>
             </a:solidFill>
             <a:prstDash val="solid"/>
           </a:ln>
@@ -2639,9 +2669,9 @@
                 <a:solidFill>
                   <a:srgbClr val="FFFFFF"/>
                 </a:solidFill>
-                <a:latin typeface="Courier New" pitchFamily="34" charset="0"/>
-                <a:ea typeface="Courier New" pitchFamily="34" charset="-122"/>
-                <a:cs typeface="Courier New" pitchFamily="34" charset="-120"/>
+                <a:latin typeface="Arial" pitchFamily="34" charset="0"/>
+                <a:ea typeface="Arial" pitchFamily="34" charset="-122"/>
+                <a:cs typeface="Arial" pitchFamily="34" charset="-120"/>
               </a:rPr>
               <a:t>03</a:t>
             </a:r>
@@ -2657,18 +2687,20 @@
         </p:nvSpPr>
         <p:spPr>
           <a:xfrm>
-            <a:off x="4154683" y="320040"/>
-            <a:ext cx="2738531" cy="502920"/>
-          </a:xfrm>
-          <a:prstGeom prst="rect">
-            <a:avLst/>
-          </a:prstGeom>
-          <a:solidFill>
-            <a:srgbClr val="E8201C"/>
-          </a:solidFill>
-          <a:ln w="25400">
+            <a:off x="4182115" y="320040"/>
+            <a:ext cx="2683667" cy="502920"/>
+          </a:xfrm>
+          <a:prstGeom prst="roundRect">
+            <a:avLst>
+              <a:gd name="adj" fmla="val 21818"/>
+            </a:avLst>
+          </a:prstGeom>
+          <a:solidFill>
+            <a:srgbClr val="17B57F"/>
+          </a:solidFill>
+          <a:ln w="12700">
             <a:solidFill>
-              <a:srgbClr val="F4F2EE"/>
+              <a:srgbClr val="F4F7F6"/>
             </a:solidFill>
             <a:prstDash val="solid"/>
           </a:ln>
@@ -2703,9 +2735,9 @@
                 <a:solidFill>
                   <a:srgbClr val="FFFFFF"/>
                 </a:solidFill>
-                <a:latin typeface="Courier New" pitchFamily="34" charset="0"/>
-                <a:ea typeface="Courier New" pitchFamily="34" charset="-122"/>
-                <a:cs typeface="Courier New" pitchFamily="34" charset="-120"/>
+                <a:latin typeface="Arial" pitchFamily="34" charset="0"/>
+                <a:ea typeface="Arial" pitchFamily="34" charset="-122"/>
+                <a:cs typeface="Arial" pitchFamily="34" charset="-120"/>
               </a:rPr>
               <a:t>04 // DEMO · 60S</a:t>
             </a:r>
@@ -2721,18 +2753,20 @@
         </p:nvSpPr>
         <p:spPr>
           <a:xfrm>
-            <a:off x="6893214" y="320040"/>
-            <a:ext cx="1141054" cy="502920"/>
-          </a:xfrm>
-          <a:prstGeom prst="rect">
-            <a:avLst/>
-          </a:prstGeom>
-          <a:solidFill>
-            <a:srgbClr val="1D1D1D"/>
-          </a:solidFill>
-          <a:ln w="25400">
+            <a:off x="6920646" y="320040"/>
+            <a:ext cx="1086190" cy="502920"/>
+          </a:xfrm>
+          <a:prstGeom prst="roundRect">
+            <a:avLst>
+              <a:gd name="adj" fmla="val 21818"/>
+            </a:avLst>
+          </a:prstGeom>
+          <a:solidFill>
+            <a:srgbClr val="0F9F6E"/>
+          </a:solidFill>
+          <a:ln w="12700">
             <a:solidFill>
-              <a:srgbClr val="F4F2EE"/>
+              <a:srgbClr val="F4F7F6"/>
             </a:solidFill>
             <a:prstDash val="solid"/>
           </a:ln>
@@ -2767,9 +2801,9 @@
                 <a:solidFill>
                   <a:srgbClr val="FFFFFF"/>
                 </a:solidFill>
-                <a:latin typeface="Courier New" pitchFamily="34" charset="0"/>
-                <a:ea typeface="Courier New" pitchFamily="34" charset="-122"/>
-                <a:cs typeface="Courier New" pitchFamily="34" charset="-120"/>
+                <a:latin typeface="Arial" pitchFamily="34" charset="0"/>
+                <a:ea typeface="Arial" pitchFamily="34" charset="-122"/>
+                <a:cs typeface="Arial" pitchFamily="34" charset="-120"/>
               </a:rPr>
               <a:t>05</a:t>
             </a:r>
@@ -2785,18 +2819,20 @@
         </p:nvSpPr>
         <p:spPr>
           <a:xfrm>
-            <a:off x="8034269" y="320040"/>
-            <a:ext cx="1141054" cy="502920"/>
-          </a:xfrm>
-          <a:prstGeom prst="rect">
-            <a:avLst/>
-          </a:prstGeom>
-          <a:solidFill>
-            <a:srgbClr val="3A3A3A"/>
-          </a:solidFill>
-          <a:ln w="25400">
+            <a:off x="8061701" y="320040"/>
+            <a:ext cx="1086190" cy="502920"/>
+          </a:xfrm>
+          <a:prstGeom prst="roundRect">
+            <a:avLst>
+              <a:gd name="adj" fmla="val 21818"/>
+            </a:avLst>
+          </a:prstGeom>
+          <a:solidFill>
+            <a:srgbClr val="0B8A5E"/>
+          </a:solidFill>
+          <a:ln w="12700">
             <a:solidFill>
-              <a:srgbClr val="F4F2EE"/>
+              <a:srgbClr val="F4F7F6"/>
             </a:solidFill>
             <a:prstDash val="solid"/>
           </a:ln>
@@ -2831,9 +2867,9 @@
                 <a:solidFill>
                   <a:srgbClr val="FFFFFF"/>
                 </a:solidFill>
-                <a:latin typeface="Courier New" pitchFamily="34" charset="0"/>
-                <a:ea typeface="Courier New" pitchFamily="34" charset="-122"/>
-                <a:cs typeface="Courier New" pitchFamily="34" charset="-120"/>
+                <a:latin typeface="Arial" pitchFamily="34" charset="0"/>
+                <a:ea typeface="Arial" pitchFamily="34" charset="-122"/>
+                <a:cs typeface="Arial" pitchFamily="34" charset="-120"/>
               </a:rPr>
               <a:t>06</a:t>
             </a:r>
@@ -2849,18 +2885,20 @@
         </p:nvSpPr>
         <p:spPr>
           <a:xfrm>
-            <a:off x="9175323" y="320040"/>
-            <a:ext cx="1141054" cy="502920"/>
-          </a:xfrm>
-          <a:prstGeom prst="rect">
-            <a:avLst/>
-          </a:prstGeom>
-          <a:solidFill>
-            <a:srgbClr val="111111"/>
-          </a:solidFill>
-          <a:ln w="25400">
+            <a:off x="9202755" y="320040"/>
+            <a:ext cx="1086190" cy="502920"/>
+          </a:xfrm>
+          <a:prstGeom prst="roundRect">
+            <a:avLst>
+              <a:gd name="adj" fmla="val 21818"/>
+            </a:avLst>
+          </a:prstGeom>
+          <a:solidFill>
+            <a:srgbClr val="0B3D2C"/>
+          </a:solidFill>
+          <a:ln w="12700">
             <a:solidFill>
-              <a:srgbClr val="F4F2EE"/>
+              <a:srgbClr val="F4F7F6"/>
             </a:solidFill>
             <a:prstDash val="solid"/>
           </a:ln>
@@ -2895,9 +2933,9 @@
                 <a:solidFill>
                   <a:srgbClr val="FFFFFF"/>
                 </a:solidFill>
-                <a:latin typeface="Courier New" pitchFamily="34" charset="0"/>
-                <a:ea typeface="Courier New" pitchFamily="34" charset="-122"/>
-                <a:cs typeface="Courier New" pitchFamily="34" charset="-120"/>
+                <a:latin typeface="Arial" pitchFamily="34" charset="0"/>
+                <a:ea typeface="Arial" pitchFamily="34" charset="-122"/>
+                <a:cs typeface="Arial" pitchFamily="34" charset="-120"/>
               </a:rPr>
               <a:t>07</a:t>
             </a:r>
@@ -2913,18 +2951,20 @@
         </p:nvSpPr>
         <p:spPr>
           <a:xfrm>
-            <a:off x="10316378" y="320040"/>
-            <a:ext cx="1141054" cy="502920"/>
-          </a:xfrm>
-          <a:prstGeom prst="rect">
-            <a:avLst/>
-          </a:prstGeom>
-          <a:solidFill>
-            <a:srgbClr val="FF2D2D"/>
-          </a:solidFill>
-          <a:ln w="25400">
+            <a:off x="10343810" y="320040"/>
+            <a:ext cx="1086190" cy="502920"/>
+          </a:xfrm>
+          <a:prstGeom prst="roundRect">
+            <a:avLst>
+              <a:gd name="adj" fmla="val 21818"/>
+            </a:avLst>
+          </a:prstGeom>
+          <a:solidFill>
+            <a:srgbClr val="22C58B"/>
+          </a:solidFill>
+          <a:ln w="12700">
             <a:solidFill>
-              <a:srgbClr val="F4F2EE"/>
+              <a:srgbClr val="F4F7F6"/>
             </a:solidFill>
             <a:prstDash val="solid"/>
           </a:ln>
@@ -2959,9 +2999,9 @@
                 <a:solidFill>
                   <a:srgbClr val="FFFFFF"/>
                 </a:solidFill>
-                <a:latin typeface="Courier New" pitchFamily="34" charset="0"/>
-                <a:ea typeface="Courier New" pitchFamily="34" charset="-122"/>
-                <a:cs typeface="Courier New" pitchFamily="34" charset="-120"/>
+                <a:latin typeface="Arial" pitchFamily="34" charset="0"/>
+                <a:ea typeface="Arial" pitchFamily="34" charset="-122"/>
+                <a:cs typeface="Arial" pitchFamily="34" charset="-120"/>
               </a:rPr>
               <a:t>08</a:t>
             </a:r>
@@ -2977,34 +3017,38 @@
         </p:nvSpPr>
         <p:spPr>
           <a:xfrm>
-            <a:off x="731520" y="1143000"/>
-            <a:ext cx="10058400" cy="320040"/>
-          </a:xfrm>
-          <a:prstGeom prst="rect">
-            <a:avLst/>
-          </a:prstGeom>
-          <a:noFill/>
-          <a:ln/>
-        </p:spPr>
-        <p:txBody>
-          <a:bodyPr wrap="square" rtlCol="0" anchor="ctr"/>
-          <a:lstStyle/>
-          <a:p>
-            <a:pPr indent="0" marL="0">
-              <a:buNone/>
-            </a:pPr>
-            <a:r>
-              <a:rPr lang="en-US" sz="1300" b="1" spc="200" kern="0" dirty="0">
-                <a:solidFill>
-                  <a:srgbClr val="E8201C"/>
-                </a:solidFill>
-                <a:latin typeface="Courier New" pitchFamily="34" charset="0"/>
-                <a:ea typeface="Courier New" pitchFamily="34" charset="-122"/>
-                <a:cs typeface="Courier New" pitchFamily="34" charset="-120"/>
+            <a:off x="731520" y="1097280"/>
+            <a:ext cx="5029200" cy="365760"/>
+          </a:xfrm>
+          <a:prstGeom prst="roundRect">
+            <a:avLst>
+              <a:gd name="adj" fmla="val 50000"/>
+            </a:avLst>
+          </a:prstGeom>
+          <a:solidFill>
+            <a:srgbClr val="E8F7F0"/>
+          </a:solidFill>
+          <a:ln/>
+        </p:spPr>
+        <p:txBody>
+          <a:bodyPr wrap="square" rtlCol="0" anchor="ctr"/>
+          <a:lstStyle/>
+          <a:p>
+            <a:pPr algn="ctr" indent="0" marL="0">
+              <a:buNone/>
+            </a:pPr>
+            <a:r>
+              <a:rPr lang="en-US" sz="1200" b="1" spc="200" kern="0" dirty="0">
+                <a:solidFill>
+                  <a:srgbClr val="0B8A5E"/>
+                </a:solidFill>
+                <a:latin typeface="Arial" pitchFamily="34" charset="0"/>
+                <a:ea typeface="Arial" pitchFamily="34" charset="-122"/>
+                <a:cs typeface="Arial" pitchFamily="34" charset="-120"/>
               </a:rPr>
               <a:t>02 // IMPACT · 15 SEC</a:t>
             </a:r>
-            <a:endParaRPr lang="en-US" sz="1300" dirty="0"/>
+            <a:endParaRPr lang="en-US" sz="1200" dirty="0"/>
           </a:p>
         </p:txBody>
       </p:sp>
@@ -3035,11 +3079,11 @@
             <a:r>
               <a:rPr lang="en-US" sz="1000" dirty="0">
                 <a:solidFill>
-                  <a:srgbClr val="6B6B6B"/>
-                </a:solidFill>
-                <a:latin typeface="Courier New" pitchFamily="34" charset="0"/>
-                <a:ea typeface="Courier New" pitchFamily="34" charset="-122"/>
-                <a:cs typeface="Courier New" pitchFamily="34" charset="-120"/>
+                  <a:srgbClr val="5F6F68"/>
+                </a:solidFill>
+                <a:latin typeface="Arial" pitchFamily="34" charset="0"/>
+                <a:ea typeface="Arial" pitchFamily="34" charset="-122"/>
+                <a:cs typeface="Arial" pitchFamily="34" charset="-120"/>
               </a:rPr>
               <a:t>MISH SENIOR</a:t>
             </a:r>
@@ -3074,11 +3118,11 @@
             <a:r>
               <a:rPr lang="en-US" sz="1000" dirty="0">
                 <a:solidFill>
-                  <a:srgbClr val="6B6B6B"/>
-                </a:solidFill>
-                <a:latin typeface="Courier New" pitchFamily="34" charset="0"/>
-                <a:ea typeface="Courier New" pitchFamily="34" charset="-122"/>
-                <a:cs typeface="Courier New" pitchFamily="34" charset="-120"/>
+                  <a:srgbClr val="5F6F68"/>
+                </a:solidFill>
+                <a:latin typeface="Arial" pitchFamily="34" charset="0"/>
+                <a:ea typeface="Arial" pitchFamily="34" charset="-122"/>
+                <a:cs typeface="Arial" pitchFamily="34" charset="-120"/>
               </a:rPr>
               <a:t>02 / 08</a:t>
             </a:r>
@@ -3113,7 +3157,7 @@
             <a:r>
               <a:rPr lang="en-US" sz="4400" b="1" dirty="0">
                 <a:solidFill>
-                  <a:srgbClr val="0D0D0D"/>
+                  <a:srgbClr val="0F1F1A"/>
                 </a:solidFill>
                 <a:latin typeface="Arial" pitchFamily="34" charset="0"/>
                 <a:ea typeface="Arial" pitchFamily="34" charset="-122"/>
@@ -3140,9 +3184,9 @@
             <a:avLst/>
           </a:prstGeom>
           <a:noFill/>
-          <a:ln w="31750">
+          <a:ln w="19050">
             <a:solidFill>
-              <a:srgbClr val="0D0D0D"/>
+              <a:srgbClr val="CBD5D0"/>
             </a:solidFill>
             <a:prstDash val="solid"/>
           </a:ln>
@@ -3156,19 +3200,30 @@
         </p:nvSpPr>
         <p:spPr>
           <a:xfrm>
-            <a:off x="731520" y="3108960"/>
-            <a:ext cx="3383280" cy="0"/>
-          </a:xfrm>
-          <a:prstGeom prst="line">
-            <a:avLst/>
-          </a:prstGeom>
-          <a:noFill/>
-          <a:ln w="31750">
+            <a:off x="731520" y="3017520"/>
+            <a:ext cx="3383280" cy="2377440"/>
+          </a:xfrm>
+          <a:prstGeom prst="roundRect">
+            <a:avLst>
+              <a:gd name="adj" fmla="val 6923"/>
+            </a:avLst>
+          </a:prstGeom>
+          <a:solidFill>
+            <a:srgbClr val="FFFFFF"/>
+          </a:solidFill>
+          <a:ln w="12700">
             <a:solidFill>
-              <a:srgbClr val="0D0D0D"/>
+              <a:srgbClr val="E3E9E6"/>
             </a:solidFill>
             <a:prstDash val="solid"/>
           </a:ln>
+          <a:effectLst>
+            <a:outerShdw sx="100000" sy="100000" kx="0" ky="0" algn="bl" rotWithShape="0" blurRad="127000" dist="38100" dir="5400000">
+              <a:srgbClr val="103020">
+                <a:alpha val="12000"/>
+              </a:srgbClr>
+            </a:outerShdw>
+          </a:effectLst>
         </p:spPr>
       </p:sp>
       <p:sp>
@@ -3179,8 +3234,8 @@
         </p:nvSpPr>
         <p:spPr>
           <a:xfrm>
-            <a:off x="731520" y="3200400"/>
-            <a:ext cx="3383280" cy="274320"/>
+            <a:off x="1005840" y="3200400"/>
+            <a:ext cx="2834640" cy="274320"/>
           </a:xfrm>
           <a:prstGeom prst="rect">
             <a:avLst/>
@@ -3198,11 +3253,11 @@
             <a:r>
               <a:rPr lang="en-US" sz="1100" b="1" dirty="0">
                 <a:solidFill>
-                  <a:srgbClr val="E8201C"/>
-                </a:solidFill>
-                <a:latin typeface="Courier New" pitchFamily="34" charset="0"/>
-                <a:ea typeface="Courier New" pitchFamily="34" charset="-122"/>
-                <a:cs typeface="Courier New" pitchFamily="34" charset="-120"/>
+                  <a:srgbClr val="0F9F6E"/>
+                </a:solidFill>
+                <a:latin typeface="Arial" pitchFamily="34" charset="0"/>
+                <a:ea typeface="Arial" pitchFamily="34" charset="-122"/>
+                <a:cs typeface="Arial" pitchFamily="34" charset="-120"/>
               </a:rPr>
               <a:t>GRADUATES</a:t>
             </a:r>
@@ -3218,8 +3273,8 @@
         </p:nvSpPr>
         <p:spPr>
           <a:xfrm>
-            <a:off x="731520" y="3520440"/>
-            <a:ext cx="3383280" cy="548640"/>
+            <a:off x="1005840" y="3520440"/>
+            <a:ext cx="2834640" cy="548640"/>
           </a:xfrm>
           <a:prstGeom prst="rect">
             <a:avLst/>
@@ -3237,7 +3292,7 @@
             <a:r>
               <a:rPr lang="en-US" sz="2400" b="1" dirty="0">
                 <a:solidFill>
-                  <a:srgbClr val="0D0D0D"/>
+                  <a:srgbClr val="0F1F1A"/>
                 </a:solidFill>
                 <a:latin typeface="Arial" pitchFamily="34" charset="0"/>
                 <a:ea typeface="Arial" pitchFamily="34" charset="-122"/>
@@ -3257,8 +3312,8 @@
         </p:nvSpPr>
         <p:spPr>
           <a:xfrm>
-            <a:off x="731520" y="4114800"/>
-            <a:ext cx="3383280" cy="1097280"/>
+            <a:off x="1005840" y="4114800"/>
+            <a:ext cx="2834640" cy="1097280"/>
           </a:xfrm>
           <a:prstGeom prst="rect">
             <a:avLst/>
@@ -3296,19 +3351,30 @@
         </p:nvSpPr>
         <p:spPr>
           <a:xfrm>
-            <a:off x="4389120" y="3108960"/>
-            <a:ext cx="3383280" cy="0"/>
-          </a:xfrm>
-          <a:prstGeom prst="line">
-            <a:avLst/>
-          </a:prstGeom>
-          <a:noFill/>
-          <a:ln w="31750">
+            <a:off x="4389120" y="3017520"/>
+            <a:ext cx="3383280" cy="2377440"/>
+          </a:xfrm>
+          <a:prstGeom prst="roundRect">
+            <a:avLst>
+              <a:gd name="adj" fmla="val 6923"/>
+            </a:avLst>
+          </a:prstGeom>
+          <a:solidFill>
+            <a:srgbClr val="FFFFFF"/>
+          </a:solidFill>
+          <a:ln w="12700">
             <a:solidFill>
-              <a:srgbClr val="0D0D0D"/>
+              <a:srgbClr val="E3E9E6"/>
             </a:solidFill>
             <a:prstDash val="solid"/>
           </a:ln>
+          <a:effectLst>
+            <a:outerShdw sx="100000" sy="100000" kx="0" ky="0" algn="bl" rotWithShape="0" blurRad="127000" dist="38100" dir="5400000">
+              <a:srgbClr val="103020">
+                <a:alpha val="12000"/>
+              </a:srgbClr>
+            </a:outerShdw>
+          </a:effectLst>
         </p:spPr>
       </p:sp>
       <p:sp>
@@ -3319,8 +3385,8 @@
         </p:nvSpPr>
         <p:spPr>
           <a:xfrm>
-            <a:off x="4389120" y="3200400"/>
-            <a:ext cx="3383280" cy="274320"/>
+            <a:off x="4663440" y="3200400"/>
+            <a:ext cx="2834640" cy="274320"/>
           </a:xfrm>
           <a:prstGeom prst="rect">
             <a:avLst/>
@@ -3338,11 +3404,11 @@
             <a:r>
               <a:rPr lang="en-US" sz="1100" b="1" dirty="0">
                 <a:solidFill>
-                  <a:srgbClr val="E8201C"/>
-                </a:solidFill>
-                <a:latin typeface="Courier New" pitchFamily="34" charset="0"/>
-                <a:ea typeface="Courier New" pitchFamily="34" charset="-122"/>
-                <a:cs typeface="Courier New" pitchFamily="34" charset="-120"/>
+                  <a:srgbClr val="0F9F6E"/>
+                </a:solidFill>
+                <a:latin typeface="Arial" pitchFamily="34" charset="0"/>
+                <a:ea typeface="Arial" pitchFamily="34" charset="-122"/>
+                <a:cs typeface="Arial" pitchFamily="34" charset="-120"/>
               </a:rPr>
               <a:t>COMPANIES</a:t>
             </a:r>
@@ -3358,8 +3424,8 @@
         </p:nvSpPr>
         <p:spPr>
           <a:xfrm>
-            <a:off x="4389120" y="3520440"/>
-            <a:ext cx="3383280" cy="548640"/>
+            <a:off x="4663440" y="3520440"/>
+            <a:ext cx="2834640" cy="548640"/>
           </a:xfrm>
           <a:prstGeom prst="rect">
             <a:avLst/>
@@ -3377,7 +3443,7 @@
             <a:r>
               <a:rPr lang="en-US" sz="2400" b="1" dirty="0">
                 <a:solidFill>
-                  <a:srgbClr val="0D0D0D"/>
+                  <a:srgbClr val="0F1F1A"/>
                 </a:solidFill>
                 <a:latin typeface="Arial" pitchFamily="34" charset="0"/>
                 <a:ea typeface="Arial" pitchFamily="34" charset="-122"/>
@@ -3397,8 +3463,8 @@
         </p:nvSpPr>
         <p:spPr>
           <a:xfrm>
-            <a:off x="4389120" y="4114800"/>
-            <a:ext cx="3383280" cy="1097280"/>
+            <a:off x="4663440" y="4114800"/>
+            <a:ext cx="2834640" cy="1097280"/>
           </a:xfrm>
           <a:prstGeom prst="rect">
             <a:avLst/>
@@ -3436,19 +3502,30 @@
         </p:nvSpPr>
         <p:spPr>
           <a:xfrm>
-            <a:off x="8046720" y="3108960"/>
-            <a:ext cx="3383280" cy="0"/>
-          </a:xfrm>
-          <a:prstGeom prst="line">
-            <a:avLst/>
-          </a:prstGeom>
-          <a:noFill/>
-          <a:ln w="31750">
+            <a:off x="8046720" y="3017520"/>
+            <a:ext cx="3383280" cy="2377440"/>
+          </a:xfrm>
+          <a:prstGeom prst="roundRect">
+            <a:avLst>
+              <a:gd name="adj" fmla="val 6923"/>
+            </a:avLst>
+          </a:prstGeom>
+          <a:solidFill>
+            <a:srgbClr val="FFFFFF"/>
+          </a:solidFill>
+          <a:ln w="12700">
             <a:solidFill>
-              <a:srgbClr val="0D0D0D"/>
+              <a:srgbClr val="E3E9E6"/>
             </a:solidFill>
             <a:prstDash val="solid"/>
           </a:ln>
+          <a:effectLst>
+            <a:outerShdw sx="100000" sy="100000" kx="0" ky="0" algn="bl" rotWithShape="0" blurRad="127000" dist="38100" dir="5400000">
+              <a:srgbClr val="103020">
+                <a:alpha val="12000"/>
+              </a:srgbClr>
+            </a:outerShdw>
+          </a:effectLst>
         </p:spPr>
       </p:sp>
       <p:sp>
@@ -3459,8 +3536,8 @@
         </p:nvSpPr>
         <p:spPr>
           <a:xfrm>
-            <a:off x="8046720" y="3200400"/>
-            <a:ext cx="3383280" cy="274320"/>
+            <a:off x="8321040" y="3200400"/>
+            <a:ext cx="2834640" cy="274320"/>
           </a:xfrm>
           <a:prstGeom prst="rect">
             <a:avLst/>
@@ -3478,11 +3555,11 @@
             <a:r>
               <a:rPr lang="en-US" sz="1100" b="1" dirty="0">
                 <a:solidFill>
-                  <a:srgbClr val="E8201C"/>
-                </a:solidFill>
-                <a:latin typeface="Courier New" pitchFamily="34" charset="0"/>
-                <a:ea typeface="Courier New" pitchFamily="34" charset="-122"/>
-                <a:cs typeface="Courier New" pitchFamily="34" charset="-120"/>
+                  <a:srgbClr val="0F9F6E"/>
+                </a:solidFill>
+                <a:latin typeface="Arial" pitchFamily="34" charset="0"/>
+                <a:ea typeface="Arial" pitchFamily="34" charset="-122"/>
+                <a:cs typeface="Arial" pitchFamily="34" charset="-120"/>
               </a:rPr>
               <a:t>HIRING</a:t>
             </a:r>
@@ -3498,8 +3575,8 @@
         </p:nvSpPr>
         <p:spPr>
           <a:xfrm>
-            <a:off x="8046720" y="3520440"/>
-            <a:ext cx="3383280" cy="548640"/>
+            <a:off x="8321040" y="3520440"/>
+            <a:ext cx="2834640" cy="548640"/>
           </a:xfrm>
           <a:prstGeom prst="rect">
             <a:avLst/>
@@ -3517,7 +3594,7 @@
             <a:r>
               <a:rPr lang="en-US" sz="2400" b="1" dirty="0">
                 <a:solidFill>
-                  <a:srgbClr val="0D0D0D"/>
+                  <a:srgbClr val="0F1F1A"/>
                 </a:solidFill>
                 <a:latin typeface="Arial" pitchFamily="34" charset="0"/>
                 <a:ea typeface="Arial" pitchFamily="34" charset="-122"/>
@@ -3537,8 +3614,8 @@
         </p:nvSpPr>
         <p:spPr>
           <a:xfrm>
-            <a:off x="8046720" y="4114800"/>
-            <a:ext cx="3383280" cy="1097280"/>
+            <a:off x="8321040" y="4114800"/>
+            <a:ext cx="2834640" cy="1097280"/>
           </a:xfrm>
           <a:prstGeom prst="rect">
             <a:avLst/>
@@ -3582,7 +3659,7 @@
     <p:bg>
       <p:bgPr>
         <a:solidFill>
-          <a:srgbClr val="F4F2EE"/>
+          <a:srgbClr val="F4F7F6"/>
         </a:solidFill>
       </p:bgPr>
     </p:bg>
@@ -3608,18 +3685,20 @@
         </p:nvSpPr>
         <p:spPr>
           <a:xfrm>
-            <a:off x="731520" y="320040"/>
-            <a:ext cx="1141054" cy="502920"/>
-          </a:xfrm>
-          <a:prstGeom prst="rect">
-            <a:avLst/>
-          </a:prstGeom>
-          <a:solidFill>
-            <a:srgbClr val="111111"/>
-          </a:solidFill>
-          <a:ln w="25400">
+            <a:off x="758952" y="320040"/>
+            <a:ext cx="1086190" cy="502920"/>
+          </a:xfrm>
+          <a:prstGeom prst="roundRect">
+            <a:avLst>
+              <a:gd name="adj" fmla="val 21818"/>
+            </a:avLst>
+          </a:prstGeom>
+          <a:solidFill>
+            <a:srgbClr val="0B3D2C"/>
+          </a:solidFill>
+          <a:ln w="12700">
             <a:solidFill>
-              <a:srgbClr val="F4F2EE"/>
+              <a:srgbClr val="F4F7F6"/>
             </a:solidFill>
             <a:prstDash val="solid"/>
           </a:ln>
@@ -3654,9 +3733,9 @@
                 <a:solidFill>
                   <a:srgbClr val="FFFFFF"/>
                 </a:solidFill>
-                <a:latin typeface="Courier New" pitchFamily="34" charset="0"/>
-                <a:ea typeface="Courier New" pitchFamily="34" charset="-122"/>
-                <a:cs typeface="Courier New" pitchFamily="34" charset="-120"/>
+                <a:latin typeface="Arial" pitchFamily="34" charset="0"/>
+                <a:ea typeface="Arial" pitchFamily="34" charset="-122"/>
+                <a:cs typeface="Arial" pitchFamily="34" charset="-120"/>
               </a:rPr>
               <a:t>01</a:t>
             </a:r>
@@ -3672,18 +3751,20 @@
         </p:nvSpPr>
         <p:spPr>
           <a:xfrm>
-            <a:off x="1872574" y="320040"/>
-            <a:ext cx="1141054" cy="502920"/>
-          </a:xfrm>
-          <a:prstGeom prst="rect">
-            <a:avLst/>
-          </a:prstGeom>
-          <a:solidFill>
-            <a:srgbClr val="3A3A3A"/>
-          </a:solidFill>
-          <a:ln w="25400">
+            <a:off x="1900006" y="320040"/>
+            <a:ext cx="1086190" cy="502920"/>
+          </a:xfrm>
+          <a:prstGeom prst="roundRect">
+            <a:avLst>
+              <a:gd name="adj" fmla="val 21818"/>
+            </a:avLst>
+          </a:prstGeom>
+          <a:solidFill>
+            <a:srgbClr val="0B8A5E"/>
+          </a:solidFill>
+          <a:ln w="12700">
             <a:solidFill>
-              <a:srgbClr val="F4F2EE"/>
+              <a:srgbClr val="F4F7F6"/>
             </a:solidFill>
             <a:prstDash val="solid"/>
           </a:ln>
@@ -3718,9 +3799,9 @@
                 <a:solidFill>
                   <a:srgbClr val="FFFFFF"/>
                 </a:solidFill>
-                <a:latin typeface="Courier New" pitchFamily="34" charset="0"/>
-                <a:ea typeface="Courier New" pitchFamily="34" charset="-122"/>
-                <a:cs typeface="Courier New" pitchFamily="34" charset="-120"/>
+                <a:latin typeface="Arial" pitchFamily="34" charset="0"/>
+                <a:ea typeface="Arial" pitchFamily="34" charset="-122"/>
+                <a:cs typeface="Arial" pitchFamily="34" charset="-120"/>
               </a:rPr>
               <a:t>02</a:t>
             </a:r>
@@ -3736,18 +3817,20 @@
         </p:nvSpPr>
         <p:spPr>
           <a:xfrm>
-            <a:off x="3013629" y="320040"/>
-            <a:ext cx="1141054" cy="502920"/>
-          </a:xfrm>
-          <a:prstGeom prst="rect">
-            <a:avLst/>
-          </a:prstGeom>
-          <a:solidFill>
-            <a:srgbClr val="1D1D1D"/>
-          </a:solidFill>
-          <a:ln w="25400">
+            <a:off x="3041061" y="320040"/>
+            <a:ext cx="1086190" cy="502920"/>
+          </a:xfrm>
+          <a:prstGeom prst="roundRect">
+            <a:avLst>
+              <a:gd name="adj" fmla="val 21818"/>
+            </a:avLst>
+          </a:prstGeom>
+          <a:solidFill>
+            <a:srgbClr val="0F9F6E"/>
+          </a:solidFill>
+          <a:ln w="12700">
             <a:solidFill>
-              <a:srgbClr val="F4F2EE"/>
+              <a:srgbClr val="F4F7F6"/>
             </a:solidFill>
             <a:prstDash val="solid"/>
           </a:ln>
@@ -3782,9 +3865,9 @@
                 <a:solidFill>
                   <a:srgbClr val="FFFFFF"/>
                 </a:solidFill>
-                <a:latin typeface="Courier New" pitchFamily="34" charset="0"/>
-                <a:ea typeface="Courier New" pitchFamily="34" charset="-122"/>
-                <a:cs typeface="Courier New" pitchFamily="34" charset="-120"/>
+                <a:latin typeface="Arial" pitchFamily="34" charset="0"/>
+                <a:ea typeface="Arial" pitchFamily="34" charset="-122"/>
+                <a:cs typeface="Arial" pitchFamily="34" charset="-120"/>
               </a:rPr>
               <a:t>03</a:t>
             </a:r>
@@ -3800,13 +3883,15 @@
         </p:nvSpPr>
         <p:spPr>
           <a:xfrm>
-            <a:off x="3041061" y="347472"/>
-            <a:ext cx="1086190" cy="448056"/>
-          </a:xfrm>
-          <a:prstGeom prst="rect">
-            <a:avLst/>
-          </a:prstGeom>
-          <a:ln w="31750">
+            <a:off x="3086781" y="365760"/>
+            <a:ext cx="994750" cy="411480"/>
+          </a:xfrm>
+          <a:prstGeom prst="roundRect">
+            <a:avLst>
+              <a:gd name="adj" fmla="val 22222"/>
+            </a:avLst>
+          </a:prstGeom>
+          <a:ln w="25400">
             <a:solidFill>
               <a:srgbClr val="FFFFFF"/>
             </a:solidFill>
@@ -3822,18 +3907,20 @@
         </p:nvSpPr>
         <p:spPr>
           <a:xfrm>
-            <a:off x="4154683" y="320040"/>
-            <a:ext cx="2738531" cy="502920"/>
-          </a:xfrm>
-          <a:prstGeom prst="rect">
-            <a:avLst/>
-          </a:prstGeom>
-          <a:solidFill>
-            <a:srgbClr val="E8201C"/>
-          </a:solidFill>
-          <a:ln w="25400">
+            <a:off x="4182115" y="320040"/>
+            <a:ext cx="2683667" cy="502920"/>
+          </a:xfrm>
+          <a:prstGeom prst="roundRect">
+            <a:avLst>
+              <a:gd name="adj" fmla="val 21818"/>
+            </a:avLst>
+          </a:prstGeom>
+          <a:solidFill>
+            <a:srgbClr val="17B57F"/>
+          </a:solidFill>
+          <a:ln w="12700">
             <a:solidFill>
-              <a:srgbClr val="F4F2EE"/>
+              <a:srgbClr val="F4F7F6"/>
             </a:solidFill>
             <a:prstDash val="solid"/>
           </a:ln>
@@ -3868,9 +3955,9 @@
                 <a:solidFill>
                   <a:srgbClr val="FFFFFF"/>
                 </a:solidFill>
-                <a:latin typeface="Courier New" pitchFamily="34" charset="0"/>
-                <a:ea typeface="Courier New" pitchFamily="34" charset="-122"/>
-                <a:cs typeface="Courier New" pitchFamily="34" charset="-120"/>
+                <a:latin typeface="Arial" pitchFamily="34" charset="0"/>
+                <a:ea typeface="Arial" pitchFamily="34" charset="-122"/>
+                <a:cs typeface="Arial" pitchFamily="34" charset="-120"/>
               </a:rPr>
               <a:t>04 // DEMO · 60S</a:t>
             </a:r>
@@ -3886,18 +3973,20 @@
         </p:nvSpPr>
         <p:spPr>
           <a:xfrm>
-            <a:off x="6893214" y="320040"/>
-            <a:ext cx="1141054" cy="502920"/>
-          </a:xfrm>
-          <a:prstGeom prst="rect">
-            <a:avLst/>
-          </a:prstGeom>
-          <a:solidFill>
-            <a:srgbClr val="1D1D1D"/>
-          </a:solidFill>
-          <a:ln w="25400">
+            <a:off x="6920646" y="320040"/>
+            <a:ext cx="1086190" cy="502920"/>
+          </a:xfrm>
+          <a:prstGeom prst="roundRect">
+            <a:avLst>
+              <a:gd name="adj" fmla="val 21818"/>
+            </a:avLst>
+          </a:prstGeom>
+          <a:solidFill>
+            <a:srgbClr val="0F9F6E"/>
+          </a:solidFill>
+          <a:ln w="12700">
             <a:solidFill>
-              <a:srgbClr val="F4F2EE"/>
+              <a:srgbClr val="F4F7F6"/>
             </a:solidFill>
             <a:prstDash val="solid"/>
           </a:ln>
@@ -3932,9 +4021,9 @@
                 <a:solidFill>
                   <a:srgbClr val="FFFFFF"/>
                 </a:solidFill>
-                <a:latin typeface="Courier New" pitchFamily="34" charset="0"/>
-                <a:ea typeface="Courier New" pitchFamily="34" charset="-122"/>
-                <a:cs typeface="Courier New" pitchFamily="34" charset="-120"/>
+                <a:latin typeface="Arial" pitchFamily="34" charset="0"/>
+                <a:ea typeface="Arial" pitchFamily="34" charset="-122"/>
+                <a:cs typeface="Arial" pitchFamily="34" charset="-120"/>
               </a:rPr>
               <a:t>05</a:t>
             </a:r>
@@ -3950,18 +4039,20 @@
         </p:nvSpPr>
         <p:spPr>
           <a:xfrm>
-            <a:off x="8034269" y="320040"/>
-            <a:ext cx="1141054" cy="502920"/>
-          </a:xfrm>
-          <a:prstGeom prst="rect">
-            <a:avLst/>
-          </a:prstGeom>
-          <a:solidFill>
-            <a:srgbClr val="3A3A3A"/>
-          </a:solidFill>
-          <a:ln w="25400">
+            <a:off x="8061701" y="320040"/>
+            <a:ext cx="1086190" cy="502920"/>
+          </a:xfrm>
+          <a:prstGeom prst="roundRect">
+            <a:avLst>
+              <a:gd name="adj" fmla="val 21818"/>
+            </a:avLst>
+          </a:prstGeom>
+          <a:solidFill>
+            <a:srgbClr val="0B8A5E"/>
+          </a:solidFill>
+          <a:ln w="12700">
             <a:solidFill>
-              <a:srgbClr val="F4F2EE"/>
+              <a:srgbClr val="F4F7F6"/>
             </a:solidFill>
             <a:prstDash val="solid"/>
           </a:ln>
@@ -3996,9 +4087,9 @@
                 <a:solidFill>
                   <a:srgbClr val="FFFFFF"/>
                 </a:solidFill>
-                <a:latin typeface="Courier New" pitchFamily="34" charset="0"/>
-                <a:ea typeface="Courier New" pitchFamily="34" charset="-122"/>
-                <a:cs typeface="Courier New" pitchFamily="34" charset="-120"/>
+                <a:latin typeface="Arial" pitchFamily="34" charset="0"/>
+                <a:ea typeface="Arial" pitchFamily="34" charset="-122"/>
+                <a:cs typeface="Arial" pitchFamily="34" charset="-120"/>
               </a:rPr>
               <a:t>06</a:t>
             </a:r>
@@ -4014,18 +4105,20 @@
         </p:nvSpPr>
         <p:spPr>
           <a:xfrm>
-            <a:off x="9175323" y="320040"/>
-            <a:ext cx="1141054" cy="502920"/>
-          </a:xfrm>
-          <a:prstGeom prst="rect">
-            <a:avLst/>
-          </a:prstGeom>
-          <a:solidFill>
-            <a:srgbClr val="111111"/>
-          </a:solidFill>
-          <a:ln w="25400">
+            <a:off x="9202755" y="320040"/>
+            <a:ext cx="1086190" cy="502920"/>
+          </a:xfrm>
+          <a:prstGeom prst="roundRect">
+            <a:avLst>
+              <a:gd name="adj" fmla="val 21818"/>
+            </a:avLst>
+          </a:prstGeom>
+          <a:solidFill>
+            <a:srgbClr val="0B3D2C"/>
+          </a:solidFill>
+          <a:ln w="12700">
             <a:solidFill>
-              <a:srgbClr val="F4F2EE"/>
+              <a:srgbClr val="F4F7F6"/>
             </a:solidFill>
             <a:prstDash val="solid"/>
           </a:ln>
@@ -4060,9 +4153,9 @@
                 <a:solidFill>
                   <a:srgbClr val="FFFFFF"/>
                 </a:solidFill>
-                <a:latin typeface="Courier New" pitchFamily="34" charset="0"/>
-                <a:ea typeface="Courier New" pitchFamily="34" charset="-122"/>
-                <a:cs typeface="Courier New" pitchFamily="34" charset="-120"/>
+                <a:latin typeface="Arial" pitchFamily="34" charset="0"/>
+                <a:ea typeface="Arial" pitchFamily="34" charset="-122"/>
+                <a:cs typeface="Arial" pitchFamily="34" charset="-120"/>
               </a:rPr>
               <a:t>07</a:t>
             </a:r>
@@ -4078,18 +4171,20 @@
         </p:nvSpPr>
         <p:spPr>
           <a:xfrm>
-            <a:off x="10316378" y="320040"/>
-            <a:ext cx="1141054" cy="502920"/>
-          </a:xfrm>
-          <a:prstGeom prst="rect">
-            <a:avLst/>
-          </a:prstGeom>
-          <a:solidFill>
-            <a:srgbClr val="FF2D2D"/>
-          </a:solidFill>
-          <a:ln w="25400">
+            <a:off x="10343810" y="320040"/>
+            <a:ext cx="1086190" cy="502920"/>
+          </a:xfrm>
+          <a:prstGeom prst="roundRect">
+            <a:avLst>
+              <a:gd name="adj" fmla="val 21818"/>
+            </a:avLst>
+          </a:prstGeom>
+          <a:solidFill>
+            <a:srgbClr val="22C58B"/>
+          </a:solidFill>
+          <a:ln w="12700">
             <a:solidFill>
-              <a:srgbClr val="F4F2EE"/>
+              <a:srgbClr val="F4F7F6"/>
             </a:solidFill>
             <a:prstDash val="solid"/>
           </a:ln>
@@ -4124,9 +4219,9 @@
                 <a:solidFill>
                   <a:srgbClr val="FFFFFF"/>
                 </a:solidFill>
-                <a:latin typeface="Courier New" pitchFamily="34" charset="0"/>
-                <a:ea typeface="Courier New" pitchFamily="34" charset="-122"/>
-                <a:cs typeface="Courier New" pitchFamily="34" charset="-120"/>
+                <a:latin typeface="Arial" pitchFamily="34" charset="0"/>
+                <a:ea typeface="Arial" pitchFamily="34" charset="-122"/>
+                <a:cs typeface="Arial" pitchFamily="34" charset="-120"/>
               </a:rPr>
               <a:t>08</a:t>
             </a:r>
@@ -4142,34 +4237,38 @@
         </p:nvSpPr>
         <p:spPr>
           <a:xfrm>
-            <a:off x="731520" y="1143000"/>
-            <a:ext cx="10058400" cy="320040"/>
-          </a:xfrm>
-          <a:prstGeom prst="rect">
-            <a:avLst/>
-          </a:prstGeom>
-          <a:noFill/>
-          <a:ln/>
-        </p:spPr>
-        <p:txBody>
-          <a:bodyPr wrap="square" rtlCol="0" anchor="ctr"/>
-          <a:lstStyle/>
-          <a:p>
-            <a:pPr indent="0" marL="0">
-              <a:buNone/>
-            </a:pPr>
-            <a:r>
-              <a:rPr lang="en-US" sz="1300" b="1" spc="200" kern="0" dirty="0">
-                <a:solidFill>
-                  <a:srgbClr val="E8201C"/>
-                </a:solidFill>
-                <a:latin typeface="Courier New" pitchFamily="34" charset="0"/>
-                <a:ea typeface="Courier New" pitchFamily="34" charset="-122"/>
-                <a:cs typeface="Courier New" pitchFamily="34" charset="-120"/>
+            <a:off x="731520" y="1097280"/>
+            <a:ext cx="5029200" cy="365760"/>
+          </a:xfrm>
+          <a:prstGeom prst="roundRect">
+            <a:avLst>
+              <a:gd name="adj" fmla="val 50000"/>
+            </a:avLst>
+          </a:prstGeom>
+          <a:solidFill>
+            <a:srgbClr val="E8F7F0"/>
+          </a:solidFill>
+          <a:ln/>
+        </p:spPr>
+        <p:txBody>
+          <a:bodyPr wrap="square" rtlCol="0" anchor="ctr"/>
+          <a:lstStyle/>
+          <a:p>
+            <a:pPr algn="ctr" indent="0" marL="0">
+              <a:buNone/>
+            </a:pPr>
+            <a:r>
+              <a:rPr lang="en-US" sz="1200" b="1" spc="200" kern="0" dirty="0">
+                <a:solidFill>
+                  <a:srgbClr val="0B8A5E"/>
+                </a:solidFill>
+                <a:latin typeface="Arial" pitchFamily="34" charset="0"/>
+                <a:ea typeface="Arial" pitchFamily="34" charset="-122"/>
+                <a:cs typeface="Arial" pitchFamily="34" charset="-120"/>
               </a:rPr>
               <a:t>03 // SOLUTION · 15 SEC</a:t>
             </a:r>
-            <a:endParaRPr lang="en-US" sz="1300" dirty="0"/>
+            <a:endParaRPr lang="en-US" sz="1200" dirty="0"/>
           </a:p>
         </p:txBody>
       </p:sp>
@@ -4200,11 +4299,11 @@
             <a:r>
               <a:rPr lang="en-US" sz="1000" dirty="0">
                 <a:solidFill>
-                  <a:srgbClr val="6B6B6B"/>
-                </a:solidFill>
-                <a:latin typeface="Courier New" pitchFamily="34" charset="0"/>
-                <a:ea typeface="Courier New" pitchFamily="34" charset="-122"/>
-                <a:cs typeface="Courier New" pitchFamily="34" charset="-120"/>
+                  <a:srgbClr val="5F6F68"/>
+                </a:solidFill>
+                <a:latin typeface="Arial" pitchFamily="34" charset="0"/>
+                <a:ea typeface="Arial" pitchFamily="34" charset="-122"/>
+                <a:cs typeface="Arial" pitchFamily="34" charset="-120"/>
               </a:rPr>
               <a:t>MISH SENIOR</a:t>
             </a:r>
@@ -4239,11 +4338,11 @@
             <a:r>
               <a:rPr lang="en-US" sz="1000" dirty="0">
                 <a:solidFill>
-                  <a:srgbClr val="6B6B6B"/>
-                </a:solidFill>
-                <a:latin typeface="Courier New" pitchFamily="34" charset="0"/>
-                <a:ea typeface="Courier New" pitchFamily="34" charset="-122"/>
-                <a:cs typeface="Courier New" pitchFamily="34" charset="-120"/>
+                  <a:srgbClr val="5F6F68"/>
+                </a:solidFill>
+                <a:latin typeface="Arial" pitchFamily="34" charset="0"/>
+                <a:ea typeface="Arial" pitchFamily="34" charset="-122"/>
+                <a:cs typeface="Arial" pitchFamily="34" charset="-120"/>
               </a:rPr>
               <a:t>03 / 08</a:t>
             </a:r>
@@ -4278,7 +4377,7 @@
             <a:r>
               <a:rPr lang="en-US" sz="4400" b="1" dirty="0">
                 <a:solidFill>
-                  <a:srgbClr val="0D0D0D"/>
+                  <a:srgbClr val="0F1F1A"/>
                 </a:solidFill>
                 <a:latin typeface="Arial" pitchFamily="34" charset="0"/>
                 <a:ea typeface="Arial" pitchFamily="34" charset="-122"/>
@@ -4305,9 +4404,9 @@
             <a:avLst/>
           </a:prstGeom>
           <a:noFill/>
-          <a:ln w="31750">
+          <a:ln w="19050">
             <a:solidFill>
-              <a:srgbClr val="0D0D0D"/>
+              <a:srgbClr val="CBD5D0"/>
             </a:solidFill>
             <a:prstDash val="solid"/>
           </a:ln>
@@ -4321,19 +4420,30 @@
         </p:nvSpPr>
         <p:spPr>
           <a:xfrm>
-            <a:off x="731520" y="3108960"/>
-            <a:ext cx="3383280" cy="0"/>
-          </a:xfrm>
-          <a:prstGeom prst="line">
-            <a:avLst/>
-          </a:prstGeom>
-          <a:noFill/>
-          <a:ln w="31750">
+            <a:off x="731520" y="3017520"/>
+            <a:ext cx="3383280" cy="2377440"/>
+          </a:xfrm>
+          <a:prstGeom prst="roundRect">
+            <a:avLst>
+              <a:gd name="adj" fmla="val 6923"/>
+            </a:avLst>
+          </a:prstGeom>
+          <a:solidFill>
+            <a:srgbClr val="FFFFFF"/>
+          </a:solidFill>
+          <a:ln w="12700">
             <a:solidFill>
-              <a:srgbClr val="0D0D0D"/>
+              <a:srgbClr val="E3E9E6"/>
             </a:solidFill>
             <a:prstDash val="solid"/>
           </a:ln>
+          <a:effectLst>
+            <a:outerShdw sx="100000" sy="100000" kx="0" ky="0" algn="bl" rotWithShape="0" blurRad="127000" dist="38100" dir="5400000">
+              <a:srgbClr val="103020">
+                <a:alpha val="12000"/>
+              </a:srgbClr>
+            </a:outerShdw>
+          </a:effectLst>
         </p:spPr>
       </p:sp>
       <p:sp>
@@ -4344,8 +4454,8 @@
         </p:nvSpPr>
         <p:spPr>
           <a:xfrm>
-            <a:off x="731520" y="3200400"/>
-            <a:ext cx="3383280" cy="274320"/>
+            <a:off x="1005840" y="3200400"/>
+            <a:ext cx="2834640" cy="274320"/>
           </a:xfrm>
           <a:prstGeom prst="rect">
             <a:avLst/>
@@ -4363,11 +4473,11 @@
             <a:r>
               <a:rPr lang="en-US" sz="1100" b="1" dirty="0">
                 <a:solidFill>
-                  <a:srgbClr val="E8201C"/>
-                </a:solidFill>
-                <a:latin typeface="Courier New" pitchFamily="34" charset="0"/>
-                <a:ea typeface="Courier New" pitchFamily="34" charset="-122"/>
-                <a:cs typeface="Courier New" pitchFamily="34" charset="-120"/>
+                  <a:srgbClr val="0F9F6E"/>
+                </a:solidFill>
+                <a:latin typeface="Arial" pitchFamily="34" charset="0"/>
+                <a:ea typeface="Arial" pitchFamily="34" charset="-122"/>
+                <a:cs typeface="Arial" pitchFamily="34" charset="-120"/>
               </a:rPr>
               <a:t>STEP 1</a:t>
             </a:r>
@@ -4383,8 +4493,8 @@
         </p:nvSpPr>
         <p:spPr>
           <a:xfrm>
-            <a:off x="731520" y="3520440"/>
-            <a:ext cx="3383280" cy="548640"/>
+            <a:off x="1005840" y="3520440"/>
+            <a:ext cx="2834640" cy="548640"/>
           </a:xfrm>
           <a:prstGeom prst="rect">
             <a:avLst/>
@@ -4402,7 +4512,7 @@
             <a:r>
               <a:rPr lang="en-US" sz="2400" b="1" dirty="0">
                 <a:solidFill>
-                  <a:srgbClr val="0D0D0D"/>
+                  <a:srgbClr val="0F1F1A"/>
                 </a:solidFill>
                 <a:latin typeface="Arial" pitchFamily="34" charset="0"/>
                 <a:ea typeface="Arial" pitchFamily="34" charset="-122"/>
@@ -4422,8 +4532,8 @@
         </p:nvSpPr>
         <p:spPr>
           <a:xfrm>
-            <a:off x="731520" y="4114800"/>
-            <a:ext cx="3383280" cy="1097280"/>
+            <a:off x="1005840" y="4114800"/>
+            <a:ext cx="2834640" cy="1097280"/>
           </a:xfrm>
           <a:prstGeom prst="rect">
             <a:avLst/>
@@ -4461,19 +4571,30 @@
         </p:nvSpPr>
         <p:spPr>
           <a:xfrm>
-            <a:off x="4389120" y="3108960"/>
-            <a:ext cx="3383280" cy="0"/>
-          </a:xfrm>
-          <a:prstGeom prst="line">
-            <a:avLst/>
-          </a:prstGeom>
-          <a:noFill/>
-          <a:ln w="31750">
+            <a:off x="4389120" y="3017520"/>
+            <a:ext cx="3383280" cy="2377440"/>
+          </a:xfrm>
+          <a:prstGeom prst="roundRect">
+            <a:avLst>
+              <a:gd name="adj" fmla="val 6923"/>
+            </a:avLst>
+          </a:prstGeom>
+          <a:solidFill>
+            <a:srgbClr val="FFFFFF"/>
+          </a:solidFill>
+          <a:ln w="12700">
             <a:solidFill>
-              <a:srgbClr val="0D0D0D"/>
+              <a:srgbClr val="E3E9E6"/>
             </a:solidFill>
             <a:prstDash val="solid"/>
           </a:ln>
+          <a:effectLst>
+            <a:outerShdw sx="100000" sy="100000" kx="0" ky="0" algn="bl" rotWithShape="0" blurRad="127000" dist="38100" dir="5400000">
+              <a:srgbClr val="103020">
+                <a:alpha val="12000"/>
+              </a:srgbClr>
+            </a:outerShdw>
+          </a:effectLst>
         </p:spPr>
       </p:sp>
       <p:sp>
@@ -4484,8 +4605,8 @@
         </p:nvSpPr>
         <p:spPr>
           <a:xfrm>
-            <a:off x="4389120" y="3200400"/>
-            <a:ext cx="3383280" cy="274320"/>
+            <a:off x="4663440" y="3200400"/>
+            <a:ext cx="2834640" cy="274320"/>
           </a:xfrm>
           <a:prstGeom prst="rect">
             <a:avLst/>
@@ -4503,11 +4624,11 @@
             <a:r>
               <a:rPr lang="en-US" sz="1100" b="1" dirty="0">
                 <a:solidFill>
-                  <a:srgbClr val="E8201C"/>
-                </a:solidFill>
-                <a:latin typeface="Courier New" pitchFamily="34" charset="0"/>
-                <a:ea typeface="Courier New" pitchFamily="34" charset="-122"/>
-                <a:cs typeface="Courier New" pitchFamily="34" charset="-120"/>
+                  <a:srgbClr val="0F9F6E"/>
+                </a:solidFill>
+                <a:latin typeface="Arial" pitchFamily="34" charset="0"/>
+                <a:ea typeface="Arial" pitchFamily="34" charset="-122"/>
+                <a:cs typeface="Arial" pitchFamily="34" charset="-120"/>
               </a:rPr>
               <a:t>STEP 2</a:t>
             </a:r>
@@ -4523,8 +4644,8 @@
         </p:nvSpPr>
         <p:spPr>
           <a:xfrm>
-            <a:off x="4389120" y="3520440"/>
-            <a:ext cx="3383280" cy="548640"/>
+            <a:off x="4663440" y="3520440"/>
+            <a:ext cx="2834640" cy="548640"/>
           </a:xfrm>
           <a:prstGeom prst="rect">
             <a:avLst/>
@@ -4542,7 +4663,7 @@
             <a:r>
               <a:rPr lang="en-US" sz="2400" b="1" dirty="0">
                 <a:solidFill>
-                  <a:srgbClr val="0D0D0D"/>
+                  <a:srgbClr val="0F1F1A"/>
                 </a:solidFill>
                 <a:latin typeface="Arial" pitchFamily="34" charset="0"/>
                 <a:ea typeface="Arial" pitchFamily="34" charset="-122"/>
@@ -4562,8 +4683,8 @@
         </p:nvSpPr>
         <p:spPr>
           <a:xfrm>
-            <a:off x="4389120" y="4114800"/>
-            <a:ext cx="3383280" cy="1097280"/>
+            <a:off x="4663440" y="4114800"/>
+            <a:ext cx="2834640" cy="1097280"/>
           </a:xfrm>
           <a:prstGeom prst="rect">
             <a:avLst/>
@@ -4601,19 +4722,30 @@
         </p:nvSpPr>
         <p:spPr>
           <a:xfrm>
-            <a:off x="8046720" y="3108960"/>
-            <a:ext cx="3383280" cy="0"/>
-          </a:xfrm>
-          <a:prstGeom prst="line">
-            <a:avLst/>
-          </a:prstGeom>
-          <a:noFill/>
-          <a:ln w="31750">
+            <a:off x="8046720" y="3017520"/>
+            <a:ext cx="3383280" cy="2377440"/>
+          </a:xfrm>
+          <a:prstGeom prst="roundRect">
+            <a:avLst>
+              <a:gd name="adj" fmla="val 6923"/>
+            </a:avLst>
+          </a:prstGeom>
+          <a:solidFill>
+            <a:srgbClr val="FFFFFF"/>
+          </a:solidFill>
+          <a:ln w="12700">
             <a:solidFill>
-              <a:srgbClr val="0D0D0D"/>
+              <a:srgbClr val="E3E9E6"/>
             </a:solidFill>
             <a:prstDash val="solid"/>
           </a:ln>
+          <a:effectLst>
+            <a:outerShdw sx="100000" sy="100000" kx="0" ky="0" algn="bl" rotWithShape="0" blurRad="127000" dist="38100" dir="5400000">
+              <a:srgbClr val="103020">
+                <a:alpha val="12000"/>
+              </a:srgbClr>
+            </a:outerShdw>
+          </a:effectLst>
         </p:spPr>
       </p:sp>
       <p:sp>
@@ -4624,8 +4756,8 @@
         </p:nvSpPr>
         <p:spPr>
           <a:xfrm>
-            <a:off x="8046720" y="3200400"/>
-            <a:ext cx="3383280" cy="274320"/>
+            <a:off x="8321040" y="3200400"/>
+            <a:ext cx="2834640" cy="274320"/>
           </a:xfrm>
           <a:prstGeom prst="rect">
             <a:avLst/>
@@ -4643,11 +4775,11 @@
             <a:r>
               <a:rPr lang="en-US" sz="1100" b="1" dirty="0">
                 <a:solidFill>
-                  <a:srgbClr val="E8201C"/>
-                </a:solidFill>
-                <a:latin typeface="Courier New" pitchFamily="34" charset="0"/>
-                <a:ea typeface="Courier New" pitchFamily="34" charset="-122"/>
-                <a:cs typeface="Courier New" pitchFamily="34" charset="-120"/>
+                  <a:srgbClr val="0F9F6E"/>
+                </a:solidFill>
+                <a:latin typeface="Arial" pitchFamily="34" charset="0"/>
+                <a:ea typeface="Arial" pitchFamily="34" charset="-122"/>
+                <a:cs typeface="Arial" pitchFamily="34" charset="-120"/>
               </a:rPr>
               <a:t>STEP 3</a:t>
             </a:r>
@@ -4663,8 +4795,8 @@
         </p:nvSpPr>
         <p:spPr>
           <a:xfrm>
-            <a:off x="8046720" y="3520440"/>
-            <a:ext cx="3383280" cy="548640"/>
+            <a:off x="8321040" y="3520440"/>
+            <a:ext cx="2834640" cy="548640"/>
           </a:xfrm>
           <a:prstGeom prst="rect">
             <a:avLst/>
@@ -4682,7 +4814,7 @@
             <a:r>
               <a:rPr lang="en-US" sz="2400" b="1" dirty="0">
                 <a:solidFill>
-                  <a:srgbClr val="0D0D0D"/>
+                  <a:srgbClr val="0F1F1A"/>
                 </a:solidFill>
                 <a:latin typeface="Arial" pitchFamily="34" charset="0"/>
                 <a:ea typeface="Arial" pitchFamily="34" charset="-122"/>
@@ -4702,8 +4834,8 @@
         </p:nvSpPr>
         <p:spPr>
           <a:xfrm>
-            <a:off x="8046720" y="4114800"/>
-            <a:ext cx="3383280" cy="1097280"/>
+            <a:off x="8321040" y="4114800"/>
+            <a:ext cx="2834640" cy="1097280"/>
           </a:xfrm>
           <a:prstGeom prst="rect">
             <a:avLst/>
@@ -4760,11 +4892,11 @@
             <a:r>
               <a:rPr lang="en-US" sz="1100" dirty="0">
                 <a:solidFill>
-                  <a:srgbClr val="6B6B6B"/>
-                </a:solidFill>
-                <a:latin typeface="Courier New" pitchFamily="34" charset="0"/>
-                <a:ea typeface="Courier New" pitchFamily="34" charset="-122"/>
-                <a:cs typeface="Courier New" pitchFamily="34" charset="-120"/>
+                  <a:srgbClr val="5F6F68"/>
+                </a:solidFill>
+                <a:latin typeface="Arial" pitchFamily="34" charset="0"/>
+                <a:ea typeface="Arial" pitchFamily="34" charset="-122"/>
+                <a:cs typeface="Arial" pitchFamily="34" charset="-120"/>
               </a:rPr>
               <a:t>AI SCORING BY GOOGLE GEMINI</a:t>
             </a:r>
@@ -4786,7 +4918,7 @@
     <p:bg>
       <p:bgPr>
         <a:solidFill>
-          <a:srgbClr val="F4F2EE"/>
+          <a:srgbClr val="F4F7F6"/>
         </a:solidFill>
       </p:bgPr>
     </p:bg>
@@ -4812,18 +4944,20 @@
         </p:nvSpPr>
         <p:spPr>
           <a:xfrm>
-            <a:off x="731520" y="320040"/>
-            <a:ext cx="1141054" cy="502920"/>
-          </a:xfrm>
-          <a:prstGeom prst="rect">
-            <a:avLst/>
-          </a:prstGeom>
-          <a:solidFill>
-            <a:srgbClr val="111111"/>
-          </a:solidFill>
-          <a:ln w="25400">
+            <a:off x="758952" y="320040"/>
+            <a:ext cx="1086190" cy="502920"/>
+          </a:xfrm>
+          <a:prstGeom prst="roundRect">
+            <a:avLst>
+              <a:gd name="adj" fmla="val 21818"/>
+            </a:avLst>
+          </a:prstGeom>
+          <a:solidFill>
+            <a:srgbClr val="0B3D2C"/>
+          </a:solidFill>
+          <a:ln w="12700">
             <a:solidFill>
-              <a:srgbClr val="F4F2EE"/>
+              <a:srgbClr val="F4F7F6"/>
             </a:solidFill>
             <a:prstDash val="solid"/>
           </a:ln>
@@ -4858,9 +4992,9 @@
                 <a:solidFill>
                   <a:srgbClr val="FFFFFF"/>
                 </a:solidFill>
-                <a:latin typeface="Courier New" pitchFamily="34" charset="0"/>
-                <a:ea typeface="Courier New" pitchFamily="34" charset="-122"/>
-                <a:cs typeface="Courier New" pitchFamily="34" charset="-120"/>
+                <a:latin typeface="Arial" pitchFamily="34" charset="0"/>
+                <a:ea typeface="Arial" pitchFamily="34" charset="-122"/>
+                <a:cs typeface="Arial" pitchFamily="34" charset="-120"/>
               </a:rPr>
               <a:t>01</a:t>
             </a:r>
@@ -4876,18 +5010,20 @@
         </p:nvSpPr>
         <p:spPr>
           <a:xfrm>
-            <a:off x="1872574" y="320040"/>
-            <a:ext cx="1141054" cy="502920"/>
-          </a:xfrm>
-          <a:prstGeom prst="rect">
-            <a:avLst/>
-          </a:prstGeom>
-          <a:solidFill>
-            <a:srgbClr val="3A3A3A"/>
-          </a:solidFill>
-          <a:ln w="25400">
+            <a:off x="1900006" y="320040"/>
+            <a:ext cx="1086190" cy="502920"/>
+          </a:xfrm>
+          <a:prstGeom prst="roundRect">
+            <a:avLst>
+              <a:gd name="adj" fmla="val 21818"/>
+            </a:avLst>
+          </a:prstGeom>
+          <a:solidFill>
+            <a:srgbClr val="0B8A5E"/>
+          </a:solidFill>
+          <a:ln w="12700">
             <a:solidFill>
-              <a:srgbClr val="F4F2EE"/>
+              <a:srgbClr val="F4F7F6"/>
             </a:solidFill>
             <a:prstDash val="solid"/>
           </a:ln>
@@ -4922,9 +5058,9 @@
                 <a:solidFill>
                   <a:srgbClr val="FFFFFF"/>
                 </a:solidFill>
-                <a:latin typeface="Courier New" pitchFamily="34" charset="0"/>
-                <a:ea typeface="Courier New" pitchFamily="34" charset="-122"/>
-                <a:cs typeface="Courier New" pitchFamily="34" charset="-120"/>
+                <a:latin typeface="Arial" pitchFamily="34" charset="0"/>
+                <a:ea typeface="Arial" pitchFamily="34" charset="-122"/>
+                <a:cs typeface="Arial" pitchFamily="34" charset="-120"/>
               </a:rPr>
               <a:t>02</a:t>
             </a:r>
@@ -4940,18 +5076,20 @@
         </p:nvSpPr>
         <p:spPr>
           <a:xfrm>
-            <a:off x="3013629" y="320040"/>
-            <a:ext cx="1141054" cy="502920"/>
-          </a:xfrm>
-          <a:prstGeom prst="rect">
-            <a:avLst/>
-          </a:prstGeom>
-          <a:solidFill>
-            <a:srgbClr val="1D1D1D"/>
-          </a:solidFill>
-          <a:ln w="25400">
+            <a:off x="3041061" y="320040"/>
+            <a:ext cx="1086190" cy="502920"/>
+          </a:xfrm>
+          <a:prstGeom prst="roundRect">
+            <a:avLst>
+              <a:gd name="adj" fmla="val 21818"/>
+            </a:avLst>
+          </a:prstGeom>
+          <a:solidFill>
+            <a:srgbClr val="0F9F6E"/>
+          </a:solidFill>
+          <a:ln w="12700">
             <a:solidFill>
-              <a:srgbClr val="F4F2EE"/>
+              <a:srgbClr val="F4F7F6"/>
             </a:solidFill>
             <a:prstDash val="solid"/>
           </a:ln>
@@ -4986,9 +5124,9 @@
                 <a:solidFill>
                   <a:srgbClr val="FFFFFF"/>
                 </a:solidFill>
-                <a:latin typeface="Courier New" pitchFamily="34" charset="0"/>
-                <a:ea typeface="Courier New" pitchFamily="34" charset="-122"/>
-                <a:cs typeface="Courier New" pitchFamily="34" charset="-120"/>
+                <a:latin typeface="Arial" pitchFamily="34" charset="0"/>
+                <a:ea typeface="Arial" pitchFamily="34" charset="-122"/>
+                <a:cs typeface="Arial" pitchFamily="34" charset="-120"/>
               </a:rPr>
               <a:t>03</a:t>
             </a:r>
@@ -5004,18 +5142,20 @@
         </p:nvSpPr>
         <p:spPr>
           <a:xfrm>
-            <a:off x="4154683" y="320040"/>
-            <a:ext cx="2738531" cy="502920"/>
-          </a:xfrm>
-          <a:prstGeom prst="rect">
-            <a:avLst/>
-          </a:prstGeom>
-          <a:solidFill>
-            <a:srgbClr val="E8201C"/>
-          </a:solidFill>
-          <a:ln w="25400">
+            <a:off x="4182115" y="320040"/>
+            <a:ext cx="2683667" cy="502920"/>
+          </a:xfrm>
+          <a:prstGeom prst="roundRect">
+            <a:avLst>
+              <a:gd name="adj" fmla="val 21818"/>
+            </a:avLst>
+          </a:prstGeom>
+          <a:solidFill>
+            <a:srgbClr val="17B57F"/>
+          </a:solidFill>
+          <a:ln w="12700">
             <a:solidFill>
-              <a:srgbClr val="F4F2EE"/>
+              <a:srgbClr val="F4F7F6"/>
             </a:solidFill>
             <a:prstDash val="solid"/>
           </a:ln>
@@ -5050,9 +5190,9 @@
                 <a:solidFill>
                   <a:srgbClr val="FFFFFF"/>
                 </a:solidFill>
-                <a:latin typeface="Courier New" pitchFamily="34" charset="0"/>
-                <a:ea typeface="Courier New" pitchFamily="34" charset="-122"/>
-                <a:cs typeface="Courier New" pitchFamily="34" charset="-120"/>
+                <a:latin typeface="Arial" pitchFamily="34" charset="0"/>
+                <a:ea typeface="Arial" pitchFamily="34" charset="-122"/>
+                <a:cs typeface="Arial" pitchFamily="34" charset="-120"/>
               </a:rPr>
               <a:t>04 // DEMO · 60S</a:t>
             </a:r>
@@ -5068,13 +5208,15 @@
         </p:nvSpPr>
         <p:spPr>
           <a:xfrm>
-            <a:off x="4182115" y="347472"/>
-            <a:ext cx="2683667" cy="448056"/>
-          </a:xfrm>
-          <a:prstGeom prst="rect">
-            <a:avLst/>
-          </a:prstGeom>
-          <a:ln w="31750">
+            <a:off x="4227835" y="365760"/>
+            <a:ext cx="2592227" cy="411480"/>
+          </a:xfrm>
+          <a:prstGeom prst="roundRect">
+            <a:avLst>
+              <a:gd name="adj" fmla="val 22222"/>
+            </a:avLst>
+          </a:prstGeom>
+          <a:ln w="25400">
             <a:solidFill>
               <a:srgbClr val="FFFFFF"/>
             </a:solidFill>
@@ -5090,18 +5232,20 @@
         </p:nvSpPr>
         <p:spPr>
           <a:xfrm>
-            <a:off x="6893214" y="320040"/>
-            <a:ext cx="1141054" cy="502920"/>
-          </a:xfrm>
-          <a:prstGeom prst="rect">
-            <a:avLst/>
-          </a:prstGeom>
-          <a:solidFill>
-            <a:srgbClr val="1D1D1D"/>
-          </a:solidFill>
-          <a:ln w="25400">
+            <a:off x="6920646" y="320040"/>
+            <a:ext cx="1086190" cy="502920"/>
+          </a:xfrm>
+          <a:prstGeom prst="roundRect">
+            <a:avLst>
+              <a:gd name="adj" fmla="val 21818"/>
+            </a:avLst>
+          </a:prstGeom>
+          <a:solidFill>
+            <a:srgbClr val="0F9F6E"/>
+          </a:solidFill>
+          <a:ln w="12700">
             <a:solidFill>
-              <a:srgbClr val="F4F2EE"/>
+              <a:srgbClr val="F4F7F6"/>
             </a:solidFill>
             <a:prstDash val="solid"/>
           </a:ln>
@@ -5136,9 +5280,9 @@
                 <a:solidFill>
                   <a:srgbClr val="FFFFFF"/>
                 </a:solidFill>
-                <a:latin typeface="Courier New" pitchFamily="34" charset="0"/>
-                <a:ea typeface="Courier New" pitchFamily="34" charset="-122"/>
-                <a:cs typeface="Courier New" pitchFamily="34" charset="-120"/>
+                <a:latin typeface="Arial" pitchFamily="34" charset="0"/>
+                <a:ea typeface="Arial" pitchFamily="34" charset="-122"/>
+                <a:cs typeface="Arial" pitchFamily="34" charset="-120"/>
               </a:rPr>
               <a:t>05</a:t>
             </a:r>
@@ -5154,18 +5298,20 @@
         </p:nvSpPr>
         <p:spPr>
           <a:xfrm>
-            <a:off x="8034269" y="320040"/>
-            <a:ext cx="1141054" cy="502920"/>
-          </a:xfrm>
-          <a:prstGeom prst="rect">
-            <a:avLst/>
-          </a:prstGeom>
-          <a:solidFill>
-            <a:srgbClr val="3A3A3A"/>
-          </a:solidFill>
-          <a:ln w="25400">
+            <a:off x="8061701" y="320040"/>
+            <a:ext cx="1086190" cy="502920"/>
+          </a:xfrm>
+          <a:prstGeom prst="roundRect">
+            <a:avLst>
+              <a:gd name="adj" fmla="val 21818"/>
+            </a:avLst>
+          </a:prstGeom>
+          <a:solidFill>
+            <a:srgbClr val="0B8A5E"/>
+          </a:solidFill>
+          <a:ln w="12700">
             <a:solidFill>
-              <a:srgbClr val="F4F2EE"/>
+              <a:srgbClr val="F4F7F6"/>
             </a:solidFill>
             <a:prstDash val="solid"/>
           </a:ln>
@@ -5200,9 +5346,9 @@
                 <a:solidFill>
                   <a:srgbClr val="FFFFFF"/>
                 </a:solidFill>
-                <a:latin typeface="Courier New" pitchFamily="34" charset="0"/>
-                <a:ea typeface="Courier New" pitchFamily="34" charset="-122"/>
-                <a:cs typeface="Courier New" pitchFamily="34" charset="-120"/>
+                <a:latin typeface="Arial" pitchFamily="34" charset="0"/>
+                <a:ea typeface="Arial" pitchFamily="34" charset="-122"/>
+                <a:cs typeface="Arial" pitchFamily="34" charset="-120"/>
               </a:rPr>
               <a:t>06</a:t>
             </a:r>
@@ -5218,18 +5364,20 @@
         </p:nvSpPr>
         <p:spPr>
           <a:xfrm>
-            <a:off x="9175323" y="320040"/>
-            <a:ext cx="1141054" cy="502920"/>
-          </a:xfrm>
-          <a:prstGeom prst="rect">
-            <a:avLst/>
-          </a:prstGeom>
-          <a:solidFill>
-            <a:srgbClr val="111111"/>
-          </a:solidFill>
-          <a:ln w="25400">
+            <a:off x="9202755" y="320040"/>
+            <a:ext cx="1086190" cy="502920"/>
+          </a:xfrm>
+          <a:prstGeom prst="roundRect">
+            <a:avLst>
+              <a:gd name="adj" fmla="val 21818"/>
+            </a:avLst>
+          </a:prstGeom>
+          <a:solidFill>
+            <a:srgbClr val="0B3D2C"/>
+          </a:solidFill>
+          <a:ln w="12700">
             <a:solidFill>
-              <a:srgbClr val="F4F2EE"/>
+              <a:srgbClr val="F4F7F6"/>
             </a:solidFill>
             <a:prstDash val="solid"/>
           </a:ln>
@@ -5264,9 +5412,9 @@
                 <a:solidFill>
                   <a:srgbClr val="FFFFFF"/>
                 </a:solidFill>
-                <a:latin typeface="Courier New" pitchFamily="34" charset="0"/>
-                <a:ea typeface="Courier New" pitchFamily="34" charset="-122"/>
-                <a:cs typeface="Courier New" pitchFamily="34" charset="-120"/>
+                <a:latin typeface="Arial" pitchFamily="34" charset="0"/>
+                <a:ea typeface="Arial" pitchFamily="34" charset="-122"/>
+                <a:cs typeface="Arial" pitchFamily="34" charset="-120"/>
               </a:rPr>
               <a:t>07</a:t>
             </a:r>
@@ -5282,18 +5430,20 @@
         </p:nvSpPr>
         <p:spPr>
           <a:xfrm>
-            <a:off x="10316378" y="320040"/>
-            <a:ext cx="1141054" cy="502920"/>
-          </a:xfrm>
-          <a:prstGeom prst="rect">
-            <a:avLst/>
-          </a:prstGeom>
-          <a:solidFill>
-            <a:srgbClr val="FF2D2D"/>
-          </a:solidFill>
-          <a:ln w="25400">
+            <a:off x="10343810" y="320040"/>
+            <a:ext cx="1086190" cy="502920"/>
+          </a:xfrm>
+          <a:prstGeom prst="roundRect">
+            <a:avLst>
+              <a:gd name="adj" fmla="val 21818"/>
+            </a:avLst>
+          </a:prstGeom>
+          <a:solidFill>
+            <a:srgbClr val="22C58B"/>
+          </a:solidFill>
+          <a:ln w="12700">
             <a:solidFill>
-              <a:srgbClr val="F4F2EE"/>
+              <a:srgbClr val="F4F7F6"/>
             </a:solidFill>
             <a:prstDash val="solid"/>
           </a:ln>
@@ -5328,9 +5478,9 @@
                 <a:solidFill>
                   <a:srgbClr val="FFFFFF"/>
                 </a:solidFill>
-                <a:latin typeface="Courier New" pitchFamily="34" charset="0"/>
-                <a:ea typeface="Courier New" pitchFamily="34" charset="-122"/>
-                <a:cs typeface="Courier New" pitchFamily="34" charset="-120"/>
+                <a:latin typeface="Arial" pitchFamily="34" charset="0"/>
+                <a:ea typeface="Arial" pitchFamily="34" charset="-122"/>
+                <a:cs typeface="Arial" pitchFamily="34" charset="-120"/>
               </a:rPr>
               <a:t>08</a:t>
             </a:r>
@@ -5346,34 +5496,38 @@
         </p:nvSpPr>
         <p:spPr>
           <a:xfrm>
-            <a:off x="731520" y="1143000"/>
-            <a:ext cx="10058400" cy="320040"/>
-          </a:xfrm>
-          <a:prstGeom prst="rect">
-            <a:avLst/>
-          </a:prstGeom>
-          <a:noFill/>
-          <a:ln/>
-        </p:spPr>
-        <p:txBody>
-          <a:bodyPr wrap="square" rtlCol="0" anchor="ctr"/>
-          <a:lstStyle/>
-          <a:p>
-            <a:pPr indent="0" marL="0">
-              <a:buNone/>
-            </a:pPr>
-            <a:r>
-              <a:rPr lang="en-US" sz="1300" b="1" spc="200" kern="0" dirty="0">
-                <a:solidFill>
-                  <a:srgbClr val="E8201C"/>
-                </a:solidFill>
-                <a:latin typeface="Courier New" pitchFamily="34" charset="0"/>
-                <a:ea typeface="Courier New" pitchFamily="34" charset="-122"/>
-                <a:cs typeface="Courier New" pitchFamily="34" charset="-120"/>
+            <a:off x="731520" y="1097280"/>
+            <a:ext cx="5029200" cy="365760"/>
+          </a:xfrm>
+          <a:prstGeom prst="roundRect">
+            <a:avLst>
+              <a:gd name="adj" fmla="val 50000"/>
+            </a:avLst>
+          </a:prstGeom>
+          <a:solidFill>
+            <a:srgbClr val="E8F7F0"/>
+          </a:solidFill>
+          <a:ln/>
+        </p:spPr>
+        <p:txBody>
+          <a:bodyPr wrap="square" rtlCol="0" anchor="ctr"/>
+          <a:lstStyle/>
+          <a:p>
+            <a:pPr algn="ctr" indent="0" marL="0">
+              <a:buNone/>
+            </a:pPr>
+            <a:r>
+              <a:rPr lang="en-US" sz="1200" b="1" spc="200" kern="0" dirty="0">
+                <a:solidFill>
+                  <a:srgbClr val="0B8A5E"/>
+                </a:solidFill>
+                <a:latin typeface="Arial" pitchFamily="34" charset="0"/>
+                <a:ea typeface="Arial" pitchFamily="34" charset="-122"/>
+                <a:cs typeface="Arial" pitchFamily="34" charset="-120"/>
               </a:rPr>
               <a:t>04 // DEMO · 60 SEC · RECORDED</a:t>
             </a:r>
-            <a:endParaRPr lang="en-US" sz="1300" dirty="0"/>
+            <a:endParaRPr lang="en-US" sz="1200" dirty="0"/>
           </a:p>
         </p:txBody>
       </p:sp>
@@ -5404,11 +5558,11 @@
             <a:r>
               <a:rPr lang="en-US" sz="1000" dirty="0">
                 <a:solidFill>
-                  <a:srgbClr val="6B6B6B"/>
-                </a:solidFill>
-                <a:latin typeface="Courier New" pitchFamily="34" charset="0"/>
-                <a:ea typeface="Courier New" pitchFamily="34" charset="-122"/>
-                <a:cs typeface="Courier New" pitchFamily="34" charset="-120"/>
+                  <a:srgbClr val="5F6F68"/>
+                </a:solidFill>
+                <a:latin typeface="Arial" pitchFamily="34" charset="0"/>
+                <a:ea typeface="Arial" pitchFamily="34" charset="-122"/>
+                <a:cs typeface="Arial" pitchFamily="34" charset="-120"/>
               </a:rPr>
               <a:t>MISH SENIOR</a:t>
             </a:r>
@@ -5443,11 +5597,11 @@
             <a:r>
               <a:rPr lang="en-US" sz="1000" dirty="0">
                 <a:solidFill>
-                  <a:srgbClr val="6B6B6B"/>
-                </a:solidFill>
-                <a:latin typeface="Courier New" pitchFamily="34" charset="0"/>
-                <a:ea typeface="Courier New" pitchFamily="34" charset="-122"/>
-                <a:cs typeface="Courier New" pitchFamily="34" charset="-120"/>
+                  <a:srgbClr val="5F6F68"/>
+                </a:solidFill>
+                <a:latin typeface="Arial" pitchFamily="34" charset="0"/>
+                <a:ea typeface="Arial" pitchFamily="34" charset="-122"/>
+                <a:cs typeface="Arial" pitchFamily="34" charset="-120"/>
               </a:rPr>
               <a:t>04 / 08</a:t>
             </a:r>
@@ -5466,12 +5620,17 @@
             <a:off x="731520" y="1645920"/>
             <a:ext cx="10725912" cy="4480560"/>
           </a:xfrm>
-          <a:prstGeom prst="rect">
-            <a:avLst/>
-          </a:prstGeom>
-          <a:ln w="31750">
+          <a:prstGeom prst="roundRect">
+            <a:avLst>
+              <a:gd name="adj" fmla="val 4082"/>
+            </a:avLst>
+          </a:prstGeom>
+          <a:solidFill>
+            <a:srgbClr val="FFFFFF"/>
+          </a:solidFill>
+          <a:ln w="25400">
             <a:solidFill>
-              <a:srgbClr val="BDB8AE"/>
+              <a:srgbClr val="CBD5D0"/>
             </a:solidFill>
             <a:prstDash val="dash"/>
           </a:ln>
@@ -5491,7 +5650,7 @@
     <p:bg>
       <p:bgPr>
         <a:solidFill>
-          <a:srgbClr val="F4F2EE"/>
+          <a:srgbClr val="F4F7F6"/>
         </a:solidFill>
       </p:bgPr>
     </p:bg>
@@ -5517,18 +5676,20 @@
         </p:nvSpPr>
         <p:spPr>
           <a:xfrm>
-            <a:off x="731520" y="320040"/>
-            <a:ext cx="1141054" cy="502920"/>
-          </a:xfrm>
-          <a:prstGeom prst="rect">
-            <a:avLst/>
-          </a:prstGeom>
-          <a:solidFill>
-            <a:srgbClr val="111111"/>
-          </a:solidFill>
-          <a:ln w="25400">
+            <a:off x="758952" y="320040"/>
+            <a:ext cx="1086190" cy="502920"/>
+          </a:xfrm>
+          <a:prstGeom prst="roundRect">
+            <a:avLst>
+              <a:gd name="adj" fmla="val 21818"/>
+            </a:avLst>
+          </a:prstGeom>
+          <a:solidFill>
+            <a:srgbClr val="0B3D2C"/>
+          </a:solidFill>
+          <a:ln w="12700">
             <a:solidFill>
-              <a:srgbClr val="F4F2EE"/>
+              <a:srgbClr val="F4F7F6"/>
             </a:solidFill>
             <a:prstDash val="solid"/>
           </a:ln>
@@ -5563,9 +5724,9 @@
                 <a:solidFill>
                   <a:srgbClr val="FFFFFF"/>
                 </a:solidFill>
-                <a:latin typeface="Courier New" pitchFamily="34" charset="0"/>
-                <a:ea typeface="Courier New" pitchFamily="34" charset="-122"/>
-                <a:cs typeface="Courier New" pitchFamily="34" charset="-120"/>
+                <a:latin typeface="Arial" pitchFamily="34" charset="0"/>
+                <a:ea typeface="Arial" pitchFamily="34" charset="-122"/>
+                <a:cs typeface="Arial" pitchFamily="34" charset="-120"/>
               </a:rPr>
               <a:t>01</a:t>
             </a:r>
@@ -5581,18 +5742,20 @@
         </p:nvSpPr>
         <p:spPr>
           <a:xfrm>
-            <a:off x="1872574" y="320040"/>
-            <a:ext cx="1141054" cy="502920"/>
-          </a:xfrm>
-          <a:prstGeom prst="rect">
-            <a:avLst/>
-          </a:prstGeom>
-          <a:solidFill>
-            <a:srgbClr val="3A3A3A"/>
-          </a:solidFill>
-          <a:ln w="25400">
+            <a:off x="1900006" y="320040"/>
+            <a:ext cx="1086190" cy="502920"/>
+          </a:xfrm>
+          <a:prstGeom prst="roundRect">
+            <a:avLst>
+              <a:gd name="adj" fmla="val 21818"/>
+            </a:avLst>
+          </a:prstGeom>
+          <a:solidFill>
+            <a:srgbClr val="0B8A5E"/>
+          </a:solidFill>
+          <a:ln w="12700">
             <a:solidFill>
-              <a:srgbClr val="F4F2EE"/>
+              <a:srgbClr val="F4F7F6"/>
             </a:solidFill>
             <a:prstDash val="solid"/>
           </a:ln>
@@ -5627,9 +5790,9 @@
                 <a:solidFill>
                   <a:srgbClr val="FFFFFF"/>
                 </a:solidFill>
-                <a:latin typeface="Courier New" pitchFamily="34" charset="0"/>
-                <a:ea typeface="Courier New" pitchFamily="34" charset="-122"/>
-                <a:cs typeface="Courier New" pitchFamily="34" charset="-120"/>
+                <a:latin typeface="Arial" pitchFamily="34" charset="0"/>
+                <a:ea typeface="Arial" pitchFamily="34" charset="-122"/>
+                <a:cs typeface="Arial" pitchFamily="34" charset="-120"/>
               </a:rPr>
               <a:t>02</a:t>
             </a:r>
@@ -5645,18 +5808,20 @@
         </p:nvSpPr>
         <p:spPr>
           <a:xfrm>
-            <a:off x="3013629" y="320040"/>
-            <a:ext cx="1141054" cy="502920"/>
-          </a:xfrm>
-          <a:prstGeom prst="rect">
-            <a:avLst/>
-          </a:prstGeom>
-          <a:solidFill>
-            <a:srgbClr val="1D1D1D"/>
-          </a:solidFill>
-          <a:ln w="25400">
+            <a:off x="3041061" y="320040"/>
+            <a:ext cx="1086190" cy="502920"/>
+          </a:xfrm>
+          <a:prstGeom prst="roundRect">
+            <a:avLst>
+              <a:gd name="adj" fmla="val 21818"/>
+            </a:avLst>
+          </a:prstGeom>
+          <a:solidFill>
+            <a:srgbClr val="0F9F6E"/>
+          </a:solidFill>
+          <a:ln w="12700">
             <a:solidFill>
-              <a:srgbClr val="F4F2EE"/>
+              <a:srgbClr val="F4F7F6"/>
             </a:solidFill>
             <a:prstDash val="solid"/>
           </a:ln>
@@ -5691,9 +5856,9 @@
                 <a:solidFill>
                   <a:srgbClr val="FFFFFF"/>
                 </a:solidFill>
-                <a:latin typeface="Courier New" pitchFamily="34" charset="0"/>
-                <a:ea typeface="Courier New" pitchFamily="34" charset="-122"/>
-                <a:cs typeface="Courier New" pitchFamily="34" charset="-120"/>
+                <a:latin typeface="Arial" pitchFamily="34" charset="0"/>
+                <a:ea typeface="Arial" pitchFamily="34" charset="-122"/>
+                <a:cs typeface="Arial" pitchFamily="34" charset="-120"/>
               </a:rPr>
               <a:t>03</a:t>
             </a:r>
@@ -5709,18 +5874,20 @@
         </p:nvSpPr>
         <p:spPr>
           <a:xfrm>
-            <a:off x="4154683" y="320040"/>
-            <a:ext cx="2738531" cy="502920"/>
-          </a:xfrm>
-          <a:prstGeom prst="rect">
-            <a:avLst/>
-          </a:prstGeom>
-          <a:solidFill>
-            <a:srgbClr val="E8201C"/>
-          </a:solidFill>
-          <a:ln w="25400">
+            <a:off x="4182115" y="320040"/>
+            <a:ext cx="2683667" cy="502920"/>
+          </a:xfrm>
+          <a:prstGeom prst="roundRect">
+            <a:avLst>
+              <a:gd name="adj" fmla="val 21818"/>
+            </a:avLst>
+          </a:prstGeom>
+          <a:solidFill>
+            <a:srgbClr val="17B57F"/>
+          </a:solidFill>
+          <a:ln w="12700">
             <a:solidFill>
-              <a:srgbClr val="F4F2EE"/>
+              <a:srgbClr val="F4F7F6"/>
             </a:solidFill>
             <a:prstDash val="solid"/>
           </a:ln>
@@ -5755,9 +5922,9 @@
                 <a:solidFill>
                   <a:srgbClr val="FFFFFF"/>
                 </a:solidFill>
-                <a:latin typeface="Courier New" pitchFamily="34" charset="0"/>
-                <a:ea typeface="Courier New" pitchFamily="34" charset="-122"/>
-                <a:cs typeface="Courier New" pitchFamily="34" charset="-120"/>
+                <a:latin typeface="Arial" pitchFamily="34" charset="0"/>
+                <a:ea typeface="Arial" pitchFamily="34" charset="-122"/>
+                <a:cs typeface="Arial" pitchFamily="34" charset="-120"/>
               </a:rPr>
               <a:t>04 // DEMO · 60S</a:t>
             </a:r>
@@ -5773,18 +5940,20 @@
         </p:nvSpPr>
         <p:spPr>
           <a:xfrm>
-            <a:off x="6893214" y="320040"/>
-            <a:ext cx="1141054" cy="502920"/>
-          </a:xfrm>
-          <a:prstGeom prst="rect">
-            <a:avLst/>
-          </a:prstGeom>
-          <a:solidFill>
-            <a:srgbClr val="1D1D1D"/>
-          </a:solidFill>
-          <a:ln w="25400">
+            <a:off x="6920646" y="320040"/>
+            <a:ext cx="1086190" cy="502920"/>
+          </a:xfrm>
+          <a:prstGeom prst="roundRect">
+            <a:avLst>
+              <a:gd name="adj" fmla="val 21818"/>
+            </a:avLst>
+          </a:prstGeom>
+          <a:solidFill>
+            <a:srgbClr val="0F9F6E"/>
+          </a:solidFill>
+          <a:ln w="12700">
             <a:solidFill>
-              <a:srgbClr val="F4F2EE"/>
+              <a:srgbClr val="F4F7F6"/>
             </a:solidFill>
             <a:prstDash val="solid"/>
           </a:ln>
@@ -5819,9 +5988,9 @@
                 <a:solidFill>
                   <a:srgbClr val="FFFFFF"/>
                 </a:solidFill>
-                <a:latin typeface="Courier New" pitchFamily="34" charset="0"/>
-                <a:ea typeface="Courier New" pitchFamily="34" charset="-122"/>
-                <a:cs typeface="Courier New" pitchFamily="34" charset="-120"/>
+                <a:latin typeface="Arial" pitchFamily="34" charset="0"/>
+                <a:ea typeface="Arial" pitchFamily="34" charset="-122"/>
+                <a:cs typeface="Arial" pitchFamily="34" charset="-120"/>
               </a:rPr>
               <a:t>05</a:t>
             </a:r>
@@ -5837,13 +6006,15 @@
         </p:nvSpPr>
         <p:spPr>
           <a:xfrm>
-            <a:off x="6920646" y="347472"/>
-            <a:ext cx="1086190" cy="448056"/>
-          </a:xfrm>
-          <a:prstGeom prst="rect">
-            <a:avLst/>
-          </a:prstGeom>
-          <a:ln w="31750">
+            <a:off x="6966366" y="365760"/>
+            <a:ext cx="994750" cy="411480"/>
+          </a:xfrm>
+          <a:prstGeom prst="roundRect">
+            <a:avLst>
+              <a:gd name="adj" fmla="val 22222"/>
+            </a:avLst>
+          </a:prstGeom>
+          <a:ln w="25400">
             <a:solidFill>
               <a:srgbClr val="FFFFFF"/>
             </a:solidFill>
@@ -5859,18 +6030,20 @@
         </p:nvSpPr>
         <p:spPr>
           <a:xfrm>
-            <a:off x="8034269" y="320040"/>
-            <a:ext cx="1141054" cy="502920"/>
-          </a:xfrm>
-          <a:prstGeom prst="rect">
-            <a:avLst/>
-          </a:prstGeom>
-          <a:solidFill>
-            <a:srgbClr val="3A3A3A"/>
-          </a:solidFill>
-          <a:ln w="25400">
+            <a:off x="8061701" y="320040"/>
+            <a:ext cx="1086190" cy="502920"/>
+          </a:xfrm>
+          <a:prstGeom prst="roundRect">
+            <a:avLst>
+              <a:gd name="adj" fmla="val 21818"/>
+            </a:avLst>
+          </a:prstGeom>
+          <a:solidFill>
+            <a:srgbClr val="0B8A5E"/>
+          </a:solidFill>
+          <a:ln w="12700">
             <a:solidFill>
-              <a:srgbClr val="F4F2EE"/>
+              <a:srgbClr val="F4F7F6"/>
             </a:solidFill>
             <a:prstDash val="solid"/>
           </a:ln>
@@ -5905,9 +6078,9 @@
                 <a:solidFill>
                   <a:srgbClr val="FFFFFF"/>
                 </a:solidFill>
-                <a:latin typeface="Courier New" pitchFamily="34" charset="0"/>
-                <a:ea typeface="Courier New" pitchFamily="34" charset="-122"/>
-                <a:cs typeface="Courier New" pitchFamily="34" charset="-120"/>
+                <a:latin typeface="Arial" pitchFamily="34" charset="0"/>
+                <a:ea typeface="Arial" pitchFamily="34" charset="-122"/>
+                <a:cs typeface="Arial" pitchFamily="34" charset="-120"/>
               </a:rPr>
               <a:t>06</a:t>
             </a:r>
@@ -5923,18 +6096,20 @@
         </p:nvSpPr>
         <p:spPr>
           <a:xfrm>
-            <a:off x="9175323" y="320040"/>
-            <a:ext cx="1141054" cy="502920"/>
-          </a:xfrm>
-          <a:prstGeom prst="rect">
-            <a:avLst/>
-          </a:prstGeom>
-          <a:solidFill>
-            <a:srgbClr val="111111"/>
-          </a:solidFill>
-          <a:ln w="25400">
+            <a:off x="9202755" y="320040"/>
+            <a:ext cx="1086190" cy="502920"/>
+          </a:xfrm>
+          <a:prstGeom prst="roundRect">
+            <a:avLst>
+              <a:gd name="adj" fmla="val 21818"/>
+            </a:avLst>
+          </a:prstGeom>
+          <a:solidFill>
+            <a:srgbClr val="0B3D2C"/>
+          </a:solidFill>
+          <a:ln w="12700">
             <a:solidFill>
-              <a:srgbClr val="F4F2EE"/>
+              <a:srgbClr val="F4F7F6"/>
             </a:solidFill>
             <a:prstDash val="solid"/>
           </a:ln>
@@ -5969,9 +6144,9 @@
                 <a:solidFill>
                   <a:srgbClr val="FFFFFF"/>
                 </a:solidFill>
-                <a:latin typeface="Courier New" pitchFamily="34" charset="0"/>
-                <a:ea typeface="Courier New" pitchFamily="34" charset="-122"/>
-                <a:cs typeface="Courier New" pitchFamily="34" charset="-120"/>
+                <a:latin typeface="Arial" pitchFamily="34" charset="0"/>
+                <a:ea typeface="Arial" pitchFamily="34" charset="-122"/>
+                <a:cs typeface="Arial" pitchFamily="34" charset="-120"/>
               </a:rPr>
               <a:t>07</a:t>
             </a:r>
@@ -5987,18 +6162,20 @@
         </p:nvSpPr>
         <p:spPr>
           <a:xfrm>
-            <a:off x="10316378" y="320040"/>
-            <a:ext cx="1141054" cy="502920"/>
-          </a:xfrm>
-          <a:prstGeom prst="rect">
-            <a:avLst/>
-          </a:prstGeom>
-          <a:solidFill>
-            <a:srgbClr val="FF2D2D"/>
-          </a:solidFill>
-          <a:ln w="25400">
+            <a:off x="10343810" y="320040"/>
+            <a:ext cx="1086190" cy="502920"/>
+          </a:xfrm>
+          <a:prstGeom prst="roundRect">
+            <a:avLst>
+              <a:gd name="adj" fmla="val 21818"/>
+            </a:avLst>
+          </a:prstGeom>
+          <a:solidFill>
+            <a:srgbClr val="22C58B"/>
+          </a:solidFill>
+          <a:ln w="12700">
             <a:solidFill>
-              <a:srgbClr val="F4F2EE"/>
+              <a:srgbClr val="F4F7F6"/>
             </a:solidFill>
             <a:prstDash val="solid"/>
           </a:ln>
@@ -6033,9 +6210,9 @@
                 <a:solidFill>
                   <a:srgbClr val="FFFFFF"/>
                 </a:solidFill>
-                <a:latin typeface="Courier New" pitchFamily="34" charset="0"/>
-                <a:ea typeface="Courier New" pitchFamily="34" charset="-122"/>
-                <a:cs typeface="Courier New" pitchFamily="34" charset="-120"/>
+                <a:latin typeface="Arial" pitchFamily="34" charset="0"/>
+                <a:ea typeface="Arial" pitchFamily="34" charset="-122"/>
+                <a:cs typeface="Arial" pitchFamily="34" charset="-120"/>
               </a:rPr>
               <a:t>08</a:t>
             </a:r>
@@ -6051,34 +6228,38 @@
         </p:nvSpPr>
         <p:spPr>
           <a:xfrm>
-            <a:off x="731520" y="1143000"/>
-            <a:ext cx="10058400" cy="320040"/>
-          </a:xfrm>
-          <a:prstGeom prst="rect">
-            <a:avLst/>
-          </a:prstGeom>
-          <a:noFill/>
-          <a:ln/>
-        </p:spPr>
-        <p:txBody>
-          <a:bodyPr wrap="square" rtlCol="0" anchor="ctr"/>
-          <a:lstStyle/>
-          <a:p>
-            <a:pPr indent="0" marL="0">
-              <a:buNone/>
-            </a:pPr>
-            <a:r>
-              <a:rPr lang="en-US" sz="1300" b="1" spc="200" kern="0" dirty="0">
-                <a:solidFill>
-                  <a:srgbClr val="E8201C"/>
-                </a:solidFill>
-                <a:latin typeface="Courier New" pitchFamily="34" charset="0"/>
-                <a:ea typeface="Courier New" pitchFamily="34" charset="-122"/>
-                <a:cs typeface="Courier New" pitchFamily="34" charset="-120"/>
+            <a:off x="731520" y="1097280"/>
+            <a:ext cx="5029200" cy="365760"/>
+          </a:xfrm>
+          <a:prstGeom prst="roundRect">
+            <a:avLst>
+              <a:gd name="adj" fmla="val 50000"/>
+            </a:avLst>
+          </a:prstGeom>
+          <a:solidFill>
+            <a:srgbClr val="E8F7F0"/>
+          </a:solidFill>
+          <a:ln/>
+        </p:spPr>
+        <p:txBody>
+          <a:bodyPr wrap="square" rtlCol="0" anchor="ctr"/>
+          <a:lstStyle/>
+          <a:p>
+            <a:pPr algn="ctr" indent="0" marL="0">
+              <a:buNone/>
+            </a:pPr>
+            <a:r>
+              <a:rPr lang="en-US" sz="1200" b="1" spc="200" kern="0" dirty="0">
+                <a:solidFill>
+                  <a:srgbClr val="0B8A5E"/>
+                </a:solidFill>
+                <a:latin typeface="Arial" pitchFamily="34" charset="0"/>
+                <a:ea typeface="Arial" pitchFamily="34" charset="-122"/>
+                <a:cs typeface="Arial" pitchFamily="34" charset="-120"/>
               </a:rPr>
               <a:t>05 // MARKET · 15 SEC</a:t>
             </a:r>
-            <a:endParaRPr lang="en-US" sz="1300" dirty="0"/>
+            <a:endParaRPr lang="en-US" sz="1200" dirty="0"/>
           </a:p>
         </p:txBody>
       </p:sp>
@@ -6109,11 +6290,11 @@
             <a:r>
               <a:rPr lang="en-US" sz="1000" dirty="0">
                 <a:solidFill>
-                  <a:srgbClr val="6B6B6B"/>
-                </a:solidFill>
-                <a:latin typeface="Courier New" pitchFamily="34" charset="0"/>
-                <a:ea typeface="Courier New" pitchFamily="34" charset="-122"/>
-                <a:cs typeface="Courier New" pitchFamily="34" charset="-120"/>
+                  <a:srgbClr val="5F6F68"/>
+                </a:solidFill>
+                <a:latin typeface="Arial" pitchFamily="34" charset="0"/>
+                <a:ea typeface="Arial" pitchFamily="34" charset="-122"/>
+                <a:cs typeface="Arial" pitchFamily="34" charset="-120"/>
               </a:rPr>
               <a:t>MISH SENIOR</a:t>
             </a:r>
@@ -6148,11 +6329,11 @@
             <a:r>
               <a:rPr lang="en-US" sz="1000" dirty="0">
                 <a:solidFill>
-                  <a:srgbClr val="6B6B6B"/>
-                </a:solidFill>
-                <a:latin typeface="Courier New" pitchFamily="34" charset="0"/>
-                <a:ea typeface="Courier New" pitchFamily="34" charset="-122"/>
-                <a:cs typeface="Courier New" pitchFamily="34" charset="-120"/>
+                  <a:srgbClr val="5F6F68"/>
+                </a:solidFill>
+                <a:latin typeface="Arial" pitchFamily="34" charset="0"/>
+                <a:ea typeface="Arial" pitchFamily="34" charset="-122"/>
+                <a:cs typeface="Arial" pitchFamily="34" charset="-120"/>
               </a:rPr>
               <a:t>05 / 08</a:t>
             </a:r>
@@ -6187,7 +6368,7 @@
             <a:r>
               <a:rPr lang="en-US" sz="4400" b="1" dirty="0">
                 <a:solidFill>
-                  <a:srgbClr val="0D0D0D"/>
+                  <a:srgbClr val="0F1F1A"/>
                 </a:solidFill>
                 <a:latin typeface="Arial" pitchFamily="34" charset="0"/>
                 <a:ea typeface="Arial" pitchFamily="34" charset="-122"/>
@@ -6214,9 +6395,9 @@
             <a:avLst/>
           </a:prstGeom>
           <a:noFill/>
-          <a:ln w="31750">
+          <a:ln w="19050">
             <a:solidFill>
-              <a:srgbClr val="0D0D0D"/>
+              <a:srgbClr val="CBD5D0"/>
             </a:solidFill>
             <a:prstDash val="solid"/>
           </a:ln>
@@ -6230,21 +6411,30 @@
         </p:nvSpPr>
         <p:spPr>
           <a:xfrm>
-            <a:off x="731520" y="3108960"/>
-            <a:ext cx="5303520" cy="2834640"/>
-          </a:xfrm>
-          <a:prstGeom prst="rect">
-            <a:avLst/>
+            <a:off x="731520" y="3017520"/>
+            <a:ext cx="5303520" cy="2926080"/>
+          </a:xfrm>
+          <a:prstGeom prst="roundRect">
+            <a:avLst>
+              <a:gd name="adj" fmla="val 6250"/>
+            </a:avLst>
           </a:prstGeom>
           <a:solidFill>
             <a:srgbClr val="FFFFFF"/>
           </a:solidFill>
-          <a:ln w="31750">
+          <a:ln w="12700">
             <a:solidFill>
-              <a:srgbClr val="0D0D0D"/>
+              <a:srgbClr val="E3E9E6"/>
             </a:solidFill>
             <a:prstDash val="solid"/>
           </a:ln>
+          <a:effectLst>
+            <a:outerShdw sx="100000" sy="100000" kx="0" ky="0" algn="bl" rotWithShape="0" blurRad="127000" dist="38100" dir="5400000">
+              <a:srgbClr val="103020">
+                <a:alpha val="12000"/>
+              </a:srgbClr>
+            </a:outerShdw>
+          </a:effectLst>
         </p:spPr>
       </p:sp>
       <p:sp>
@@ -6274,11 +6464,11 @@
             <a:r>
               <a:rPr lang="en-US" sz="1100" b="1" dirty="0">
                 <a:solidFill>
-                  <a:srgbClr val="E8201C"/>
-                </a:solidFill>
-                <a:latin typeface="Courier New" pitchFamily="34" charset="0"/>
-                <a:ea typeface="Courier New" pitchFamily="34" charset="-122"/>
-                <a:cs typeface="Courier New" pitchFamily="34" charset="-120"/>
+                  <a:srgbClr val="0F9F6E"/>
+                </a:solidFill>
+                <a:latin typeface="Arial" pitchFamily="34" charset="0"/>
+                <a:ea typeface="Arial" pitchFamily="34" charset="-122"/>
+                <a:cs typeface="Arial" pitchFamily="34" charset="-120"/>
               </a:rPr>
               <a:t>COMPETITOR 1</a:t>
             </a:r>
@@ -6313,7 +6503,7 @@
             <a:r>
               <a:rPr lang="en-US" sz="2400" b="1" dirty="0">
                 <a:solidFill>
-                  <a:srgbClr val="0D0D0D"/>
+                  <a:srgbClr val="0F1F1A"/>
                 </a:solidFill>
                 <a:latin typeface="Arial" pitchFamily="34" charset="0"/>
                 <a:ea typeface="Arial" pitchFamily="34" charset="-122"/>
@@ -6372,21 +6562,30 @@
         </p:nvSpPr>
         <p:spPr>
           <a:xfrm>
-            <a:off x="6153912" y="3108960"/>
-            <a:ext cx="5303520" cy="2834640"/>
-          </a:xfrm>
-          <a:prstGeom prst="rect">
-            <a:avLst/>
+            <a:off x="6153912" y="3017520"/>
+            <a:ext cx="5303520" cy="2926080"/>
+          </a:xfrm>
+          <a:prstGeom prst="roundRect">
+            <a:avLst>
+              <a:gd name="adj" fmla="val 6250"/>
+            </a:avLst>
           </a:prstGeom>
           <a:solidFill>
             <a:srgbClr val="FFFFFF"/>
           </a:solidFill>
-          <a:ln w="31750">
+          <a:ln w="25400">
             <a:solidFill>
-              <a:srgbClr val="E8201C"/>
+              <a:srgbClr val="0F9F6E"/>
             </a:solidFill>
             <a:prstDash val="solid"/>
           </a:ln>
+          <a:effectLst>
+            <a:outerShdw sx="100000" sy="100000" kx="0" ky="0" algn="bl" rotWithShape="0" blurRad="127000" dist="38100" dir="5400000">
+              <a:srgbClr val="103020">
+                <a:alpha val="12000"/>
+              </a:srgbClr>
+            </a:outerShdw>
+          </a:effectLst>
         </p:spPr>
       </p:sp>
       <p:sp>
@@ -6416,11 +6615,11 @@
             <a:r>
               <a:rPr lang="en-US" sz="1100" b="1" dirty="0">
                 <a:solidFill>
-                  <a:srgbClr val="E8201C"/>
-                </a:solidFill>
-                <a:latin typeface="Courier New" pitchFamily="34" charset="0"/>
-                <a:ea typeface="Courier New" pitchFamily="34" charset="-122"/>
-                <a:cs typeface="Courier New" pitchFamily="34" charset="-120"/>
+                  <a:srgbClr val="0F9F6E"/>
+                </a:solidFill>
+                <a:latin typeface="Arial" pitchFamily="34" charset="0"/>
+                <a:ea typeface="Arial" pitchFamily="34" charset="-122"/>
+                <a:cs typeface="Arial" pitchFamily="34" charset="-120"/>
               </a:rPr>
               <a:t>OUR GAP</a:t>
             </a:r>
@@ -6455,7 +6654,7 @@
             <a:r>
               <a:rPr lang="en-US" sz="2400" b="1" dirty="0">
                 <a:solidFill>
-                  <a:srgbClr val="0D0D0D"/>
+                  <a:srgbClr val="0F1F1A"/>
                 </a:solidFill>
                 <a:latin typeface="Arial" pitchFamily="34" charset="0"/>
                 <a:ea typeface="Arial" pitchFamily="34" charset="-122"/>
@@ -6520,7 +6719,7 @@
     <p:bg>
       <p:bgPr>
         <a:solidFill>
-          <a:srgbClr val="F4F2EE"/>
+          <a:srgbClr val="F4F7F6"/>
         </a:solidFill>
       </p:bgPr>
     </p:bg>
@@ -6546,18 +6745,20 @@
         </p:nvSpPr>
         <p:spPr>
           <a:xfrm>
-            <a:off x="731520" y="320040"/>
-            <a:ext cx="1141054" cy="502920"/>
-          </a:xfrm>
-          <a:prstGeom prst="rect">
-            <a:avLst/>
-          </a:prstGeom>
-          <a:solidFill>
-            <a:srgbClr val="111111"/>
-          </a:solidFill>
-          <a:ln w="25400">
+            <a:off x="758952" y="320040"/>
+            <a:ext cx="1086190" cy="502920"/>
+          </a:xfrm>
+          <a:prstGeom prst="roundRect">
+            <a:avLst>
+              <a:gd name="adj" fmla="val 21818"/>
+            </a:avLst>
+          </a:prstGeom>
+          <a:solidFill>
+            <a:srgbClr val="0B3D2C"/>
+          </a:solidFill>
+          <a:ln w="12700">
             <a:solidFill>
-              <a:srgbClr val="F4F2EE"/>
+              <a:srgbClr val="F4F7F6"/>
             </a:solidFill>
             <a:prstDash val="solid"/>
           </a:ln>
@@ -6592,9 +6793,9 @@
                 <a:solidFill>
                   <a:srgbClr val="FFFFFF"/>
                 </a:solidFill>
-                <a:latin typeface="Courier New" pitchFamily="34" charset="0"/>
-                <a:ea typeface="Courier New" pitchFamily="34" charset="-122"/>
-                <a:cs typeface="Courier New" pitchFamily="34" charset="-120"/>
+                <a:latin typeface="Arial" pitchFamily="34" charset="0"/>
+                <a:ea typeface="Arial" pitchFamily="34" charset="-122"/>
+                <a:cs typeface="Arial" pitchFamily="34" charset="-120"/>
               </a:rPr>
               <a:t>01</a:t>
             </a:r>
@@ -6610,18 +6811,20 @@
         </p:nvSpPr>
         <p:spPr>
           <a:xfrm>
-            <a:off x="1872574" y="320040"/>
-            <a:ext cx="1141054" cy="502920"/>
-          </a:xfrm>
-          <a:prstGeom prst="rect">
-            <a:avLst/>
-          </a:prstGeom>
-          <a:solidFill>
-            <a:srgbClr val="3A3A3A"/>
-          </a:solidFill>
-          <a:ln w="25400">
+            <a:off x="1900006" y="320040"/>
+            <a:ext cx="1086190" cy="502920"/>
+          </a:xfrm>
+          <a:prstGeom prst="roundRect">
+            <a:avLst>
+              <a:gd name="adj" fmla="val 21818"/>
+            </a:avLst>
+          </a:prstGeom>
+          <a:solidFill>
+            <a:srgbClr val="0B8A5E"/>
+          </a:solidFill>
+          <a:ln w="12700">
             <a:solidFill>
-              <a:srgbClr val="F4F2EE"/>
+              <a:srgbClr val="F4F7F6"/>
             </a:solidFill>
             <a:prstDash val="solid"/>
           </a:ln>
@@ -6656,9 +6859,9 @@
                 <a:solidFill>
                   <a:srgbClr val="FFFFFF"/>
                 </a:solidFill>
-                <a:latin typeface="Courier New" pitchFamily="34" charset="0"/>
-                <a:ea typeface="Courier New" pitchFamily="34" charset="-122"/>
-                <a:cs typeface="Courier New" pitchFamily="34" charset="-120"/>
+                <a:latin typeface="Arial" pitchFamily="34" charset="0"/>
+                <a:ea typeface="Arial" pitchFamily="34" charset="-122"/>
+                <a:cs typeface="Arial" pitchFamily="34" charset="-120"/>
               </a:rPr>
               <a:t>02</a:t>
             </a:r>
@@ -6674,18 +6877,20 @@
         </p:nvSpPr>
         <p:spPr>
           <a:xfrm>
-            <a:off x="3013629" y="320040"/>
-            <a:ext cx="1141054" cy="502920"/>
-          </a:xfrm>
-          <a:prstGeom prst="rect">
-            <a:avLst/>
-          </a:prstGeom>
-          <a:solidFill>
-            <a:srgbClr val="1D1D1D"/>
-          </a:solidFill>
-          <a:ln w="25400">
+            <a:off x="3041061" y="320040"/>
+            <a:ext cx="1086190" cy="502920"/>
+          </a:xfrm>
+          <a:prstGeom prst="roundRect">
+            <a:avLst>
+              <a:gd name="adj" fmla="val 21818"/>
+            </a:avLst>
+          </a:prstGeom>
+          <a:solidFill>
+            <a:srgbClr val="0F9F6E"/>
+          </a:solidFill>
+          <a:ln w="12700">
             <a:solidFill>
-              <a:srgbClr val="F4F2EE"/>
+              <a:srgbClr val="F4F7F6"/>
             </a:solidFill>
             <a:prstDash val="solid"/>
           </a:ln>
@@ -6720,9 +6925,9 @@
                 <a:solidFill>
                   <a:srgbClr val="FFFFFF"/>
                 </a:solidFill>
-                <a:latin typeface="Courier New" pitchFamily="34" charset="0"/>
-                <a:ea typeface="Courier New" pitchFamily="34" charset="-122"/>
-                <a:cs typeface="Courier New" pitchFamily="34" charset="-120"/>
+                <a:latin typeface="Arial" pitchFamily="34" charset="0"/>
+                <a:ea typeface="Arial" pitchFamily="34" charset="-122"/>
+                <a:cs typeface="Arial" pitchFamily="34" charset="-120"/>
               </a:rPr>
               <a:t>03</a:t>
             </a:r>
@@ -6738,18 +6943,20 @@
         </p:nvSpPr>
         <p:spPr>
           <a:xfrm>
-            <a:off x="4154683" y="320040"/>
-            <a:ext cx="2738531" cy="502920"/>
-          </a:xfrm>
-          <a:prstGeom prst="rect">
-            <a:avLst/>
-          </a:prstGeom>
-          <a:solidFill>
-            <a:srgbClr val="E8201C"/>
-          </a:solidFill>
-          <a:ln w="25400">
+            <a:off x="4182115" y="320040"/>
+            <a:ext cx="2683667" cy="502920"/>
+          </a:xfrm>
+          <a:prstGeom prst="roundRect">
+            <a:avLst>
+              <a:gd name="adj" fmla="val 21818"/>
+            </a:avLst>
+          </a:prstGeom>
+          <a:solidFill>
+            <a:srgbClr val="17B57F"/>
+          </a:solidFill>
+          <a:ln w="12700">
             <a:solidFill>
-              <a:srgbClr val="F4F2EE"/>
+              <a:srgbClr val="F4F7F6"/>
             </a:solidFill>
             <a:prstDash val="solid"/>
           </a:ln>
@@ -6784,9 +6991,9 @@
                 <a:solidFill>
                   <a:srgbClr val="FFFFFF"/>
                 </a:solidFill>
-                <a:latin typeface="Courier New" pitchFamily="34" charset="0"/>
-                <a:ea typeface="Courier New" pitchFamily="34" charset="-122"/>
-                <a:cs typeface="Courier New" pitchFamily="34" charset="-120"/>
+                <a:latin typeface="Arial" pitchFamily="34" charset="0"/>
+                <a:ea typeface="Arial" pitchFamily="34" charset="-122"/>
+                <a:cs typeface="Arial" pitchFamily="34" charset="-120"/>
               </a:rPr>
               <a:t>04 // DEMO · 60S</a:t>
             </a:r>
@@ -6802,18 +7009,20 @@
         </p:nvSpPr>
         <p:spPr>
           <a:xfrm>
-            <a:off x="6893214" y="320040"/>
-            <a:ext cx="1141054" cy="502920"/>
-          </a:xfrm>
-          <a:prstGeom prst="rect">
-            <a:avLst/>
-          </a:prstGeom>
-          <a:solidFill>
-            <a:srgbClr val="1D1D1D"/>
-          </a:solidFill>
-          <a:ln w="25400">
+            <a:off x="6920646" y="320040"/>
+            <a:ext cx="1086190" cy="502920"/>
+          </a:xfrm>
+          <a:prstGeom prst="roundRect">
+            <a:avLst>
+              <a:gd name="adj" fmla="val 21818"/>
+            </a:avLst>
+          </a:prstGeom>
+          <a:solidFill>
+            <a:srgbClr val="0F9F6E"/>
+          </a:solidFill>
+          <a:ln w="12700">
             <a:solidFill>
-              <a:srgbClr val="F4F2EE"/>
+              <a:srgbClr val="F4F7F6"/>
             </a:solidFill>
             <a:prstDash val="solid"/>
           </a:ln>
@@ -6848,9 +7057,9 @@
                 <a:solidFill>
                   <a:srgbClr val="FFFFFF"/>
                 </a:solidFill>
-                <a:latin typeface="Courier New" pitchFamily="34" charset="0"/>
-                <a:ea typeface="Courier New" pitchFamily="34" charset="-122"/>
-                <a:cs typeface="Courier New" pitchFamily="34" charset="-120"/>
+                <a:latin typeface="Arial" pitchFamily="34" charset="0"/>
+                <a:ea typeface="Arial" pitchFamily="34" charset="-122"/>
+                <a:cs typeface="Arial" pitchFamily="34" charset="-120"/>
               </a:rPr>
               <a:t>05</a:t>
             </a:r>
@@ -6866,18 +7075,20 @@
         </p:nvSpPr>
         <p:spPr>
           <a:xfrm>
-            <a:off x="8034269" y="320040"/>
-            <a:ext cx="1141054" cy="502920"/>
-          </a:xfrm>
-          <a:prstGeom prst="rect">
-            <a:avLst/>
-          </a:prstGeom>
-          <a:solidFill>
-            <a:srgbClr val="3A3A3A"/>
-          </a:solidFill>
-          <a:ln w="25400">
+            <a:off x="8061701" y="320040"/>
+            <a:ext cx="1086190" cy="502920"/>
+          </a:xfrm>
+          <a:prstGeom prst="roundRect">
+            <a:avLst>
+              <a:gd name="adj" fmla="val 21818"/>
+            </a:avLst>
+          </a:prstGeom>
+          <a:solidFill>
+            <a:srgbClr val="0B8A5E"/>
+          </a:solidFill>
+          <a:ln w="12700">
             <a:solidFill>
-              <a:srgbClr val="F4F2EE"/>
+              <a:srgbClr val="F4F7F6"/>
             </a:solidFill>
             <a:prstDash val="solid"/>
           </a:ln>
@@ -6912,9 +7123,9 @@
                 <a:solidFill>
                   <a:srgbClr val="FFFFFF"/>
                 </a:solidFill>
-                <a:latin typeface="Courier New" pitchFamily="34" charset="0"/>
-                <a:ea typeface="Courier New" pitchFamily="34" charset="-122"/>
-                <a:cs typeface="Courier New" pitchFamily="34" charset="-120"/>
+                <a:latin typeface="Arial" pitchFamily="34" charset="0"/>
+                <a:ea typeface="Arial" pitchFamily="34" charset="-122"/>
+                <a:cs typeface="Arial" pitchFamily="34" charset="-120"/>
               </a:rPr>
               <a:t>06</a:t>
             </a:r>
@@ -6930,13 +7141,15 @@
         </p:nvSpPr>
         <p:spPr>
           <a:xfrm>
-            <a:off x="8061701" y="347472"/>
-            <a:ext cx="1086190" cy="448056"/>
-          </a:xfrm>
-          <a:prstGeom prst="rect">
-            <a:avLst/>
-          </a:prstGeom>
-          <a:ln w="31750">
+            <a:off x="8107421" y="365760"/>
+            <a:ext cx="994750" cy="411480"/>
+          </a:xfrm>
+          <a:prstGeom prst="roundRect">
+            <a:avLst>
+              <a:gd name="adj" fmla="val 22222"/>
+            </a:avLst>
+          </a:prstGeom>
+          <a:ln w="25400">
             <a:solidFill>
               <a:srgbClr val="FFFFFF"/>
             </a:solidFill>
@@ -6952,18 +7165,20 @@
         </p:nvSpPr>
         <p:spPr>
           <a:xfrm>
-            <a:off x="9175323" y="320040"/>
-            <a:ext cx="1141054" cy="502920"/>
-          </a:xfrm>
-          <a:prstGeom prst="rect">
-            <a:avLst/>
-          </a:prstGeom>
-          <a:solidFill>
-            <a:srgbClr val="111111"/>
-          </a:solidFill>
-          <a:ln w="25400">
+            <a:off x="9202755" y="320040"/>
+            <a:ext cx="1086190" cy="502920"/>
+          </a:xfrm>
+          <a:prstGeom prst="roundRect">
+            <a:avLst>
+              <a:gd name="adj" fmla="val 21818"/>
+            </a:avLst>
+          </a:prstGeom>
+          <a:solidFill>
+            <a:srgbClr val="0B3D2C"/>
+          </a:solidFill>
+          <a:ln w="12700">
             <a:solidFill>
-              <a:srgbClr val="F4F2EE"/>
+              <a:srgbClr val="F4F7F6"/>
             </a:solidFill>
             <a:prstDash val="solid"/>
           </a:ln>
@@ -6998,9 +7213,9 @@
                 <a:solidFill>
                   <a:srgbClr val="FFFFFF"/>
                 </a:solidFill>
-                <a:latin typeface="Courier New" pitchFamily="34" charset="0"/>
-                <a:ea typeface="Courier New" pitchFamily="34" charset="-122"/>
-                <a:cs typeface="Courier New" pitchFamily="34" charset="-120"/>
+                <a:latin typeface="Arial" pitchFamily="34" charset="0"/>
+                <a:ea typeface="Arial" pitchFamily="34" charset="-122"/>
+                <a:cs typeface="Arial" pitchFamily="34" charset="-120"/>
               </a:rPr>
               <a:t>07</a:t>
             </a:r>
@@ -7016,18 +7231,20 @@
         </p:nvSpPr>
         <p:spPr>
           <a:xfrm>
-            <a:off x="10316378" y="320040"/>
-            <a:ext cx="1141054" cy="502920"/>
-          </a:xfrm>
-          <a:prstGeom prst="rect">
-            <a:avLst/>
-          </a:prstGeom>
-          <a:solidFill>
-            <a:srgbClr val="FF2D2D"/>
-          </a:solidFill>
-          <a:ln w="25400">
+            <a:off x="10343810" y="320040"/>
+            <a:ext cx="1086190" cy="502920"/>
+          </a:xfrm>
+          <a:prstGeom prst="roundRect">
+            <a:avLst>
+              <a:gd name="adj" fmla="val 21818"/>
+            </a:avLst>
+          </a:prstGeom>
+          <a:solidFill>
+            <a:srgbClr val="22C58B"/>
+          </a:solidFill>
+          <a:ln w="12700">
             <a:solidFill>
-              <a:srgbClr val="F4F2EE"/>
+              <a:srgbClr val="F4F7F6"/>
             </a:solidFill>
             <a:prstDash val="solid"/>
           </a:ln>
@@ -7062,9 +7279,9 @@
                 <a:solidFill>
                   <a:srgbClr val="FFFFFF"/>
                 </a:solidFill>
-                <a:latin typeface="Courier New" pitchFamily="34" charset="0"/>
-                <a:ea typeface="Courier New" pitchFamily="34" charset="-122"/>
-                <a:cs typeface="Courier New" pitchFamily="34" charset="-120"/>
+                <a:latin typeface="Arial" pitchFamily="34" charset="0"/>
+                <a:ea typeface="Arial" pitchFamily="34" charset="-122"/>
+                <a:cs typeface="Arial" pitchFamily="34" charset="-120"/>
               </a:rPr>
               <a:t>08</a:t>
             </a:r>
@@ -7080,34 +7297,38 @@
         </p:nvSpPr>
         <p:spPr>
           <a:xfrm>
-            <a:off x="731520" y="1143000"/>
-            <a:ext cx="10058400" cy="320040"/>
-          </a:xfrm>
-          <a:prstGeom prst="rect">
-            <a:avLst/>
-          </a:prstGeom>
-          <a:noFill/>
-          <a:ln/>
-        </p:spPr>
-        <p:txBody>
-          <a:bodyPr wrap="square" rtlCol="0" anchor="ctr"/>
-          <a:lstStyle/>
-          <a:p>
-            <a:pPr indent="0" marL="0">
-              <a:buNone/>
-            </a:pPr>
-            <a:r>
-              <a:rPr lang="en-US" sz="1300" b="1" spc="200" kern="0" dirty="0">
-                <a:solidFill>
-                  <a:srgbClr val="E8201C"/>
-                </a:solidFill>
-                <a:latin typeface="Courier New" pitchFamily="34" charset="0"/>
-                <a:ea typeface="Courier New" pitchFamily="34" charset="-122"/>
-                <a:cs typeface="Courier New" pitchFamily="34" charset="-120"/>
+            <a:off x="731520" y="1097280"/>
+            <a:ext cx="5029200" cy="365760"/>
+          </a:xfrm>
+          <a:prstGeom prst="roundRect">
+            <a:avLst>
+              <a:gd name="adj" fmla="val 50000"/>
+            </a:avLst>
+          </a:prstGeom>
+          <a:solidFill>
+            <a:srgbClr val="E8F7F0"/>
+          </a:solidFill>
+          <a:ln/>
+        </p:spPr>
+        <p:txBody>
+          <a:bodyPr wrap="square" rtlCol="0" anchor="ctr"/>
+          <a:lstStyle/>
+          <a:p>
+            <a:pPr algn="ctr" indent="0" marL="0">
+              <a:buNone/>
+            </a:pPr>
+            <a:r>
+              <a:rPr lang="en-US" sz="1200" b="1" spc="200" kern="0" dirty="0">
+                <a:solidFill>
+                  <a:srgbClr val="0B8A5E"/>
+                </a:solidFill>
+                <a:latin typeface="Arial" pitchFamily="34" charset="0"/>
+                <a:ea typeface="Arial" pitchFamily="34" charset="-122"/>
+                <a:cs typeface="Arial" pitchFamily="34" charset="-120"/>
               </a:rPr>
               <a:t>06 // BUSINESS · 15 SEC</a:t>
             </a:r>
-            <a:endParaRPr lang="en-US" sz="1300" dirty="0"/>
+            <a:endParaRPr lang="en-US" sz="1200" dirty="0"/>
           </a:p>
         </p:txBody>
       </p:sp>
@@ -7138,11 +7359,11 @@
             <a:r>
               <a:rPr lang="en-US" sz="1000" dirty="0">
                 <a:solidFill>
-                  <a:srgbClr val="6B6B6B"/>
-                </a:solidFill>
-                <a:latin typeface="Courier New" pitchFamily="34" charset="0"/>
-                <a:ea typeface="Courier New" pitchFamily="34" charset="-122"/>
-                <a:cs typeface="Courier New" pitchFamily="34" charset="-120"/>
+                  <a:srgbClr val="5F6F68"/>
+                </a:solidFill>
+                <a:latin typeface="Arial" pitchFamily="34" charset="0"/>
+                <a:ea typeface="Arial" pitchFamily="34" charset="-122"/>
+                <a:cs typeface="Arial" pitchFamily="34" charset="-120"/>
               </a:rPr>
               <a:t>MISH SENIOR</a:t>
             </a:r>
@@ -7177,11 +7398,11 @@
             <a:r>
               <a:rPr lang="en-US" sz="1000" dirty="0">
                 <a:solidFill>
-                  <a:srgbClr val="6B6B6B"/>
-                </a:solidFill>
-                <a:latin typeface="Courier New" pitchFamily="34" charset="0"/>
-                <a:ea typeface="Courier New" pitchFamily="34" charset="-122"/>
-                <a:cs typeface="Courier New" pitchFamily="34" charset="-120"/>
+                  <a:srgbClr val="5F6F68"/>
+                </a:solidFill>
+                <a:latin typeface="Arial" pitchFamily="34" charset="0"/>
+                <a:ea typeface="Arial" pitchFamily="34" charset="-122"/>
+                <a:cs typeface="Arial" pitchFamily="34" charset="-120"/>
               </a:rPr>
               <a:t>06 / 08</a:t>
             </a:r>
@@ -7216,7 +7437,7 @@
             <a:r>
               <a:rPr lang="en-US" sz="4400" b="1" dirty="0">
                 <a:solidFill>
-                  <a:srgbClr val="0D0D0D"/>
+                  <a:srgbClr val="0F1F1A"/>
                 </a:solidFill>
                 <a:latin typeface="Arial" pitchFamily="34" charset="0"/>
                 <a:ea typeface="Arial" pitchFamily="34" charset="-122"/>
@@ -7243,9 +7464,9 @@
             <a:avLst/>
           </a:prstGeom>
           <a:noFill/>
-          <a:ln w="31750">
+          <a:ln w="19050">
             <a:solidFill>
-              <a:srgbClr val="0D0D0D"/>
+              <a:srgbClr val="CBD5D0"/>
             </a:solidFill>
             <a:prstDash val="solid"/>
           </a:ln>
@@ -7259,21 +7480,30 @@
         </p:nvSpPr>
         <p:spPr>
           <a:xfrm>
-            <a:off x="731520" y="3108960"/>
-            <a:ext cx="5303520" cy="2834640"/>
-          </a:xfrm>
-          <a:prstGeom prst="rect">
-            <a:avLst/>
+            <a:off x="731520" y="3017520"/>
+            <a:ext cx="5303520" cy="2926080"/>
+          </a:xfrm>
+          <a:prstGeom prst="roundRect">
+            <a:avLst>
+              <a:gd name="adj" fmla="val 6250"/>
+            </a:avLst>
           </a:prstGeom>
           <a:solidFill>
             <a:srgbClr val="FFFFFF"/>
           </a:solidFill>
-          <a:ln w="31750">
+          <a:ln w="12700">
             <a:solidFill>
-              <a:srgbClr val="0D0D0D"/>
+              <a:srgbClr val="E3E9E6"/>
             </a:solidFill>
             <a:prstDash val="solid"/>
           </a:ln>
+          <a:effectLst>
+            <a:outerShdw sx="100000" sy="100000" kx="0" ky="0" algn="bl" rotWithShape="0" blurRad="127000" dist="38100" dir="5400000">
+              <a:srgbClr val="103020">
+                <a:alpha val="12000"/>
+              </a:srgbClr>
+            </a:outerShdw>
+          </a:effectLst>
         </p:spPr>
       </p:sp>
       <p:sp>
@@ -7303,11 +7533,11 @@
             <a:r>
               <a:rPr lang="en-US" sz="1100" b="1" dirty="0">
                 <a:solidFill>
-                  <a:srgbClr val="E8201C"/>
-                </a:solidFill>
-                <a:latin typeface="Courier New" pitchFamily="34" charset="0"/>
-                <a:ea typeface="Courier New" pitchFamily="34" charset="-122"/>
-                <a:cs typeface="Courier New" pitchFamily="34" charset="-120"/>
+                  <a:srgbClr val="0F9F6E"/>
+                </a:solidFill>
+                <a:latin typeface="Arial" pitchFamily="34" charset="0"/>
+                <a:ea typeface="Arial" pitchFamily="34" charset="-122"/>
+                <a:cs typeface="Arial" pitchFamily="34" charset="-120"/>
               </a:rPr>
               <a:t>BASIC</a:t>
             </a:r>
@@ -7342,7 +7572,7 @@
             <a:r>
               <a:rPr lang="en-US" sz="2400" b="1" dirty="0">
                 <a:solidFill>
-                  <a:srgbClr val="0D0D0D"/>
+                  <a:srgbClr val="0F1F1A"/>
                 </a:solidFill>
                 <a:latin typeface="Arial" pitchFamily="34" charset="0"/>
                 <a:ea typeface="Arial" pitchFamily="34" charset="-122"/>
@@ -7401,21 +7631,30 @@
         </p:nvSpPr>
         <p:spPr>
           <a:xfrm>
-            <a:off x="6153912" y="3108960"/>
-            <a:ext cx="5303520" cy="2834640"/>
-          </a:xfrm>
-          <a:prstGeom prst="rect">
-            <a:avLst/>
+            <a:off x="6153912" y="3017520"/>
+            <a:ext cx="5303520" cy="2926080"/>
+          </a:xfrm>
+          <a:prstGeom prst="roundRect">
+            <a:avLst>
+              <a:gd name="adj" fmla="val 6250"/>
+            </a:avLst>
           </a:prstGeom>
           <a:solidFill>
             <a:srgbClr val="FFFFFF"/>
           </a:solidFill>
-          <a:ln w="31750">
+          <a:ln w="25400">
             <a:solidFill>
-              <a:srgbClr val="E8201C"/>
+              <a:srgbClr val="0F9F6E"/>
             </a:solidFill>
             <a:prstDash val="solid"/>
           </a:ln>
+          <a:effectLst>
+            <a:outerShdw sx="100000" sy="100000" kx="0" ky="0" algn="bl" rotWithShape="0" blurRad="127000" dist="38100" dir="5400000">
+              <a:srgbClr val="103020">
+                <a:alpha val="12000"/>
+              </a:srgbClr>
+            </a:outerShdw>
+          </a:effectLst>
         </p:spPr>
       </p:sp>
       <p:sp>
@@ -7445,11 +7684,11 @@
             <a:r>
               <a:rPr lang="en-US" sz="1100" b="1" dirty="0">
                 <a:solidFill>
-                  <a:srgbClr val="E8201C"/>
-                </a:solidFill>
-                <a:latin typeface="Courier New" pitchFamily="34" charset="0"/>
-                <a:ea typeface="Courier New" pitchFamily="34" charset="-122"/>
-                <a:cs typeface="Courier New" pitchFamily="34" charset="-120"/>
+                  <a:srgbClr val="0F9F6E"/>
+                </a:solidFill>
+                <a:latin typeface="Arial" pitchFamily="34" charset="0"/>
+                <a:ea typeface="Arial" pitchFamily="34" charset="-122"/>
+                <a:cs typeface="Arial" pitchFamily="34" charset="-120"/>
               </a:rPr>
               <a:t>PREMIUM</a:t>
             </a:r>
@@ -7484,7 +7723,7 @@
             <a:r>
               <a:rPr lang="en-US" sz="2400" b="1" dirty="0">
                 <a:solidFill>
-                  <a:srgbClr val="0D0D0D"/>
+                  <a:srgbClr val="0F1F1A"/>
                 </a:solidFill>
                 <a:latin typeface="Arial" pitchFamily="34" charset="0"/>
                 <a:ea typeface="Arial" pitchFamily="34" charset="-122"/>
@@ -7562,11 +7801,11 @@
             <a:r>
               <a:rPr lang="en-US" sz="1000" dirty="0">
                 <a:solidFill>
-                  <a:srgbClr val="6B6B6B"/>
-                </a:solidFill>
-                <a:latin typeface="Courier New" pitchFamily="34" charset="0"/>
-                <a:ea typeface="Courier New" pitchFamily="34" charset="-122"/>
-                <a:cs typeface="Courier New" pitchFamily="34" charset="-120"/>
+                  <a:srgbClr val="5F6F68"/>
+                </a:solidFill>
+                <a:latin typeface="Arial" pitchFamily="34" charset="0"/>
+                <a:ea typeface="Arial" pitchFamily="34" charset="-122"/>
+                <a:cs typeface="Arial" pitchFamily="34" charset="-120"/>
               </a:rPr>
               <a:t>Demo note: payments are simulated.</a:t>
             </a:r>
@@ -7588,7 +7827,7 @@
     <p:bg>
       <p:bgPr>
         <a:solidFill>
-          <a:srgbClr val="F4F2EE"/>
+          <a:srgbClr val="F4F7F6"/>
         </a:solidFill>
       </p:bgPr>
     </p:bg>
@@ -7614,18 +7853,20 @@
         </p:nvSpPr>
         <p:spPr>
           <a:xfrm>
-            <a:off x="731520" y="320040"/>
-            <a:ext cx="1141054" cy="502920"/>
-          </a:xfrm>
-          <a:prstGeom prst="rect">
-            <a:avLst/>
-          </a:prstGeom>
-          <a:solidFill>
-            <a:srgbClr val="111111"/>
-          </a:solidFill>
-          <a:ln w="25400">
+            <a:off x="758952" y="320040"/>
+            <a:ext cx="1086190" cy="502920"/>
+          </a:xfrm>
+          <a:prstGeom prst="roundRect">
+            <a:avLst>
+              <a:gd name="adj" fmla="val 21818"/>
+            </a:avLst>
+          </a:prstGeom>
+          <a:solidFill>
+            <a:srgbClr val="0B3D2C"/>
+          </a:solidFill>
+          <a:ln w="12700">
             <a:solidFill>
-              <a:srgbClr val="F4F2EE"/>
+              <a:srgbClr val="F4F7F6"/>
             </a:solidFill>
             <a:prstDash val="solid"/>
           </a:ln>
@@ -7660,9 +7901,9 @@
                 <a:solidFill>
                   <a:srgbClr val="FFFFFF"/>
                 </a:solidFill>
-                <a:latin typeface="Courier New" pitchFamily="34" charset="0"/>
-                <a:ea typeface="Courier New" pitchFamily="34" charset="-122"/>
-                <a:cs typeface="Courier New" pitchFamily="34" charset="-120"/>
+                <a:latin typeface="Arial" pitchFamily="34" charset="0"/>
+                <a:ea typeface="Arial" pitchFamily="34" charset="-122"/>
+                <a:cs typeface="Arial" pitchFamily="34" charset="-120"/>
               </a:rPr>
               <a:t>01</a:t>
             </a:r>
@@ -7678,18 +7919,20 @@
         </p:nvSpPr>
         <p:spPr>
           <a:xfrm>
-            <a:off x="1872574" y="320040"/>
-            <a:ext cx="1141054" cy="502920"/>
-          </a:xfrm>
-          <a:prstGeom prst="rect">
-            <a:avLst/>
-          </a:prstGeom>
-          <a:solidFill>
-            <a:srgbClr val="3A3A3A"/>
-          </a:solidFill>
-          <a:ln w="25400">
+            <a:off x="1900006" y="320040"/>
+            <a:ext cx="1086190" cy="502920"/>
+          </a:xfrm>
+          <a:prstGeom prst="roundRect">
+            <a:avLst>
+              <a:gd name="adj" fmla="val 21818"/>
+            </a:avLst>
+          </a:prstGeom>
+          <a:solidFill>
+            <a:srgbClr val="0B8A5E"/>
+          </a:solidFill>
+          <a:ln w="12700">
             <a:solidFill>
-              <a:srgbClr val="F4F2EE"/>
+              <a:srgbClr val="F4F7F6"/>
             </a:solidFill>
             <a:prstDash val="solid"/>
           </a:ln>
@@ -7724,9 +7967,9 @@
                 <a:solidFill>
                   <a:srgbClr val="FFFFFF"/>
                 </a:solidFill>
-                <a:latin typeface="Courier New" pitchFamily="34" charset="0"/>
-                <a:ea typeface="Courier New" pitchFamily="34" charset="-122"/>
-                <a:cs typeface="Courier New" pitchFamily="34" charset="-120"/>
+                <a:latin typeface="Arial" pitchFamily="34" charset="0"/>
+                <a:ea typeface="Arial" pitchFamily="34" charset="-122"/>
+                <a:cs typeface="Arial" pitchFamily="34" charset="-120"/>
               </a:rPr>
               <a:t>02</a:t>
             </a:r>
@@ -7742,18 +7985,20 @@
         </p:nvSpPr>
         <p:spPr>
           <a:xfrm>
-            <a:off x="3013629" y="320040"/>
-            <a:ext cx="1141054" cy="502920"/>
-          </a:xfrm>
-          <a:prstGeom prst="rect">
-            <a:avLst/>
-          </a:prstGeom>
-          <a:solidFill>
-            <a:srgbClr val="1D1D1D"/>
-          </a:solidFill>
-          <a:ln w="25400">
+            <a:off x="3041061" y="320040"/>
+            <a:ext cx="1086190" cy="502920"/>
+          </a:xfrm>
+          <a:prstGeom prst="roundRect">
+            <a:avLst>
+              <a:gd name="adj" fmla="val 21818"/>
+            </a:avLst>
+          </a:prstGeom>
+          <a:solidFill>
+            <a:srgbClr val="0F9F6E"/>
+          </a:solidFill>
+          <a:ln w="12700">
             <a:solidFill>
-              <a:srgbClr val="F4F2EE"/>
+              <a:srgbClr val="F4F7F6"/>
             </a:solidFill>
             <a:prstDash val="solid"/>
           </a:ln>
@@ -7788,9 +8033,9 @@
                 <a:solidFill>
                   <a:srgbClr val="FFFFFF"/>
                 </a:solidFill>
-                <a:latin typeface="Courier New" pitchFamily="34" charset="0"/>
-                <a:ea typeface="Courier New" pitchFamily="34" charset="-122"/>
-                <a:cs typeface="Courier New" pitchFamily="34" charset="-120"/>
+                <a:latin typeface="Arial" pitchFamily="34" charset="0"/>
+                <a:ea typeface="Arial" pitchFamily="34" charset="-122"/>
+                <a:cs typeface="Arial" pitchFamily="34" charset="-120"/>
               </a:rPr>
               <a:t>03</a:t>
             </a:r>
@@ -7806,18 +8051,20 @@
         </p:nvSpPr>
         <p:spPr>
           <a:xfrm>
-            <a:off x="4154683" y="320040"/>
-            <a:ext cx="2738531" cy="502920"/>
-          </a:xfrm>
-          <a:prstGeom prst="rect">
-            <a:avLst/>
-          </a:prstGeom>
-          <a:solidFill>
-            <a:srgbClr val="E8201C"/>
-          </a:solidFill>
-          <a:ln w="25400">
+            <a:off x="4182115" y="320040"/>
+            <a:ext cx="2683667" cy="502920"/>
+          </a:xfrm>
+          <a:prstGeom prst="roundRect">
+            <a:avLst>
+              <a:gd name="adj" fmla="val 21818"/>
+            </a:avLst>
+          </a:prstGeom>
+          <a:solidFill>
+            <a:srgbClr val="17B57F"/>
+          </a:solidFill>
+          <a:ln w="12700">
             <a:solidFill>
-              <a:srgbClr val="F4F2EE"/>
+              <a:srgbClr val="F4F7F6"/>
             </a:solidFill>
             <a:prstDash val="solid"/>
           </a:ln>
@@ -7852,9 +8099,9 @@
                 <a:solidFill>
                   <a:srgbClr val="FFFFFF"/>
                 </a:solidFill>
-                <a:latin typeface="Courier New" pitchFamily="34" charset="0"/>
-                <a:ea typeface="Courier New" pitchFamily="34" charset="-122"/>
-                <a:cs typeface="Courier New" pitchFamily="34" charset="-120"/>
+                <a:latin typeface="Arial" pitchFamily="34" charset="0"/>
+                <a:ea typeface="Arial" pitchFamily="34" charset="-122"/>
+                <a:cs typeface="Arial" pitchFamily="34" charset="-120"/>
               </a:rPr>
               <a:t>04 // DEMO · 60S</a:t>
             </a:r>
@@ -7870,18 +8117,20 @@
         </p:nvSpPr>
         <p:spPr>
           <a:xfrm>
-            <a:off x="6893214" y="320040"/>
-            <a:ext cx="1141054" cy="502920"/>
-          </a:xfrm>
-          <a:prstGeom prst="rect">
-            <a:avLst/>
-          </a:prstGeom>
-          <a:solidFill>
-            <a:srgbClr val="1D1D1D"/>
-          </a:solidFill>
-          <a:ln w="25400">
+            <a:off x="6920646" y="320040"/>
+            <a:ext cx="1086190" cy="502920"/>
+          </a:xfrm>
+          <a:prstGeom prst="roundRect">
+            <a:avLst>
+              <a:gd name="adj" fmla="val 21818"/>
+            </a:avLst>
+          </a:prstGeom>
+          <a:solidFill>
+            <a:srgbClr val="0F9F6E"/>
+          </a:solidFill>
+          <a:ln w="12700">
             <a:solidFill>
-              <a:srgbClr val="F4F2EE"/>
+              <a:srgbClr val="F4F7F6"/>
             </a:solidFill>
             <a:prstDash val="solid"/>
           </a:ln>
@@ -7916,9 +8165,9 @@
                 <a:solidFill>
                   <a:srgbClr val="FFFFFF"/>
                 </a:solidFill>
-                <a:latin typeface="Courier New" pitchFamily="34" charset="0"/>
-                <a:ea typeface="Courier New" pitchFamily="34" charset="-122"/>
-                <a:cs typeface="Courier New" pitchFamily="34" charset="-120"/>
+                <a:latin typeface="Arial" pitchFamily="34" charset="0"/>
+                <a:ea typeface="Arial" pitchFamily="34" charset="-122"/>
+                <a:cs typeface="Arial" pitchFamily="34" charset="-120"/>
               </a:rPr>
               <a:t>05</a:t>
             </a:r>
@@ -7934,18 +8183,20 @@
         </p:nvSpPr>
         <p:spPr>
           <a:xfrm>
-            <a:off x="8034269" y="320040"/>
-            <a:ext cx="1141054" cy="502920"/>
-          </a:xfrm>
-          <a:prstGeom prst="rect">
-            <a:avLst/>
-          </a:prstGeom>
-          <a:solidFill>
-            <a:srgbClr val="3A3A3A"/>
-          </a:solidFill>
-          <a:ln w="25400">
+            <a:off x="8061701" y="320040"/>
+            <a:ext cx="1086190" cy="502920"/>
+          </a:xfrm>
+          <a:prstGeom prst="roundRect">
+            <a:avLst>
+              <a:gd name="adj" fmla="val 21818"/>
+            </a:avLst>
+          </a:prstGeom>
+          <a:solidFill>
+            <a:srgbClr val="0B8A5E"/>
+          </a:solidFill>
+          <a:ln w="12700">
             <a:solidFill>
-              <a:srgbClr val="F4F2EE"/>
+              <a:srgbClr val="F4F7F6"/>
             </a:solidFill>
             <a:prstDash val="solid"/>
           </a:ln>
@@ -7980,9 +8231,9 @@
                 <a:solidFill>
                   <a:srgbClr val="FFFFFF"/>
                 </a:solidFill>
-                <a:latin typeface="Courier New" pitchFamily="34" charset="0"/>
-                <a:ea typeface="Courier New" pitchFamily="34" charset="-122"/>
-                <a:cs typeface="Courier New" pitchFamily="34" charset="-120"/>
+                <a:latin typeface="Arial" pitchFamily="34" charset="0"/>
+                <a:ea typeface="Arial" pitchFamily="34" charset="-122"/>
+                <a:cs typeface="Arial" pitchFamily="34" charset="-120"/>
               </a:rPr>
               <a:t>06</a:t>
             </a:r>
@@ -7998,18 +8249,20 @@
         </p:nvSpPr>
         <p:spPr>
           <a:xfrm>
-            <a:off x="9175323" y="320040"/>
-            <a:ext cx="1141054" cy="502920"/>
-          </a:xfrm>
-          <a:prstGeom prst="rect">
-            <a:avLst/>
-          </a:prstGeom>
-          <a:solidFill>
-            <a:srgbClr val="111111"/>
-          </a:solidFill>
-          <a:ln w="25400">
+            <a:off x="9202755" y="320040"/>
+            <a:ext cx="1086190" cy="502920"/>
+          </a:xfrm>
+          <a:prstGeom prst="roundRect">
+            <a:avLst>
+              <a:gd name="adj" fmla="val 21818"/>
+            </a:avLst>
+          </a:prstGeom>
+          <a:solidFill>
+            <a:srgbClr val="0B3D2C"/>
+          </a:solidFill>
+          <a:ln w="12700">
             <a:solidFill>
-              <a:srgbClr val="F4F2EE"/>
+              <a:srgbClr val="F4F7F6"/>
             </a:solidFill>
             <a:prstDash val="solid"/>
           </a:ln>
@@ -8044,9 +8297,9 @@
                 <a:solidFill>
                   <a:srgbClr val="FFFFFF"/>
                 </a:solidFill>
-                <a:latin typeface="Courier New" pitchFamily="34" charset="0"/>
-                <a:ea typeface="Courier New" pitchFamily="34" charset="-122"/>
-                <a:cs typeface="Courier New" pitchFamily="34" charset="-120"/>
+                <a:latin typeface="Arial" pitchFamily="34" charset="0"/>
+                <a:ea typeface="Arial" pitchFamily="34" charset="-122"/>
+                <a:cs typeface="Arial" pitchFamily="34" charset="-120"/>
               </a:rPr>
               <a:t>07</a:t>
             </a:r>
@@ -8062,13 +8315,15 @@
         </p:nvSpPr>
         <p:spPr>
           <a:xfrm>
-            <a:off x="9202755" y="347472"/>
-            <a:ext cx="1086190" cy="448056"/>
-          </a:xfrm>
-          <a:prstGeom prst="rect">
-            <a:avLst/>
-          </a:prstGeom>
-          <a:ln w="31750">
+            <a:off x="9248475" y="365760"/>
+            <a:ext cx="994750" cy="411480"/>
+          </a:xfrm>
+          <a:prstGeom prst="roundRect">
+            <a:avLst>
+              <a:gd name="adj" fmla="val 22222"/>
+            </a:avLst>
+          </a:prstGeom>
+          <a:ln w="25400">
             <a:solidFill>
               <a:srgbClr val="FFFFFF"/>
             </a:solidFill>
@@ -8084,18 +8339,20 @@
         </p:nvSpPr>
         <p:spPr>
           <a:xfrm>
-            <a:off x="10316378" y="320040"/>
-            <a:ext cx="1141054" cy="502920"/>
-          </a:xfrm>
-          <a:prstGeom prst="rect">
-            <a:avLst/>
-          </a:prstGeom>
-          <a:solidFill>
-            <a:srgbClr val="FF2D2D"/>
-          </a:solidFill>
-          <a:ln w="25400">
+            <a:off x="10343810" y="320040"/>
+            <a:ext cx="1086190" cy="502920"/>
+          </a:xfrm>
+          <a:prstGeom prst="roundRect">
+            <a:avLst>
+              <a:gd name="adj" fmla="val 21818"/>
+            </a:avLst>
+          </a:prstGeom>
+          <a:solidFill>
+            <a:srgbClr val="22C58B"/>
+          </a:solidFill>
+          <a:ln w="12700">
             <a:solidFill>
-              <a:srgbClr val="F4F2EE"/>
+              <a:srgbClr val="F4F7F6"/>
             </a:solidFill>
             <a:prstDash val="solid"/>
           </a:ln>
@@ -8130,9 +8387,9 @@
                 <a:solidFill>
                   <a:srgbClr val="FFFFFF"/>
                 </a:solidFill>
-                <a:latin typeface="Courier New" pitchFamily="34" charset="0"/>
-                <a:ea typeface="Courier New" pitchFamily="34" charset="-122"/>
-                <a:cs typeface="Courier New" pitchFamily="34" charset="-120"/>
+                <a:latin typeface="Arial" pitchFamily="34" charset="0"/>
+                <a:ea typeface="Arial" pitchFamily="34" charset="-122"/>
+                <a:cs typeface="Arial" pitchFamily="34" charset="-120"/>
               </a:rPr>
               <a:t>08</a:t>
             </a:r>
@@ -8148,34 +8405,38 @@
         </p:nvSpPr>
         <p:spPr>
           <a:xfrm>
-            <a:off x="731520" y="1143000"/>
-            <a:ext cx="10058400" cy="320040"/>
-          </a:xfrm>
-          <a:prstGeom prst="rect">
-            <a:avLst/>
-          </a:prstGeom>
-          <a:noFill/>
-          <a:ln/>
-        </p:spPr>
-        <p:txBody>
-          <a:bodyPr wrap="square" rtlCol="0" anchor="ctr"/>
-          <a:lstStyle/>
-          <a:p>
-            <a:pPr indent="0" marL="0">
-              <a:buNone/>
-            </a:pPr>
-            <a:r>
-              <a:rPr lang="en-US" sz="1300" b="1" spc="200" kern="0" dirty="0">
-                <a:solidFill>
-                  <a:srgbClr val="E8201C"/>
-                </a:solidFill>
-                <a:latin typeface="Courier New" pitchFamily="34" charset="0"/>
-                <a:ea typeface="Courier New" pitchFamily="34" charset="-122"/>
-                <a:cs typeface="Courier New" pitchFamily="34" charset="-120"/>
+            <a:off x="731520" y="1097280"/>
+            <a:ext cx="5029200" cy="365760"/>
+          </a:xfrm>
+          <a:prstGeom prst="roundRect">
+            <a:avLst>
+              <a:gd name="adj" fmla="val 50000"/>
+            </a:avLst>
+          </a:prstGeom>
+          <a:solidFill>
+            <a:srgbClr val="E8F7F0"/>
+          </a:solidFill>
+          <a:ln/>
+        </p:spPr>
+        <p:txBody>
+          <a:bodyPr wrap="square" rtlCol="0" anchor="ctr"/>
+          <a:lstStyle/>
+          <a:p>
+            <a:pPr algn="ctr" indent="0" marL="0">
+              <a:buNone/>
+            </a:pPr>
+            <a:r>
+              <a:rPr lang="en-US" sz="1200" b="1" spc="200" kern="0" dirty="0">
+                <a:solidFill>
+                  <a:srgbClr val="0B8A5E"/>
+                </a:solidFill>
+                <a:latin typeface="Arial" pitchFamily="34" charset="0"/>
+                <a:ea typeface="Arial" pitchFamily="34" charset="-122"/>
+                <a:cs typeface="Arial" pitchFamily="34" charset="-120"/>
               </a:rPr>
               <a:t>07 // TEAM · 10 SEC</a:t>
             </a:r>
-            <a:endParaRPr lang="en-US" sz="1300" dirty="0"/>
+            <a:endParaRPr lang="en-US" sz="1200" dirty="0"/>
           </a:p>
         </p:txBody>
       </p:sp>
@@ -8206,11 +8467,11 @@
             <a:r>
               <a:rPr lang="en-US" sz="1000" dirty="0">
                 <a:solidFill>
-                  <a:srgbClr val="6B6B6B"/>
-                </a:solidFill>
-                <a:latin typeface="Courier New" pitchFamily="34" charset="0"/>
-                <a:ea typeface="Courier New" pitchFamily="34" charset="-122"/>
-                <a:cs typeface="Courier New" pitchFamily="34" charset="-120"/>
+                  <a:srgbClr val="5F6F68"/>
+                </a:solidFill>
+                <a:latin typeface="Arial" pitchFamily="34" charset="0"/>
+                <a:ea typeface="Arial" pitchFamily="34" charset="-122"/>
+                <a:cs typeface="Arial" pitchFamily="34" charset="-120"/>
               </a:rPr>
               <a:t>MISH SENIOR</a:t>
             </a:r>
@@ -8245,11 +8506,11 @@
             <a:r>
               <a:rPr lang="en-US" sz="1000" dirty="0">
                 <a:solidFill>
-                  <a:srgbClr val="6B6B6B"/>
-                </a:solidFill>
-                <a:latin typeface="Courier New" pitchFamily="34" charset="0"/>
-                <a:ea typeface="Courier New" pitchFamily="34" charset="-122"/>
-                <a:cs typeface="Courier New" pitchFamily="34" charset="-120"/>
+                  <a:srgbClr val="5F6F68"/>
+                </a:solidFill>
+                <a:latin typeface="Arial" pitchFamily="34" charset="0"/>
+                <a:ea typeface="Arial" pitchFamily="34" charset="-122"/>
+                <a:cs typeface="Arial" pitchFamily="34" charset="-120"/>
               </a:rPr>
               <a:t>07 / 08</a:t>
             </a:r>
@@ -8284,7 +8545,7 @@
             <a:r>
               <a:rPr lang="en-US" sz="4400" b="1" dirty="0">
                 <a:solidFill>
-                  <a:srgbClr val="0D0D0D"/>
+                  <a:srgbClr val="0F1F1A"/>
                 </a:solidFill>
                 <a:latin typeface="Arial" pitchFamily="34" charset="0"/>
                 <a:ea typeface="Arial" pitchFamily="34" charset="-122"/>
@@ -8311,9 +8572,9 @@
             <a:avLst/>
           </a:prstGeom>
           <a:noFill/>
-          <a:ln w="31750">
+          <a:ln w="19050">
             <a:solidFill>
-              <a:srgbClr val="0D0D0D"/>
+              <a:srgbClr val="CBD5D0"/>
             </a:solidFill>
             <a:prstDash val="solid"/>
           </a:ln>
@@ -8327,19 +8588,30 @@
         </p:nvSpPr>
         <p:spPr>
           <a:xfrm>
-            <a:off x="731520" y="3108960"/>
-            <a:ext cx="3383280" cy="0"/>
-          </a:xfrm>
-          <a:prstGeom prst="line">
-            <a:avLst/>
-          </a:prstGeom>
-          <a:noFill/>
-          <a:ln w="31750">
+            <a:off x="731520" y="3017520"/>
+            <a:ext cx="3383280" cy="2377440"/>
+          </a:xfrm>
+          <a:prstGeom prst="roundRect">
+            <a:avLst>
+              <a:gd name="adj" fmla="val 6923"/>
+            </a:avLst>
+          </a:prstGeom>
+          <a:solidFill>
+            <a:srgbClr val="FFFFFF"/>
+          </a:solidFill>
+          <a:ln w="12700">
             <a:solidFill>
-              <a:srgbClr val="0D0D0D"/>
+              <a:srgbClr val="E3E9E6"/>
             </a:solidFill>
             <a:prstDash val="solid"/>
           </a:ln>
+          <a:effectLst>
+            <a:outerShdw sx="100000" sy="100000" kx="0" ky="0" algn="bl" rotWithShape="0" blurRad="127000" dist="38100" dir="5400000">
+              <a:srgbClr val="103020">
+                <a:alpha val="12000"/>
+              </a:srgbClr>
+            </a:outerShdw>
+          </a:effectLst>
         </p:spPr>
       </p:sp>
       <p:sp>
@@ -8350,8 +8622,8 @@
         </p:nvSpPr>
         <p:spPr>
           <a:xfrm>
-            <a:off x="731520" y="3200400"/>
-            <a:ext cx="3383280" cy="274320"/>
+            <a:off x="1005840" y="3200400"/>
+            <a:ext cx="2834640" cy="274320"/>
           </a:xfrm>
           <a:prstGeom prst="rect">
             <a:avLst/>
@@ -8369,11 +8641,11 @@
             <a:r>
               <a:rPr lang="en-US" sz="1100" b="1" dirty="0">
                 <a:solidFill>
-                  <a:srgbClr val="E8201C"/>
-                </a:solidFill>
-                <a:latin typeface="Courier New" pitchFamily="34" charset="0"/>
-                <a:ea typeface="Courier New" pitchFamily="34" charset="-122"/>
-                <a:cs typeface="Courier New" pitchFamily="34" charset="-120"/>
+                  <a:srgbClr val="0F9F6E"/>
+                </a:solidFill>
+                <a:latin typeface="Arial" pitchFamily="34" charset="0"/>
+                <a:ea typeface="Arial" pitchFamily="34" charset="-122"/>
+                <a:cs typeface="Arial" pitchFamily="34" charset="-120"/>
               </a:rPr>
               <a:t>ROLE</a:t>
             </a:r>
@@ -8389,8 +8661,8 @@
         </p:nvSpPr>
         <p:spPr>
           <a:xfrm>
-            <a:off x="731520" y="3520440"/>
-            <a:ext cx="3383280" cy="548640"/>
+            <a:off x="1005840" y="3520440"/>
+            <a:ext cx="2834640" cy="548640"/>
           </a:xfrm>
           <a:prstGeom prst="rect">
             <a:avLst/>
@@ -8408,7 +8680,7 @@
             <a:r>
               <a:rPr lang="en-US" sz="2400" b="1" dirty="0">
                 <a:solidFill>
-                  <a:srgbClr val="E8201C"/>
+                  <a:srgbClr val="0F9F6E"/>
                 </a:solidFill>
                 <a:latin typeface="Arial" pitchFamily="34" charset="0"/>
                 <a:ea typeface="Arial" pitchFamily="34" charset="-122"/>
@@ -8428,8 +8700,8 @@
         </p:nvSpPr>
         <p:spPr>
           <a:xfrm>
-            <a:off x="731520" y="4114800"/>
-            <a:ext cx="3383280" cy="1097280"/>
+            <a:off x="1005840" y="4114800"/>
+            <a:ext cx="2834640" cy="1097280"/>
           </a:xfrm>
           <a:prstGeom prst="rect">
             <a:avLst/>
@@ -8467,19 +8739,30 @@
         </p:nvSpPr>
         <p:spPr>
           <a:xfrm>
-            <a:off x="4389120" y="3108960"/>
-            <a:ext cx="3383280" cy="0"/>
-          </a:xfrm>
-          <a:prstGeom prst="line">
-            <a:avLst/>
-          </a:prstGeom>
-          <a:noFill/>
-          <a:ln w="31750">
+            <a:off x="4389120" y="3017520"/>
+            <a:ext cx="3383280" cy="2377440"/>
+          </a:xfrm>
+          <a:prstGeom prst="roundRect">
+            <a:avLst>
+              <a:gd name="adj" fmla="val 6923"/>
+            </a:avLst>
+          </a:prstGeom>
+          <a:solidFill>
+            <a:srgbClr val="FFFFFF"/>
+          </a:solidFill>
+          <a:ln w="12700">
             <a:solidFill>
-              <a:srgbClr val="0D0D0D"/>
+              <a:srgbClr val="E3E9E6"/>
             </a:solidFill>
             <a:prstDash val="solid"/>
           </a:ln>
+          <a:effectLst>
+            <a:outerShdw sx="100000" sy="100000" kx="0" ky="0" algn="bl" rotWithShape="0" blurRad="127000" dist="38100" dir="5400000">
+              <a:srgbClr val="103020">
+                <a:alpha val="12000"/>
+              </a:srgbClr>
+            </a:outerShdw>
+          </a:effectLst>
         </p:spPr>
       </p:sp>
       <p:sp>
@@ -8490,8 +8773,8 @@
         </p:nvSpPr>
         <p:spPr>
           <a:xfrm>
-            <a:off x="4389120" y="3200400"/>
-            <a:ext cx="3383280" cy="274320"/>
+            <a:off x="4663440" y="3200400"/>
+            <a:ext cx="2834640" cy="274320"/>
           </a:xfrm>
           <a:prstGeom prst="rect">
             <a:avLst/>
@@ -8509,11 +8792,11 @@
             <a:r>
               <a:rPr lang="en-US" sz="1100" b="1" dirty="0">
                 <a:solidFill>
-                  <a:srgbClr val="E8201C"/>
-                </a:solidFill>
-                <a:latin typeface="Courier New" pitchFamily="34" charset="0"/>
-                <a:ea typeface="Courier New" pitchFamily="34" charset="-122"/>
-                <a:cs typeface="Courier New" pitchFamily="34" charset="-120"/>
+                  <a:srgbClr val="0F9F6E"/>
+                </a:solidFill>
+                <a:latin typeface="Arial" pitchFamily="34" charset="0"/>
+                <a:ea typeface="Arial" pitchFamily="34" charset="-122"/>
+                <a:cs typeface="Arial" pitchFamily="34" charset="-120"/>
               </a:rPr>
               <a:t>ROLE</a:t>
             </a:r>
@@ -8529,8 +8812,8 @@
         </p:nvSpPr>
         <p:spPr>
           <a:xfrm>
-            <a:off x="4389120" y="3520440"/>
-            <a:ext cx="3383280" cy="548640"/>
+            <a:off x="4663440" y="3520440"/>
+            <a:ext cx="2834640" cy="548640"/>
           </a:xfrm>
           <a:prstGeom prst="rect">
             <a:avLst/>
@@ -8548,7 +8831,7 @@
             <a:r>
               <a:rPr lang="en-US" sz="2400" b="1" dirty="0">
                 <a:solidFill>
-                  <a:srgbClr val="E8201C"/>
+                  <a:srgbClr val="0F9F6E"/>
                 </a:solidFill>
                 <a:latin typeface="Arial" pitchFamily="34" charset="0"/>
                 <a:ea typeface="Arial" pitchFamily="34" charset="-122"/>
@@ -8568,8 +8851,8 @@
         </p:nvSpPr>
         <p:spPr>
           <a:xfrm>
-            <a:off x="4389120" y="4114800"/>
-            <a:ext cx="3383280" cy="1097280"/>
+            <a:off x="4663440" y="4114800"/>
+            <a:ext cx="2834640" cy="1097280"/>
           </a:xfrm>
           <a:prstGeom prst="rect">
             <a:avLst/>
@@ -8607,19 +8890,30 @@
         </p:nvSpPr>
         <p:spPr>
           <a:xfrm>
-            <a:off x="8046720" y="3108960"/>
-            <a:ext cx="3383280" cy="0"/>
-          </a:xfrm>
-          <a:prstGeom prst="line">
-            <a:avLst/>
-          </a:prstGeom>
-          <a:noFill/>
-          <a:ln w="31750">
+            <a:off x="8046720" y="3017520"/>
+            <a:ext cx="3383280" cy="2377440"/>
+          </a:xfrm>
+          <a:prstGeom prst="roundRect">
+            <a:avLst>
+              <a:gd name="adj" fmla="val 6923"/>
+            </a:avLst>
+          </a:prstGeom>
+          <a:solidFill>
+            <a:srgbClr val="FFFFFF"/>
+          </a:solidFill>
+          <a:ln w="12700">
             <a:solidFill>
-              <a:srgbClr val="0D0D0D"/>
+              <a:srgbClr val="E3E9E6"/>
             </a:solidFill>
             <a:prstDash val="solid"/>
           </a:ln>
+          <a:effectLst>
+            <a:outerShdw sx="100000" sy="100000" kx="0" ky="0" algn="bl" rotWithShape="0" blurRad="127000" dist="38100" dir="5400000">
+              <a:srgbClr val="103020">
+                <a:alpha val="12000"/>
+              </a:srgbClr>
+            </a:outerShdw>
+          </a:effectLst>
         </p:spPr>
       </p:sp>
       <p:sp>
@@ -8630,8 +8924,8 @@
         </p:nvSpPr>
         <p:spPr>
           <a:xfrm>
-            <a:off x="8046720" y="3200400"/>
-            <a:ext cx="3383280" cy="274320"/>
+            <a:off x="8321040" y="3200400"/>
+            <a:ext cx="2834640" cy="274320"/>
           </a:xfrm>
           <a:prstGeom prst="rect">
             <a:avLst/>
@@ -8649,11 +8943,11 @@
             <a:r>
               <a:rPr lang="en-US" sz="1100" b="1" dirty="0">
                 <a:solidFill>
-                  <a:srgbClr val="E8201C"/>
-                </a:solidFill>
-                <a:latin typeface="Courier New" pitchFamily="34" charset="0"/>
-                <a:ea typeface="Courier New" pitchFamily="34" charset="-122"/>
-                <a:cs typeface="Courier New" pitchFamily="34" charset="-120"/>
+                  <a:srgbClr val="0F9F6E"/>
+                </a:solidFill>
+                <a:latin typeface="Arial" pitchFamily="34" charset="0"/>
+                <a:ea typeface="Arial" pitchFamily="34" charset="-122"/>
+                <a:cs typeface="Arial" pitchFamily="34" charset="-120"/>
               </a:rPr>
               <a:t>ROLE</a:t>
             </a:r>
@@ -8669,8 +8963,8 @@
         </p:nvSpPr>
         <p:spPr>
           <a:xfrm>
-            <a:off x="8046720" y="3520440"/>
-            <a:ext cx="3383280" cy="548640"/>
+            <a:off x="8321040" y="3520440"/>
+            <a:ext cx="2834640" cy="548640"/>
           </a:xfrm>
           <a:prstGeom prst="rect">
             <a:avLst/>
@@ -8688,7 +8982,7 @@
             <a:r>
               <a:rPr lang="en-US" sz="2400" b="1" dirty="0">
                 <a:solidFill>
-                  <a:srgbClr val="E8201C"/>
+                  <a:srgbClr val="0F9F6E"/>
                 </a:solidFill>
                 <a:latin typeface="Arial" pitchFamily="34" charset="0"/>
                 <a:ea typeface="Arial" pitchFamily="34" charset="-122"/>
@@ -8708,8 +9002,8 @@
         </p:nvSpPr>
         <p:spPr>
           <a:xfrm>
-            <a:off x="8046720" y="4114800"/>
-            <a:ext cx="3383280" cy="1097280"/>
+            <a:off x="8321040" y="4114800"/>
+            <a:ext cx="2834640" cy="1097280"/>
           </a:xfrm>
           <a:prstGeom prst="rect">
             <a:avLst/>
@@ -8753,7 +9047,7 @@
     <p:bg>
       <p:bgPr>
         <a:solidFill>
-          <a:srgbClr val="F4F2EE"/>
+          <a:srgbClr val="F4F7F6"/>
         </a:solidFill>
       </p:bgPr>
     </p:bg>
@@ -8779,18 +9073,20 @@
         </p:nvSpPr>
         <p:spPr>
           <a:xfrm>
-            <a:off x="731520" y="320040"/>
-            <a:ext cx="1141054" cy="502920"/>
-          </a:xfrm>
-          <a:prstGeom prst="rect">
-            <a:avLst/>
-          </a:prstGeom>
-          <a:solidFill>
-            <a:srgbClr val="111111"/>
-          </a:solidFill>
-          <a:ln w="25400">
+            <a:off x="758952" y="320040"/>
+            <a:ext cx="1086190" cy="502920"/>
+          </a:xfrm>
+          <a:prstGeom prst="roundRect">
+            <a:avLst>
+              <a:gd name="adj" fmla="val 21818"/>
+            </a:avLst>
+          </a:prstGeom>
+          <a:solidFill>
+            <a:srgbClr val="0B3D2C"/>
+          </a:solidFill>
+          <a:ln w="12700">
             <a:solidFill>
-              <a:srgbClr val="F4F2EE"/>
+              <a:srgbClr val="F4F7F6"/>
             </a:solidFill>
             <a:prstDash val="solid"/>
           </a:ln>
@@ -8825,9 +9121,9 @@
                 <a:solidFill>
                   <a:srgbClr val="FFFFFF"/>
                 </a:solidFill>
-                <a:latin typeface="Courier New" pitchFamily="34" charset="0"/>
-                <a:ea typeface="Courier New" pitchFamily="34" charset="-122"/>
-                <a:cs typeface="Courier New" pitchFamily="34" charset="-120"/>
+                <a:latin typeface="Arial" pitchFamily="34" charset="0"/>
+                <a:ea typeface="Arial" pitchFamily="34" charset="-122"/>
+                <a:cs typeface="Arial" pitchFamily="34" charset="-120"/>
               </a:rPr>
               <a:t>01</a:t>
             </a:r>
@@ -8843,18 +9139,20 @@
         </p:nvSpPr>
         <p:spPr>
           <a:xfrm>
-            <a:off x="1872574" y="320040"/>
-            <a:ext cx="1141054" cy="502920"/>
-          </a:xfrm>
-          <a:prstGeom prst="rect">
-            <a:avLst/>
-          </a:prstGeom>
-          <a:solidFill>
-            <a:srgbClr val="3A3A3A"/>
-          </a:solidFill>
-          <a:ln w="25400">
+            <a:off x="1900006" y="320040"/>
+            <a:ext cx="1086190" cy="502920"/>
+          </a:xfrm>
+          <a:prstGeom prst="roundRect">
+            <a:avLst>
+              <a:gd name="adj" fmla="val 21818"/>
+            </a:avLst>
+          </a:prstGeom>
+          <a:solidFill>
+            <a:srgbClr val="0B8A5E"/>
+          </a:solidFill>
+          <a:ln w="12700">
             <a:solidFill>
-              <a:srgbClr val="F4F2EE"/>
+              <a:srgbClr val="F4F7F6"/>
             </a:solidFill>
             <a:prstDash val="solid"/>
           </a:ln>
@@ -8889,9 +9187,9 @@
                 <a:solidFill>
                   <a:srgbClr val="FFFFFF"/>
                 </a:solidFill>
-                <a:latin typeface="Courier New" pitchFamily="34" charset="0"/>
-                <a:ea typeface="Courier New" pitchFamily="34" charset="-122"/>
-                <a:cs typeface="Courier New" pitchFamily="34" charset="-120"/>
+                <a:latin typeface="Arial" pitchFamily="34" charset="0"/>
+                <a:ea typeface="Arial" pitchFamily="34" charset="-122"/>
+                <a:cs typeface="Arial" pitchFamily="34" charset="-120"/>
               </a:rPr>
               <a:t>02</a:t>
             </a:r>
@@ -8907,18 +9205,20 @@
         </p:nvSpPr>
         <p:spPr>
           <a:xfrm>
-            <a:off x="3013629" y="320040"/>
-            <a:ext cx="1141054" cy="502920"/>
-          </a:xfrm>
-          <a:prstGeom prst="rect">
-            <a:avLst/>
-          </a:prstGeom>
-          <a:solidFill>
-            <a:srgbClr val="1D1D1D"/>
-          </a:solidFill>
-          <a:ln w="25400">
+            <a:off x="3041061" y="320040"/>
+            <a:ext cx="1086190" cy="502920"/>
+          </a:xfrm>
+          <a:prstGeom prst="roundRect">
+            <a:avLst>
+              <a:gd name="adj" fmla="val 21818"/>
+            </a:avLst>
+          </a:prstGeom>
+          <a:solidFill>
+            <a:srgbClr val="0F9F6E"/>
+          </a:solidFill>
+          <a:ln w="12700">
             <a:solidFill>
-              <a:srgbClr val="F4F2EE"/>
+              <a:srgbClr val="F4F7F6"/>
             </a:solidFill>
             <a:prstDash val="solid"/>
           </a:ln>
@@ -8953,9 +9253,9 @@
                 <a:solidFill>
                   <a:srgbClr val="FFFFFF"/>
                 </a:solidFill>
-                <a:latin typeface="Courier New" pitchFamily="34" charset="0"/>
-                <a:ea typeface="Courier New" pitchFamily="34" charset="-122"/>
-                <a:cs typeface="Courier New" pitchFamily="34" charset="-120"/>
+                <a:latin typeface="Arial" pitchFamily="34" charset="0"/>
+                <a:ea typeface="Arial" pitchFamily="34" charset="-122"/>
+                <a:cs typeface="Arial" pitchFamily="34" charset="-120"/>
               </a:rPr>
               <a:t>03</a:t>
             </a:r>
@@ -8971,18 +9271,20 @@
         </p:nvSpPr>
         <p:spPr>
           <a:xfrm>
-            <a:off x="4154683" y="320040"/>
-            <a:ext cx="2738531" cy="502920"/>
-          </a:xfrm>
-          <a:prstGeom prst="rect">
-            <a:avLst/>
-          </a:prstGeom>
-          <a:solidFill>
-            <a:srgbClr val="E8201C"/>
-          </a:solidFill>
-          <a:ln w="25400">
+            <a:off x="4182115" y="320040"/>
+            <a:ext cx="2683667" cy="502920"/>
+          </a:xfrm>
+          <a:prstGeom prst="roundRect">
+            <a:avLst>
+              <a:gd name="adj" fmla="val 21818"/>
+            </a:avLst>
+          </a:prstGeom>
+          <a:solidFill>
+            <a:srgbClr val="17B57F"/>
+          </a:solidFill>
+          <a:ln w="12700">
             <a:solidFill>
-              <a:srgbClr val="F4F2EE"/>
+              <a:srgbClr val="F4F7F6"/>
             </a:solidFill>
             <a:prstDash val="solid"/>
           </a:ln>
@@ -9017,9 +9319,9 @@
                 <a:solidFill>
                   <a:srgbClr val="FFFFFF"/>
                 </a:solidFill>
-                <a:latin typeface="Courier New" pitchFamily="34" charset="0"/>
-                <a:ea typeface="Courier New" pitchFamily="34" charset="-122"/>
-                <a:cs typeface="Courier New" pitchFamily="34" charset="-120"/>
+                <a:latin typeface="Arial" pitchFamily="34" charset="0"/>
+                <a:ea typeface="Arial" pitchFamily="34" charset="-122"/>
+                <a:cs typeface="Arial" pitchFamily="34" charset="-120"/>
               </a:rPr>
               <a:t>04 // DEMO · 60S</a:t>
             </a:r>
@@ -9035,18 +9337,20 @@
         </p:nvSpPr>
         <p:spPr>
           <a:xfrm>
-            <a:off x="6893214" y="320040"/>
-            <a:ext cx="1141054" cy="502920"/>
-          </a:xfrm>
-          <a:prstGeom prst="rect">
-            <a:avLst/>
-          </a:prstGeom>
-          <a:solidFill>
-            <a:srgbClr val="1D1D1D"/>
-          </a:solidFill>
-          <a:ln w="25400">
+            <a:off x="6920646" y="320040"/>
+            <a:ext cx="1086190" cy="502920"/>
+          </a:xfrm>
+          <a:prstGeom prst="roundRect">
+            <a:avLst>
+              <a:gd name="adj" fmla="val 21818"/>
+            </a:avLst>
+          </a:prstGeom>
+          <a:solidFill>
+            <a:srgbClr val="0F9F6E"/>
+          </a:solidFill>
+          <a:ln w="12700">
             <a:solidFill>
-              <a:srgbClr val="F4F2EE"/>
+              <a:srgbClr val="F4F7F6"/>
             </a:solidFill>
             <a:prstDash val="solid"/>
           </a:ln>
@@ -9081,9 +9385,9 @@
                 <a:solidFill>
                   <a:srgbClr val="FFFFFF"/>
                 </a:solidFill>
-                <a:latin typeface="Courier New" pitchFamily="34" charset="0"/>
-                <a:ea typeface="Courier New" pitchFamily="34" charset="-122"/>
-                <a:cs typeface="Courier New" pitchFamily="34" charset="-120"/>
+                <a:latin typeface="Arial" pitchFamily="34" charset="0"/>
+                <a:ea typeface="Arial" pitchFamily="34" charset="-122"/>
+                <a:cs typeface="Arial" pitchFamily="34" charset="-120"/>
               </a:rPr>
               <a:t>05</a:t>
             </a:r>
@@ -9099,18 +9403,20 @@
         </p:nvSpPr>
         <p:spPr>
           <a:xfrm>
-            <a:off x="8034269" y="320040"/>
-            <a:ext cx="1141054" cy="502920"/>
-          </a:xfrm>
-          <a:prstGeom prst="rect">
-            <a:avLst/>
-          </a:prstGeom>
-          <a:solidFill>
-            <a:srgbClr val="3A3A3A"/>
-          </a:solidFill>
-          <a:ln w="25400">
+            <a:off x="8061701" y="320040"/>
+            <a:ext cx="1086190" cy="502920"/>
+          </a:xfrm>
+          <a:prstGeom prst="roundRect">
+            <a:avLst>
+              <a:gd name="adj" fmla="val 21818"/>
+            </a:avLst>
+          </a:prstGeom>
+          <a:solidFill>
+            <a:srgbClr val="0B8A5E"/>
+          </a:solidFill>
+          <a:ln w="12700">
             <a:solidFill>
-              <a:srgbClr val="F4F2EE"/>
+              <a:srgbClr val="F4F7F6"/>
             </a:solidFill>
             <a:prstDash val="solid"/>
           </a:ln>
@@ -9145,9 +9451,9 @@
                 <a:solidFill>
                   <a:srgbClr val="FFFFFF"/>
                 </a:solidFill>
-                <a:latin typeface="Courier New" pitchFamily="34" charset="0"/>
-                <a:ea typeface="Courier New" pitchFamily="34" charset="-122"/>
-                <a:cs typeface="Courier New" pitchFamily="34" charset="-120"/>
+                <a:latin typeface="Arial" pitchFamily="34" charset="0"/>
+                <a:ea typeface="Arial" pitchFamily="34" charset="-122"/>
+                <a:cs typeface="Arial" pitchFamily="34" charset="-120"/>
               </a:rPr>
               <a:t>06</a:t>
             </a:r>
@@ -9163,18 +9469,20 @@
         </p:nvSpPr>
         <p:spPr>
           <a:xfrm>
-            <a:off x="9175323" y="320040"/>
-            <a:ext cx="1141054" cy="502920"/>
-          </a:xfrm>
-          <a:prstGeom prst="rect">
-            <a:avLst/>
-          </a:prstGeom>
-          <a:solidFill>
-            <a:srgbClr val="111111"/>
-          </a:solidFill>
-          <a:ln w="25400">
+            <a:off x="9202755" y="320040"/>
+            <a:ext cx="1086190" cy="502920"/>
+          </a:xfrm>
+          <a:prstGeom prst="roundRect">
+            <a:avLst>
+              <a:gd name="adj" fmla="val 21818"/>
+            </a:avLst>
+          </a:prstGeom>
+          <a:solidFill>
+            <a:srgbClr val="0B3D2C"/>
+          </a:solidFill>
+          <a:ln w="12700">
             <a:solidFill>
-              <a:srgbClr val="F4F2EE"/>
+              <a:srgbClr val="F4F7F6"/>
             </a:solidFill>
             <a:prstDash val="solid"/>
           </a:ln>
@@ -9209,9 +9517,9 @@
                 <a:solidFill>
                   <a:srgbClr val="FFFFFF"/>
                 </a:solidFill>
-                <a:latin typeface="Courier New" pitchFamily="34" charset="0"/>
-                <a:ea typeface="Courier New" pitchFamily="34" charset="-122"/>
-                <a:cs typeface="Courier New" pitchFamily="34" charset="-120"/>
+                <a:latin typeface="Arial" pitchFamily="34" charset="0"/>
+                <a:ea typeface="Arial" pitchFamily="34" charset="-122"/>
+                <a:cs typeface="Arial" pitchFamily="34" charset="-120"/>
               </a:rPr>
               <a:t>07</a:t>
             </a:r>
@@ -9227,18 +9535,20 @@
         </p:nvSpPr>
         <p:spPr>
           <a:xfrm>
-            <a:off x="10316378" y="320040"/>
-            <a:ext cx="1141054" cy="502920"/>
-          </a:xfrm>
-          <a:prstGeom prst="rect">
-            <a:avLst/>
-          </a:prstGeom>
-          <a:solidFill>
-            <a:srgbClr val="FF2D2D"/>
-          </a:solidFill>
-          <a:ln w="25400">
+            <a:off x="10343810" y="320040"/>
+            <a:ext cx="1086190" cy="502920"/>
+          </a:xfrm>
+          <a:prstGeom prst="roundRect">
+            <a:avLst>
+              <a:gd name="adj" fmla="val 21818"/>
+            </a:avLst>
+          </a:prstGeom>
+          <a:solidFill>
+            <a:srgbClr val="22C58B"/>
+          </a:solidFill>
+          <a:ln w="12700">
             <a:solidFill>
-              <a:srgbClr val="F4F2EE"/>
+              <a:srgbClr val="F4F7F6"/>
             </a:solidFill>
             <a:prstDash val="solid"/>
           </a:ln>
@@ -9273,9 +9583,9 @@
                 <a:solidFill>
                   <a:srgbClr val="FFFFFF"/>
                 </a:solidFill>
-                <a:latin typeface="Courier New" pitchFamily="34" charset="0"/>
-                <a:ea typeface="Courier New" pitchFamily="34" charset="-122"/>
-                <a:cs typeface="Courier New" pitchFamily="34" charset="-120"/>
+                <a:latin typeface="Arial" pitchFamily="34" charset="0"/>
+                <a:ea typeface="Arial" pitchFamily="34" charset="-122"/>
+                <a:cs typeface="Arial" pitchFamily="34" charset="-120"/>
               </a:rPr>
               <a:t>08</a:t>
             </a:r>
@@ -9291,13 +9601,15 @@
         </p:nvSpPr>
         <p:spPr>
           <a:xfrm>
-            <a:off x="10343810" y="347472"/>
-            <a:ext cx="1086190" cy="448056"/>
-          </a:xfrm>
-          <a:prstGeom prst="rect">
-            <a:avLst/>
-          </a:prstGeom>
-          <a:ln w="31750">
+            <a:off x="10389530" y="365760"/>
+            <a:ext cx="994750" cy="411480"/>
+          </a:xfrm>
+          <a:prstGeom prst="roundRect">
+            <a:avLst>
+              <a:gd name="adj" fmla="val 22222"/>
+            </a:avLst>
+          </a:prstGeom>
+          <a:ln w="25400">
             <a:solidFill>
               <a:srgbClr val="FFFFFF"/>
             </a:solidFill>
@@ -9313,34 +9625,38 @@
         </p:nvSpPr>
         <p:spPr>
           <a:xfrm>
-            <a:off x="731520" y="1143000"/>
-            <a:ext cx="10058400" cy="320040"/>
-          </a:xfrm>
-          <a:prstGeom prst="rect">
-            <a:avLst/>
-          </a:prstGeom>
-          <a:noFill/>
-          <a:ln/>
-        </p:spPr>
-        <p:txBody>
-          <a:bodyPr wrap="square" rtlCol="0" anchor="ctr"/>
-          <a:lstStyle/>
-          <a:p>
-            <a:pPr indent="0" marL="0">
-              <a:buNone/>
-            </a:pPr>
-            <a:r>
-              <a:rPr lang="en-US" sz="1300" b="1" spc="200" kern="0" dirty="0">
-                <a:solidFill>
-                  <a:srgbClr val="E8201C"/>
-                </a:solidFill>
-                <a:latin typeface="Courier New" pitchFamily="34" charset="0"/>
-                <a:ea typeface="Courier New" pitchFamily="34" charset="-122"/>
-                <a:cs typeface="Courier New" pitchFamily="34" charset="-120"/>
+            <a:off x="731520" y="1097280"/>
+            <a:ext cx="5029200" cy="365760"/>
+          </a:xfrm>
+          <a:prstGeom prst="roundRect">
+            <a:avLst>
+              <a:gd name="adj" fmla="val 50000"/>
+            </a:avLst>
+          </a:prstGeom>
+          <a:solidFill>
+            <a:srgbClr val="E8F7F0"/>
+          </a:solidFill>
+          <a:ln/>
+        </p:spPr>
+        <p:txBody>
+          <a:bodyPr wrap="square" rtlCol="0" anchor="ctr"/>
+          <a:lstStyle/>
+          <a:p>
+            <a:pPr algn="ctr" indent="0" marL="0">
+              <a:buNone/>
+            </a:pPr>
+            <a:r>
+              <a:rPr lang="en-US" sz="1200" b="1" spc="200" kern="0" dirty="0">
+                <a:solidFill>
+                  <a:srgbClr val="0B8A5E"/>
+                </a:solidFill>
+                <a:latin typeface="Arial" pitchFamily="34" charset="0"/>
+                <a:ea typeface="Arial" pitchFamily="34" charset="-122"/>
+                <a:cs typeface="Arial" pitchFamily="34" charset="-120"/>
               </a:rPr>
               <a:t>08 // THE ASK · 15 SEC</a:t>
             </a:r>
-            <a:endParaRPr lang="en-US" sz="1300" dirty="0"/>
+            <a:endParaRPr lang="en-US" sz="1200" dirty="0"/>
           </a:p>
         </p:txBody>
       </p:sp>
@@ -9371,11 +9687,11 @@
             <a:r>
               <a:rPr lang="en-US" sz="1000" dirty="0">
                 <a:solidFill>
-                  <a:srgbClr val="6B6B6B"/>
-                </a:solidFill>
-                <a:latin typeface="Courier New" pitchFamily="34" charset="0"/>
-                <a:ea typeface="Courier New" pitchFamily="34" charset="-122"/>
-                <a:cs typeface="Courier New" pitchFamily="34" charset="-120"/>
+                  <a:srgbClr val="5F6F68"/>
+                </a:solidFill>
+                <a:latin typeface="Arial" pitchFamily="34" charset="0"/>
+                <a:ea typeface="Arial" pitchFamily="34" charset="-122"/>
+                <a:cs typeface="Arial" pitchFamily="34" charset="-120"/>
               </a:rPr>
               <a:t>MISH SENIOR</a:t>
             </a:r>
@@ -9410,11 +9726,11 @@
             <a:r>
               <a:rPr lang="en-US" sz="1000" dirty="0">
                 <a:solidFill>
-                  <a:srgbClr val="6B6B6B"/>
-                </a:solidFill>
-                <a:latin typeface="Courier New" pitchFamily="34" charset="0"/>
-                <a:ea typeface="Courier New" pitchFamily="34" charset="-122"/>
-                <a:cs typeface="Courier New" pitchFamily="34" charset="-120"/>
+                  <a:srgbClr val="5F6F68"/>
+                </a:solidFill>
+                <a:latin typeface="Arial" pitchFamily="34" charset="0"/>
+                <a:ea typeface="Arial" pitchFamily="34" charset="-122"/>
+                <a:cs typeface="Arial" pitchFamily="34" charset="-120"/>
               </a:rPr>
               <a:t>08 / 08</a:t>
             </a:r>
@@ -9449,7 +9765,7 @@
             <a:r>
               <a:rPr lang="en-US" sz="4400" b="1" dirty="0">
                 <a:solidFill>
-                  <a:srgbClr val="0D0D0D"/>
+                  <a:srgbClr val="0F1F1A"/>
                 </a:solidFill>
                 <a:latin typeface="Arial" pitchFamily="34" charset="0"/>
                 <a:ea typeface="Arial" pitchFamily="34" charset="-122"/>
@@ -9476,9 +9792,9 @@
             <a:avLst/>
           </a:prstGeom>
           <a:noFill/>
-          <a:ln w="31750">
+          <a:ln w="19050">
             <a:solidFill>
-              <a:srgbClr val="0D0D0D"/>
+              <a:srgbClr val="CBD5D0"/>
             </a:solidFill>
             <a:prstDash val="solid"/>
           </a:ln>
@@ -9493,17 +9809,17 @@
         <p:spPr>
           <a:xfrm>
             <a:off x="777240" y="3172968"/>
-            <a:ext cx="182880" cy="182880"/>
-          </a:xfrm>
-          <a:prstGeom prst="rect">
-            <a:avLst/>
-          </a:prstGeom>
-          <a:solidFill>
-            <a:srgbClr val="E8201C"/>
+            <a:ext cx="201168" cy="201168"/>
+          </a:xfrm>
+          <a:prstGeom prst="ellipse">
+            <a:avLst/>
+          </a:prstGeom>
+          <a:solidFill>
+            <a:srgbClr val="0F9F6E"/>
           </a:solidFill>
           <a:ln w="12700">
             <a:solidFill>
-              <a:srgbClr val="E8201C"/>
+              <a:srgbClr val="0F9F6E"/>
             </a:solidFill>
             <a:prstDash val="solid"/>
           </a:ln>
@@ -9536,7 +9852,7 @@
             <a:r>
               <a:rPr lang="en-US" sz="2600" dirty="0">
                 <a:solidFill>
-                  <a:srgbClr val="0D0D0D"/>
+                  <a:srgbClr val="0F1F1A"/>
                 </a:solidFill>
                 <a:latin typeface="Arial" pitchFamily="34" charset="0"/>
                 <a:ea typeface="Arial" pitchFamily="34" charset="-122"/>
@@ -9557,17 +9873,17 @@
         <p:spPr>
           <a:xfrm>
             <a:off x="777240" y="4041648"/>
-            <a:ext cx="182880" cy="182880"/>
-          </a:xfrm>
-          <a:prstGeom prst="rect">
-            <a:avLst/>
-          </a:prstGeom>
-          <a:solidFill>
-            <a:srgbClr val="E8201C"/>
+            <a:ext cx="201168" cy="201168"/>
+          </a:xfrm>
+          <a:prstGeom prst="ellipse">
+            <a:avLst/>
+          </a:prstGeom>
+          <a:solidFill>
+            <a:srgbClr val="0F9F6E"/>
           </a:solidFill>
           <a:ln w="12700">
             <a:solidFill>
-              <a:srgbClr val="E8201C"/>
+              <a:srgbClr val="0F9F6E"/>
             </a:solidFill>
             <a:prstDash val="solid"/>
           </a:ln>
@@ -9600,7 +9916,7 @@
             <a:r>
               <a:rPr lang="en-US" sz="2600" dirty="0">
                 <a:solidFill>
-                  <a:srgbClr val="0D0D0D"/>
+                  <a:srgbClr val="0F1F1A"/>
                 </a:solidFill>
                 <a:latin typeface="Arial" pitchFamily="34" charset="0"/>
                 <a:ea typeface="Arial" pitchFamily="34" charset="-122"/>
@@ -9639,7 +9955,7 @@
             <a:r>
               <a:rPr lang="en-US" sz="3600" b="1" dirty="0">
                 <a:solidFill>
-                  <a:srgbClr val="0D0D0D"/>
+                  <a:srgbClr val="0F1F1A"/>
                 </a:solidFill>
                 <a:latin typeface="Arial" pitchFamily="34" charset="0"/>
                 <a:ea typeface="Arial" pitchFamily="34" charset="-122"/>
@@ -9653,7 +9969,7 @@
             <a:r>
               <a:rPr lang="en-US" sz="3600" b="1" dirty="0">
                 <a:solidFill>
-                  <a:srgbClr val="E8201C"/>
+                  <a:srgbClr val="0F9F6E"/>
                 </a:solidFill>
                 <a:latin typeface="Arial" pitchFamily="34" charset="0"/>
                 <a:ea typeface="Arial" pitchFamily="34" charset="-122"/>

--- a/presentation/Mish-Senior-Pitch.pptx
+++ b/presentation/Mish-Senior-Pitch.pptx
@@ -1500,565 +1500,13 @@
       </p:grpSpPr>
       <p:sp>
         <p:nvSpPr>
-          <p:cNvPr id="2" name="Shape 0"/>
-          <p:cNvSpPr/>
-          <p:nvPr/>
-        </p:nvSpPr>
-        <p:spPr>
-          <a:xfrm>
-            <a:off x="758952" y="320040"/>
-            <a:ext cx="1086190" cy="502920"/>
-          </a:xfrm>
-          <a:prstGeom prst="roundRect">
-            <a:avLst>
-              <a:gd name="adj" fmla="val 21818"/>
-            </a:avLst>
-          </a:prstGeom>
-          <a:solidFill>
-            <a:srgbClr val="0B3D2C"/>
-          </a:solidFill>
-          <a:ln w="12700">
-            <a:solidFill>
-              <a:srgbClr val="F4F7F6"/>
-            </a:solidFill>
-            <a:prstDash val="solid"/>
-          </a:ln>
-        </p:spPr>
-      </p:sp>
-      <p:sp>
-        <p:nvSpPr>
-          <p:cNvPr id="3" name="Text 1"/>
-          <p:cNvSpPr/>
-          <p:nvPr/>
-        </p:nvSpPr>
-        <p:spPr>
-          <a:xfrm>
-            <a:off x="731520" y="320040"/>
-            <a:ext cx="1141054" cy="502920"/>
-          </a:xfrm>
-          <a:prstGeom prst="rect">
-            <a:avLst/>
-          </a:prstGeom>
-          <a:noFill/>
-          <a:ln/>
-        </p:spPr>
-        <p:txBody>
-          <a:bodyPr wrap="square" rtlCol="0" anchor="ctr"/>
-          <a:lstStyle/>
-          <a:p>
-            <a:pPr algn="ctr" indent="0" marL="0">
-              <a:buNone/>
-            </a:pPr>
-            <a:r>
-              <a:rPr lang="en-US" sz="1200" b="1" dirty="0">
-                <a:solidFill>
-                  <a:srgbClr val="FFFFFF"/>
-                </a:solidFill>
-                <a:latin typeface="Arial" pitchFamily="34" charset="0"/>
-                <a:ea typeface="Arial" pitchFamily="34" charset="-122"/>
-                <a:cs typeface="Arial" pitchFamily="34" charset="-120"/>
-              </a:rPr>
-              <a:t>01</a:t>
-            </a:r>
-            <a:endParaRPr lang="en-US" sz="1200" dirty="0"/>
-          </a:p>
-        </p:txBody>
-      </p:sp>
-      <p:sp>
-        <p:nvSpPr>
-          <p:cNvPr id="4" name="Shape 2"/>
-          <p:cNvSpPr/>
-          <p:nvPr/>
-        </p:nvSpPr>
-        <p:spPr>
-          <a:xfrm>
-            <a:off x="804672" y="365760"/>
-            <a:ext cx="994750" cy="411480"/>
-          </a:xfrm>
-          <a:prstGeom prst="roundRect">
-            <a:avLst>
-              <a:gd name="adj" fmla="val 22222"/>
-            </a:avLst>
-          </a:prstGeom>
-          <a:ln w="25400">
-            <a:solidFill>
-              <a:srgbClr val="FFFFFF"/>
-            </a:solidFill>
-            <a:prstDash val="solid"/>
-          </a:ln>
-        </p:spPr>
-      </p:sp>
-      <p:sp>
-        <p:nvSpPr>
-          <p:cNvPr id="5" name="Shape 3"/>
-          <p:cNvSpPr/>
-          <p:nvPr/>
-        </p:nvSpPr>
-        <p:spPr>
-          <a:xfrm>
-            <a:off x="1900006" y="320040"/>
-            <a:ext cx="1086190" cy="502920"/>
-          </a:xfrm>
-          <a:prstGeom prst="roundRect">
-            <a:avLst>
-              <a:gd name="adj" fmla="val 21818"/>
-            </a:avLst>
-          </a:prstGeom>
-          <a:solidFill>
-            <a:srgbClr val="0B8A5E"/>
-          </a:solidFill>
-          <a:ln w="12700">
-            <a:solidFill>
-              <a:srgbClr val="F4F7F6"/>
-            </a:solidFill>
-            <a:prstDash val="solid"/>
-          </a:ln>
-        </p:spPr>
-      </p:sp>
-      <p:sp>
-        <p:nvSpPr>
-          <p:cNvPr id="6" name="Text 4"/>
-          <p:cNvSpPr/>
-          <p:nvPr/>
-        </p:nvSpPr>
-        <p:spPr>
-          <a:xfrm>
-            <a:off x="1872574" y="320040"/>
-            <a:ext cx="1141054" cy="502920"/>
-          </a:xfrm>
-          <a:prstGeom prst="rect">
-            <a:avLst/>
-          </a:prstGeom>
-          <a:noFill/>
-          <a:ln/>
-        </p:spPr>
-        <p:txBody>
-          <a:bodyPr wrap="square" rtlCol="0" anchor="ctr"/>
-          <a:lstStyle/>
-          <a:p>
-            <a:pPr algn="ctr" indent="0" marL="0">
-              <a:buNone/>
-            </a:pPr>
-            <a:r>
-              <a:rPr lang="en-US" sz="1200" b="1" dirty="0">
-                <a:solidFill>
-                  <a:srgbClr val="FFFFFF"/>
-                </a:solidFill>
-                <a:latin typeface="Arial" pitchFamily="34" charset="0"/>
-                <a:ea typeface="Arial" pitchFamily="34" charset="-122"/>
-                <a:cs typeface="Arial" pitchFamily="34" charset="-120"/>
-              </a:rPr>
-              <a:t>02</a:t>
-            </a:r>
-            <a:endParaRPr lang="en-US" sz="1200" dirty="0"/>
-          </a:p>
-        </p:txBody>
-      </p:sp>
-      <p:sp>
-        <p:nvSpPr>
-          <p:cNvPr id="7" name="Shape 5"/>
-          <p:cNvSpPr/>
-          <p:nvPr/>
-        </p:nvSpPr>
-        <p:spPr>
-          <a:xfrm>
-            <a:off x="3041061" y="320040"/>
-            <a:ext cx="1086190" cy="502920"/>
-          </a:xfrm>
-          <a:prstGeom prst="roundRect">
-            <a:avLst>
-              <a:gd name="adj" fmla="val 21818"/>
-            </a:avLst>
-          </a:prstGeom>
-          <a:solidFill>
-            <a:srgbClr val="0F9F6E"/>
-          </a:solidFill>
-          <a:ln w="12700">
-            <a:solidFill>
-              <a:srgbClr val="F4F7F6"/>
-            </a:solidFill>
-            <a:prstDash val="solid"/>
-          </a:ln>
-        </p:spPr>
-      </p:sp>
-      <p:sp>
-        <p:nvSpPr>
-          <p:cNvPr id="8" name="Text 6"/>
-          <p:cNvSpPr/>
-          <p:nvPr/>
-        </p:nvSpPr>
-        <p:spPr>
-          <a:xfrm>
-            <a:off x="3013629" y="320040"/>
-            <a:ext cx="1141054" cy="502920"/>
-          </a:xfrm>
-          <a:prstGeom prst="rect">
-            <a:avLst/>
-          </a:prstGeom>
-          <a:noFill/>
-          <a:ln/>
-        </p:spPr>
-        <p:txBody>
-          <a:bodyPr wrap="square" rtlCol="0" anchor="ctr"/>
-          <a:lstStyle/>
-          <a:p>
-            <a:pPr algn="ctr" indent="0" marL="0">
-              <a:buNone/>
-            </a:pPr>
-            <a:r>
-              <a:rPr lang="en-US" sz="1200" b="1" dirty="0">
-                <a:solidFill>
-                  <a:srgbClr val="FFFFFF"/>
-                </a:solidFill>
-                <a:latin typeface="Arial" pitchFamily="34" charset="0"/>
-                <a:ea typeface="Arial" pitchFamily="34" charset="-122"/>
-                <a:cs typeface="Arial" pitchFamily="34" charset="-120"/>
-              </a:rPr>
-              <a:t>03</a:t>
-            </a:r>
-            <a:endParaRPr lang="en-US" sz="1200" dirty="0"/>
-          </a:p>
-        </p:txBody>
-      </p:sp>
-      <p:sp>
-        <p:nvSpPr>
-          <p:cNvPr id="9" name="Shape 7"/>
-          <p:cNvSpPr/>
-          <p:nvPr/>
-        </p:nvSpPr>
-        <p:spPr>
-          <a:xfrm>
-            <a:off x="4182115" y="320040"/>
-            <a:ext cx="2683667" cy="502920"/>
-          </a:xfrm>
-          <a:prstGeom prst="roundRect">
-            <a:avLst>
-              <a:gd name="adj" fmla="val 21818"/>
-            </a:avLst>
-          </a:prstGeom>
-          <a:solidFill>
-            <a:srgbClr val="17B57F"/>
-          </a:solidFill>
-          <a:ln w="12700">
-            <a:solidFill>
-              <a:srgbClr val="F4F7F6"/>
-            </a:solidFill>
-            <a:prstDash val="solid"/>
-          </a:ln>
-        </p:spPr>
-      </p:sp>
-      <p:sp>
-        <p:nvSpPr>
-          <p:cNvPr id="10" name="Text 8"/>
-          <p:cNvSpPr/>
-          <p:nvPr/>
-        </p:nvSpPr>
-        <p:spPr>
-          <a:xfrm>
-            <a:off x="4154683" y="320040"/>
-            <a:ext cx="2738531" cy="502920"/>
-          </a:xfrm>
-          <a:prstGeom prst="rect">
-            <a:avLst/>
-          </a:prstGeom>
-          <a:noFill/>
-          <a:ln/>
-        </p:spPr>
-        <p:txBody>
-          <a:bodyPr wrap="square" rtlCol="0" anchor="ctr"/>
-          <a:lstStyle/>
-          <a:p>
-            <a:pPr algn="ctr" indent="0" marL="0">
-              <a:buNone/>
-            </a:pPr>
-            <a:r>
-              <a:rPr lang="en-US" sz="1200" b="1" dirty="0">
-                <a:solidFill>
-                  <a:srgbClr val="FFFFFF"/>
-                </a:solidFill>
-                <a:latin typeface="Arial" pitchFamily="34" charset="0"/>
-                <a:ea typeface="Arial" pitchFamily="34" charset="-122"/>
-                <a:cs typeface="Arial" pitchFamily="34" charset="-120"/>
-              </a:rPr>
-              <a:t>04 // DEMO · 60S</a:t>
-            </a:r>
-            <a:endParaRPr lang="en-US" sz="1200" dirty="0"/>
-          </a:p>
-        </p:txBody>
-      </p:sp>
-      <p:sp>
-        <p:nvSpPr>
-          <p:cNvPr id="11" name="Shape 9"/>
-          <p:cNvSpPr/>
-          <p:nvPr/>
-        </p:nvSpPr>
-        <p:spPr>
-          <a:xfrm>
-            <a:off x="6920646" y="320040"/>
-            <a:ext cx="1086190" cy="502920"/>
-          </a:xfrm>
-          <a:prstGeom prst="roundRect">
-            <a:avLst>
-              <a:gd name="adj" fmla="val 21818"/>
-            </a:avLst>
-          </a:prstGeom>
-          <a:solidFill>
-            <a:srgbClr val="0F9F6E"/>
-          </a:solidFill>
-          <a:ln w="12700">
-            <a:solidFill>
-              <a:srgbClr val="F4F7F6"/>
-            </a:solidFill>
-            <a:prstDash val="solid"/>
-          </a:ln>
-        </p:spPr>
-      </p:sp>
-      <p:sp>
-        <p:nvSpPr>
-          <p:cNvPr id="12" name="Text 10"/>
-          <p:cNvSpPr/>
-          <p:nvPr/>
-        </p:nvSpPr>
-        <p:spPr>
-          <a:xfrm>
-            <a:off x="6893214" y="320040"/>
-            <a:ext cx="1141054" cy="502920"/>
-          </a:xfrm>
-          <a:prstGeom prst="rect">
-            <a:avLst/>
-          </a:prstGeom>
-          <a:noFill/>
-          <a:ln/>
-        </p:spPr>
-        <p:txBody>
-          <a:bodyPr wrap="square" rtlCol="0" anchor="ctr"/>
-          <a:lstStyle/>
-          <a:p>
-            <a:pPr algn="ctr" indent="0" marL="0">
-              <a:buNone/>
-            </a:pPr>
-            <a:r>
-              <a:rPr lang="en-US" sz="1200" b="1" dirty="0">
-                <a:solidFill>
-                  <a:srgbClr val="FFFFFF"/>
-                </a:solidFill>
-                <a:latin typeface="Arial" pitchFamily="34" charset="0"/>
-                <a:ea typeface="Arial" pitchFamily="34" charset="-122"/>
-                <a:cs typeface="Arial" pitchFamily="34" charset="-120"/>
-              </a:rPr>
-              <a:t>05</a:t>
-            </a:r>
-            <a:endParaRPr lang="en-US" sz="1200" dirty="0"/>
-          </a:p>
-        </p:txBody>
-      </p:sp>
-      <p:sp>
-        <p:nvSpPr>
-          <p:cNvPr id="13" name="Shape 11"/>
-          <p:cNvSpPr/>
-          <p:nvPr/>
-        </p:nvSpPr>
-        <p:spPr>
-          <a:xfrm>
-            <a:off x="8061701" y="320040"/>
-            <a:ext cx="1086190" cy="502920"/>
-          </a:xfrm>
-          <a:prstGeom prst="roundRect">
-            <a:avLst>
-              <a:gd name="adj" fmla="val 21818"/>
-            </a:avLst>
-          </a:prstGeom>
-          <a:solidFill>
-            <a:srgbClr val="0B8A5E"/>
-          </a:solidFill>
-          <a:ln w="12700">
-            <a:solidFill>
-              <a:srgbClr val="F4F7F6"/>
-            </a:solidFill>
-            <a:prstDash val="solid"/>
-          </a:ln>
-        </p:spPr>
-      </p:sp>
-      <p:sp>
-        <p:nvSpPr>
-          <p:cNvPr id="14" name="Text 12"/>
-          <p:cNvSpPr/>
-          <p:nvPr/>
-        </p:nvSpPr>
-        <p:spPr>
-          <a:xfrm>
-            <a:off x="8034269" y="320040"/>
-            <a:ext cx="1141054" cy="502920"/>
-          </a:xfrm>
-          <a:prstGeom prst="rect">
-            <a:avLst/>
-          </a:prstGeom>
-          <a:noFill/>
-          <a:ln/>
-        </p:spPr>
-        <p:txBody>
-          <a:bodyPr wrap="square" rtlCol="0" anchor="ctr"/>
-          <a:lstStyle/>
-          <a:p>
-            <a:pPr algn="ctr" indent="0" marL="0">
-              <a:buNone/>
-            </a:pPr>
-            <a:r>
-              <a:rPr lang="en-US" sz="1200" b="1" dirty="0">
-                <a:solidFill>
-                  <a:srgbClr val="FFFFFF"/>
-                </a:solidFill>
-                <a:latin typeface="Arial" pitchFamily="34" charset="0"/>
-                <a:ea typeface="Arial" pitchFamily="34" charset="-122"/>
-                <a:cs typeface="Arial" pitchFamily="34" charset="-120"/>
-              </a:rPr>
-              <a:t>06</a:t>
-            </a:r>
-            <a:endParaRPr lang="en-US" sz="1200" dirty="0"/>
-          </a:p>
-        </p:txBody>
-      </p:sp>
-      <p:sp>
-        <p:nvSpPr>
-          <p:cNvPr id="15" name="Shape 13"/>
-          <p:cNvSpPr/>
-          <p:nvPr/>
-        </p:nvSpPr>
-        <p:spPr>
-          <a:xfrm>
-            <a:off x="9202755" y="320040"/>
-            <a:ext cx="1086190" cy="502920"/>
-          </a:xfrm>
-          <a:prstGeom prst="roundRect">
-            <a:avLst>
-              <a:gd name="adj" fmla="val 21818"/>
-            </a:avLst>
-          </a:prstGeom>
-          <a:solidFill>
-            <a:srgbClr val="0B3D2C"/>
-          </a:solidFill>
-          <a:ln w="12700">
-            <a:solidFill>
-              <a:srgbClr val="F4F7F6"/>
-            </a:solidFill>
-            <a:prstDash val="solid"/>
-          </a:ln>
-        </p:spPr>
-      </p:sp>
-      <p:sp>
-        <p:nvSpPr>
-          <p:cNvPr id="16" name="Text 14"/>
-          <p:cNvSpPr/>
-          <p:nvPr/>
-        </p:nvSpPr>
-        <p:spPr>
-          <a:xfrm>
-            <a:off x="9175323" y="320040"/>
-            <a:ext cx="1141054" cy="502920"/>
-          </a:xfrm>
-          <a:prstGeom prst="rect">
-            <a:avLst/>
-          </a:prstGeom>
-          <a:noFill/>
-          <a:ln/>
-        </p:spPr>
-        <p:txBody>
-          <a:bodyPr wrap="square" rtlCol="0" anchor="ctr"/>
-          <a:lstStyle/>
-          <a:p>
-            <a:pPr algn="ctr" indent="0" marL="0">
-              <a:buNone/>
-            </a:pPr>
-            <a:r>
-              <a:rPr lang="en-US" sz="1200" b="1" dirty="0">
-                <a:solidFill>
-                  <a:srgbClr val="FFFFFF"/>
-                </a:solidFill>
-                <a:latin typeface="Arial" pitchFamily="34" charset="0"/>
-                <a:ea typeface="Arial" pitchFamily="34" charset="-122"/>
-                <a:cs typeface="Arial" pitchFamily="34" charset="-120"/>
-              </a:rPr>
-              <a:t>07</a:t>
-            </a:r>
-            <a:endParaRPr lang="en-US" sz="1200" dirty="0"/>
-          </a:p>
-        </p:txBody>
-      </p:sp>
-      <p:sp>
-        <p:nvSpPr>
-          <p:cNvPr id="17" name="Shape 15"/>
-          <p:cNvSpPr/>
-          <p:nvPr/>
-        </p:nvSpPr>
-        <p:spPr>
-          <a:xfrm>
-            <a:off x="10343810" y="320040"/>
-            <a:ext cx="1086190" cy="502920"/>
-          </a:xfrm>
-          <a:prstGeom prst="roundRect">
-            <a:avLst>
-              <a:gd name="adj" fmla="val 21818"/>
-            </a:avLst>
-          </a:prstGeom>
-          <a:solidFill>
-            <a:srgbClr val="22C58B"/>
-          </a:solidFill>
-          <a:ln w="12700">
-            <a:solidFill>
-              <a:srgbClr val="F4F7F6"/>
-            </a:solidFill>
-            <a:prstDash val="solid"/>
-          </a:ln>
-        </p:spPr>
-      </p:sp>
-      <p:sp>
-        <p:nvSpPr>
-          <p:cNvPr id="18" name="Text 16"/>
-          <p:cNvSpPr/>
-          <p:nvPr/>
-        </p:nvSpPr>
-        <p:spPr>
-          <a:xfrm>
-            <a:off x="10316378" y="320040"/>
-            <a:ext cx="1141054" cy="502920"/>
-          </a:xfrm>
-          <a:prstGeom prst="rect">
-            <a:avLst/>
-          </a:prstGeom>
-          <a:noFill/>
-          <a:ln/>
-        </p:spPr>
-        <p:txBody>
-          <a:bodyPr wrap="square" rtlCol="0" anchor="ctr"/>
-          <a:lstStyle/>
-          <a:p>
-            <a:pPr algn="ctr" indent="0" marL="0">
-              <a:buNone/>
-            </a:pPr>
-            <a:r>
-              <a:rPr lang="en-US" sz="1200" b="1" dirty="0">
-                <a:solidFill>
-                  <a:srgbClr val="FFFFFF"/>
-                </a:solidFill>
-                <a:latin typeface="Arial" pitchFamily="34" charset="0"/>
-                <a:ea typeface="Arial" pitchFamily="34" charset="-122"/>
-                <a:cs typeface="Arial" pitchFamily="34" charset="-120"/>
-              </a:rPr>
-              <a:t>08</a:t>
-            </a:r>
-            <a:endParaRPr lang="en-US" sz="1200" dirty="0"/>
-          </a:p>
-        </p:txBody>
-      </p:sp>
-      <p:sp>
-        <p:nvSpPr>
-          <p:cNvPr id="19" name="Text 17"/>
-          <p:cNvSpPr/>
-          <p:nvPr/>
-        </p:nvSpPr>
-        <p:spPr>
-          <a:xfrm>
-            <a:off x="731520" y="1097280"/>
+          <p:cNvPr id="2" name="Text 0"/>
+          <p:cNvSpPr/>
+          <p:nvPr/>
+        </p:nvSpPr>
+        <p:spPr>
+          <a:xfrm>
+            <a:off x="731520" y="640080"/>
             <a:ext cx="5029200" cy="365760"/>
           </a:xfrm>
           <a:prstGeom prst="roundRect">
@@ -2095,7 +1543,7 @@
       </p:sp>
       <p:sp>
         <p:nvSpPr>
-          <p:cNvPr id="20" name="Text 18"/>
+          <p:cNvPr id="3" name="Text 1"/>
           <p:cNvSpPr/>
           <p:nvPr/>
         </p:nvSpPr>
@@ -2134,7 +1582,7 @@
       </p:sp>
       <p:sp>
         <p:nvSpPr>
-          <p:cNvPr id="21" name="Text 19"/>
+          <p:cNvPr id="4" name="Text 2"/>
           <p:cNvSpPr/>
           <p:nvPr/>
         </p:nvSpPr>
@@ -2173,7 +1621,7 @@
       </p:sp>
       <p:sp>
         <p:nvSpPr>
-          <p:cNvPr id="22" name="Text 20"/>
+          <p:cNvPr id="5" name="Text 3"/>
           <p:cNvSpPr/>
           <p:nvPr/>
         </p:nvSpPr>
@@ -2212,7 +1660,7 @@
       </p:sp>
       <p:sp>
         <p:nvSpPr>
-          <p:cNvPr id="23" name="Shape 21"/>
+          <p:cNvPr id="6" name="Shape 4"/>
           <p:cNvSpPr/>
           <p:nvPr/>
         </p:nvSpPr>
@@ -2235,7 +1683,7 @@
       </p:sp>
       <p:sp>
         <p:nvSpPr>
-          <p:cNvPr id="24" name="Shape 22"/>
+          <p:cNvPr id="7" name="Shape 5"/>
           <p:cNvSpPr/>
           <p:nvPr/>
         </p:nvSpPr>
@@ -2260,7 +1708,7 @@
       </p:sp>
       <p:sp>
         <p:nvSpPr>
-          <p:cNvPr id="25" name="Text 23"/>
+          <p:cNvPr id="8" name="Text 6"/>
           <p:cNvSpPr/>
           <p:nvPr/>
         </p:nvSpPr>
@@ -2299,7 +1747,7 @@
       </p:sp>
       <p:sp>
         <p:nvSpPr>
-          <p:cNvPr id="26" name="Shape 24"/>
+          <p:cNvPr id="9" name="Shape 7"/>
           <p:cNvSpPr/>
           <p:nvPr/>
         </p:nvSpPr>
@@ -2324,7 +1772,7 @@
       </p:sp>
       <p:sp>
         <p:nvSpPr>
-          <p:cNvPr id="27" name="Text 25"/>
+          <p:cNvPr id="10" name="Text 8"/>
           <p:cNvSpPr/>
           <p:nvPr/>
         </p:nvSpPr>
@@ -2363,7 +1811,7 @@
       </p:sp>
       <p:sp>
         <p:nvSpPr>
-          <p:cNvPr id="28" name="Shape 26"/>
+          <p:cNvPr id="11" name="Shape 9"/>
           <p:cNvSpPr/>
           <p:nvPr/>
         </p:nvSpPr>
@@ -2388,7 +1836,7 @@
       </p:sp>
       <p:sp>
         <p:nvSpPr>
-          <p:cNvPr id="29" name="Text 27"/>
+          <p:cNvPr id="12" name="Text 10"/>
           <p:cNvSpPr/>
           <p:nvPr/>
         </p:nvSpPr>
@@ -2459,565 +1907,13 @@
       </p:grpSpPr>
       <p:sp>
         <p:nvSpPr>
-          <p:cNvPr id="2" name="Shape 0"/>
-          <p:cNvSpPr/>
-          <p:nvPr/>
-        </p:nvSpPr>
-        <p:spPr>
-          <a:xfrm>
-            <a:off x="758952" y="320040"/>
-            <a:ext cx="1086190" cy="502920"/>
-          </a:xfrm>
-          <a:prstGeom prst="roundRect">
-            <a:avLst>
-              <a:gd name="adj" fmla="val 21818"/>
-            </a:avLst>
-          </a:prstGeom>
-          <a:solidFill>
-            <a:srgbClr val="0B3D2C"/>
-          </a:solidFill>
-          <a:ln w="12700">
-            <a:solidFill>
-              <a:srgbClr val="F4F7F6"/>
-            </a:solidFill>
-            <a:prstDash val="solid"/>
-          </a:ln>
-        </p:spPr>
-      </p:sp>
-      <p:sp>
-        <p:nvSpPr>
-          <p:cNvPr id="3" name="Text 1"/>
-          <p:cNvSpPr/>
-          <p:nvPr/>
-        </p:nvSpPr>
-        <p:spPr>
-          <a:xfrm>
-            <a:off x="731520" y="320040"/>
-            <a:ext cx="1141054" cy="502920"/>
-          </a:xfrm>
-          <a:prstGeom prst="rect">
-            <a:avLst/>
-          </a:prstGeom>
-          <a:noFill/>
-          <a:ln/>
-        </p:spPr>
-        <p:txBody>
-          <a:bodyPr wrap="square" rtlCol="0" anchor="ctr"/>
-          <a:lstStyle/>
-          <a:p>
-            <a:pPr algn="ctr" indent="0" marL="0">
-              <a:buNone/>
-            </a:pPr>
-            <a:r>
-              <a:rPr lang="en-US" sz="1200" b="1" dirty="0">
-                <a:solidFill>
-                  <a:srgbClr val="FFFFFF"/>
-                </a:solidFill>
-                <a:latin typeface="Arial" pitchFamily="34" charset="0"/>
-                <a:ea typeface="Arial" pitchFamily="34" charset="-122"/>
-                <a:cs typeface="Arial" pitchFamily="34" charset="-120"/>
-              </a:rPr>
-              <a:t>01</a:t>
-            </a:r>
-            <a:endParaRPr lang="en-US" sz="1200" dirty="0"/>
-          </a:p>
-        </p:txBody>
-      </p:sp>
-      <p:sp>
-        <p:nvSpPr>
-          <p:cNvPr id="4" name="Shape 2"/>
-          <p:cNvSpPr/>
-          <p:nvPr/>
-        </p:nvSpPr>
-        <p:spPr>
-          <a:xfrm>
-            <a:off x="1900006" y="320040"/>
-            <a:ext cx="1086190" cy="502920"/>
-          </a:xfrm>
-          <a:prstGeom prst="roundRect">
-            <a:avLst>
-              <a:gd name="adj" fmla="val 21818"/>
-            </a:avLst>
-          </a:prstGeom>
-          <a:solidFill>
-            <a:srgbClr val="0B8A5E"/>
-          </a:solidFill>
-          <a:ln w="12700">
-            <a:solidFill>
-              <a:srgbClr val="F4F7F6"/>
-            </a:solidFill>
-            <a:prstDash val="solid"/>
-          </a:ln>
-        </p:spPr>
-      </p:sp>
-      <p:sp>
-        <p:nvSpPr>
-          <p:cNvPr id="5" name="Text 3"/>
-          <p:cNvSpPr/>
-          <p:nvPr/>
-        </p:nvSpPr>
-        <p:spPr>
-          <a:xfrm>
-            <a:off x="1872574" y="320040"/>
-            <a:ext cx="1141054" cy="502920"/>
-          </a:xfrm>
-          <a:prstGeom prst="rect">
-            <a:avLst/>
-          </a:prstGeom>
-          <a:noFill/>
-          <a:ln/>
-        </p:spPr>
-        <p:txBody>
-          <a:bodyPr wrap="square" rtlCol="0" anchor="ctr"/>
-          <a:lstStyle/>
-          <a:p>
-            <a:pPr algn="ctr" indent="0" marL="0">
-              <a:buNone/>
-            </a:pPr>
-            <a:r>
-              <a:rPr lang="en-US" sz="1200" b="1" dirty="0">
-                <a:solidFill>
-                  <a:srgbClr val="FFFFFF"/>
-                </a:solidFill>
-                <a:latin typeface="Arial" pitchFamily="34" charset="0"/>
-                <a:ea typeface="Arial" pitchFamily="34" charset="-122"/>
-                <a:cs typeface="Arial" pitchFamily="34" charset="-120"/>
-              </a:rPr>
-              <a:t>02</a:t>
-            </a:r>
-            <a:endParaRPr lang="en-US" sz="1200" dirty="0"/>
-          </a:p>
-        </p:txBody>
-      </p:sp>
-      <p:sp>
-        <p:nvSpPr>
-          <p:cNvPr id="6" name="Shape 4"/>
-          <p:cNvSpPr/>
-          <p:nvPr/>
-        </p:nvSpPr>
-        <p:spPr>
-          <a:xfrm>
-            <a:off x="1945726" y="365760"/>
-            <a:ext cx="994750" cy="411480"/>
-          </a:xfrm>
-          <a:prstGeom prst="roundRect">
-            <a:avLst>
-              <a:gd name="adj" fmla="val 22222"/>
-            </a:avLst>
-          </a:prstGeom>
-          <a:ln w="25400">
-            <a:solidFill>
-              <a:srgbClr val="FFFFFF"/>
-            </a:solidFill>
-            <a:prstDash val="solid"/>
-          </a:ln>
-        </p:spPr>
-      </p:sp>
-      <p:sp>
-        <p:nvSpPr>
-          <p:cNvPr id="7" name="Shape 5"/>
-          <p:cNvSpPr/>
-          <p:nvPr/>
-        </p:nvSpPr>
-        <p:spPr>
-          <a:xfrm>
-            <a:off x="3041061" y="320040"/>
-            <a:ext cx="1086190" cy="502920"/>
-          </a:xfrm>
-          <a:prstGeom prst="roundRect">
-            <a:avLst>
-              <a:gd name="adj" fmla="val 21818"/>
-            </a:avLst>
-          </a:prstGeom>
-          <a:solidFill>
-            <a:srgbClr val="0F9F6E"/>
-          </a:solidFill>
-          <a:ln w="12700">
-            <a:solidFill>
-              <a:srgbClr val="F4F7F6"/>
-            </a:solidFill>
-            <a:prstDash val="solid"/>
-          </a:ln>
-        </p:spPr>
-      </p:sp>
-      <p:sp>
-        <p:nvSpPr>
-          <p:cNvPr id="8" name="Text 6"/>
-          <p:cNvSpPr/>
-          <p:nvPr/>
-        </p:nvSpPr>
-        <p:spPr>
-          <a:xfrm>
-            <a:off x="3013629" y="320040"/>
-            <a:ext cx="1141054" cy="502920"/>
-          </a:xfrm>
-          <a:prstGeom prst="rect">
-            <a:avLst/>
-          </a:prstGeom>
-          <a:noFill/>
-          <a:ln/>
-        </p:spPr>
-        <p:txBody>
-          <a:bodyPr wrap="square" rtlCol="0" anchor="ctr"/>
-          <a:lstStyle/>
-          <a:p>
-            <a:pPr algn="ctr" indent="0" marL="0">
-              <a:buNone/>
-            </a:pPr>
-            <a:r>
-              <a:rPr lang="en-US" sz="1200" b="1" dirty="0">
-                <a:solidFill>
-                  <a:srgbClr val="FFFFFF"/>
-                </a:solidFill>
-                <a:latin typeface="Arial" pitchFamily="34" charset="0"/>
-                <a:ea typeface="Arial" pitchFamily="34" charset="-122"/>
-                <a:cs typeface="Arial" pitchFamily="34" charset="-120"/>
-              </a:rPr>
-              <a:t>03</a:t>
-            </a:r>
-            <a:endParaRPr lang="en-US" sz="1200" dirty="0"/>
-          </a:p>
-        </p:txBody>
-      </p:sp>
-      <p:sp>
-        <p:nvSpPr>
-          <p:cNvPr id="9" name="Shape 7"/>
-          <p:cNvSpPr/>
-          <p:nvPr/>
-        </p:nvSpPr>
-        <p:spPr>
-          <a:xfrm>
-            <a:off x="4182115" y="320040"/>
-            <a:ext cx="2683667" cy="502920"/>
-          </a:xfrm>
-          <a:prstGeom prst="roundRect">
-            <a:avLst>
-              <a:gd name="adj" fmla="val 21818"/>
-            </a:avLst>
-          </a:prstGeom>
-          <a:solidFill>
-            <a:srgbClr val="17B57F"/>
-          </a:solidFill>
-          <a:ln w="12700">
-            <a:solidFill>
-              <a:srgbClr val="F4F7F6"/>
-            </a:solidFill>
-            <a:prstDash val="solid"/>
-          </a:ln>
-        </p:spPr>
-      </p:sp>
-      <p:sp>
-        <p:nvSpPr>
-          <p:cNvPr id="10" name="Text 8"/>
-          <p:cNvSpPr/>
-          <p:nvPr/>
-        </p:nvSpPr>
-        <p:spPr>
-          <a:xfrm>
-            <a:off x="4154683" y="320040"/>
-            <a:ext cx="2738531" cy="502920"/>
-          </a:xfrm>
-          <a:prstGeom prst="rect">
-            <a:avLst/>
-          </a:prstGeom>
-          <a:noFill/>
-          <a:ln/>
-        </p:spPr>
-        <p:txBody>
-          <a:bodyPr wrap="square" rtlCol="0" anchor="ctr"/>
-          <a:lstStyle/>
-          <a:p>
-            <a:pPr algn="ctr" indent="0" marL="0">
-              <a:buNone/>
-            </a:pPr>
-            <a:r>
-              <a:rPr lang="en-US" sz="1200" b="1" dirty="0">
-                <a:solidFill>
-                  <a:srgbClr val="FFFFFF"/>
-                </a:solidFill>
-                <a:latin typeface="Arial" pitchFamily="34" charset="0"/>
-                <a:ea typeface="Arial" pitchFamily="34" charset="-122"/>
-                <a:cs typeface="Arial" pitchFamily="34" charset="-120"/>
-              </a:rPr>
-              <a:t>04 // DEMO · 60S</a:t>
-            </a:r>
-            <a:endParaRPr lang="en-US" sz="1200" dirty="0"/>
-          </a:p>
-        </p:txBody>
-      </p:sp>
-      <p:sp>
-        <p:nvSpPr>
-          <p:cNvPr id="11" name="Shape 9"/>
-          <p:cNvSpPr/>
-          <p:nvPr/>
-        </p:nvSpPr>
-        <p:spPr>
-          <a:xfrm>
-            <a:off x="6920646" y="320040"/>
-            <a:ext cx="1086190" cy="502920"/>
-          </a:xfrm>
-          <a:prstGeom prst="roundRect">
-            <a:avLst>
-              <a:gd name="adj" fmla="val 21818"/>
-            </a:avLst>
-          </a:prstGeom>
-          <a:solidFill>
-            <a:srgbClr val="0F9F6E"/>
-          </a:solidFill>
-          <a:ln w="12700">
-            <a:solidFill>
-              <a:srgbClr val="F4F7F6"/>
-            </a:solidFill>
-            <a:prstDash val="solid"/>
-          </a:ln>
-        </p:spPr>
-      </p:sp>
-      <p:sp>
-        <p:nvSpPr>
-          <p:cNvPr id="12" name="Text 10"/>
-          <p:cNvSpPr/>
-          <p:nvPr/>
-        </p:nvSpPr>
-        <p:spPr>
-          <a:xfrm>
-            <a:off x="6893214" y="320040"/>
-            <a:ext cx="1141054" cy="502920"/>
-          </a:xfrm>
-          <a:prstGeom prst="rect">
-            <a:avLst/>
-          </a:prstGeom>
-          <a:noFill/>
-          <a:ln/>
-        </p:spPr>
-        <p:txBody>
-          <a:bodyPr wrap="square" rtlCol="0" anchor="ctr"/>
-          <a:lstStyle/>
-          <a:p>
-            <a:pPr algn="ctr" indent="0" marL="0">
-              <a:buNone/>
-            </a:pPr>
-            <a:r>
-              <a:rPr lang="en-US" sz="1200" b="1" dirty="0">
-                <a:solidFill>
-                  <a:srgbClr val="FFFFFF"/>
-                </a:solidFill>
-                <a:latin typeface="Arial" pitchFamily="34" charset="0"/>
-                <a:ea typeface="Arial" pitchFamily="34" charset="-122"/>
-                <a:cs typeface="Arial" pitchFamily="34" charset="-120"/>
-              </a:rPr>
-              <a:t>05</a:t>
-            </a:r>
-            <a:endParaRPr lang="en-US" sz="1200" dirty="0"/>
-          </a:p>
-        </p:txBody>
-      </p:sp>
-      <p:sp>
-        <p:nvSpPr>
-          <p:cNvPr id="13" name="Shape 11"/>
-          <p:cNvSpPr/>
-          <p:nvPr/>
-        </p:nvSpPr>
-        <p:spPr>
-          <a:xfrm>
-            <a:off x="8061701" y="320040"/>
-            <a:ext cx="1086190" cy="502920"/>
-          </a:xfrm>
-          <a:prstGeom prst="roundRect">
-            <a:avLst>
-              <a:gd name="adj" fmla="val 21818"/>
-            </a:avLst>
-          </a:prstGeom>
-          <a:solidFill>
-            <a:srgbClr val="0B8A5E"/>
-          </a:solidFill>
-          <a:ln w="12700">
-            <a:solidFill>
-              <a:srgbClr val="F4F7F6"/>
-            </a:solidFill>
-            <a:prstDash val="solid"/>
-          </a:ln>
-        </p:spPr>
-      </p:sp>
-      <p:sp>
-        <p:nvSpPr>
-          <p:cNvPr id="14" name="Text 12"/>
-          <p:cNvSpPr/>
-          <p:nvPr/>
-        </p:nvSpPr>
-        <p:spPr>
-          <a:xfrm>
-            <a:off x="8034269" y="320040"/>
-            <a:ext cx="1141054" cy="502920"/>
-          </a:xfrm>
-          <a:prstGeom prst="rect">
-            <a:avLst/>
-          </a:prstGeom>
-          <a:noFill/>
-          <a:ln/>
-        </p:spPr>
-        <p:txBody>
-          <a:bodyPr wrap="square" rtlCol="0" anchor="ctr"/>
-          <a:lstStyle/>
-          <a:p>
-            <a:pPr algn="ctr" indent="0" marL="0">
-              <a:buNone/>
-            </a:pPr>
-            <a:r>
-              <a:rPr lang="en-US" sz="1200" b="1" dirty="0">
-                <a:solidFill>
-                  <a:srgbClr val="FFFFFF"/>
-                </a:solidFill>
-                <a:latin typeface="Arial" pitchFamily="34" charset="0"/>
-                <a:ea typeface="Arial" pitchFamily="34" charset="-122"/>
-                <a:cs typeface="Arial" pitchFamily="34" charset="-120"/>
-              </a:rPr>
-              <a:t>06</a:t>
-            </a:r>
-            <a:endParaRPr lang="en-US" sz="1200" dirty="0"/>
-          </a:p>
-        </p:txBody>
-      </p:sp>
-      <p:sp>
-        <p:nvSpPr>
-          <p:cNvPr id="15" name="Shape 13"/>
-          <p:cNvSpPr/>
-          <p:nvPr/>
-        </p:nvSpPr>
-        <p:spPr>
-          <a:xfrm>
-            <a:off x="9202755" y="320040"/>
-            <a:ext cx="1086190" cy="502920"/>
-          </a:xfrm>
-          <a:prstGeom prst="roundRect">
-            <a:avLst>
-              <a:gd name="adj" fmla="val 21818"/>
-            </a:avLst>
-          </a:prstGeom>
-          <a:solidFill>
-            <a:srgbClr val="0B3D2C"/>
-          </a:solidFill>
-          <a:ln w="12700">
-            <a:solidFill>
-              <a:srgbClr val="F4F7F6"/>
-            </a:solidFill>
-            <a:prstDash val="solid"/>
-          </a:ln>
-        </p:spPr>
-      </p:sp>
-      <p:sp>
-        <p:nvSpPr>
-          <p:cNvPr id="16" name="Text 14"/>
-          <p:cNvSpPr/>
-          <p:nvPr/>
-        </p:nvSpPr>
-        <p:spPr>
-          <a:xfrm>
-            <a:off x="9175323" y="320040"/>
-            <a:ext cx="1141054" cy="502920"/>
-          </a:xfrm>
-          <a:prstGeom prst="rect">
-            <a:avLst/>
-          </a:prstGeom>
-          <a:noFill/>
-          <a:ln/>
-        </p:spPr>
-        <p:txBody>
-          <a:bodyPr wrap="square" rtlCol="0" anchor="ctr"/>
-          <a:lstStyle/>
-          <a:p>
-            <a:pPr algn="ctr" indent="0" marL="0">
-              <a:buNone/>
-            </a:pPr>
-            <a:r>
-              <a:rPr lang="en-US" sz="1200" b="1" dirty="0">
-                <a:solidFill>
-                  <a:srgbClr val="FFFFFF"/>
-                </a:solidFill>
-                <a:latin typeface="Arial" pitchFamily="34" charset="0"/>
-                <a:ea typeface="Arial" pitchFamily="34" charset="-122"/>
-                <a:cs typeface="Arial" pitchFamily="34" charset="-120"/>
-              </a:rPr>
-              <a:t>07</a:t>
-            </a:r>
-            <a:endParaRPr lang="en-US" sz="1200" dirty="0"/>
-          </a:p>
-        </p:txBody>
-      </p:sp>
-      <p:sp>
-        <p:nvSpPr>
-          <p:cNvPr id="17" name="Shape 15"/>
-          <p:cNvSpPr/>
-          <p:nvPr/>
-        </p:nvSpPr>
-        <p:spPr>
-          <a:xfrm>
-            <a:off x="10343810" y="320040"/>
-            <a:ext cx="1086190" cy="502920"/>
-          </a:xfrm>
-          <a:prstGeom prst="roundRect">
-            <a:avLst>
-              <a:gd name="adj" fmla="val 21818"/>
-            </a:avLst>
-          </a:prstGeom>
-          <a:solidFill>
-            <a:srgbClr val="22C58B"/>
-          </a:solidFill>
-          <a:ln w="12700">
-            <a:solidFill>
-              <a:srgbClr val="F4F7F6"/>
-            </a:solidFill>
-            <a:prstDash val="solid"/>
-          </a:ln>
-        </p:spPr>
-      </p:sp>
-      <p:sp>
-        <p:nvSpPr>
-          <p:cNvPr id="18" name="Text 16"/>
-          <p:cNvSpPr/>
-          <p:nvPr/>
-        </p:nvSpPr>
-        <p:spPr>
-          <a:xfrm>
-            <a:off x="10316378" y="320040"/>
-            <a:ext cx="1141054" cy="502920"/>
-          </a:xfrm>
-          <a:prstGeom prst="rect">
-            <a:avLst/>
-          </a:prstGeom>
-          <a:noFill/>
-          <a:ln/>
-        </p:spPr>
-        <p:txBody>
-          <a:bodyPr wrap="square" rtlCol="0" anchor="ctr"/>
-          <a:lstStyle/>
-          <a:p>
-            <a:pPr algn="ctr" indent="0" marL="0">
-              <a:buNone/>
-            </a:pPr>
-            <a:r>
-              <a:rPr lang="en-US" sz="1200" b="1" dirty="0">
-                <a:solidFill>
-                  <a:srgbClr val="FFFFFF"/>
-                </a:solidFill>
-                <a:latin typeface="Arial" pitchFamily="34" charset="0"/>
-                <a:ea typeface="Arial" pitchFamily="34" charset="-122"/>
-                <a:cs typeface="Arial" pitchFamily="34" charset="-120"/>
-              </a:rPr>
-              <a:t>08</a:t>
-            </a:r>
-            <a:endParaRPr lang="en-US" sz="1200" dirty="0"/>
-          </a:p>
-        </p:txBody>
-      </p:sp>
-      <p:sp>
-        <p:nvSpPr>
-          <p:cNvPr id="19" name="Text 17"/>
-          <p:cNvSpPr/>
-          <p:nvPr/>
-        </p:nvSpPr>
-        <p:spPr>
-          <a:xfrm>
-            <a:off x="731520" y="1097280"/>
+          <p:cNvPr id="2" name="Text 0"/>
+          <p:cNvSpPr/>
+          <p:nvPr/>
+        </p:nvSpPr>
+        <p:spPr>
+          <a:xfrm>
+            <a:off x="731520" y="640080"/>
             <a:ext cx="5029200" cy="365760"/>
           </a:xfrm>
           <a:prstGeom prst="roundRect">
@@ -3054,7 +1950,7 @@
       </p:sp>
       <p:sp>
         <p:nvSpPr>
-          <p:cNvPr id="20" name="Text 18"/>
+          <p:cNvPr id="3" name="Text 1"/>
           <p:cNvSpPr/>
           <p:nvPr/>
         </p:nvSpPr>
@@ -3093,7 +1989,7 @@
       </p:sp>
       <p:sp>
         <p:nvSpPr>
-          <p:cNvPr id="21" name="Text 19"/>
+          <p:cNvPr id="4" name="Text 2"/>
           <p:cNvSpPr/>
           <p:nvPr/>
         </p:nvSpPr>
@@ -3132,7 +2028,7 @@
       </p:sp>
       <p:sp>
         <p:nvSpPr>
-          <p:cNvPr id="22" name="Text 20"/>
+          <p:cNvPr id="5" name="Text 3"/>
           <p:cNvSpPr/>
           <p:nvPr/>
         </p:nvSpPr>
@@ -3171,7 +2067,7 @@
       </p:sp>
       <p:sp>
         <p:nvSpPr>
-          <p:cNvPr id="23" name="Shape 21"/>
+          <p:cNvPr id="6" name="Shape 4"/>
           <p:cNvSpPr/>
           <p:nvPr/>
         </p:nvSpPr>
@@ -3194,7 +2090,7 @@
       </p:sp>
       <p:sp>
         <p:nvSpPr>
-          <p:cNvPr id="24" name="Shape 22"/>
+          <p:cNvPr id="7" name="Shape 5"/>
           <p:cNvSpPr/>
           <p:nvPr/>
         </p:nvSpPr>
@@ -3228,7 +2124,7 @@
       </p:sp>
       <p:sp>
         <p:nvSpPr>
-          <p:cNvPr id="25" name="Text 23"/>
+          <p:cNvPr id="8" name="Text 6"/>
           <p:cNvSpPr/>
           <p:nvPr/>
         </p:nvSpPr>
@@ -3267,7 +2163,7 @@
       </p:sp>
       <p:sp>
         <p:nvSpPr>
-          <p:cNvPr id="26" name="Text 24"/>
+          <p:cNvPr id="9" name="Text 7"/>
           <p:cNvSpPr/>
           <p:nvPr/>
         </p:nvSpPr>
@@ -3306,7 +2202,7 @@
       </p:sp>
       <p:sp>
         <p:nvSpPr>
-          <p:cNvPr id="27" name="Text 25"/>
+          <p:cNvPr id="10" name="Text 8"/>
           <p:cNvSpPr/>
           <p:nvPr/>
         </p:nvSpPr>
@@ -3345,7 +2241,7 @@
       </p:sp>
       <p:sp>
         <p:nvSpPr>
-          <p:cNvPr id="28" name="Shape 26"/>
+          <p:cNvPr id="11" name="Shape 9"/>
           <p:cNvSpPr/>
           <p:nvPr/>
         </p:nvSpPr>
@@ -3379,7 +2275,7 @@
       </p:sp>
       <p:sp>
         <p:nvSpPr>
-          <p:cNvPr id="29" name="Text 27"/>
+          <p:cNvPr id="12" name="Text 10"/>
           <p:cNvSpPr/>
           <p:nvPr/>
         </p:nvSpPr>
@@ -3418,7 +2314,7 @@
       </p:sp>
       <p:sp>
         <p:nvSpPr>
-          <p:cNvPr id="30" name="Text 28"/>
+          <p:cNvPr id="13" name="Text 11"/>
           <p:cNvSpPr/>
           <p:nvPr/>
         </p:nvSpPr>
@@ -3457,7 +2353,7 @@
       </p:sp>
       <p:sp>
         <p:nvSpPr>
-          <p:cNvPr id="31" name="Text 29"/>
+          <p:cNvPr id="14" name="Text 12"/>
           <p:cNvSpPr/>
           <p:nvPr/>
         </p:nvSpPr>
@@ -3496,7 +2392,7 @@
       </p:sp>
       <p:sp>
         <p:nvSpPr>
-          <p:cNvPr id="32" name="Shape 30"/>
+          <p:cNvPr id="15" name="Shape 13"/>
           <p:cNvSpPr/>
           <p:nvPr/>
         </p:nvSpPr>
@@ -3530,7 +2426,7 @@
       </p:sp>
       <p:sp>
         <p:nvSpPr>
-          <p:cNvPr id="33" name="Text 31"/>
+          <p:cNvPr id="16" name="Text 14"/>
           <p:cNvSpPr/>
           <p:nvPr/>
         </p:nvSpPr>
@@ -3569,7 +2465,7 @@
       </p:sp>
       <p:sp>
         <p:nvSpPr>
-          <p:cNvPr id="34" name="Text 32"/>
+          <p:cNvPr id="17" name="Text 15"/>
           <p:cNvSpPr/>
           <p:nvPr/>
         </p:nvSpPr>
@@ -3608,7 +2504,7 @@
       </p:sp>
       <p:sp>
         <p:nvSpPr>
-          <p:cNvPr id="35" name="Text 33"/>
+          <p:cNvPr id="18" name="Text 16"/>
           <p:cNvSpPr/>
           <p:nvPr/>
         </p:nvSpPr>
@@ -3679,565 +2575,13 @@
       </p:grpSpPr>
       <p:sp>
         <p:nvSpPr>
-          <p:cNvPr id="2" name="Shape 0"/>
-          <p:cNvSpPr/>
-          <p:nvPr/>
-        </p:nvSpPr>
-        <p:spPr>
-          <a:xfrm>
-            <a:off x="758952" y="320040"/>
-            <a:ext cx="1086190" cy="502920"/>
-          </a:xfrm>
-          <a:prstGeom prst="roundRect">
-            <a:avLst>
-              <a:gd name="adj" fmla="val 21818"/>
-            </a:avLst>
-          </a:prstGeom>
-          <a:solidFill>
-            <a:srgbClr val="0B3D2C"/>
-          </a:solidFill>
-          <a:ln w="12700">
-            <a:solidFill>
-              <a:srgbClr val="F4F7F6"/>
-            </a:solidFill>
-            <a:prstDash val="solid"/>
-          </a:ln>
-        </p:spPr>
-      </p:sp>
-      <p:sp>
-        <p:nvSpPr>
-          <p:cNvPr id="3" name="Text 1"/>
-          <p:cNvSpPr/>
-          <p:nvPr/>
-        </p:nvSpPr>
-        <p:spPr>
-          <a:xfrm>
-            <a:off x="731520" y="320040"/>
-            <a:ext cx="1141054" cy="502920"/>
-          </a:xfrm>
-          <a:prstGeom prst="rect">
-            <a:avLst/>
-          </a:prstGeom>
-          <a:noFill/>
-          <a:ln/>
-        </p:spPr>
-        <p:txBody>
-          <a:bodyPr wrap="square" rtlCol="0" anchor="ctr"/>
-          <a:lstStyle/>
-          <a:p>
-            <a:pPr algn="ctr" indent="0" marL="0">
-              <a:buNone/>
-            </a:pPr>
-            <a:r>
-              <a:rPr lang="en-US" sz="1200" b="1" dirty="0">
-                <a:solidFill>
-                  <a:srgbClr val="FFFFFF"/>
-                </a:solidFill>
-                <a:latin typeface="Arial" pitchFamily="34" charset="0"/>
-                <a:ea typeface="Arial" pitchFamily="34" charset="-122"/>
-                <a:cs typeface="Arial" pitchFamily="34" charset="-120"/>
-              </a:rPr>
-              <a:t>01</a:t>
-            </a:r>
-            <a:endParaRPr lang="en-US" sz="1200" dirty="0"/>
-          </a:p>
-        </p:txBody>
-      </p:sp>
-      <p:sp>
-        <p:nvSpPr>
-          <p:cNvPr id="4" name="Shape 2"/>
-          <p:cNvSpPr/>
-          <p:nvPr/>
-        </p:nvSpPr>
-        <p:spPr>
-          <a:xfrm>
-            <a:off x="1900006" y="320040"/>
-            <a:ext cx="1086190" cy="502920"/>
-          </a:xfrm>
-          <a:prstGeom prst="roundRect">
-            <a:avLst>
-              <a:gd name="adj" fmla="val 21818"/>
-            </a:avLst>
-          </a:prstGeom>
-          <a:solidFill>
-            <a:srgbClr val="0B8A5E"/>
-          </a:solidFill>
-          <a:ln w="12700">
-            <a:solidFill>
-              <a:srgbClr val="F4F7F6"/>
-            </a:solidFill>
-            <a:prstDash val="solid"/>
-          </a:ln>
-        </p:spPr>
-      </p:sp>
-      <p:sp>
-        <p:nvSpPr>
-          <p:cNvPr id="5" name="Text 3"/>
-          <p:cNvSpPr/>
-          <p:nvPr/>
-        </p:nvSpPr>
-        <p:spPr>
-          <a:xfrm>
-            <a:off x="1872574" y="320040"/>
-            <a:ext cx="1141054" cy="502920"/>
-          </a:xfrm>
-          <a:prstGeom prst="rect">
-            <a:avLst/>
-          </a:prstGeom>
-          <a:noFill/>
-          <a:ln/>
-        </p:spPr>
-        <p:txBody>
-          <a:bodyPr wrap="square" rtlCol="0" anchor="ctr"/>
-          <a:lstStyle/>
-          <a:p>
-            <a:pPr algn="ctr" indent="0" marL="0">
-              <a:buNone/>
-            </a:pPr>
-            <a:r>
-              <a:rPr lang="en-US" sz="1200" b="1" dirty="0">
-                <a:solidFill>
-                  <a:srgbClr val="FFFFFF"/>
-                </a:solidFill>
-                <a:latin typeface="Arial" pitchFamily="34" charset="0"/>
-                <a:ea typeface="Arial" pitchFamily="34" charset="-122"/>
-                <a:cs typeface="Arial" pitchFamily="34" charset="-120"/>
-              </a:rPr>
-              <a:t>02</a:t>
-            </a:r>
-            <a:endParaRPr lang="en-US" sz="1200" dirty="0"/>
-          </a:p>
-        </p:txBody>
-      </p:sp>
-      <p:sp>
-        <p:nvSpPr>
-          <p:cNvPr id="6" name="Shape 4"/>
-          <p:cNvSpPr/>
-          <p:nvPr/>
-        </p:nvSpPr>
-        <p:spPr>
-          <a:xfrm>
-            <a:off x="3041061" y="320040"/>
-            <a:ext cx="1086190" cy="502920"/>
-          </a:xfrm>
-          <a:prstGeom prst="roundRect">
-            <a:avLst>
-              <a:gd name="adj" fmla="val 21818"/>
-            </a:avLst>
-          </a:prstGeom>
-          <a:solidFill>
-            <a:srgbClr val="0F9F6E"/>
-          </a:solidFill>
-          <a:ln w="12700">
-            <a:solidFill>
-              <a:srgbClr val="F4F7F6"/>
-            </a:solidFill>
-            <a:prstDash val="solid"/>
-          </a:ln>
-        </p:spPr>
-      </p:sp>
-      <p:sp>
-        <p:nvSpPr>
-          <p:cNvPr id="7" name="Text 5"/>
-          <p:cNvSpPr/>
-          <p:nvPr/>
-        </p:nvSpPr>
-        <p:spPr>
-          <a:xfrm>
-            <a:off x="3013629" y="320040"/>
-            <a:ext cx="1141054" cy="502920"/>
-          </a:xfrm>
-          <a:prstGeom prst="rect">
-            <a:avLst/>
-          </a:prstGeom>
-          <a:noFill/>
-          <a:ln/>
-        </p:spPr>
-        <p:txBody>
-          <a:bodyPr wrap="square" rtlCol="0" anchor="ctr"/>
-          <a:lstStyle/>
-          <a:p>
-            <a:pPr algn="ctr" indent="0" marL="0">
-              <a:buNone/>
-            </a:pPr>
-            <a:r>
-              <a:rPr lang="en-US" sz="1200" b="1" dirty="0">
-                <a:solidFill>
-                  <a:srgbClr val="FFFFFF"/>
-                </a:solidFill>
-                <a:latin typeface="Arial" pitchFamily="34" charset="0"/>
-                <a:ea typeface="Arial" pitchFamily="34" charset="-122"/>
-                <a:cs typeface="Arial" pitchFamily="34" charset="-120"/>
-              </a:rPr>
-              <a:t>03</a:t>
-            </a:r>
-            <a:endParaRPr lang="en-US" sz="1200" dirty="0"/>
-          </a:p>
-        </p:txBody>
-      </p:sp>
-      <p:sp>
-        <p:nvSpPr>
-          <p:cNvPr id="8" name="Shape 6"/>
-          <p:cNvSpPr/>
-          <p:nvPr/>
-        </p:nvSpPr>
-        <p:spPr>
-          <a:xfrm>
-            <a:off x="3086781" y="365760"/>
-            <a:ext cx="994750" cy="411480"/>
-          </a:xfrm>
-          <a:prstGeom prst="roundRect">
-            <a:avLst>
-              <a:gd name="adj" fmla="val 22222"/>
-            </a:avLst>
-          </a:prstGeom>
-          <a:ln w="25400">
-            <a:solidFill>
-              <a:srgbClr val="FFFFFF"/>
-            </a:solidFill>
-            <a:prstDash val="solid"/>
-          </a:ln>
-        </p:spPr>
-      </p:sp>
-      <p:sp>
-        <p:nvSpPr>
-          <p:cNvPr id="9" name="Shape 7"/>
-          <p:cNvSpPr/>
-          <p:nvPr/>
-        </p:nvSpPr>
-        <p:spPr>
-          <a:xfrm>
-            <a:off x="4182115" y="320040"/>
-            <a:ext cx="2683667" cy="502920"/>
-          </a:xfrm>
-          <a:prstGeom prst="roundRect">
-            <a:avLst>
-              <a:gd name="adj" fmla="val 21818"/>
-            </a:avLst>
-          </a:prstGeom>
-          <a:solidFill>
-            <a:srgbClr val="17B57F"/>
-          </a:solidFill>
-          <a:ln w="12700">
-            <a:solidFill>
-              <a:srgbClr val="F4F7F6"/>
-            </a:solidFill>
-            <a:prstDash val="solid"/>
-          </a:ln>
-        </p:spPr>
-      </p:sp>
-      <p:sp>
-        <p:nvSpPr>
-          <p:cNvPr id="10" name="Text 8"/>
-          <p:cNvSpPr/>
-          <p:nvPr/>
-        </p:nvSpPr>
-        <p:spPr>
-          <a:xfrm>
-            <a:off x="4154683" y="320040"/>
-            <a:ext cx="2738531" cy="502920"/>
-          </a:xfrm>
-          <a:prstGeom prst="rect">
-            <a:avLst/>
-          </a:prstGeom>
-          <a:noFill/>
-          <a:ln/>
-        </p:spPr>
-        <p:txBody>
-          <a:bodyPr wrap="square" rtlCol="0" anchor="ctr"/>
-          <a:lstStyle/>
-          <a:p>
-            <a:pPr algn="ctr" indent="0" marL="0">
-              <a:buNone/>
-            </a:pPr>
-            <a:r>
-              <a:rPr lang="en-US" sz="1200" b="1" dirty="0">
-                <a:solidFill>
-                  <a:srgbClr val="FFFFFF"/>
-                </a:solidFill>
-                <a:latin typeface="Arial" pitchFamily="34" charset="0"/>
-                <a:ea typeface="Arial" pitchFamily="34" charset="-122"/>
-                <a:cs typeface="Arial" pitchFamily="34" charset="-120"/>
-              </a:rPr>
-              <a:t>04 // DEMO · 60S</a:t>
-            </a:r>
-            <a:endParaRPr lang="en-US" sz="1200" dirty="0"/>
-          </a:p>
-        </p:txBody>
-      </p:sp>
-      <p:sp>
-        <p:nvSpPr>
-          <p:cNvPr id="11" name="Shape 9"/>
-          <p:cNvSpPr/>
-          <p:nvPr/>
-        </p:nvSpPr>
-        <p:spPr>
-          <a:xfrm>
-            <a:off x="6920646" y="320040"/>
-            <a:ext cx="1086190" cy="502920"/>
-          </a:xfrm>
-          <a:prstGeom prst="roundRect">
-            <a:avLst>
-              <a:gd name="adj" fmla="val 21818"/>
-            </a:avLst>
-          </a:prstGeom>
-          <a:solidFill>
-            <a:srgbClr val="0F9F6E"/>
-          </a:solidFill>
-          <a:ln w="12700">
-            <a:solidFill>
-              <a:srgbClr val="F4F7F6"/>
-            </a:solidFill>
-            <a:prstDash val="solid"/>
-          </a:ln>
-        </p:spPr>
-      </p:sp>
-      <p:sp>
-        <p:nvSpPr>
-          <p:cNvPr id="12" name="Text 10"/>
-          <p:cNvSpPr/>
-          <p:nvPr/>
-        </p:nvSpPr>
-        <p:spPr>
-          <a:xfrm>
-            <a:off x="6893214" y="320040"/>
-            <a:ext cx="1141054" cy="502920"/>
-          </a:xfrm>
-          <a:prstGeom prst="rect">
-            <a:avLst/>
-          </a:prstGeom>
-          <a:noFill/>
-          <a:ln/>
-        </p:spPr>
-        <p:txBody>
-          <a:bodyPr wrap="square" rtlCol="0" anchor="ctr"/>
-          <a:lstStyle/>
-          <a:p>
-            <a:pPr algn="ctr" indent="0" marL="0">
-              <a:buNone/>
-            </a:pPr>
-            <a:r>
-              <a:rPr lang="en-US" sz="1200" b="1" dirty="0">
-                <a:solidFill>
-                  <a:srgbClr val="FFFFFF"/>
-                </a:solidFill>
-                <a:latin typeface="Arial" pitchFamily="34" charset="0"/>
-                <a:ea typeface="Arial" pitchFamily="34" charset="-122"/>
-                <a:cs typeface="Arial" pitchFamily="34" charset="-120"/>
-              </a:rPr>
-              <a:t>05</a:t>
-            </a:r>
-            <a:endParaRPr lang="en-US" sz="1200" dirty="0"/>
-          </a:p>
-        </p:txBody>
-      </p:sp>
-      <p:sp>
-        <p:nvSpPr>
-          <p:cNvPr id="13" name="Shape 11"/>
-          <p:cNvSpPr/>
-          <p:nvPr/>
-        </p:nvSpPr>
-        <p:spPr>
-          <a:xfrm>
-            <a:off x="8061701" y="320040"/>
-            <a:ext cx="1086190" cy="502920"/>
-          </a:xfrm>
-          <a:prstGeom prst="roundRect">
-            <a:avLst>
-              <a:gd name="adj" fmla="val 21818"/>
-            </a:avLst>
-          </a:prstGeom>
-          <a:solidFill>
-            <a:srgbClr val="0B8A5E"/>
-          </a:solidFill>
-          <a:ln w="12700">
-            <a:solidFill>
-              <a:srgbClr val="F4F7F6"/>
-            </a:solidFill>
-            <a:prstDash val="solid"/>
-          </a:ln>
-        </p:spPr>
-      </p:sp>
-      <p:sp>
-        <p:nvSpPr>
-          <p:cNvPr id="14" name="Text 12"/>
-          <p:cNvSpPr/>
-          <p:nvPr/>
-        </p:nvSpPr>
-        <p:spPr>
-          <a:xfrm>
-            <a:off x="8034269" y="320040"/>
-            <a:ext cx="1141054" cy="502920"/>
-          </a:xfrm>
-          <a:prstGeom prst="rect">
-            <a:avLst/>
-          </a:prstGeom>
-          <a:noFill/>
-          <a:ln/>
-        </p:spPr>
-        <p:txBody>
-          <a:bodyPr wrap="square" rtlCol="0" anchor="ctr"/>
-          <a:lstStyle/>
-          <a:p>
-            <a:pPr algn="ctr" indent="0" marL="0">
-              <a:buNone/>
-            </a:pPr>
-            <a:r>
-              <a:rPr lang="en-US" sz="1200" b="1" dirty="0">
-                <a:solidFill>
-                  <a:srgbClr val="FFFFFF"/>
-                </a:solidFill>
-                <a:latin typeface="Arial" pitchFamily="34" charset="0"/>
-                <a:ea typeface="Arial" pitchFamily="34" charset="-122"/>
-                <a:cs typeface="Arial" pitchFamily="34" charset="-120"/>
-              </a:rPr>
-              <a:t>06</a:t>
-            </a:r>
-            <a:endParaRPr lang="en-US" sz="1200" dirty="0"/>
-          </a:p>
-        </p:txBody>
-      </p:sp>
-      <p:sp>
-        <p:nvSpPr>
-          <p:cNvPr id="15" name="Shape 13"/>
-          <p:cNvSpPr/>
-          <p:nvPr/>
-        </p:nvSpPr>
-        <p:spPr>
-          <a:xfrm>
-            <a:off x="9202755" y="320040"/>
-            <a:ext cx="1086190" cy="502920"/>
-          </a:xfrm>
-          <a:prstGeom prst="roundRect">
-            <a:avLst>
-              <a:gd name="adj" fmla="val 21818"/>
-            </a:avLst>
-          </a:prstGeom>
-          <a:solidFill>
-            <a:srgbClr val="0B3D2C"/>
-          </a:solidFill>
-          <a:ln w="12700">
-            <a:solidFill>
-              <a:srgbClr val="F4F7F6"/>
-            </a:solidFill>
-            <a:prstDash val="solid"/>
-          </a:ln>
-        </p:spPr>
-      </p:sp>
-      <p:sp>
-        <p:nvSpPr>
-          <p:cNvPr id="16" name="Text 14"/>
-          <p:cNvSpPr/>
-          <p:nvPr/>
-        </p:nvSpPr>
-        <p:spPr>
-          <a:xfrm>
-            <a:off x="9175323" y="320040"/>
-            <a:ext cx="1141054" cy="502920"/>
-          </a:xfrm>
-          <a:prstGeom prst="rect">
-            <a:avLst/>
-          </a:prstGeom>
-          <a:noFill/>
-          <a:ln/>
-        </p:spPr>
-        <p:txBody>
-          <a:bodyPr wrap="square" rtlCol="0" anchor="ctr"/>
-          <a:lstStyle/>
-          <a:p>
-            <a:pPr algn="ctr" indent="0" marL="0">
-              <a:buNone/>
-            </a:pPr>
-            <a:r>
-              <a:rPr lang="en-US" sz="1200" b="1" dirty="0">
-                <a:solidFill>
-                  <a:srgbClr val="FFFFFF"/>
-                </a:solidFill>
-                <a:latin typeface="Arial" pitchFamily="34" charset="0"/>
-                <a:ea typeface="Arial" pitchFamily="34" charset="-122"/>
-                <a:cs typeface="Arial" pitchFamily="34" charset="-120"/>
-              </a:rPr>
-              <a:t>07</a:t>
-            </a:r>
-            <a:endParaRPr lang="en-US" sz="1200" dirty="0"/>
-          </a:p>
-        </p:txBody>
-      </p:sp>
-      <p:sp>
-        <p:nvSpPr>
-          <p:cNvPr id="17" name="Shape 15"/>
-          <p:cNvSpPr/>
-          <p:nvPr/>
-        </p:nvSpPr>
-        <p:spPr>
-          <a:xfrm>
-            <a:off x="10343810" y="320040"/>
-            <a:ext cx="1086190" cy="502920"/>
-          </a:xfrm>
-          <a:prstGeom prst="roundRect">
-            <a:avLst>
-              <a:gd name="adj" fmla="val 21818"/>
-            </a:avLst>
-          </a:prstGeom>
-          <a:solidFill>
-            <a:srgbClr val="22C58B"/>
-          </a:solidFill>
-          <a:ln w="12700">
-            <a:solidFill>
-              <a:srgbClr val="F4F7F6"/>
-            </a:solidFill>
-            <a:prstDash val="solid"/>
-          </a:ln>
-        </p:spPr>
-      </p:sp>
-      <p:sp>
-        <p:nvSpPr>
-          <p:cNvPr id="18" name="Text 16"/>
-          <p:cNvSpPr/>
-          <p:nvPr/>
-        </p:nvSpPr>
-        <p:spPr>
-          <a:xfrm>
-            <a:off x="10316378" y="320040"/>
-            <a:ext cx="1141054" cy="502920"/>
-          </a:xfrm>
-          <a:prstGeom prst="rect">
-            <a:avLst/>
-          </a:prstGeom>
-          <a:noFill/>
-          <a:ln/>
-        </p:spPr>
-        <p:txBody>
-          <a:bodyPr wrap="square" rtlCol="0" anchor="ctr"/>
-          <a:lstStyle/>
-          <a:p>
-            <a:pPr algn="ctr" indent="0" marL="0">
-              <a:buNone/>
-            </a:pPr>
-            <a:r>
-              <a:rPr lang="en-US" sz="1200" b="1" dirty="0">
-                <a:solidFill>
-                  <a:srgbClr val="FFFFFF"/>
-                </a:solidFill>
-                <a:latin typeface="Arial" pitchFamily="34" charset="0"/>
-                <a:ea typeface="Arial" pitchFamily="34" charset="-122"/>
-                <a:cs typeface="Arial" pitchFamily="34" charset="-120"/>
-              </a:rPr>
-              <a:t>08</a:t>
-            </a:r>
-            <a:endParaRPr lang="en-US" sz="1200" dirty="0"/>
-          </a:p>
-        </p:txBody>
-      </p:sp>
-      <p:sp>
-        <p:nvSpPr>
-          <p:cNvPr id="19" name="Text 17"/>
-          <p:cNvSpPr/>
-          <p:nvPr/>
-        </p:nvSpPr>
-        <p:spPr>
-          <a:xfrm>
-            <a:off x="731520" y="1097280"/>
+          <p:cNvPr id="2" name="Text 0"/>
+          <p:cNvSpPr/>
+          <p:nvPr/>
+        </p:nvSpPr>
+        <p:spPr>
+          <a:xfrm>
+            <a:off x="731520" y="640080"/>
             <a:ext cx="5029200" cy="365760"/>
           </a:xfrm>
           <a:prstGeom prst="roundRect">
@@ -4274,7 +2618,7 @@
       </p:sp>
       <p:sp>
         <p:nvSpPr>
-          <p:cNvPr id="20" name="Text 18"/>
+          <p:cNvPr id="3" name="Text 1"/>
           <p:cNvSpPr/>
           <p:nvPr/>
         </p:nvSpPr>
@@ -4313,7 +2657,7 @@
       </p:sp>
       <p:sp>
         <p:nvSpPr>
-          <p:cNvPr id="21" name="Text 19"/>
+          <p:cNvPr id="4" name="Text 2"/>
           <p:cNvSpPr/>
           <p:nvPr/>
         </p:nvSpPr>
@@ -4352,7 +2696,7 @@
       </p:sp>
       <p:sp>
         <p:nvSpPr>
-          <p:cNvPr id="22" name="Text 20"/>
+          <p:cNvPr id="5" name="Text 3"/>
           <p:cNvSpPr/>
           <p:nvPr/>
         </p:nvSpPr>
@@ -4391,7 +2735,7 @@
       </p:sp>
       <p:sp>
         <p:nvSpPr>
-          <p:cNvPr id="23" name="Shape 21"/>
+          <p:cNvPr id="6" name="Shape 4"/>
           <p:cNvSpPr/>
           <p:nvPr/>
         </p:nvSpPr>
@@ -4414,7 +2758,7 @@
       </p:sp>
       <p:sp>
         <p:nvSpPr>
-          <p:cNvPr id="24" name="Shape 22"/>
+          <p:cNvPr id="7" name="Shape 5"/>
           <p:cNvSpPr/>
           <p:nvPr/>
         </p:nvSpPr>
@@ -4448,7 +2792,7 @@
       </p:sp>
       <p:sp>
         <p:nvSpPr>
-          <p:cNvPr id="25" name="Text 23"/>
+          <p:cNvPr id="8" name="Text 6"/>
           <p:cNvSpPr/>
           <p:nvPr/>
         </p:nvSpPr>
@@ -4487,7 +2831,7 @@
       </p:sp>
       <p:sp>
         <p:nvSpPr>
-          <p:cNvPr id="26" name="Text 24"/>
+          <p:cNvPr id="9" name="Text 7"/>
           <p:cNvSpPr/>
           <p:nvPr/>
         </p:nvSpPr>
@@ -4526,7 +2870,7 @@
       </p:sp>
       <p:sp>
         <p:nvSpPr>
-          <p:cNvPr id="27" name="Text 25"/>
+          <p:cNvPr id="10" name="Text 8"/>
           <p:cNvSpPr/>
           <p:nvPr/>
         </p:nvSpPr>
@@ -4565,7 +2909,7 @@
       </p:sp>
       <p:sp>
         <p:nvSpPr>
-          <p:cNvPr id="28" name="Shape 26"/>
+          <p:cNvPr id="11" name="Shape 9"/>
           <p:cNvSpPr/>
           <p:nvPr/>
         </p:nvSpPr>
@@ -4599,7 +2943,7 @@
       </p:sp>
       <p:sp>
         <p:nvSpPr>
-          <p:cNvPr id="29" name="Text 27"/>
+          <p:cNvPr id="12" name="Text 10"/>
           <p:cNvSpPr/>
           <p:nvPr/>
         </p:nvSpPr>
@@ -4638,7 +2982,7 @@
       </p:sp>
       <p:sp>
         <p:nvSpPr>
-          <p:cNvPr id="30" name="Text 28"/>
+          <p:cNvPr id="13" name="Text 11"/>
           <p:cNvSpPr/>
           <p:nvPr/>
         </p:nvSpPr>
@@ -4677,7 +3021,7 @@
       </p:sp>
       <p:sp>
         <p:nvSpPr>
-          <p:cNvPr id="31" name="Text 29"/>
+          <p:cNvPr id="14" name="Text 12"/>
           <p:cNvSpPr/>
           <p:nvPr/>
         </p:nvSpPr>
@@ -4716,7 +3060,7 @@
       </p:sp>
       <p:sp>
         <p:nvSpPr>
-          <p:cNvPr id="32" name="Shape 30"/>
+          <p:cNvPr id="15" name="Shape 13"/>
           <p:cNvSpPr/>
           <p:nvPr/>
         </p:nvSpPr>
@@ -4750,7 +3094,7 @@
       </p:sp>
       <p:sp>
         <p:nvSpPr>
-          <p:cNvPr id="33" name="Text 31"/>
+          <p:cNvPr id="16" name="Text 14"/>
           <p:cNvSpPr/>
           <p:nvPr/>
         </p:nvSpPr>
@@ -4789,7 +3133,7 @@
       </p:sp>
       <p:sp>
         <p:nvSpPr>
-          <p:cNvPr id="34" name="Text 32"/>
+          <p:cNvPr id="17" name="Text 15"/>
           <p:cNvSpPr/>
           <p:nvPr/>
         </p:nvSpPr>
@@ -4828,7 +3172,7 @@
       </p:sp>
       <p:sp>
         <p:nvSpPr>
-          <p:cNvPr id="35" name="Text 33"/>
+          <p:cNvPr id="18" name="Text 16"/>
           <p:cNvSpPr/>
           <p:nvPr/>
         </p:nvSpPr>
@@ -4867,7 +3211,7 @@
       </p:sp>
       <p:sp>
         <p:nvSpPr>
-          <p:cNvPr id="36" name="Text 34"/>
+          <p:cNvPr id="19" name="Text 17"/>
           <p:cNvSpPr/>
           <p:nvPr/>
         </p:nvSpPr>
@@ -4938,565 +3282,13 @@
       </p:grpSpPr>
       <p:sp>
         <p:nvSpPr>
-          <p:cNvPr id="2" name="Shape 0"/>
-          <p:cNvSpPr/>
-          <p:nvPr/>
-        </p:nvSpPr>
-        <p:spPr>
-          <a:xfrm>
-            <a:off x="758952" y="320040"/>
-            <a:ext cx="1086190" cy="502920"/>
-          </a:xfrm>
-          <a:prstGeom prst="roundRect">
-            <a:avLst>
-              <a:gd name="adj" fmla="val 21818"/>
-            </a:avLst>
-          </a:prstGeom>
-          <a:solidFill>
-            <a:srgbClr val="0B3D2C"/>
-          </a:solidFill>
-          <a:ln w="12700">
-            <a:solidFill>
-              <a:srgbClr val="F4F7F6"/>
-            </a:solidFill>
-            <a:prstDash val="solid"/>
-          </a:ln>
-        </p:spPr>
-      </p:sp>
-      <p:sp>
-        <p:nvSpPr>
-          <p:cNvPr id="3" name="Text 1"/>
-          <p:cNvSpPr/>
-          <p:nvPr/>
-        </p:nvSpPr>
-        <p:spPr>
-          <a:xfrm>
-            <a:off x="731520" y="320040"/>
-            <a:ext cx="1141054" cy="502920"/>
-          </a:xfrm>
-          <a:prstGeom prst="rect">
-            <a:avLst/>
-          </a:prstGeom>
-          <a:noFill/>
-          <a:ln/>
-        </p:spPr>
-        <p:txBody>
-          <a:bodyPr wrap="square" rtlCol="0" anchor="ctr"/>
-          <a:lstStyle/>
-          <a:p>
-            <a:pPr algn="ctr" indent="0" marL="0">
-              <a:buNone/>
-            </a:pPr>
-            <a:r>
-              <a:rPr lang="en-US" sz="1200" b="1" dirty="0">
-                <a:solidFill>
-                  <a:srgbClr val="FFFFFF"/>
-                </a:solidFill>
-                <a:latin typeface="Arial" pitchFamily="34" charset="0"/>
-                <a:ea typeface="Arial" pitchFamily="34" charset="-122"/>
-                <a:cs typeface="Arial" pitchFamily="34" charset="-120"/>
-              </a:rPr>
-              <a:t>01</a:t>
-            </a:r>
-            <a:endParaRPr lang="en-US" sz="1200" dirty="0"/>
-          </a:p>
-        </p:txBody>
-      </p:sp>
-      <p:sp>
-        <p:nvSpPr>
-          <p:cNvPr id="4" name="Shape 2"/>
-          <p:cNvSpPr/>
-          <p:nvPr/>
-        </p:nvSpPr>
-        <p:spPr>
-          <a:xfrm>
-            <a:off x="1900006" y="320040"/>
-            <a:ext cx="1086190" cy="502920"/>
-          </a:xfrm>
-          <a:prstGeom prst="roundRect">
-            <a:avLst>
-              <a:gd name="adj" fmla="val 21818"/>
-            </a:avLst>
-          </a:prstGeom>
-          <a:solidFill>
-            <a:srgbClr val="0B8A5E"/>
-          </a:solidFill>
-          <a:ln w="12700">
-            <a:solidFill>
-              <a:srgbClr val="F4F7F6"/>
-            </a:solidFill>
-            <a:prstDash val="solid"/>
-          </a:ln>
-        </p:spPr>
-      </p:sp>
-      <p:sp>
-        <p:nvSpPr>
-          <p:cNvPr id="5" name="Text 3"/>
-          <p:cNvSpPr/>
-          <p:nvPr/>
-        </p:nvSpPr>
-        <p:spPr>
-          <a:xfrm>
-            <a:off x="1872574" y="320040"/>
-            <a:ext cx="1141054" cy="502920"/>
-          </a:xfrm>
-          <a:prstGeom prst="rect">
-            <a:avLst/>
-          </a:prstGeom>
-          <a:noFill/>
-          <a:ln/>
-        </p:spPr>
-        <p:txBody>
-          <a:bodyPr wrap="square" rtlCol="0" anchor="ctr"/>
-          <a:lstStyle/>
-          <a:p>
-            <a:pPr algn="ctr" indent="0" marL="0">
-              <a:buNone/>
-            </a:pPr>
-            <a:r>
-              <a:rPr lang="en-US" sz="1200" b="1" dirty="0">
-                <a:solidFill>
-                  <a:srgbClr val="FFFFFF"/>
-                </a:solidFill>
-                <a:latin typeface="Arial" pitchFamily="34" charset="0"/>
-                <a:ea typeface="Arial" pitchFamily="34" charset="-122"/>
-                <a:cs typeface="Arial" pitchFamily="34" charset="-120"/>
-              </a:rPr>
-              <a:t>02</a:t>
-            </a:r>
-            <a:endParaRPr lang="en-US" sz="1200" dirty="0"/>
-          </a:p>
-        </p:txBody>
-      </p:sp>
-      <p:sp>
-        <p:nvSpPr>
-          <p:cNvPr id="6" name="Shape 4"/>
-          <p:cNvSpPr/>
-          <p:nvPr/>
-        </p:nvSpPr>
-        <p:spPr>
-          <a:xfrm>
-            <a:off x="3041061" y="320040"/>
-            <a:ext cx="1086190" cy="502920"/>
-          </a:xfrm>
-          <a:prstGeom prst="roundRect">
-            <a:avLst>
-              <a:gd name="adj" fmla="val 21818"/>
-            </a:avLst>
-          </a:prstGeom>
-          <a:solidFill>
-            <a:srgbClr val="0F9F6E"/>
-          </a:solidFill>
-          <a:ln w="12700">
-            <a:solidFill>
-              <a:srgbClr val="F4F7F6"/>
-            </a:solidFill>
-            <a:prstDash val="solid"/>
-          </a:ln>
-        </p:spPr>
-      </p:sp>
-      <p:sp>
-        <p:nvSpPr>
-          <p:cNvPr id="7" name="Text 5"/>
-          <p:cNvSpPr/>
-          <p:nvPr/>
-        </p:nvSpPr>
-        <p:spPr>
-          <a:xfrm>
-            <a:off x="3013629" y="320040"/>
-            <a:ext cx="1141054" cy="502920"/>
-          </a:xfrm>
-          <a:prstGeom prst="rect">
-            <a:avLst/>
-          </a:prstGeom>
-          <a:noFill/>
-          <a:ln/>
-        </p:spPr>
-        <p:txBody>
-          <a:bodyPr wrap="square" rtlCol="0" anchor="ctr"/>
-          <a:lstStyle/>
-          <a:p>
-            <a:pPr algn="ctr" indent="0" marL="0">
-              <a:buNone/>
-            </a:pPr>
-            <a:r>
-              <a:rPr lang="en-US" sz="1200" b="1" dirty="0">
-                <a:solidFill>
-                  <a:srgbClr val="FFFFFF"/>
-                </a:solidFill>
-                <a:latin typeface="Arial" pitchFamily="34" charset="0"/>
-                <a:ea typeface="Arial" pitchFamily="34" charset="-122"/>
-                <a:cs typeface="Arial" pitchFamily="34" charset="-120"/>
-              </a:rPr>
-              <a:t>03</a:t>
-            </a:r>
-            <a:endParaRPr lang="en-US" sz="1200" dirty="0"/>
-          </a:p>
-        </p:txBody>
-      </p:sp>
-      <p:sp>
-        <p:nvSpPr>
-          <p:cNvPr id="8" name="Shape 6"/>
-          <p:cNvSpPr/>
-          <p:nvPr/>
-        </p:nvSpPr>
-        <p:spPr>
-          <a:xfrm>
-            <a:off x="4182115" y="320040"/>
-            <a:ext cx="2683667" cy="502920"/>
-          </a:xfrm>
-          <a:prstGeom prst="roundRect">
-            <a:avLst>
-              <a:gd name="adj" fmla="val 21818"/>
-            </a:avLst>
-          </a:prstGeom>
-          <a:solidFill>
-            <a:srgbClr val="17B57F"/>
-          </a:solidFill>
-          <a:ln w="12700">
-            <a:solidFill>
-              <a:srgbClr val="F4F7F6"/>
-            </a:solidFill>
-            <a:prstDash val="solid"/>
-          </a:ln>
-        </p:spPr>
-      </p:sp>
-      <p:sp>
-        <p:nvSpPr>
-          <p:cNvPr id="9" name="Text 7"/>
-          <p:cNvSpPr/>
-          <p:nvPr/>
-        </p:nvSpPr>
-        <p:spPr>
-          <a:xfrm>
-            <a:off x="4154683" y="320040"/>
-            <a:ext cx="2738531" cy="502920"/>
-          </a:xfrm>
-          <a:prstGeom prst="rect">
-            <a:avLst/>
-          </a:prstGeom>
-          <a:noFill/>
-          <a:ln/>
-        </p:spPr>
-        <p:txBody>
-          <a:bodyPr wrap="square" rtlCol="0" anchor="ctr"/>
-          <a:lstStyle/>
-          <a:p>
-            <a:pPr algn="ctr" indent="0" marL="0">
-              <a:buNone/>
-            </a:pPr>
-            <a:r>
-              <a:rPr lang="en-US" sz="1200" b="1" dirty="0">
-                <a:solidFill>
-                  <a:srgbClr val="FFFFFF"/>
-                </a:solidFill>
-                <a:latin typeface="Arial" pitchFamily="34" charset="0"/>
-                <a:ea typeface="Arial" pitchFamily="34" charset="-122"/>
-                <a:cs typeface="Arial" pitchFamily="34" charset="-120"/>
-              </a:rPr>
-              <a:t>04 // DEMO · 60S</a:t>
-            </a:r>
-            <a:endParaRPr lang="en-US" sz="1200" dirty="0"/>
-          </a:p>
-        </p:txBody>
-      </p:sp>
-      <p:sp>
-        <p:nvSpPr>
-          <p:cNvPr id="10" name="Shape 8"/>
-          <p:cNvSpPr/>
-          <p:nvPr/>
-        </p:nvSpPr>
-        <p:spPr>
-          <a:xfrm>
-            <a:off x="4227835" y="365760"/>
-            <a:ext cx="2592227" cy="411480"/>
-          </a:xfrm>
-          <a:prstGeom prst="roundRect">
-            <a:avLst>
-              <a:gd name="adj" fmla="val 22222"/>
-            </a:avLst>
-          </a:prstGeom>
-          <a:ln w="25400">
-            <a:solidFill>
-              <a:srgbClr val="FFFFFF"/>
-            </a:solidFill>
-            <a:prstDash val="solid"/>
-          </a:ln>
-        </p:spPr>
-      </p:sp>
-      <p:sp>
-        <p:nvSpPr>
-          <p:cNvPr id="11" name="Shape 9"/>
-          <p:cNvSpPr/>
-          <p:nvPr/>
-        </p:nvSpPr>
-        <p:spPr>
-          <a:xfrm>
-            <a:off x="6920646" y="320040"/>
-            <a:ext cx="1086190" cy="502920"/>
-          </a:xfrm>
-          <a:prstGeom prst="roundRect">
-            <a:avLst>
-              <a:gd name="adj" fmla="val 21818"/>
-            </a:avLst>
-          </a:prstGeom>
-          <a:solidFill>
-            <a:srgbClr val="0F9F6E"/>
-          </a:solidFill>
-          <a:ln w="12700">
-            <a:solidFill>
-              <a:srgbClr val="F4F7F6"/>
-            </a:solidFill>
-            <a:prstDash val="solid"/>
-          </a:ln>
-        </p:spPr>
-      </p:sp>
-      <p:sp>
-        <p:nvSpPr>
-          <p:cNvPr id="12" name="Text 10"/>
-          <p:cNvSpPr/>
-          <p:nvPr/>
-        </p:nvSpPr>
-        <p:spPr>
-          <a:xfrm>
-            <a:off x="6893214" y="320040"/>
-            <a:ext cx="1141054" cy="502920"/>
-          </a:xfrm>
-          <a:prstGeom prst="rect">
-            <a:avLst/>
-          </a:prstGeom>
-          <a:noFill/>
-          <a:ln/>
-        </p:spPr>
-        <p:txBody>
-          <a:bodyPr wrap="square" rtlCol="0" anchor="ctr"/>
-          <a:lstStyle/>
-          <a:p>
-            <a:pPr algn="ctr" indent="0" marL="0">
-              <a:buNone/>
-            </a:pPr>
-            <a:r>
-              <a:rPr lang="en-US" sz="1200" b="1" dirty="0">
-                <a:solidFill>
-                  <a:srgbClr val="FFFFFF"/>
-                </a:solidFill>
-                <a:latin typeface="Arial" pitchFamily="34" charset="0"/>
-                <a:ea typeface="Arial" pitchFamily="34" charset="-122"/>
-                <a:cs typeface="Arial" pitchFamily="34" charset="-120"/>
-              </a:rPr>
-              <a:t>05</a:t>
-            </a:r>
-            <a:endParaRPr lang="en-US" sz="1200" dirty="0"/>
-          </a:p>
-        </p:txBody>
-      </p:sp>
-      <p:sp>
-        <p:nvSpPr>
-          <p:cNvPr id="13" name="Shape 11"/>
-          <p:cNvSpPr/>
-          <p:nvPr/>
-        </p:nvSpPr>
-        <p:spPr>
-          <a:xfrm>
-            <a:off x="8061701" y="320040"/>
-            <a:ext cx="1086190" cy="502920"/>
-          </a:xfrm>
-          <a:prstGeom prst="roundRect">
-            <a:avLst>
-              <a:gd name="adj" fmla="val 21818"/>
-            </a:avLst>
-          </a:prstGeom>
-          <a:solidFill>
-            <a:srgbClr val="0B8A5E"/>
-          </a:solidFill>
-          <a:ln w="12700">
-            <a:solidFill>
-              <a:srgbClr val="F4F7F6"/>
-            </a:solidFill>
-            <a:prstDash val="solid"/>
-          </a:ln>
-        </p:spPr>
-      </p:sp>
-      <p:sp>
-        <p:nvSpPr>
-          <p:cNvPr id="14" name="Text 12"/>
-          <p:cNvSpPr/>
-          <p:nvPr/>
-        </p:nvSpPr>
-        <p:spPr>
-          <a:xfrm>
-            <a:off x="8034269" y="320040"/>
-            <a:ext cx="1141054" cy="502920"/>
-          </a:xfrm>
-          <a:prstGeom prst="rect">
-            <a:avLst/>
-          </a:prstGeom>
-          <a:noFill/>
-          <a:ln/>
-        </p:spPr>
-        <p:txBody>
-          <a:bodyPr wrap="square" rtlCol="0" anchor="ctr"/>
-          <a:lstStyle/>
-          <a:p>
-            <a:pPr algn="ctr" indent="0" marL="0">
-              <a:buNone/>
-            </a:pPr>
-            <a:r>
-              <a:rPr lang="en-US" sz="1200" b="1" dirty="0">
-                <a:solidFill>
-                  <a:srgbClr val="FFFFFF"/>
-                </a:solidFill>
-                <a:latin typeface="Arial" pitchFamily="34" charset="0"/>
-                <a:ea typeface="Arial" pitchFamily="34" charset="-122"/>
-                <a:cs typeface="Arial" pitchFamily="34" charset="-120"/>
-              </a:rPr>
-              <a:t>06</a:t>
-            </a:r>
-            <a:endParaRPr lang="en-US" sz="1200" dirty="0"/>
-          </a:p>
-        </p:txBody>
-      </p:sp>
-      <p:sp>
-        <p:nvSpPr>
-          <p:cNvPr id="15" name="Shape 13"/>
-          <p:cNvSpPr/>
-          <p:nvPr/>
-        </p:nvSpPr>
-        <p:spPr>
-          <a:xfrm>
-            <a:off x="9202755" y="320040"/>
-            <a:ext cx="1086190" cy="502920"/>
-          </a:xfrm>
-          <a:prstGeom prst="roundRect">
-            <a:avLst>
-              <a:gd name="adj" fmla="val 21818"/>
-            </a:avLst>
-          </a:prstGeom>
-          <a:solidFill>
-            <a:srgbClr val="0B3D2C"/>
-          </a:solidFill>
-          <a:ln w="12700">
-            <a:solidFill>
-              <a:srgbClr val="F4F7F6"/>
-            </a:solidFill>
-            <a:prstDash val="solid"/>
-          </a:ln>
-        </p:spPr>
-      </p:sp>
-      <p:sp>
-        <p:nvSpPr>
-          <p:cNvPr id="16" name="Text 14"/>
-          <p:cNvSpPr/>
-          <p:nvPr/>
-        </p:nvSpPr>
-        <p:spPr>
-          <a:xfrm>
-            <a:off x="9175323" y="320040"/>
-            <a:ext cx="1141054" cy="502920"/>
-          </a:xfrm>
-          <a:prstGeom prst="rect">
-            <a:avLst/>
-          </a:prstGeom>
-          <a:noFill/>
-          <a:ln/>
-        </p:spPr>
-        <p:txBody>
-          <a:bodyPr wrap="square" rtlCol="0" anchor="ctr"/>
-          <a:lstStyle/>
-          <a:p>
-            <a:pPr algn="ctr" indent="0" marL="0">
-              <a:buNone/>
-            </a:pPr>
-            <a:r>
-              <a:rPr lang="en-US" sz="1200" b="1" dirty="0">
-                <a:solidFill>
-                  <a:srgbClr val="FFFFFF"/>
-                </a:solidFill>
-                <a:latin typeface="Arial" pitchFamily="34" charset="0"/>
-                <a:ea typeface="Arial" pitchFamily="34" charset="-122"/>
-                <a:cs typeface="Arial" pitchFamily="34" charset="-120"/>
-              </a:rPr>
-              <a:t>07</a:t>
-            </a:r>
-            <a:endParaRPr lang="en-US" sz="1200" dirty="0"/>
-          </a:p>
-        </p:txBody>
-      </p:sp>
-      <p:sp>
-        <p:nvSpPr>
-          <p:cNvPr id="17" name="Shape 15"/>
-          <p:cNvSpPr/>
-          <p:nvPr/>
-        </p:nvSpPr>
-        <p:spPr>
-          <a:xfrm>
-            <a:off x="10343810" y="320040"/>
-            <a:ext cx="1086190" cy="502920"/>
-          </a:xfrm>
-          <a:prstGeom prst="roundRect">
-            <a:avLst>
-              <a:gd name="adj" fmla="val 21818"/>
-            </a:avLst>
-          </a:prstGeom>
-          <a:solidFill>
-            <a:srgbClr val="22C58B"/>
-          </a:solidFill>
-          <a:ln w="12700">
-            <a:solidFill>
-              <a:srgbClr val="F4F7F6"/>
-            </a:solidFill>
-            <a:prstDash val="solid"/>
-          </a:ln>
-        </p:spPr>
-      </p:sp>
-      <p:sp>
-        <p:nvSpPr>
-          <p:cNvPr id="18" name="Text 16"/>
-          <p:cNvSpPr/>
-          <p:nvPr/>
-        </p:nvSpPr>
-        <p:spPr>
-          <a:xfrm>
-            <a:off x="10316378" y="320040"/>
-            <a:ext cx="1141054" cy="502920"/>
-          </a:xfrm>
-          <a:prstGeom prst="rect">
-            <a:avLst/>
-          </a:prstGeom>
-          <a:noFill/>
-          <a:ln/>
-        </p:spPr>
-        <p:txBody>
-          <a:bodyPr wrap="square" rtlCol="0" anchor="ctr"/>
-          <a:lstStyle/>
-          <a:p>
-            <a:pPr algn="ctr" indent="0" marL="0">
-              <a:buNone/>
-            </a:pPr>
-            <a:r>
-              <a:rPr lang="en-US" sz="1200" b="1" dirty="0">
-                <a:solidFill>
-                  <a:srgbClr val="FFFFFF"/>
-                </a:solidFill>
-                <a:latin typeface="Arial" pitchFamily="34" charset="0"/>
-                <a:ea typeface="Arial" pitchFamily="34" charset="-122"/>
-                <a:cs typeface="Arial" pitchFamily="34" charset="-120"/>
-              </a:rPr>
-              <a:t>08</a:t>
-            </a:r>
-            <a:endParaRPr lang="en-US" sz="1200" dirty="0"/>
-          </a:p>
-        </p:txBody>
-      </p:sp>
-      <p:sp>
-        <p:nvSpPr>
-          <p:cNvPr id="19" name="Text 17"/>
-          <p:cNvSpPr/>
-          <p:nvPr/>
-        </p:nvSpPr>
-        <p:spPr>
-          <a:xfrm>
-            <a:off x="731520" y="1097280"/>
+          <p:cNvPr id="2" name="Text 0"/>
+          <p:cNvSpPr/>
+          <p:nvPr/>
+        </p:nvSpPr>
+        <p:spPr>
+          <a:xfrm>
+            <a:off x="731520" y="640080"/>
             <a:ext cx="5029200" cy="365760"/>
           </a:xfrm>
           <a:prstGeom prst="roundRect">
@@ -5533,7 +3325,7 @@
       </p:sp>
       <p:sp>
         <p:nvSpPr>
-          <p:cNvPr id="20" name="Text 18"/>
+          <p:cNvPr id="3" name="Text 1"/>
           <p:cNvSpPr/>
           <p:nvPr/>
         </p:nvSpPr>
@@ -5572,7 +3364,7 @@
       </p:sp>
       <p:sp>
         <p:nvSpPr>
-          <p:cNvPr id="21" name="Text 19"/>
+          <p:cNvPr id="4" name="Text 2"/>
           <p:cNvSpPr/>
           <p:nvPr/>
         </p:nvSpPr>
@@ -5611,7 +3403,7 @@
       </p:sp>
       <p:sp>
         <p:nvSpPr>
-          <p:cNvPr id="22" name="Shape 20"/>
+          <p:cNvPr id="5" name="Shape 3"/>
           <p:cNvSpPr/>
           <p:nvPr/>
         </p:nvSpPr>
@@ -5670,565 +3462,13 @@
       </p:grpSpPr>
       <p:sp>
         <p:nvSpPr>
-          <p:cNvPr id="2" name="Shape 0"/>
-          <p:cNvSpPr/>
-          <p:nvPr/>
-        </p:nvSpPr>
-        <p:spPr>
-          <a:xfrm>
-            <a:off x="758952" y="320040"/>
-            <a:ext cx="1086190" cy="502920"/>
-          </a:xfrm>
-          <a:prstGeom prst="roundRect">
-            <a:avLst>
-              <a:gd name="adj" fmla="val 21818"/>
-            </a:avLst>
-          </a:prstGeom>
-          <a:solidFill>
-            <a:srgbClr val="0B3D2C"/>
-          </a:solidFill>
-          <a:ln w="12700">
-            <a:solidFill>
-              <a:srgbClr val="F4F7F6"/>
-            </a:solidFill>
-            <a:prstDash val="solid"/>
-          </a:ln>
-        </p:spPr>
-      </p:sp>
-      <p:sp>
-        <p:nvSpPr>
-          <p:cNvPr id="3" name="Text 1"/>
-          <p:cNvSpPr/>
-          <p:nvPr/>
-        </p:nvSpPr>
-        <p:spPr>
-          <a:xfrm>
-            <a:off x="731520" y="320040"/>
-            <a:ext cx="1141054" cy="502920"/>
-          </a:xfrm>
-          <a:prstGeom prst="rect">
-            <a:avLst/>
-          </a:prstGeom>
-          <a:noFill/>
-          <a:ln/>
-        </p:spPr>
-        <p:txBody>
-          <a:bodyPr wrap="square" rtlCol="0" anchor="ctr"/>
-          <a:lstStyle/>
-          <a:p>
-            <a:pPr algn="ctr" indent="0" marL="0">
-              <a:buNone/>
-            </a:pPr>
-            <a:r>
-              <a:rPr lang="en-US" sz="1200" b="1" dirty="0">
-                <a:solidFill>
-                  <a:srgbClr val="FFFFFF"/>
-                </a:solidFill>
-                <a:latin typeface="Arial" pitchFamily="34" charset="0"/>
-                <a:ea typeface="Arial" pitchFamily="34" charset="-122"/>
-                <a:cs typeface="Arial" pitchFamily="34" charset="-120"/>
-              </a:rPr>
-              <a:t>01</a:t>
-            </a:r>
-            <a:endParaRPr lang="en-US" sz="1200" dirty="0"/>
-          </a:p>
-        </p:txBody>
-      </p:sp>
-      <p:sp>
-        <p:nvSpPr>
-          <p:cNvPr id="4" name="Shape 2"/>
-          <p:cNvSpPr/>
-          <p:nvPr/>
-        </p:nvSpPr>
-        <p:spPr>
-          <a:xfrm>
-            <a:off x="1900006" y="320040"/>
-            <a:ext cx="1086190" cy="502920"/>
-          </a:xfrm>
-          <a:prstGeom prst="roundRect">
-            <a:avLst>
-              <a:gd name="adj" fmla="val 21818"/>
-            </a:avLst>
-          </a:prstGeom>
-          <a:solidFill>
-            <a:srgbClr val="0B8A5E"/>
-          </a:solidFill>
-          <a:ln w="12700">
-            <a:solidFill>
-              <a:srgbClr val="F4F7F6"/>
-            </a:solidFill>
-            <a:prstDash val="solid"/>
-          </a:ln>
-        </p:spPr>
-      </p:sp>
-      <p:sp>
-        <p:nvSpPr>
-          <p:cNvPr id="5" name="Text 3"/>
-          <p:cNvSpPr/>
-          <p:nvPr/>
-        </p:nvSpPr>
-        <p:spPr>
-          <a:xfrm>
-            <a:off x="1872574" y="320040"/>
-            <a:ext cx="1141054" cy="502920"/>
-          </a:xfrm>
-          <a:prstGeom prst="rect">
-            <a:avLst/>
-          </a:prstGeom>
-          <a:noFill/>
-          <a:ln/>
-        </p:spPr>
-        <p:txBody>
-          <a:bodyPr wrap="square" rtlCol="0" anchor="ctr"/>
-          <a:lstStyle/>
-          <a:p>
-            <a:pPr algn="ctr" indent="0" marL="0">
-              <a:buNone/>
-            </a:pPr>
-            <a:r>
-              <a:rPr lang="en-US" sz="1200" b="1" dirty="0">
-                <a:solidFill>
-                  <a:srgbClr val="FFFFFF"/>
-                </a:solidFill>
-                <a:latin typeface="Arial" pitchFamily="34" charset="0"/>
-                <a:ea typeface="Arial" pitchFamily="34" charset="-122"/>
-                <a:cs typeface="Arial" pitchFamily="34" charset="-120"/>
-              </a:rPr>
-              <a:t>02</a:t>
-            </a:r>
-            <a:endParaRPr lang="en-US" sz="1200" dirty="0"/>
-          </a:p>
-        </p:txBody>
-      </p:sp>
-      <p:sp>
-        <p:nvSpPr>
-          <p:cNvPr id="6" name="Shape 4"/>
-          <p:cNvSpPr/>
-          <p:nvPr/>
-        </p:nvSpPr>
-        <p:spPr>
-          <a:xfrm>
-            <a:off x="3041061" y="320040"/>
-            <a:ext cx="1086190" cy="502920"/>
-          </a:xfrm>
-          <a:prstGeom prst="roundRect">
-            <a:avLst>
-              <a:gd name="adj" fmla="val 21818"/>
-            </a:avLst>
-          </a:prstGeom>
-          <a:solidFill>
-            <a:srgbClr val="0F9F6E"/>
-          </a:solidFill>
-          <a:ln w="12700">
-            <a:solidFill>
-              <a:srgbClr val="F4F7F6"/>
-            </a:solidFill>
-            <a:prstDash val="solid"/>
-          </a:ln>
-        </p:spPr>
-      </p:sp>
-      <p:sp>
-        <p:nvSpPr>
-          <p:cNvPr id="7" name="Text 5"/>
-          <p:cNvSpPr/>
-          <p:nvPr/>
-        </p:nvSpPr>
-        <p:spPr>
-          <a:xfrm>
-            <a:off x="3013629" y="320040"/>
-            <a:ext cx="1141054" cy="502920"/>
-          </a:xfrm>
-          <a:prstGeom prst="rect">
-            <a:avLst/>
-          </a:prstGeom>
-          <a:noFill/>
-          <a:ln/>
-        </p:spPr>
-        <p:txBody>
-          <a:bodyPr wrap="square" rtlCol="0" anchor="ctr"/>
-          <a:lstStyle/>
-          <a:p>
-            <a:pPr algn="ctr" indent="0" marL="0">
-              <a:buNone/>
-            </a:pPr>
-            <a:r>
-              <a:rPr lang="en-US" sz="1200" b="1" dirty="0">
-                <a:solidFill>
-                  <a:srgbClr val="FFFFFF"/>
-                </a:solidFill>
-                <a:latin typeface="Arial" pitchFamily="34" charset="0"/>
-                <a:ea typeface="Arial" pitchFamily="34" charset="-122"/>
-                <a:cs typeface="Arial" pitchFamily="34" charset="-120"/>
-              </a:rPr>
-              <a:t>03</a:t>
-            </a:r>
-            <a:endParaRPr lang="en-US" sz="1200" dirty="0"/>
-          </a:p>
-        </p:txBody>
-      </p:sp>
-      <p:sp>
-        <p:nvSpPr>
-          <p:cNvPr id="8" name="Shape 6"/>
-          <p:cNvSpPr/>
-          <p:nvPr/>
-        </p:nvSpPr>
-        <p:spPr>
-          <a:xfrm>
-            <a:off x="4182115" y="320040"/>
-            <a:ext cx="2683667" cy="502920"/>
-          </a:xfrm>
-          <a:prstGeom prst="roundRect">
-            <a:avLst>
-              <a:gd name="adj" fmla="val 21818"/>
-            </a:avLst>
-          </a:prstGeom>
-          <a:solidFill>
-            <a:srgbClr val="17B57F"/>
-          </a:solidFill>
-          <a:ln w="12700">
-            <a:solidFill>
-              <a:srgbClr val="F4F7F6"/>
-            </a:solidFill>
-            <a:prstDash val="solid"/>
-          </a:ln>
-        </p:spPr>
-      </p:sp>
-      <p:sp>
-        <p:nvSpPr>
-          <p:cNvPr id="9" name="Text 7"/>
-          <p:cNvSpPr/>
-          <p:nvPr/>
-        </p:nvSpPr>
-        <p:spPr>
-          <a:xfrm>
-            <a:off x="4154683" y="320040"/>
-            <a:ext cx="2738531" cy="502920"/>
-          </a:xfrm>
-          <a:prstGeom prst="rect">
-            <a:avLst/>
-          </a:prstGeom>
-          <a:noFill/>
-          <a:ln/>
-        </p:spPr>
-        <p:txBody>
-          <a:bodyPr wrap="square" rtlCol="0" anchor="ctr"/>
-          <a:lstStyle/>
-          <a:p>
-            <a:pPr algn="ctr" indent="0" marL="0">
-              <a:buNone/>
-            </a:pPr>
-            <a:r>
-              <a:rPr lang="en-US" sz="1200" b="1" dirty="0">
-                <a:solidFill>
-                  <a:srgbClr val="FFFFFF"/>
-                </a:solidFill>
-                <a:latin typeface="Arial" pitchFamily="34" charset="0"/>
-                <a:ea typeface="Arial" pitchFamily="34" charset="-122"/>
-                <a:cs typeface="Arial" pitchFamily="34" charset="-120"/>
-              </a:rPr>
-              <a:t>04 // DEMO · 60S</a:t>
-            </a:r>
-            <a:endParaRPr lang="en-US" sz="1200" dirty="0"/>
-          </a:p>
-        </p:txBody>
-      </p:sp>
-      <p:sp>
-        <p:nvSpPr>
-          <p:cNvPr id="10" name="Shape 8"/>
-          <p:cNvSpPr/>
-          <p:nvPr/>
-        </p:nvSpPr>
-        <p:spPr>
-          <a:xfrm>
-            <a:off x="6920646" y="320040"/>
-            <a:ext cx="1086190" cy="502920"/>
-          </a:xfrm>
-          <a:prstGeom prst="roundRect">
-            <a:avLst>
-              <a:gd name="adj" fmla="val 21818"/>
-            </a:avLst>
-          </a:prstGeom>
-          <a:solidFill>
-            <a:srgbClr val="0F9F6E"/>
-          </a:solidFill>
-          <a:ln w="12700">
-            <a:solidFill>
-              <a:srgbClr val="F4F7F6"/>
-            </a:solidFill>
-            <a:prstDash val="solid"/>
-          </a:ln>
-        </p:spPr>
-      </p:sp>
-      <p:sp>
-        <p:nvSpPr>
-          <p:cNvPr id="11" name="Text 9"/>
-          <p:cNvSpPr/>
-          <p:nvPr/>
-        </p:nvSpPr>
-        <p:spPr>
-          <a:xfrm>
-            <a:off x="6893214" y="320040"/>
-            <a:ext cx="1141054" cy="502920"/>
-          </a:xfrm>
-          <a:prstGeom prst="rect">
-            <a:avLst/>
-          </a:prstGeom>
-          <a:noFill/>
-          <a:ln/>
-        </p:spPr>
-        <p:txBody>
-          <a:bodyPr wrap="square" rtlCol="0" anchor="ctr"/>
-          <a:lstStyle/>
-          <a:p>
-            <a:pPr algn="ctr" indent="0" marL="0">
-              <a:buNone/>
-            </a:pPr>
-            <a:r>
-              <a:rPr lang="en-US" sz="1200" b="1" dirty="0">
-                <a:solidFill>
-                  <a:srgbClr val="FFFFFF"/>
-                </a:solidFill>
-                <a:latin typeface="Arial" pitchFamily="34" charset="0"/>
-                <a:ea typeface="Arial" pitchFamily="34" charset="-122"/>
-                <a:cs typeface="Arial" pitchFamily="34" charset="-120"/>
-              </a:rPr>
-              <a:t>05</a:t>
-            </a:r>
-            <a:endParaRPr lang="en-US" sz="1200" dirty="0"/>
-          </a:p>
-        </p:txBody>
-      </p:sp>
-      <p:sp>
-        <p:nvSpPr>
-          <p:cNvPr id="12" name="Shape 10"/>
-          <p:cNvSpPr/>
-          <p:nvPr/>
-        </p:nvSpPr>
-        <p:spPr>
-          <a:xfrm>
-            <a:off x="6966366" y="365760"/>
-            <a:ext cx="994750" cy="411480"/>
-          </a:xfrm>
-          <a:prstGeom prst="roundRect">
-            <a:avLst>
-              <a:gd name="adj" fmla="val 22222"/>
-            </a:avLst>
-          </a:prstGeom>
-          <a:ln w="25400">
-            <a:solidFill>
-              <a:srgbClr val="FFFFFF"/>
-            </a:solidFill>
-            <a:prstDash val="solid"/>
-          </a:ln>
-        </p:spPr>
-      </p:sp>
-      <p:sp>
-        <p:nvSpPr>
-          <p:cNvPr id="13" name="Shape 11"/>
-          <p:cNvSpPr/>
-          <p:nvPr/>
-        </p:nvSpPr>
-        <p:spPr>
-          <a:xfrm>
-            <a:off x="8061701" y="320040"/>
-            <a:ext cx="1086190" cy="502920"/>
-          </a:xfrm>
-          <a:prstGeom prst="roundRect">
-            <a:avLst>
-              <a:gd name="adj" fmla="val 21818"/>
-            </a:avLst>
-          </a:prstGeom>
-          <a:solidFill>
-            <a:srgbClr val="0B8A5E"/>
-          </a:solidFill>
-          <a:ln w="12700">
-            <a:solidFill>
-              <a:srgbClr val="F4F7F6"/>
-            </a:solidFill>
-            <a:prstDash val="solid"/>
-          </a:ln>
-        </p:spPr>
-      </p:sp>
-      <p:sp>
-        <p:nvSpPr>
-          <p:cNvPr id="14" name="Text 12"/>
-          <p:cNvSpPr/>
-          <p:nvPr/>
-        </p:nvSpPr>
-        <p:spPr>
-          <a:xfrm>
-            <a:off x="8034269" y="320040"/>
-            <a:ext cx="1141054" cy="502920"/>
-          </a:xfrm>
-          <a:prstGeom prst="rect">
-            <a:avLst/>
-          </a:prstGeom>
-          <a:noFill/>
-          <a:ln/>
-        </p:spPr>
-        <p:txBody>
-          <a:bodyPr wrap="square" rtlCol="0" anchor="ctr"/>
-          <a:lstStyle/>
-          <a:p>
-            <a:pPr algn="ctr" indent="0" marL="0">
-              <a:buNone/>
-            </a:pPr>
-            <a:r>
-              <a:rPr lang="en-US" sz="1200" b="1" dirty="0">
-                <a:solidFill>
-                  <a:srgbClr val="FFFFFF"/>
-                </a:solidFill>
-                <a:latin typeface="Arial" pitchFamily="34" charset="0"/>
-                <a:ea typeface="Arial" pitchFamily="34" charset="-122"/>
-                <a:cs typeface="Arial" pitchFamily="34" charset="-120"/>
-              </a:rPr>
-              <a:t>06</a:t>
-            </a:r>
-            <a:endParaRPr lang="en-US" sz="1200" dirty="0"/>
-          </a:p>
-        </p:txBody>
-      </p:sp>
-      <p:sp>
-        <p:nvSpPr>
-          <p:cNvPr id="15" name="Shape 13"/>
-          <p:cNvSpPr/>
-          <p:nvPr/>
-        </p:nvSpPr>
-        <p:spPr>
-          <a:xfrm>
-            <a:off x="9202755" y="320040"/>
-            <a:ext cx="1086190" cy="502920"/>
-          </a:xfrm>
-          <a:prstGeom prst="roundRect">
-            <a:avLst>
-              <a:gd name="adj" fmla="val 21818"/>
-            </a:avLst>
-          </a:prstGeom>
-          <a:solidFill>
-            <a:srgbClr val="0B3D2C"/>
-          </a:solidFill>
-          <a:ln w="12700">
-            <a:solidFill>
-              <a:srgbClr val="F4F7F6"/>
-            </a:solidFill>
-            <a:prstDash val="solid"/>
-          </a:ln>
-        </p:spPr>
-      </p:sp>
-      <p:sp>
-        <p:nvSpPr>
-          <p:cNvPr id="16" name="Text 14"/>
-          <p:cNvSpPr/>
-          <p:nvPr/>
-        </p:nvSpPr>
-        <p:spPr>
-          <a:xfrm>
-            <a:off x="9175323" y="320040"/>
-            <a:ext cx="1141054" cy="502920"/>
-          </a:xfrm>
-          <a:prstGeom prst="rect">
-            <a:avLst/>
-          </a:prstGeom>
-          <a:noFill/>
-          <a:ln/>
-        </p:spPr>
-        <p:txBody>
-          <a:bodyPr wrap="square" rtlCol="0" anchor="ctr"/>
-          <a:lstStyle/>
-          <a:p>
-            <a:pPr algn="ctr" indent="0" marL="0">
-              <a:buNone/>
-            </a:pPr>
-            <a:r>
-              <a:rPr lang="en-US" sz="1200" b="1" dirty="0">
-                <a:solidFill>
-                  <a:srgbClr val="FFFFFF"/>
-                </a:solidFill>
-                <a:latin typeface="Arial" pitchFamily="34" charset="0"/>
-                <a:ea typeface="Arial" pitchFamily="34" charset="-122"/>
-                <a:cs typeface="Arial" pitchFamily="34" charset="-120"/>
-              </a:rPr>
-              <a:t>07</a:t>
-            </a:r>
-            <a:endParaRPr lang="en-US" sz="1200" dirty="0"/>
-          </a:p>
-        </p:txBody>
-      </p:sp>
-      <p:sp>
-        <p:nvSpPr>
-          <p:cNvPr id="17" name="Shape 15"/>
-          <p:cNvSpPr/>
-          <p:nvPr/>
-        </p:nvSpPr>
-        <p:spPr>
-          <a:xfrm>
-            <a:off x="10343810" y="320040"/>
-            <a:ext cx="1086190" cy="502920"/>
-          </a:xfrm>
-          <a:prstGeom prst="roundRect">
-            <a:avLst>
-              <a:gd name="adj" fmla="val 21818"/>
-            </a:avLst>
-          </a:prstGeom>
-          <a:solidFill>
-            <a:srgbClr val="22C58B"/>
-          </a:solidFill>
-          <a:ln w="12700">
-            <a:solidFill>
-              <a:srgbClr val="F4F7F6"/>
-            </a:solidFill>
-            <a:prstDash val="solid"/>
-          </a:ln>
-        </p:spPr>
-      </p:sp>
-      <p:sp>
-        <p:nvSpPr>
-          <p:cNvPr id="18" name="Text 16"/>
-          <p:cNvSpPr/>
-          <p:nvPr/>
-        </p:nvSpPr>
-        <p:spPr>
-          <a:xfrm>
-            <a:off x="10316378" y="320040"/>
-            <a:ext cx="1141054" cy="502920"/>
-          </a:xfrm>
-          <a:prstGeom prst="rect">
-            <a:avLst/>
-          </a:prstGeom>
-          <a:noFill/>
-          <a:ln/>
-        </p:spPr>
-        <p:txBody>
-          <a:bodyPr wrap="square" rtlCol="0" anchor="ctr"/>
-          <a:lstStyle/>
-          <a:p>
-            <a:pPr algn="ctr" indent="0" marL="0">
-              <a:buNone/>
-            </a:pPr>
-            <a:r>
-              <a:rPr lang="en-US" sz="1200" b="1" dirty="0">
-                <a:solidFill>
-                  <a:srgbClr val="FFFFFF"/>
-                </a:solidFill>
-                <a:latin typeface="Arial" pitchFamily="34" charset="0"/>
-                <a:ea typeface="Arial" pitchFamily="34" charset="-122"/>
-                <a:cs typeface="Arial" pitchFamily="34" charset="-120"/>
-              </a:rPr>
-              <a:t>08</a:t>
-            </a:r>
-            <a:endParaRPr lang="en-US" sz="1200" dirty="0"/>
-          </a:p>
-        </p:txBody>
-      </p:sp>
-      <p:sp>
-        <p:nvSpPr>
-          <p:cNvPr id="19" name="Text 17"/>
-          <p:cNvSpPr/>
-          <p:nvPr/>
-        </p:nvSpPr>
-        <p:spPr>
-          <a:xfrm>
-            <a:off x="731520" y="1097280"/>
+          <p:cNvPr id="2" name="Text 0"/>
+          <p:cNvSpPr/>
+          <p:nvPr/>
+        </p:nvSpPr>
+        <p:spPr>
+          <a:xfrm>
+            <a:off x="731520" y="640080"/>
             <a:ext cx="5029200" cy="365760"/>
           </a:xfrm>
           <a:prstGeom prst="roundRect">
@@ -6265,7 +3505,7 @@
       </p:sp>
       <p:sp>
         <p:nvSpPr>
-          <p:cNvPr id="20" name="Text 18"/>
+          <p:cNvPr id="3" name="Text 1"/>
           <p:cNvSpPr/>
           <p:nvPr/>
         </p:nvSpPr>
@@ -6304,7 +3544,7 @@
       </p:sp>
       <p:sp>
         <p:nvSpPr>
-          <p:cNvPr id="21" name="Text 19"/>
+          <p:cNvPr id="4" name="Text 2"/>
           <p:cNvSpPr/>
           <p:nvPr/>
         </p:nvSpPr>
@@ -6343,7 +3583,7 @@
       </p:sp>
       <p:sp>
         <p:nvSpPr>
-          <p:cNvPr id="22" name="Text 20"/>
+          <p:cNvPr id="5" name="Text 3"/>
           <p:cNvSpPr/>
           <p:nvPr/>
         </p:nvSpPr>
@@ -6382,7 +3622,7 @@
       </p:sp>
       <p:sp>
         <p:nvSpPr>
-          <p:cNvPr id="23" name="Shape 21"/>
+          <p:cNvPr id="6" name="Shape 4"/>
           <p:cNvSpPr/>
           <p:nvPr/>
         </p:nvSpPr>
@@ -6405,7 +3645,7 @@
       </p:sp>
       <p:sp>
         <p:nvSpPr>
-          <p:cNvPr id="24" name="Shape 22"/>
+          <p:cNvPr id="7" name="Shape 5"/>
           <p:cNvSpPr/>
           <p:nvPr/>
         </p:nvSpPr>
@@ -6439,7 +3679,7 @@
       </p:sp>
       <p:sp>
         <p:nvSpPr>
-          <p:cNvPr id="25" name="Text 23"/>
+          <p:cNvPr id="8" name="Text 6"/>
           <p:cNvSpPr/>
           <p:nvPr/>
         </p:nvSpPr>
@@ -6478,7 +3718,7 @@
       </p:sp>
       <p:sp>
         <p:nvSpPr>
-          <p:cNvPr id="26" name="Text 24"/>
+          <p:cNvPr id="9" name="Text 7"/>
           <p:cNvSpPr/>
           <p:nvPr/>
         </p:nvSpPr>
@@ -6517,7 +3757,7 @@
       </p:sp>
       <p:sp>
         <p:nvSpPr>
-          <p:cNvPr id="27" name="Text 25"/>
+          <p:cNvPr id="10" name="Text 8"/>
           <p:cNvSpPr/>
           <p:nvPr/>
         </p:nvSpPr>
@@ -6556,7 +3796,7 @@
       </p:sp>
       <p:sp>
         <p:nvSpPr>
-          <p:cNvPr id="28" name="Shape 26"/>
+          <p:cNvPr id="11" name="Shape 9"/>
           <p:cNvSpPr/>
           <p:nvPr/>
         </p:nvSpPr>
@@ -6590,7 +3830,7 @@
       </p:sp>
       <p:sp>
         <p:nvSpPr>
-          <p:cNvPr id="29" name="Text 27"/>
+          <p:cNvPr id="12" name="Text 10"/>
           <p:cNvSpPr/>
           <p:nvPr/>
         </p:nvSpPr>
@@ -6629,7 +3869,7 @@
       </p:sp>
       <p:sp>
         <p:nvSpPr>
-          <p:cNvPr id="30" name="Text 28"/>
+          <p:cNvPr id="13" name="Text 11"/>
           <p:cNvSpPr/>
           <p:nvPr/>
         </p:nvSpPr>
@@ -6668,7 +3908,7 @@
       </p:sp>
       <p:sp>
         <p:nvSpPr>
-          <p:cNvPr id="31" name="Text 29"/>
+          <p:cNvPr id="14" name="Text 12"/>
           <p:cNvSpPr/>
           <p:nvPr/>
         </p:nvSpPr>
@@ -6739,565 +3979,13 @@
       </p:grpSpPr>
       <p:sp>
         <p:nvSpPr>
-          <p:cNvPr id="2" name="Shape 0"/>
-          <p:cNvSpPr/>
-          <p:nvPr/>
-        </p:nvSpPr>
-        <p:spPr>
-          <a:xfrm>
-            <a:off x="758952" y="320040"/>
-            <a:ext cx="1086190" cy="502920"/>
-          </a:xfrm>
-          <a:prstGeom prst="roundRect">
-            <a:avLst>
-              <a:gd name="adj" fmla="val 21818"/>
-            </a:avLst>
-          </a:prstGeom>
-          <a:solidFill>
-            <a:srgbClr val="0B3D2C"/>
-          </a:solidFill>
-          <a:ln w="12700">
-            <a:solidFill>
-              <a:srgbClr val="F4F7F6"/>
-            </a:solidFill>
-            <a:prstDash val="solid"/>
-          </a:ln>
-        </p:spPr>
-      </p:sp>
-      <p:sp>
-        <p:nvSpPr>
-          <p:cNvPr id="3" name="Text 1"/>
-          <p:cNvSpPr/>
-          <p:nvPr/>
-        </p:nvSpPr>
-        <p:spPr>
-          <a:xfrm>
-            <a:off x="731520" y="320040"/>
-            <a:ext cx="1141054" cy="502920"/>
-          </a:xfrm>
-          <a:prstGeom prst="rect">
-            <a:avLst/>
-          </a:prstGeom>
-          <a:noFill/>
-          <a:ln/>
-        </p:spPr>
-        <p:txBody>
-          <a:bodyPr wrap="square" rtlCol="0" anchor="ctr"/>
-          <a:lstStyle/>
-          <a:p>
-            <a:pPr algn="ctr" indent="0" marL="0">
-              <a:buNone/>
-            </a:pPr>
-            <a:r>
-              <a:rPr lang="en-US" sz="1200" b="1" dirty="0">
-                <a:solidFill>
-                  <a:srgbClr val="FFFFFF"/>
-                </a:solidFill>
-                <a:latin typeface="Arial" pitchFamily="34" charset="0"/>
-                <a:ea typeface="Arial" pitchFamily="34" charset="-122"/>
-                <a:cs typeface="Arial" pitchFamily="34" charset="-120"/>
-              </a:rPr>
-              <a:t>01</a:t>
-            </a:r>
-            <a:endParaRPr lang="en-US" sz="1200" dirty="0"/>
-          </a:p>
-        </p:txBody>
-      </p:sp>
-      <p:sp>
-        <p:nvSpPr>
-          <p:cNvPr id="4" name="Shape 2"/>
-          <p:cNvSpPr/>
-          <p:nvPr/>
-        </p:nvSpPr>
-        <p:spPr>
-          <a:xfrm>
-            <a:off x="1900006" y="320040"/>
-            <a:ext cx="1086190" cy="502920"/>
-          </a:xfrm>
-          <a:prstGeom prst="roundRect">
-            <a:avLst>
-              <a:gd name="adj" fmla="val 21818"/>
-            </a:avLst>
-          </a:prstGeom>
-          <a:solidFill>
-            <a:srgbClr val="0B8A5E"/>
-          </a:solidFill>
-          <a:ln w="12700">
-            <a:solidFill>
-              <a:srgbClr val="F4F7F6"/>
-            </a:solidFill>
-            <a:prstDash val="solid"/>
-          </a:ln>
-        </p:spPr>
-      </p:sp>
-      <p:sp>
-        <p:nvSpPr>
-          <p:cNvPr id="5" name="Text 3"/>
-          <p:cNvSpPr/>
-          <p:nvPr/>
-        </p:nvSpPr>
-        <p:spPr>
-          <a:xfrm>
-            <a:off x="1872574" y="320040"/>
-            <a:ext cx="1141054" cy="502920"/>
-          </a:xfrm>
-          <a:prstGeom prst="rect">
-            <a:avLst/>
-          </a:prstGeom>
-          <a:noFill/>
-          <a:ln/>
-        </p:spPr>
-        <p:txBody>
-          <a:bodyPr wrap="square" rtlCol="0" anchor="ctr"/>
-          <a:lstStyle/>
-          <a:p>
-            <a:pPr algn="ctr" indent="0" marL="0">
-              <a:buNone/>
-            </a:pPr>
-            <a:r>
-              <a:rPr lang="en-US" sz="1200" b="1" dirty="0">
-                <a:solidFill>
-                  <a:srgbClr val="FFFFFF"/>
-                </a:solidFill>
-                <a:latin typeface="Arial" pitchFamily="34" charset="0"/>
-                <a:ea typeface="Arial" pitchFamily="34" charset="-122"/>
-                <a:cs typeface="Arial" pitchFamily="34" charset="-120"/>
-              </a:rPr>
-              <a:t>02</a:t>
-            </a:r>
-            <a:endParaRPr lang="en-US" sz="1200" dirty="0"/>
-          </a:p>
-        </p:txBody>
-      </p:sp>
-      <p:sp>
-        <p:nvSpPr>
-          <p:cNvPr id="6" name="Shape 4"/>
-          <p:cNvSpPr/>
-          <p:nvPr/>
-        </p:nvSpPr>
-        <p:spPr>
-          <a:xfrm>
-            <a:off x="3041061" y="320040"/>
-            <a:ext cx="1086190" cy="502920"/>
-          </a:xfrm>
-          <a:prstGeom prst="roundRect">
-            <a:avLst>
-              <a:gd name="adj" fmla="val 21818"/>
-            </a:avLst>
-          </a:prstGeom>
-          <a:solidFill>
-            <a:srgbClr val="0F9F6E"/>
-          </a:solidFill>
-          <a:ln w="12700">
-            <a:solidFill>
-              <a:srgbClr val="F4F7F6"/>
-            </a:solidFill>
-            <a:prstDash val="solid"/>
-          </a:ln>
-        </p:spPr>
-      </p:sp>
-      <p:sp>
-        <p:nvSpPr>
-          <p:cNvPr id="7" name="Text 5"/>
-          <p:cNvSpPr/>
-          <p:nvPr/>
-        </p:nvSpPr>
-        <p:spPr>
-          <a:xfrm>
-            <a:off x="3013629" y="320040"/>
-            <a:ext cx="1141054" cy="502920"/>
-          </a:xfrm>
-          <a:prstGeom prst="rect">
-            <a:avLst/>
-          </a:prstGeom>
-          <a:noFill/>
-          <a:ln/>
-        </p:spPr>
-        <p:txBody>
-          <a:bodyPr wrap="square" rtlCol="0" anchor="ctr"/>
-          <a:lstStyle/>
-          <a:p>
-            <a:pPr algn="ctr" indent="0" marL="0">
-              <a:buNone/>
-            </a:pPr>
-            <a:r>
-              <a:rPr lang="en-US" sz="1200" b="1" dirty="0">
-                <a:solidFill>
-                  <a:srgbClr val="FFFFFF"/>
-                </a:solidFill>
-                <a:latin typeface="Arial" pitchFamily="34" charset="0"/>
-                <a:ea typeface="Arial" pitchFamily="34" charset="-122"/>
-                <a:cs typeface="Arial" pitchFamily="34" charset="-120"/>
-              </a:rPr>
-              <a:t>03</a:t>
-            </a:r>
-            <a:endParaRPr lang="en-US" sz="1200" dirty="0"/>
-          </a:p>
-        </p:txBody>
-      </p:sp>
-      <p:sp>
-        <p:nvSpPr>
-          <p:cNvPr id="8" name="Shape 6"/>
-          <p:cNvSpPr/>
-          <p:nvPr/>
-        </p:nvSpPr>
-        <p:spPr>
-          <a:xfrm>
-            <a:off x="4182115" y="320040"/>
-            <a:ext cx="2683667" cy="502920"/>
-          </a:xfrm>
-          <a:prstGeom prst="roundRect">
-            <a:avLst>
-              <a:gd name="adj" fmla="val 21818"/>
-            </a:avLst>
-          </a:prstGeom>
-          <a:solidFill>
-            <a:srgbClr val="17B57F"/>
-          </a:solidFill>
-          <a:ln w="12700">
-            <a:solidFill>
-              <a:srgbClr val="F4F7F6"/>
-            </a:solidFill>
-            <a:prstDash val="solid"/>
-          </a:ln>
-        </p:spPr>
-      </p:sp>
-      <p:sp>
-        <p:nvSpPr>
-          <p:cNvPr id="9" name="Text 7"/>
-          <p:cNvSpPr/>
-          <p:nvPr/>
-        </p:nvSpPr>
-        <p:spPr>
-          <a:xfrm>
-            <a:off x="4154683" y="320040"/>
-            <a:ext cx="2738531" cy="502920"/>
-          </a:xfrm>
-          <a:prstGeom prst="rect">
-            <a:avLst/>
-          </a:prstGeom>
-          <a:noFill/>
-          <a:ln/>
-        </p:spPr>
-        <p:txBody>
-          <a:bodyPr wrap="square" rtlCol="0" anchor="ctr"/>
-          <a:lstStyle/>
-          <a:p>
-            <a:pPr algn="ctr" indent="0" marL="0">
-              <a:buNone/>
-            </a:pPr>
-            <a:r>
-              <a:rPr lang="en-US" sz="1200" b="1" dirty="0">
-                <a:solidFill>
-                  <a:srgbClr val="FFFFFF"/>
-                </a:solidFill>
-                <a:latin typeface="Arial" pitchFamily="34" charset="0"/>
-                <a:ea typeface="Arial" pitchFamily="34" charset="-122"/>
-                <a:cs typeface="Arial" pitchFamily="34" charset="-120"/>
-              </a:rPr>
-              <a:t>04 // DEMO · 60S</a:t>
-            </a:r>
-            <a:endParaRPr lang="en-US" sz="1200" dirty="0"/>
-          </a:p>
-        </p:txBody>
-      </p:sp>
-      <p:sp>
-        <p:nvSpPr>
-          <p:cNvPr id="10" name="Shape 8"/>
-          <p:cNvSpPr/>
-          <p:nvPr/>
-        </p:nvSpPr>
-        <p:spPr>
-          <a:xfrm>
-            <a:off x="6920646" y="320040"/>
-            <a:ext cx="1086190" cy="502920"/>
-          </a:xfrm>
-          <a:prstGeom prst="roundRect">
-            <a:avLst>
-              <a:gd name="adj" fmla="val 21818"/>
-            </a:avLst>
-          </a:prstGeom>
-          <a:solidFill>
-            <a:srgbClr val="0F9F6E"/>
-          </a:solidFill>
-          <a:ln w="12700">
-            <a:solidFill>
-              <a:srgbClr val="F4F7F6"/>
-            </a:solidFill>
-            <a:prstDash val="solid"/>
-          </a:ln>
-        </p:spPr>
-      </p:sp>
-      <p:sp>
-        <p:nvSpPr>
-          <p:cNvPr id="11" name="Text 9"/>
-          <p:cNvSpPr/>
-          <p:nvPr/>
-        </p:nvSpPr>
-        <p:spPr>
-          <a:xfrm>
-            <a:off x="6893214" y="320040"/>
-            <a:ext cx="1141054" cy="502920"/>
-          </a:xfrm>
-          <a:prstGeom prst="rect">
-            <a:avLst/>
-          </a:prstGeom>
-          <a:noFill/>
-          <a:ln/>
-        </p:spPr>
-        <p:txBody>
-          <a:bodyPr wrap="square" rtlCol="0" anchor="ctr"/>
-          <a:lstStyle/>
-          <a:p>
-            <a:pPr algn="ctr" indent="0" marL="0">
-              <a:buNone/>
-            </a:pPr>
-            <a:r>
-              <a:rPr lang="en-US" sz="1200" b="1" dirty="0">
-                <a:solidFill>
-                  <a:srgbClr val="FFFFFF"/>
-                </a:solidFill>
-                <a:latin typeface="Arial" pitchFamily="34" charset="0"/>
-                <a:ea typeface="Arial" pitchFamily="34" charset="-122"/>
-                <a:cs typeface="Arial" pitchFamily="34" charset="-120"/>
-              </a:rPr>
-              <a:t>05</a:t>
-            </a:r>
-            <a:endParaRPr lang="en-US" sz="1200" dirty="0"/>
-          </a:p>
-        </p:txBody>
-      </p:sp>
-      <p:sp>
-        <p:nvSpPr>
-          <p:cNvPr id="12" name="Shape 10"/>
-          <p:cNvSpPr/>
-          <p:nvPr/>
-        </p:nvSpPr>
-        <p:spPr>
-          <a:xfrm>
-            <a:off x="8061701" y="320040"/>
-            <a:ext cx="1086190" cy="502920"/>
-          </a:xfrm>
-          <a:prstGeom prst="roundRect">
-            <a:avLst>
-              <a:gd name="adj" fmla="val 21818"/>
-            </a:avLst>
-          </a:prstGeom>
-          <a:solidFill>
-            <a:srgbClr val="0B8A5E"/>
-          </a:solidFill>
-          <a:ln w="12700">
-            <a:solidFill>
-              <a:srgbClr val="F4F7F6"/>
-            </a:solidFill>
-            <a:prstDash val="solid"/>
-          </a:ln>
-        </p:spPr>
-      </p:sp>
-      <p:sp>
-        <p:nvSpPr>
-          <p:cNvPr id="13" name="Text 11"/>
-          <p:cNvSpPr/>
-          <p:nvPr/>
-        </p:nvSpPr>
-        <p:spPr>
-          <a:xfrm>
-            <a:off x="8034269" y="320040"/>
-            <a:ext cx="1141054" cy="502920"/>
-          </a:xfrm>
-          <a:prstGeom prst="rect">
-            <a:avLst/>
-          </a:prstGeom>
-          <a:noFill/>
-          <a:ln/>
-        </p:spPr>
-        <p:txBody>
-          <a:bodyPr wrap="square" rtlCol="0" anchor="ctr"/>
-          <a:lstStyle/>
-          <a:p>
-            <a:pPr algn="ctr" indent="0" marL="0">
-              <a:buNone/>
-            </a:pPr>
-            <a:r>
-              <a:rPr lang="en-US" sz="1200" b="1" dirty="0">
-                <a:solidFill>
-                  <a:srgbClr val="FFFFFF"/>
-                </a:solidFill>
-                <a:latin typeface="Arial" pitchFamily="34" charset="0"/>
-                <a:ea typeface="Arial" pitchFamily="34" charset="-122"/>
-                <a:cs typeface="Arial" pitchFamily="34" charset="-120"/>
-              </a:rPr>
-              <a:t>06</a:t>
-            </a:r>
-            <a:endParaRPr lang="en-US" sz="1200" dirty="0"/>
-          </a:p>
-        </p:txBody>
-      </p:sp>
-      <p:sp>
-        <p:nvSpPr>
-          <p:cNvPr id="14" name="Shape 12"/>
-          <p:cNvSpPr/>
-          <p:nvPr/>
-        </p:nvSpPr>
-        <p:spPr>
-          <a:xfrm>
-            <a:off x="8107421" y="365760"/>
-            <a:ext cx="994750" cy="411480"/>
-          </a:xfrm>
-          <a:prstGeom prst="roundRect">
-            <a:avLst>
-              <a:gd name="adj" fmla="val 22222"/>
-            </a:avLst>
-          </a:prstGeom>
-          <a:ln w="25400">
-            <a:solidFill>
-              <a:srgbClr val="FFFFFF"/>
-            </a:solidFill>
-            <a:prstDash val="solid"/>
-          </a:ln>
-        </p:spPr>
-      </p:sp>
-      <p:sp>
-        <p:nvSpPr>
-          <p:cNvPr id="15" name="Shape 13"/>
-          <p:cNvSpPr/>
-          <p:nvPr/>
-        </p:nvSpPr>
-        <p:spPr>
-          <a:xfrm>
-            <a:off x="9202755" y="320040"/>
-            <a:ext cx="1086190" cy="502920"/>
-          </a:xfrm>
-          <a:prstGeom prst="roundRect">
-            <a:avLst>
-              <a:gd name="adj" fmla="val 21818"/>
-            </a:avLst>
-          </a:prstGeom>
-          <a:solidFill>
-            <a:srgbClr val="0B3D2C"/>
-          </a:solidFill>
-          <a:ln w="12700">
-            <a:solidFill>
-              <a:srgbClr val="F4F7F6"/>
-            </a:solidFill>
-            <a:prstDash val="solid"/>
-          </a:ln>
-        </p:spPr>
-      </p:sp>
-      <p:sp>
-        <p:nvSpPr>
-          <p:cNvPr id="16" name="Text 14"/>
-          <p:cNvSpPr/>
-          <p:nvPr/>
-        </p:nvSpPr>
-        <p:spPr>
-          <a:xfrm>
-            <a:off x="9175323" y="320040"/>
-            <a:ext cx="1141054" cy="502920"/>
-          </a:xfrm>
-          <a:prstGeom prst="rect">
-            <a:avLst/>
-          </a:prstGeom>
-          <a:noFill/>
-          <a:ln/>
-        </p:spPr>
-        <p:txBody>
-          <a:bodyPr wrap="square" rtlCol="0" anchor="ctr"/>
-          <a:lstStyle/>
-          <a:p>
-            <a:pPr algn="ctr" indent="0" marL="0">
-              <a:buNone/>
-            </a:pPr>
-            <a:r>
-              <a:rPr lang="en-US" sz="1200" b="1" dirty="0">
-                <a:solidFill>
-                  <a:srgbClr val="FFFFFF"/>
-                </a:solidFill>
-                <a:latin typeface="Arial" pitchFamily="34" charset="0"/>
-                <a:ea typeface="Arial" pitchFamily="34" charset="-122"/>
-                <a:cs typeface="Arial" pitchFamily="34" charset="-120"/>
-              </a:rPr>
-              <a:t>07</a:t>
-            </a:r>
-            <a:endParaRPr lang="en-US" sz="1200" dirty="0"/>
-          </a:p>
-        </p:txBody>
-      </p:sp>
-      <p:sp>
-        <p:nvSpPr>
-          <p:cNvPr id="17" name="Shape 15"/>
-          <p:cNvSpPr/>
-          <p:nvPr/>
-        </p:nvSpPr>
-        <p:spPr>
-          <a:xfrm>
-            <a:off x="10343810" y="320040"/>
-            <a:ext cx="1086190" cy="502920"/>
-          </a:xfrm>
-          <a:prstGeom prst="roundRect">
-            <a:avLst>
-              <a:gd name="adj" fmla="val 21818"/>
-            </a:avLst>
-          </a:prstGeom>
-          <a:solidFill>
-            <a:srgbClr val="22C58B"/>
-          </a:solidFill>
-          <a:ln w="12700">
-            <a:solidFill>
-              <a:srgbClr val="F4F7F6"/>
-            </a:solidFill>
-            <a:prstDash val="solid"/>
-          </a:ln>
-        </p:spPr>
-      </p:sp>
-      <p:sp>
-        <p:nvSpPr>
-          <p:cNvPr id="18" name="Text 16"/>
-          <p:cNvSpPr/>
-          <p:nvPr/>
-        </p:nvSpPr>
-        <p:spPr>
-          <a:xfrm>
-            <a:off x="10316378" y="320040"/>
-            <a:ext cx="1141054" cy="502920"/>
-          </a:xfrm>
-          <a:prstGeom prst="rect">
-            <a:avLst/>
-          </a:prstGeom>
-          <a:noFill/>
-          <a:ln/>
-        </p:spPr>
-        <p:txBody>
-          <a:bodyPr wrap="square" rtlCol="0" anchor="ctr"/>
-          <a:lstStyle/>
-          <a:p>
-            <a:pPr algn="ctr" indent="0" marL="0">
-              <a:buNone/>
-            </a:pPr>
-            <a:r>
-              <a:rPr lang="en-US" sz="1200" b="1" dirty="0">
-                <a:solidFill>
-                  <a:srgbClr val="FFFFFF"/>
-                </a:solidFill>
-                <a:latin typeface="Arial" pitchFamily="34" charset="0"/>
-                <a:ea typeface="Arial" pitchFamily="34" charset="-122"/>
-                <a:cs typeface="Arial" pitchFamily="34" charset="-120"/>
-              </a:rPr>
-              <a:t>08</a:t>
-            </a:r>
-            <a:endParaRPr lang="en-US" sz="1200" dirty="0"/>
-          </a:p>
-        </p:txBody>
-      </p:sp>
-      <p:sp>
-        <p:nvSpPr>
-          <p:cNvPr id="19" name="Text 17"/>
-          <p:cNvSpPr/>
-          <p:nvPr/>
-        </p:nvSpPr>
-        <p:spPr>
-          <a:xfrm>
-            <a:off x="731520" y="1097280"/>
+          <p:cNvPr id="2" name="Text 0"/>
+          <p:cNvSpPr/>
+          <p:nvPr/>
+        </p:nvSpPr>
+        <p:spPr>
+          <a:xfrm>
+            <a:off x="731520" y="640080"/>
             <a:ext cx="5029200" cy="365760"/>
           </a:xfrm>
           <a:prstGeom prst="roundRect">
@@ -7334,7 +4022,7 @@
       </p:sp>
       <p:sp>
         <p:nvSpPr>
-          <p:cNvPr id="20" name="Text 18"/>
+          <p:cNvPr id="3" name="Text 1"/>
           <p:cNvSpPr/>
           <p:nvPr/>
         </p:nvSpPr>
@@ -7373,7 +4061,7 @@
       </p:sp>
       <p:sp>
         <p:nvSpPr>
-          <p:cNvPr id="21" name="Text 19"/>
+          <p:cNvPr id="4" name="Text 2"/>
           <p:cNvSpPr/>
           <p:nvPr/>
         </p:nvSpPr>
@@ -7412,7 +4100,7 @@
       </p:sp>
       <p:sp>
         <p:nvSpPr>
-          <p:cNvPr id="22" name="Text 20"/>
+          <p:cNvPr id="5" name="Text 3"/>
           <p:cNvSpPr/>
           <p:nvPr/>
         </p:nvSpPr>
@@ -7451,7 +4139,7 @@
       </p:sp>
       <p:sp>
         <p:nvSpPr>
-          <p:cNvPr id="23" name="Shape 21"/>
+          <p:cNvPr id="6" name="Shape 4"/>
           <p:cNvSpPr/>
           <p:nvPr/>
         </p:nvSpPr>
@@ -7474,7 +4162,7 @@
       </p:sp>
       <p:sp>
         <p:nvSpPr>
-          <p:cNvPr id="24" name="Shape 22"/>
+          <p:cNvPr id="7" name="Shape 5"/>
           <p:cNvSpPr/>
           <p:nvPr/>
         </p:nvSpPr>
@@ -7508,7 +4196,7 @@
       </p:sp>
       <p:sp>
         <p:nvSpPr>
-          <p:cNvPr id="25" name="Text 23"/>
+          <p:cNvPr id="8" name="Text 6"/>
           <p:cNvSpPr/>
           <p:nvPr/>
         </p:nvSpPr>
@@ -7547,7 +4235,7 @@
       </p:sp>
       <p:sp>
         <p:nvSpPr>
-          <p:cNvPr id="26" name="Text 24"/>
+          <p:cNvPr id="9" name="Text 7"/>
           <p:cNvSpPr/>
           <p:nvPr/>
         </p:nvSpPr>
@@ -7586,7 +4274,7 @@
       </p:sp>
       <p:sp>
         <p:nvSpPr>
-          <p:cNvPr id="27" name="Text 25"/>
+          <p:cNvPr id="10" name="Text 8"/>
           <p:cNvSpPr/>
           <p:nvPr/>
         </p:nvSpPr>
@@ -7625,7 +4313,7 @@
       </p:sp>
       <p:sp>
         <p:nvSpPr>
-          <p:cNvPr id="28" name="Shape 26"/>
+          <p:cNvPr id="11" name="Shape 9"/>
           <p:cNvSpPr/>
           <p:nvPr/>
         </p:nvSpPr>
@@ -7659,7 +4347,7 @@
       </p:sp>
       <p:sp>
         <p:nvSpPr>
-          <p:cNvPr id="29" name="Text 27"/>
+          <p:cNvPr id="12" name="Text 10"/>
           <p:cNvSpPr/>
           <p:nvPr/>
         </p:nvSpPr>
@@ -7698,7 +4386,7 @@
       </p:sp>
       <p:sp>
         <p:nvSpPr>
-          <p:cNvPr id="30" name="Text 28"/>
+          <p:cNvPr id="13" name="Text 11"/>
           <p:cNvSpPr/>
           <p:nvPr/>
         </p:nvSpPr>
@@ -7737,7 +4425,7 @@
       </p:sp>
       <p:sp>
         <p:nvSpPr>
-          <p:cNvPr id="31" name="Text 29"/>
+          <p:cNvPr id="14" name="Text 12"/>
           <p:cNvSpPr/>
           <p:nvPr/>
         </p:nvSpPr>
@@ -7776,7 +4464,7 @@
       </p:sp>
       <p:sp>
         <p:nvSpPr>
-          <p:cNvPr id="32" name="Text 30"/>
+          <p:cNvPr id="15" name="Text 13"/>
           <p:cNvSpPr/>
           <p:nvPr/>
         </p:nvSpPr>
@@ -7847,565 +4535,13 @@
       </p:grpSpPr>
       <p:sp>
         <p:nvSpPr>
-          <p:cNvPr id="2" name="Shape 0"/>
-          <p:cNvSpPr/>
-          <p:nvPr/>
-        </p:nvSpPr>
-        <p:spPr>
-          <a:xfrm>
-            <a:off x="758952" y="320040"/>
-            <a:ext cx="1086190" cy="502920"/>
-          </a:xfrm>
-          <a:prstGeom prst="roundRect">
-            <a:avLst>
-              <a:gd name="adj" fmla="val 21818"/>
-            </a:avLst>
-          </a:prstGeom>
-          <a:solidFill>
-            <a:srgbClr val="0B3D2C"/>
-          </a:solidFill>
-          <a:ln w="12700">
-            <a:solidFill>
-              <a:srgbClr val="F4F7F6"/>
-            </a:solidFill>
-            <a:prstDash val="solid"/>
-          </a:ln>
-        </p:spPr>
-      </p:sp>
-      <p:sp>
-        <p:nvSpPr>
-          <p:cNvPr id="3" name="Text 1"/>
-          <p:cNvSpPr/>
-          <p:nvPr/>
-        </p:nvSpPr>
-        <p:spPr>
-          <a:xfrm>
-            <a:off x="731520" y="320040"/>
-            <a:ext cx="1141054" cy="502920"/>
-          </a:xfrm>
-          <a:prstGeom prst="rect">
-            <a:avLst/>
-          </a:prstGeom>
-          <a:noFill/>
-          <a:ln/>
-        </p:spPr>
-        <p:txBody>
-          <a:bodyPr wrap="square" rtlCol="0" anchor="ctr"/>
-          <a:lstStyle/>
-          <a:p>
-            <a:pPr algn="ctr" indent="0" marL="0">
-              <a:buNone/>
-            </a:pPr>
-            <a:r>
-              <a:rPr lang="en-US" sz="1200" b="1" dirty="0">
-                <a:solidFill>
-                  <a:srgbClr val="FFFFFF"/>
-                </a:solidFill>
-                <a:latin typeface="Arial" pitchFamily="34" charset="0"/>
-                <a:ea typeface="Arial" pitchFamily="34" charset="-122"/>
-                <a:cs typeface="Arial" pitchFamily="34" charset="-120"/>
-              </a:rPr>
-              <a:t>01</a:t>
-            </a:r>
-            <a:endParaRPr lang="en-US" sz="1200" dirty="0"/>
-          </a:p>
-        </p:txBody>
-      </p:sp>
-      <p:sp>
-        <p:nvSpPr>
-          <p:cNvPr id="4" name="Shape 2"/>
-          <p:cNvSpPr/>
-          <p:nvPr/>
-        </p:nvSpPr>
-        <p:spPr>
-          <a:xfrm>
-            <a:off x="1900006" y="320040"/>
-            <a:ext cx="1086190" cy="502920"/>
-          </a:xfrm>
-          <a:prstGeom prst="roundRect">
-            <a:avLst>
-              <a:gd name="adj" fmla="val 21818"/>
-            </a:avLst>
-          </a:prstGeom>
-          <a:solidFill>
-            <a:srgbClr val="0B8A5E"/>
-          </a:solidFill>
-          <a:ln w="12700">
-            <a:solidFill>
-              <a:srgbClr val="F4F7F6"/>
-            </a:solidFill>
-            <a:prstDash val="solid"/>
-          </a:ln>
-        </p:spPr>
-      </p:sp>
-      <p:sp>
-        <p:nvSpPr>
-          <p:cNvPr id="5" name="Text 3"/>
-          <p:cNvSpPr/>
-          <p:nvPr/>
-        </p:nvSpPr>
-        <p:spPr>
-          <a:xfrm>
-            <a:off x="1872574" y="320040"/>
-            <a:ext cx="1141054" cy="502920"/>
-          </a:xfrm>
-          <a:prstGeom prst="rect">
-            <a:avLst/>
-          </a:prstGeom>
-          <a:noFill/>
-          <a:ln/>
-        </p:spPr>
-        <p:txBody>
-          <a:bodyPr wrap="square" rtlCol="0" anchor="ctr"/>
-          <a:lstStyle/>
-          <a:p>
-            <a:pPr algn="ctr" indent="0" marL="0">
-              <a:buNone/>
-            </a:pPr>
-            <a:r>
-              <a:rPr lang="en-US" sz="1200" b="1" dirty="0">
-                <a:solidFill>
-                  <a:srgbClr val="FFFFFF"/>
-                </a:solidFill>
-                <a:latin typeface="Arial" pitchFamily="34" charset="0"/>
-                <a:ea typeface="Arial" pitchFamily="34" charset="-122"/>
-                <a:cs typeface="Arial" pitchFamily="34" charset="-120"/>
-              </a:rPr>
-              <a:t>02</a:t>
-            </a:r>
-            <a:endParaRPr lang="en-US" sz="1200" dirty="0"/>
-          </a:p>
-        </p:txBody>
-      </p:sp>
-      <p:sp>
-        <p:nvSpPr>
-          <p:cNvPr id="6" name="Shape 4"/>
-          <p:cNvSpPr/>
-          <p:nvPr/>
-        </p:nvSpPr>
-        <p:spPr>
-          <a:xfrm>
-            <a:off x="3041061" y="320040"/>
-            <a:ext cx="1086190" cy="502920"/>
-          </a:xfrm>
-          <a:prstGeom prst="roundRect">
-            <a:avLst>
-              <a:gd name="adj" fmla="val 21818"/>
-            </a:avLst>
-          </a:prstGeom>
-          <a:solidFill>
-            <a:srgbClr val="0F9F6E"/>
-          </a:solidFill>
-          <a:ln w="12700">
-            <a:solidFill>
-              <a:srgbClr val="F4F7F6"/>
-            </a:solidFill>
-            <a:prstDash val="solid"/>
-          </a:ln>
-        </p:spPr>
-      </p:sp>
-      <p:sp>
-        <p:nvSpPr>
-          <p:cNvPr id="7" name="Text 5"/>
-          <p:cNvSpPr/>
-          <p:nvPr/>
-        </p:nvSpPr>
-        <p:spPr>
-          <a:xfrm>
-            <a:off x="3013629" y="320040"/>
-            <a:ext cx="1141054" cy="502920"/>
-          </a:xfrm>
-          <a:prstGeom prst="rect">
-            <a:avLst/>
-          </a:prstGeom>
-          <a:noFill/>
-          <a:ln/>
-        </p:spPr>
-        <p:txBody>
-          <a:bodyPr wrap="square" rtlCol="0" anchor="ctr"/>
-          <a:lstStyle/>
-          <a:p>
-            <a:pPr algn="ctr" indent="0" marL="0">
-              <a:buNone/>
-            </a:pPr>
-            <a:r>
-              <a:rPr lang="en-US" sz="1200" b="1" dirty="0">
-                <a:solidFill>
-                  <a:srgbClr val="FFFFFF"/>
-                </a:solidFill>
-                <a:latin typeface="Arial" pitchFamily="34" charset="0"/>
-                <a:ea typeface="Arial" pitchFamily="34" charset="-122"/>
-                <a:cs typeface="Arial" pitchFamily="34" charset="-120"/>
-              </a:rPr>
-              <a:t>03</a:t>
-            </a:r>
-            <a:endParaRPr lang="en-US" sz="1200" dirty="0"/>
-          </a:p>
-        </p:txBody>
-      </p:sp>
-      <p:sp>
-        <p:nvSpPr>
-          <p:cNvPr id="8" name="Shape 6"/>
-          <p:cNvSpPr/>
-          <p:nvPr/>
-        </p:nvSpPr>
-        <p:spPr>
-          <a:xfrm>
-            <a:off x="4182115" y="320040"/>
-            <a:ext cx="2683667" cy="502920"/>
-          </a:xfrm>
-          <a:prstGeom prst="roundRect">
-            <a:avLst>
-              <a:gd name="adj" fmla="val 21818"/>
-            </a:avLst>
-          </a:prstGeom>
-          <a:solidFill>
-            <a:srgbClr val="17B57F"/>
-          </a:solidFill>
-          <a:ln w="12700">
-            <a:solidFill>
-              <a:srgbClr val="F4F7F6"/>
-            </a:solidFill>
-            <a:prstDash val="solid"/>
-          </a:ln>
-        </p:spPr>
-      </p:sp>
-      <p:sp>
-        <p:nvSpPr>
-          <p:cNvPr id="9" name="Text 7"/>
-          <p:cNvSpPr/>
-          <p:nvPr/>
-        </p:nvSpPr>
-        <p:spPr>
-          <a:xfrm>
-            <a:off x="4154683" y="320040"/>
-            <a:ext cx="2738531" cy="502920"/>
-          </a:xfrm>
-          <a:prstGeom prst="rect">
-            <a:avLst/>
-          </a:prstGeom>
-          <a:noFill/>
-          <a:ln/>
-        </p:spPr>
-        <p:txBody>
-          <a:bodyPr wrap="square" rtlCol="0" anchor="ctr"/>
-          <a:lstStyle/>
-          <a:p>
-            <a:pPr algn="ctr" indent="0" marL="0">
-              <a:buNone/>
-            </a:pPr>
-            <a:r>
-              <a:rPr lang="en-US" sz="1200" b="1" dirty="0">
-                <a:solidFill>
-                  <a:srgbClr val="FFFFFF"/>
-                </a:solidFill>
-                <a:latin typeface="Arial" pitchFamily="34" charset="0"/>
-                <a:ea typeface="Arial" pitchFamily="34" charset="-122"/>
-                <a:cs typeface="Arial" pitchFamily="34" charset="-120"/>
-              </a:rPr>
-              <a:t>04 // DEMO · 60S</a:t>
-            </a:r>
-            <a:endParaRPr lang="en-US" sz="1200" dirty="0"/>
-          </a:p>
-        </p:txBody>
-      </p:sp>
-      <p:sp>
-        <p:nvSpPr>
-          <p:cNvPr id="10" name="Shape 8"/>
-          <p:cNvSpPr/>
-          <p:nvPr/>
-        </p:nvSpPr>
-        <p:spPr>
-          <a:xfrm>
-            <a:off x="6920646" y="320040"/>
-            <a:ext cx="1086190" cy="502920"/>
-          </a:xfrm>
-          <a:prstGeom prst="roundRect">
-            <a:avLst>
-              <a:gd name="adj" fmla="val 21818"/>
-            </a:avLst>
-          </a:prstGeom>
-          <a:solidFill>
-            <a:srgbClr val="0F9F6E"/>
-          </a:solidFill>
-          <a:ln w="12700">
-            <a:solidFill>
-              <a:srgbClr val="F4F7F6"/>
-            </a:solidFill>
-            <a:prstDash val="solid"/>
-          </a:ln>
-        </p:spPr>
-      </p:sp>
-      <p:sp>
-        <p:nvSpPr>
-          <p:cNvPr id="11" name="Text 9"/>
-          <p:cNvSpPr/>
-          <p:nvPr/>
-        </p:nvSpPr>
-        <p:spPr>
-          <a:xfrm>
-            <a:off x="6893214" y="320040"/>
-            <a:ext cx="1141054" cy="502920"/>
-          </a:xfrm>
-          <a:prstGeom prst="rect">
-            <a:avLst/>
-          </a:prstGeom>
-          <a:noFill/>
-          <a:ln/>
-        </p:spPr>
-        <p:txBody>
-          <a:bodyPr wrap="square" rtlCol="0" anchor="ctr"/>
-          <a:lstStyle/>
-          <a:p>
-            <a:pPr algn="ctr" indent="0" marL="0">
-              <a:buNone/>
-            </a:pPr>
-            <a:r>
-              <a:rPr lang="en-US" sz="1200" b="1" dirty="0">
-                <a:solidFill>
-                  <a:srgbClr val="FFFFFF"/>
-                </a:solidFill>
-                <a:latin typeface="Arial" pitchFamily="34" charset="0"/>
-                <a:ea typeface="Arial" pitchFamily="34" charset="-122"/>
-                <a:cs typeface="Arial" pitchFamily="34" charset="-120"/>
-              </a:rPr>
-              <a:t>05</a:t>
-            </a:r>
-            <a:endParaRPr lang="en-US" sz="1200" dirty="0"/>
-          </a:p>
-        </p:txBody>
-      </p:sp>
-      <p:sp>
-        <p:nvSpPr>
-          <p:cNvPr id="12" name="Shape 10"/>
-          <p:cNvSpPr/>
-          <p:nvPr/>
-        </p:nvSpPr>
-        <p:spPr>
-          <a:xfrm>
-            <a:off x="8061701" y="320040"/>
-            <a:ext cx="1086190" cy="502920"/>
-          </a:xfrm>
-          <a:prstGeom prst="roundRect">
-            <a:avLst>
-              <a:gd name="adj" fmla="val 21818"/>
-            </a:avLst>
-          </a:prstGeom>
-          <a:solidFill>
-            <a:srgbClr val="0B8A5E"/>
-          </a:solidFill>
-          <a:ln w="12700">
-            <a:solidFill>
-              <a:srgbClr val="F4F7F6"/>
-            </a:solidFill>
-            <a:prstDash val="solid"/>
-          </a:ln>
-        </p:spPr>
-      </p:sp>
-      <p:sp>
-        <p:nvSpPr>
-          <p:cNvPr id="13" name="Text 11"/>
-          <p:cNvSpPr/>
-          <p:nvPr/>
-        </p:nvSpPr>
-        <p:spPr>
-          <a:xfrm>
-            <a:off x="8034269" y="320040"/>
-            <a:ext cx="1141054" cy="502920"/>
-          </a:xfrm>
-          <a:prstGeom prst="rect">
-            <a:avLst/>
-          </a:prstGeom>
-          <a:noFill/>
-          <a:ln/>
-        </p:spPr>
-        <p:txBody>
-          <a:bodyPr wrap="square" rtlCol="0" anchor="ctr"/>
-          <a:lstStyle/>
-          <a:p>
-            <a:pPr algn="ctr" indent="0" marL="0">
-              <a:buNone/>
-            </a:pPr>
-            <a:r>
-              <a:rPr lang="en-US" sz="1200" b="1" dirty="0">
-                <a:solidFill>
-                  <a:srgbClr val="FFFFFF"/>
-                </a:solidFill>
-                <a:latin typeface="Arial" pitchFamily="34" charset="0"/>
-                <a:ea typeface="Arial" pitchFamily="34" charset="-122"/>
-                <a:cs typeface="Arial" pitchFamily="34" charset="-120"/>
-              </a:rPr>
-              <a:t>06</a:t>
-            </a:r>
-            <a:endParaRPr lang="en-US" sz="1200" dirty="0"/>
-          </a:p>
-        </p:txBody>
-      </p:sp>
-      <p:sp>
-        <p:nvSpPr>
-          <p:cNvPr id="14" name="Shape 12"/>
-          <p:cNvSpPr/>
-          <p:nvPr/>
-        </p:nvSpPr>
-        <p:spPr>
-          <a:xfrm>
-            <a:off x="9202755" y="320040"/>
-            <a:ext cx="1086190" cy="502920"/>
-          </a:xfrm>
-          <a:prstGeom prst="roundRect">
-            <a:avLst>
-              <a:gd name="adj" fmla="val 21818"/>
-            </a:avLst>
-          </a:prstGeom>
-          <a:solidFill>
-            <a:srgbClr val="0B3D2C"/>
-          </a:solidFill>
-          <a:ln w="12700">
-            <a:solidFill>
-              <a:srgbClr val="F4F7F6"/>
-            </a:solidFill>
-            <a:prstDash val="solid"/>
-          </a:ln>
-        </p:spPr>
-      </p:sp>
-      <p:sp>
-        <p:nvSpPr>
-          <p:cNvPr id="15" name="Text 13"/>
-          <p:cNvSpPr/>
-          <p:nvPr/>
-        </p:nvSpPr>
-        <p:spPr>
-          <a:xfrm>
-            <a:off x="9175323" y="320040"/>
-            <a:ext cx="1141054" cy="502920"/>
-          </a:xfrm>
-          <a:prstGeom prst="rect">
-            <a:avLst/>
-          </a:prstGeom>
-          <a:noFill/>
-          <a:ln/>
-        </p:spPr>
-        <p:txBody>
-          <a:bodyPr wrap="square" rtlCol="0" anchor="ctr"/>
-          <a:lstStyle/>
-          <a:p>
-            <a:pPr algn="ctr" indent="0" marL="0">
-              <a:buNone/>
-            </a:pPr>
-            <a:r>
-              <a:rPr lang="en-US" sz="1200" b="1" dirty="0">
-                <a:solidFill>
-                  <a:srgbClr val="FFFFFF"/>
-                </a:solidFill>
-                <a:latin typeface="Arial" pitchFamily="34" charset="0"/>
-                <a:ea typeface="Arial" pitchFamily="34" charset="-122"/>
-                <a:cs typeface="Arial" pitchFamily="34" charset="-120"/>
-              </a:rPr>
-              <a:t>07</a:t>
-            </a:r>
-            <a:endParaRPr lang="en-US" sz="1200" dirty="0"/>
-          </a:p>
-        </p:txBody>
-      </p:sp>
-      <p:sp>
-        <p:nvSpPr>
-          <p:cNvPr id="16" name="Shape 14"/>
-          <p:cNvSpPr/>
-          <p:nvPr/>
-        </p:nvSpPr>
-        <p:spPr>
-          <a:xfrm>
-            <a:off x="9248475" y="365760"/>
-            <a:ext cx="994750" cy="411480"/>
-          </a:xfrm>
-          <a:prstGeom prst="roundRect">
-            <a:avLst>
-              <a:gd name="adj" fmla="val 22222"/>
-            </a:avLst>
-          </a:prstGeom>
-          <a:ln w="25400">
-            <a:solidFill>
-              <a:srgbClr val="FFFFFF"/>
-            </a:solidFill>
-            <a:prstDash val="solid"/>
-          </a:ln>
-        </p:spPr>
-      </p:sp>
-      <p:sp>
-        <p:nvSpPr>
-          <p:cNvPr id="17" name="Shape 15"/>
-          <p:cNvSpPr/>
-          <p:nvPr/>
-        </p:nvSpPr>
-        <p:spPr>
-          <a:xfrm>
-            <a:off x="10343810" y="320040"/>
-            <a:ext cx="1086190" cy="502920"/>
-          </a:xfrm>
-          <a:prstGeom prst="roundRect">
-            <a:avLst>
-              <a:gd name="adj" fmla="val 21818"/>
-            </a:avLst>
-          </a:prstGeom>
-          <a:solidFill>
-            <a:srgbClr val="22C58B"/>
-          </a:solidFill>
-          <a:ln w="12700">
-            <a:solidFill>
-              <a:srgbClr val="F4F7F6"/>
-            </a:solidFill>
-            <a:prstDash val="solid"/>
-          </a:ln>
-        </p:spPr>
-      </p:sp>
-      <p:sp>
-        <p:nvSpPr>
-          <p:cNvPr id="18" name="Text 16"/>
-          <p:cNvSpPr/>
-          <p:nvPr/>
-        </p:nvSpPr>
-        <p:spPr>
-          <a:xfrm>
-            <a:off x="10316378" y="320040"/>
-            <a:ext cx="1141054" cy="502920"/>
-          </a:xfrm>
-          <a:prstGeom prst="rect">
-            <a:avLst/>
-          </a:prstGeom>
-          <a:noFill/>
-          <a:ln/>
-        </p:spPr>
-        <p:txBody>
-          <a:bodyPr wrap="square" rtlCol="0" anchor="ctr"/>
-          <a:lstStyle/>
-          <a:p>
-            <a:pPr algn="ctr" indent="0" marL="0">
-              <a:buNone/>
-            </a:pPr>
-            <a:r>
-              <a:rPr lang="en-US" sz="1200" b="1" dirty="0">
-                <a:solidFill>
-                  <a:srgbClr val="FFFFFF"/>
-                </a:solidFill>
-                <a:latin typeface="Arial" pitchFamily="34" charset="0"/>
-                <a:ea typeface="Arial" pitchFamily="34" charset="-122"/>
-                <a:cs typeface="Arial" pitchFamily="34" charset="-120"/>
-              </a:rPr>
-              <a:t>08</a:t>
-            </a:r>
-            <a:endParaRPr lang="en-US" sz="1200" dirty="0"/>
-          </a:p>
-        </p:txBody>
-      </p:sp>
-      <p:sp>
-        <p:nvSpPr>
-          <p:cNvPr id="19" name="Text 17"/>
-          <p:cNvSpPr/>
-          <p:nvPr/>
-        </p:nvSpPr>
-        <p:spPr>
-          <a:xfrm>
-            <a:off x="731520" y="1097280"/>
+          <p:cNvPr id="2" name="Text 0"/>
+          <p:cNvSpPr/>
+          <p:nvPr/>
+        </p:nvSpPr>
+        <p:spPr>
+          <a:xfrm>
+            <a:off x="731520" y="640080"/>
             <a:ext cx="5029200" cy="365760"/>
           </a:xfrm>
           <a:prstGeom prst="roundRect">
@@ -8442,7 +4578,7 @@
       </p:sp>
       <p:sp>
         <p:nvSpPr>
-          <p:cNvPr id="20" name="Text 18"/>
+          <p:cNvPr id="3" name="Text 1"/>
           <p:cNvSpPr/>
           <p:nvPr/>
         </p:nvSpPr>
@@ -8481,7 +4617,7 @@
       </p:sp>
       <p:sp>
         <p:nvSpPr>
-          <p:cNvPr id="21" name="Text 19"/>
+          <p:cNvPr id="4" name="Text 2"/>
           <p:cNvSpPr/>
           <p:nvPr/>
         </p:nvSpPr>
@@ -8520,7 +4656,7 @@
       </p:sp>
       <p:sp>
         <p:nvSpPr>
-          <p:cNvPr id="22" name="Text 20"/>
+          <p:cNvPr id="5" name="Text 3"/>
           <p:cNvSpPr/>
           <p:nvPr/>
         </p:nvSpPr>
@@ -8559,7 +4695,7 @@
       </p:sp>
       <p:sp>
         <p:nvSpPr>
-          <p:cNvPr id="23" name="Shape 21"/>
+          <p:cNvPr id="6" name="Shape 4"/>
           <p:cNvSpPr/>
           <p:nvPr/>
         </p:nvSpPr>
@@ -8582,7 +4718,7 @@
       </p:sp>
       <p:sp>
         <p:nvSpPr>
-          <p:cNvPr id="24" name="Shape 22"/>
+          <p:cNvPr id="7" name="Shape 5"/>
           <p:cNvSpPr/>
           <p:nvPr/>
         </p:nvSpPr>
@@ -8616,7 +4752,7 @@
       </p:sp>
       <p:sp>
         <p:nvSpPr>
-          <p:cNvPr id="25" name="Text 23"/>
+          <p:cNvPr id="8" name="Text 6"/>
           <p:cNvSpPr/>
           <p:nvPr/>
         </p:nvSpPr>
@@ -8655,7 +4791,7 @@
       </p:sp>
       <p:sp>
         <p:nvSpPr>
-          <p:cNvPr id="26" name="Text 24"/>
+          <p:cNvPr id="9" name="Text 7"/>
           <p:cNvSpPr/>
           <p:nvPr/>
         </p:nvSpPr>
@@ -8694,7 +4830,7 @@
       </p:sp>
       <p:sp>
         <p:nvSpPr>
-          <p:cNvPr id="27" name="Text 25"/>
+          <p:cNvPr id="10" name="Text 8"/>
           <p:cNvSpPr/>
           <p:nvPr/>
         </p:nvSpPr>
@@ -8733,7 +4869,7 @@
       </p:sp>
       <p:sp>
         <p:nvSpPr>
-          <p:cNvPr id="28" name="Shape 26"/>
+          <p:cNvPr id="11" name="Shape 9"/>
           <p:cNvSpPr/>
           <p:nvPr/>
         </p:nvSpPr>
@@ -8767,7 +4903,7 @@
       </p:sp>
       <p:sp>
         <p:nvSpPr>
-          <p:cNvPr id="29" name="Text 27"/>
+          <p:cNvPr id="12" name="Text 10"/>
           <p:cNvSpPr/>
           <p:nvPr/>
         </p:nvSpPr>
@@ -8806,7 +4942,7 @@
       </p:sp>
       <p:sp>
         <p:nvSpPr>
-          <p:cNvPr id="30" name="Text 28"/>
+          <p:cNvPr id="13" name="Text 11"/>
           <p:cNvSpPr/>
           <p:nvPr/>
         </p:nvSpPr>
@@ -8845,7 +4981,7 @@
       </p:sp>
       <p:sp>
         <p:nvSpPr>
-          <p:cNvPr id="31" name="Text 29"/>
+          <p:cNvPr id="14" name="Text 12"/>
           <p:cNvSpPr/>
           <p:nvPr/>
         </p:nvSpPr>
@@ -8884,7 +5020,7 @@
       </p:sp>
       <p:sp>
         <p:nvSpPr>
-          <p:cNvPr id="32" name="Shape 30"/>
+          <p:cNvPr id="15" name="Shape 13"/>
           <p:cNvSpPr/>
           <p:nvPr/>
         </p:nvSpPr>
@@ -8918,7 +5054,7 @@
       </p:sp>
       <p:sp>
         <p:nvSpPr>
-          <p:cNvPr id="33" name="Text 31"/>
+          <p:cNvPr id="16" name="Text 14"/>
           <p:cNvSpPr/>
           <p:nvPr/>
         </p:nvSpPr>
@@ -8957,7 +5093,7 @@
       </p:sp>
       <p:sp>
         <p:nvSpPr>
-          <p:cNvPr id="34" name="Text 32"/>
+          <p:cNvPr id="17" name="Text 15"/>
           <p:cNvSpPr/>
           <p:nvPr/>
         </p:nvSpPr>
@@ -8996,7 +5132,7 @@
       </p:sp>
       <p:sp>
         <p:nvSpPr>
-          <p:cNvPr id="35" name="Text 33"/>
+          <p:cNvPr id="18" name="Text 16"/>
           <p:cNvSpPr/>
           <p:nvPr/>
         </p:nvSpPr>
@@ -9067,565 +5203,13 @@
       </p:grpSpPr>
       <p:sp>
         <p:nvSpPr>
-          <p:cNvPr id="2" name="Shape 0"/>
-          <p:cNvSpPr/>
-          <p:nvPr/>
-        </p:nvSpPr>
-        <p:spPr>
-          <a:xfrm>
-            <a:off x="758952" y="320040"/>
-            <a:ext cx="1086190" cy="502920"/>
-          </a:xfrm>
-          <a:prstGeom prst="roundRect">
-            <a:avLst>
-              <a:gd name="adj" fmla="val 21818"/>
-            </a:avLst>
-          </a:prstGeom>
-          <a:solidFill>
-            <a:srgbClr val="0B3D2C"/>
-          </a:solidFill>
-          <a:ln w="12700">
-            <a:solidFill>
-              <a:srgbClr val="F4F7F6"/>
-            </a:solidFill>
-            <a:prstDash val="solid"/>
-          </a:ln>
-        </p:spPr>
-      </p:sp>
-      <p:sp>
-        <p:nvSpPr>
-          <p:cNvPr id="3" name="Text 1"/>
-          <p:cNvSpPr/>
-          <p:nvPr/>
-        </p:nvSpPr>
-        <p:spPr>
-          <a:xfrm>
-            <a:off x="731520" y="320040"/>
-            <a:ext cx="1141054" cy="502920"/>
-          </a:xfrm>
-          <a:prstGeom prst="rect">
-            <a:avLst/>
-          </a:prstGeom>
-          <a:noFill/>
-          <a:ln/>
-        </p:spPr>
-        <p:txBody>
-          <a:bodyPr wrap="square" rtlCol="0" anchor="ctr"/>
-          <a:lstStyle/>
-          <a:p>
-            <a:pPr algn="ctr" indent="0" marL="0">
-              <a:buNone/>
-            </a:pPr>
-            <a:r>
-              <a:rPr lang="en-US" sz="1200" b="1" dirty="0">
-                <a:solidFill>
-                  <a:srgbClr val="FFFFFF"/>
-                </a:solidFill>
-                <a:latin typeface="Arial" pitchFamily="34" charset="0"/>
-                <a:ea typeface="Arial" pitchFamily="34" charset="-122"/>
-                <a:cs typeface="Arial" pitchFamily="34" charset="-120"/>
-              </a:rPr>
-              <a:t>01</a:t>
-            </a:r>
-            <a:endParaRPr lang="en-US" sz="1200" dirty="0"/>
-          </a:p>
-        </p:txBody>
-      </p:sp>
-      <p:sp>
-        <p:nvSpPr>
-          <p:cNvPr id="4" name="Shape 2"/>
-          <p:cNvSpPr/>
-          <p:nvPr/>
-        </p:nvSpPr>
-        <p:spPr>
-          <a:xfrm>
-            <a:off x="1900006" y="320040"/>
-            <a:ext cx="1086190" cy="502920"/>
-          </a:xfrm>
-          <a:prstGeom prst="roundRect">
-            <a:avLst>
-              <a:gd name="adj" fmla="val 21818"/>
-            </a:avLst>
-          </a:prstGeom>
-          <a:solidFill>
-            <a:srgbClr val="0B8A5E"/>
-          </a:solidFill>
-          <a:ln w="12700">
-            <a:solidFill>
-              <a:srgbClr val="F4F7F6"/>
-            </a:solidFill>
-            <a:prstDash val="solid"/>
-          </a:ln>
-        </p:spPr>
-      </p:sp>
-      <p:sp>
-        <p:nvSpPr>
-          <p:cNvPr id="5" name="Text 3"/>
-          <p:cNvSpPr/>
-          <p:nvPr/>
-        </p:nvSpPr>
-        <p:spPr>
-          <a:xfrm>
-            <a:off x="1872574" y="320040"/>
-            <a:ext cx="1141054" cy="502920"/>
-          </a:xfrm>
-          <a:prstGeom prst="rect">
-            <a:avLst/>
-          </a:prstGeom>
-          <a:noFill/>
-          <a:ln/>
-        </p:spPr>
-        <p:txBody>
-          <a:bodyPr wrap="square" rtlCol="0" anchor="ctr"/>
-          <a:lstStyle/>
-          <a:p>
-            <a:pPr algn="ctr" indent="0" marL="0">
-              <a:buNone/>
-            </a:pPr>
-            <a:r>
-              <a:rPr lang="en-US" sz="1200" b="1" dirty="0">
-                <a:solidFill>
-                  <a:srgbClr val="FFFFFF"/>
-                </a:solidFill>
-                <a:latin typeface="Arial" pitchFamily="34" charset="0"/>
-                <a:ea typeface="Arial" pitchFamily="34" charset="-122"/>
-                <a:cs typeface="Arial" pitchFamily="34" charset="-120"/>
-              </a:rPr>
-              <a:t>02</a:t>
-            </a:r>
-            <a:endParaRPr lang="en-US" sz="1200" dirty="0"/>
-          </a:p>
-        </p:txBody>
-      </p:sp>
-      <p:sp>
-        <p:nvSpPr>
-          <p:cNvPr id="6" name="Shape 4"/>
-          <p:cNvSpPr/>
-          <p:nvPr/>
-        </p:nvSpPr>
-        <p:spPr>
-          <a:xfrm>
-            <a:off x="3041061" y="320040"/>
-            <a:ext cx="1086190" cy="502920"/>
-          </a:xfrm>
-          <a:prstGeom prst="roundRect">
-            <a:avLst>
-              <a:gd name="adj" fmla="val 21818"/>
-            </a:avLst>
-          </a:prstGeom>
-          <a:solidFill>
-            <a:srgbClr val="0F9F6E"/>
-          </a:solidFill>
-          <a:ln w="12700">
-            <a:solidFill>
-              <a:srgbClr val="F4F7F6"/>
-            </a:solidFill>
-            <a:prstDash val="solid"/>
-          </a:ln>
-        </p:spPr>
-      </p:sp>
-      <p:sp>
-        <p:nvSpPr>
-          <p:cNvPr id="7" name="Text 5"/>
-          <p:cNvSpPr/>
-          <p:nvPr/>
-        </p:nvSpPr>
-        <p:spPr>
-          <a:xfrm>
-            <a:off x="3013629" y="320040"/>
-            <a:ext cx="1141054" cy="502920"/>
-          </a:xfrm>
-          <a:prstGeom prst="rect">
-            <a:avLst/>
-          </a:prstGeom>
-          <a:noFill/>
-          <a:ln/>
-        </p:spPr>
-        <p:txBody>
-          <a:bodyPr wrap="square" rtlCol="0" anchor="ctr"/>
-          <a:lstStyle/>
-          <a:p>
-            <a:pPr algn="ctr" indent="0" marL="0">
-              <a:buNone/>
-            </a:pPr>
-            <a:r>
-              <a:rPr lang="en-US" sz="1200" b="1" dirty="0">
-                <a:solidFill>
-                  <a:srgbClr val="FFFFFF"/>
-                </a:solidFill>
-                <a:latin typeface="Arial" pitchFamily="34" charset="0"/>
-                <a:ea typeface="Arial" pitchFamily="34" charset="-122"/>
-                <a:cs typeface="Arial" pitchFamily="34" charset="-120"/>
-              </a:rPr>
-              <a:t>03</a:t>
-            </a:r>
-            <a:endParaRPr lang="en-US" sz="1200" dirty="0"/>
-          </a:p>
-        </p:txBody>
-      </p:sp>
-      <p:sp>
-        <p:nvSpPr>
-          <p:cNvPr id="8" name="Shape 6"/>
-          <p:cNvSpPr/>
-          <p:nvPr/>
-        </p:nvSpPr>
-        <p:spPr>
-          <a:xfrm>
-            <a:off x="4182115" y="320040"/>
-            <a:ext cx="2683667" cy="502920"/>
-          </a:xfrm>
-          <a:prstGeom prst="roundRect">
-            <a:avLst>
-              <a:gd name="adj" fmla="val 21818"/>
-            </a:avLst>
-          </a:prstGeom>
-          <a:solidFill>
-            <a:srgbClr val="17B57F"/>
-          </a:solidFill>
-          <a:ln w="12700">
-            <a:solidFill>
-              <a:srgbClr val="F4F7F6"/>
-            </a:solidFill>
-            <a:prstDash val="solid"/>
-          </a:ln>
-        </p:spPr>
-      </p:sp>
-      <p:sp>
-        <p:nvSpPr>
-          <p:cNvPr id="9" name="Text 7"/>
-          <p:cNvSpPr/>
-          <p:nvPr/>
-        </p:nvSpPr>
-        <p:spPr>
-          <a:xfrm>
-            <a:off x="4154683" y="320040"/>
-            <a:ext cx="2738531" cy="502920"/>
-          </a:xfrm>
-          <a:prstGeom prst="rect">
-            <a:avLst/>
-          </a:prstGeom>
-          <a:noFill/>
-          <a:ln/>
-        </p:spPr>
-        <p:txBody>
-          <a:bodyPr wrap="square" rtlCol="0" anchor="ctr"/>
-          <a:lstStyle/>
-          <a:p>
-            <a:pPr algn="ctr" indent="0" marL="0">
-              <a:buNone/>
-            </a:pPr>
-            <a:r>
-              <a:rPr lang="en-US" sz="1200" b="1" dirty="0">
-                <a:solidFill>
-                  <a:srgbClr val="FFFFFF"/>
-                </a:solidFill>
-                <a:latin typeface="Arial" pitchFamily="34" charset="0"/>
-                <a:ea typeface="Arial" pitchFamily="34" charset="-122"/>
-                <a:cs typeface="Arial" pitchFamily="34" charset="-120"/>
-              </a:rPr>
-              <a:t>04 // DEMO · 60S</a:t>
-            </a:r>
-            <a:endParaRPr lang="en-US" sz="1200" dirty="0"/>
-          </a:p>
-        </p:txBody>
-      </p:sp>
-      <p:sp>
-        <p:nvSpPr>
-          <p:cNvPr id="10" name="Shape 8"/>
-          <p:cNvSpPr/>
-          <p:nvPr/>
-        </p:nvSpPr>
-        <p:spPr>
-          <a:xfrm>
-            <a:off x="6920646" y="320040"/>
-            <a:ext cx="1086190" cy="502920"/>
-          </a:xfrm>
-          <a:prstGeom prst="roundRect">
-            <a:avLst>
-              <a:gd name="adj" fmla="val 21818"/>
-            </a:avLst>
-          </a:prstGeom>
-          <a:solidFill>
-            <a:srgbClr val="0F9F6E"/>
-          </a:solidFill>
-          <a:ln w="12700">
-            <a:solidFill>
-              <a:srgbClr val="F4F7F6"/>
-            </a:solidFill>
-            <a:prstDash val="solid"/>
-          </a:ln>
-        </p:spPr>
-      </p:sp>
-      <p:sp>
-        <p:nvSpPr>
-          <p:cNvPr id="11" name="Text 9"/>
-          <p:cNvSpPr/>
-          <p:nvPr/>
-        </p:nvSpPr>
-        <p:spPr>
-          <a:xfrm>
-            <a:off x="6893214" y="320040"/>
-            <a:ext cx="1141054" cy="502920"/>
-          </a:xfrm>
-          <a:prstGeom prst="rect">
-            <a:avLst/>
-          </a:prstGeom>
-          <a:noFill/>
-          <a:ln/>
-        </p:spPr>
-        <p:txBody>
-          <a:bodyPr wrap="square" rtlCol="0" anchor="ctr"/>
-          <a:lstStyle/>
-          <a:p>
-            <a:pPr algn="ctr" indent="0" marL="0">
-              <a:buNone/>
-            </a:pPr>
-            <a:r>
-              <a:rPr lang="en-US" sz="1200" b="1" dirty="0">
-                <a:solidFill>
-                  <a:srgbClr val="FFFFFF"/>
-                </a:solidFill>
-                <a:latin typeface="Arial" pitchFamily="34" charset="0"/>
-                <a:ea typeface="Arial" pitchFamily="34" charset="-122"/>
-                <a:cs typeface="Arial" pitchFamily="34" charset="-120"/>
-              </a:rPr>
-              <a:t>05</a:t>
-            </a:r>
-            <a:endParaRPr lang="en-US" sz="1200" dirty="0"/>
-          </a:p>
-        </p:txBody>
-      </p:sp>
-      <p:sp>
-        <p:nvSpPr>
-          <p:cNvPr id="12" name="Shape 10"/>
-          <p:cNvSpPr/>
-          <p:nvPr/>
-        </p:nvSpPr>
-        <p:spPr>
-          <a:xfrm>
-            <a:off x="8061701" y="320040"/>
-            <a:ext cx="1086190" cy="502920"/>
-          </a:xfrm>
-          <a:prstGeom prst="roundRect">
-            <a:avLst>
-              <a:gd name="adj" fmla="val 21818"/>
-            </a:avLst>
-          </a:prstGeom>
-          <a:solidFill>
-            <a:srgbClr val="0B8A5E"/>
-          </a:solidFill>
-          <a:ln w="12700">
-            <a:solidFill>
-              <a:srgbClr val="F4F7F6"/>
-            </a:solidFill>
-            <a:prstDash val="solid"/>
-          </a:ln>
-        </p:spPr>
-      </p:sp>
-      <p:sp>
-        <p:nvSpPr>
-          <p:cNvPr id="13" name="Text 11"/>
-          <p:cNvSpPr/>
-          <p:nvPr/>
-        </p:nvSpPr>
-        <p:spPr>
-          <a:xfrm>
-            <a:off x="8034269" y="320040"/>
-            <a:ext cx="1141054" cy="502920"/>
-          </a:xfrm>
-          <a:prstGeom prst="rect">
-            <a:avLst/>
-          </a:prstGeom>
-          <a:noFill/>
-          <a:ln/>
-        </p:spPr>
-        <p:txBody>
-          <a:bodyPr wrap="square" rtlCol="0" anchor="ctr"/>
-          <a:lstStyle/>
-          <a:p>
-            <a:pPr algn="ctr" indent="0" marL="0">
-              <a:buNone/>
-            </a:pPr>
-            <a:r>
-              <a:rPr lang="en-US" sz="1200" b="1" dirty="0">
-                <a:solidFill>
-                  <a:srgbClr val="FFFFFF"/>
-                </a:solidFill>
-                <a:latin typeface="Arial" pitchFamily="34" charset="0"/>
-                <a:ea typeface="Arial" pitchFamily="34" charset="-122"/>
-                <a:cs typeface="Arial" pitchFamily="34" charset="-120"/>
-              </a:rPr>
-              <a:t>06</a:t>
-            </a:r>
-            <a:endParaRPr lang="en-US" sz="1200" dirty="0"/>
-          </a:p>
-        </p:txBody>
-      </p:sp>
-      <p:sp>
-        <p:nvSpPr>
-          <p:cNvPr id="14" name="Shape 12"/>
-          <p:cNvSpPr/>
-          <p:nvPr/>
-        </p:nvSpPr>
-        <p:spPr>
-          <a:xfrm>
-            <a:off x="9202755" y="320040"/>
-            <a:ext cx="1086190" cy="502920"/>
-          </a:xfrm>
-          <a:prstGeom prst="roundRect">
-            <a:avLst>
-              <a:gd name="adj" fmla="val 21818"/>
-            </a:avLst>
-          </a:prstGeom>
-          <a:solidFill>
-            <a:srgbClr val="0B3D2C"/>
-          </a:solidFill>
-          <a:ln w="12700">
-            <a:solidFill>
-              <a:srgbClr val="F4F7F6"/>
-            </a:solidFill>
-            <a:prstDash val="solid"/>
-          </a:ln>
-        </p:spPr>
-      </p:sp>
-      <p:sp>
-        <p:nvSpPr>
-          <p:cNvPr id="15" name="Text 13"/>
-          <p:cNvSpPr/>
-          <p:nvPr/>
-        </p:nvSpPr>
-        <p:spPr>
-          <a:xfrm>
-            <a:off x="9175323" y="320040"/>
-            <a:ext cx="1141054" cy="502920"/>
-          </a:xfrm>
-          <a:prstGeom prst="rect">
-            <a:avLst/>
-          </a:prstGeom>
-          <a:noFill/>
-          <a:ln/>
-        </p:spPr>
-        <p:txBody>
-          <a:bodyPr wrap="square" rtlCol="0" anchor="ctr"/>
-          <a:lstStyle/>
-          <a:p>
-            <a:pPr algn="ctr" indent="0" marL="0">
-              <a:buNone/>
-            </a:pPr>
-            <a:r>
-              <a:rPr lang="en-US" sz="1200" b="1" dirty="0">
-                <a:solidFill>
-                  <a:srgbClr val="FFFFFF"/>
-                </a:solidFill>
-                <a:latin typeface="Arial" pitchFamily="34" charset="0"/>
-                <a:ea typeface="Arial" pitchFamily="34" charset="-122"/>
-                <a:cs typeface="Arial" pitchFamily="34" charset="-120"/>
-              </a:rPr>
-              <a:t>07</a:t>
-            </a:r>
-            <a:endParaRPr lang="en-US" sz="1200" dirty="0"/>
-          </a:p>
-        </p:txBody>
-      </p:sp>
-      <p:sp>
-        <p:nvSpPr>
-          <p:cNvPr id="16" name="Shape 14"/>
-          <p:cNvSpPr/>
-          <p:nvPr/>
-        </p:nvSpPr>
-        <p:spPr>
-          <a:xfrm>
-            <a:off x="10343810" y="320040"/>
-            <a:ext cx="1086190" cy="502920"/>
-          </a:xfrm>
-          <a:prstGeom prst="roundRect">
-            <a:avLst>
-              <a:gd name="adj" fmla="val 21818"/>
-            </a:avLst>
-          </a:prstGeom>
-          <a:solidFill>
-            <a:srgbClr val="22C58B"/>
-          </a:solidFill>
-          <a:ln w="12700">
-            <a:solidFill>
-              <a:srgbClr val="F4F7F6"/>
-            </a:solidFill>
-            <a:prstDash val="solid"/>
-          </a:ln>
-        </p:spPr>
-      </p:sp>
-      <p:sp>
-        <p:nvSpPr>
-          <p:cNvPr id="17" name="Text 15"/>
-          <p:cNvSpPr/>
-          <p:nvPr/>
-        </p:nvSpPr>
-        <p:spPr>
-          <a:xfrm>
-            <a:off x="10316378" y="320040"/>
-            <a:ext cx="1141054" cy="502920"/>
-          </a:xfrm>
-          <a:prstGeom prst="rect">
-            <a:avLst/>
-          </a:prstGeom>
-          <a:noFill/>
-          <a:ln/>
-        </p:spPr>
-        <p:txBody>
-          <a:bodyPr wrap="square" rtlCol="0" anchor="ctr"/>
-          <a:lstStyle/>
-          <a:p>
-            <a:pPr algn="ctr" indent="0" marL="0">
-              <a:buNone/>
-            </a:pPr>
-            <a:r>
-              <a:rPr lang="en-US" sz="1200" b="1" dirty="0">
-                <a:solidFill>
-                  <a:srgbClr val="FFFFFF"/>
-                </a:solidFill>
-                <a:latin typeface="Arial" pitchFamily="34" charset="0"/>
-                <a:ea typeface="Arial" pitchFamily="34" charset="-122"/>
-                <a:cs typeface="Arial" pitchFamily="34" charset="-120"/>
-              </a:rPr>
-              <a:t>08</a:t>
-            </a:r>
-            <a:endParaRPr lang="en-US" sz="1200" dirty="0"/>
-          </a:p>
-        </p:txBody>
-      </p:sp>
-      <p:sp>
-        <p:nvSpPr>
-          <p:cNvPr id="18" name="Shape 16"/>
-          <p:cNvSpPr/>
-          <p:nvPr/>
-        </p:nvSpPr>
-        <p:spPr>
-          <a:xfrm>
-            <a:off x="10389530" y="365760"/>
-            <a:ext cx="994750" cy="411480"/>
-          </a:xfrm>
-          <a:prstGeom prst="roundRect">
-            <a:avLst>
-              <a:gd name="adj" fmla="val 22222"/>
-            </a:avLst>
-          </a:prstGeom>
-          <a:ln w="25400">
-            <a:solidFill>
-              <a:srgbClr val="FFFFFF"/>
-            </a:solidFill>
-            <a:prstDash val="solid"/>
-          </a:ln>
-        </p:spPr>
-      </p:sp>
-      <p:sp>
-        <p:nvSpPr>
-          <p:cNvPr id="19" name="Text 17"/>
-          <p:cNvSpPr/>
-          <p:nvPr/>
-        </p:nvSpPr>
-        <p:spPr>
-          <a:xfrm>
-            <a:off x="731520" y="1097280"/>
+          <p:cNvPr id="2" name="Text 0"/>
+          <p:cNvSpPr/>
+          <p:nvPr/>
+        </p:nvSpPr>
+        <p:spPr>
+          <a:xfrm>
+            <a:off x="731520" y="640080"/>
             <a:ext cx="5029200" cy="365760"/>
           </a:xfrm>
           <a:prstGeom prst="roundRect">
@@ -9662,7 +5246,7 @@
       </p:sp>
       <p:sp>
         <p:nvSpPr>
-          <p:cNvPr id="20" name="Text 18"/>
+          <p:cNvPr id="3" name="Text 1"/>
           <p:cNvSpPr/>
           <p:nvPr/>
         </p:nvSpPr>
@@ -9701,7 +5285,7 @@
       </p:sp>
       <p:sp>
         <p:nvSpPr>
-          <p:cNvPr id="21" name="Text 19"/>
+          <p:cNvPr id="4" name="Text 2"/>
           <p:cNvSpPr/>
           <p:nvPr/>
         </p:nvSpPr>
@@ -9740,7 +5324,7 @@
       </p:sp>
       <p:sp>
         <p:nvSpPr>
-          <p:cNvPr id="22" name="Text 20"/>
+          <p:cNvPr id="5" name="Text 3"/>
           <p:cNvSpPr/>
           <p:nvPr/>
         </p:nvSpPr>
@@ -9779,7 +5363,7 @@
       </p:sp>
       <p:sp>
         <p:nvSpPr>
-          <p:cNvPr id="23" name="Shape 21"/>
+          <p:cNvPr id="6" name="Shape 4"/>
           <p:cNvSpPr/>
           <p:nvPr/>
         </p:nvSpPr>
@@ -9802,7 +5386,7 @@
       </p:sp>
       <p:sp>
         <p:nvSpPr>
-          <p:cNvPr id="24" name="Shape 22"/>
+          <p:cNvPr id="7" name="Shape 5"/>
           <p:cNvSpPr/>
           <p:nvPr/>
         </p:nvSpPr>
@@ -9827,7 +5411,7 @@
       </p:sp>
       <p:sp>
         <p:nvSpPr>
-          <p:cNvPr id="25" name="Text 23"/>
+          <p:cNvPr id="8" name="Text 6"/>
           <p:cNvSpPr/>
           <p:nvPr/>
         </p:nvSpPr>
@@ -9866,7 +5450,7 @@
       </p:sp>
       <p:sp>
         <p:nvSpPr>
-          <p:cNvPr id="26" name="Shape 24"/>
+          <p:cNvPr id="9" name="Shape 7"/>
           <p:cNvSpPr/>
           <p:nvPr/>
         </p:nvSpPr>
@@ -9891,7 +5475,7 @@
       </p:sp>
       <p:sp>
         <p:nvSpPr>
-          <p:cNvPr id="27" name="Text 25"/>
+          <p:cNvPr id="10" name="Text 8"/>
           <p:cNvSpPr/>
           <p:nvPr/>
         </p:nvSpPr>
@@ -9930,7 +5514,7 @@
       </p:sp>
       <p:sp>
         <p:nvSpPr>
-          <p:cNvPr id="28" name="Text 26"/>
+          <p:cNvPr id="11" name="Text 9"/>
           <p:cNvSpPr/>
           <p:nvPr/>
         </p:nvSpPr>

--- a/presentation/Mish-Senior-Pitch.pptx
+++ b/presentation/Mish-Senior-Pitch.pptx
@@ -13,9 +13,10 @@
     <p:sldId id="261" r:id="rId7"/>
     <p:sldId id="262" r:id="rId8"/>
     <p:sldId id="263" r:id="rId9"/>
+    <p:sldId id="264" r:id="rId10"/>
   </p:sldIdLst>
   <p:notesMasterIdLst>
-    <p:notesMasterId r:id="rId10"/>
+    <p:notesMasterId r:id="rId11"/>
   </p:notesMasterIdLst>
   <p:sldSz cx="12192000" cy="6858000"/>
   <p:notesSz cx="6858000" cy="12192000"/>
@@ -1149,6 +1150,94 @@
             <a:fld id="{F7021451-1387-4CA6-816F-3879F97B5CBC}" type="slidenum">
               <a:rPr lang="en-US"/>
               <a:t>8</a:t>
+            </a:fld>
+            <a:endParaRPr lang="en-US"/>
+          </a:p>
+        </p:txBody>
+      </p:sp>
+    </p:spTree>
+    <p:extLst>
+      <p:ext uri="{BB962C8B-B14F-4D97-AF65-F5344CB8AC3E}">
+        <p14:creationId xmlns:p14="http://schemas.microsoft.com/office/powerpoint/2010/main" val="1024086991"/>
+      </p:ext>
+    </p:extLst>
+  </p:cSld>
+  <p:clrMapOvr>
+    <a:masterClrMapping/>
+  </p:clrMapOvr>
+</p:notes>
+</file>
+
+<file path=ppt/notesSlides/notesSlide9.xml><?xml version="1.0" encoding="utf-8"?>
+<p:notes xmlns:a="http://schemas.openxmlformats.org/drawingml/2006/main" xmlns:r="http://schemas.openxmlformats.org/officeDocument/2006/relationships" xmlns:p="http://schemas.openxmlformats.org/presentationml/2006/main">
+  <p:cSld>
+    <p:spTree>
+      <p:nvGrpSpPr>
+        <p:cNvPr id="1" name=""/>
+        <p:cNvGrpSpPr/>
+        <p:nvPr/>
+      </p:nvGrpSpPr>
+      <p:grpSpPr>
+        <a:xfrm>
+          <a:off x="0" y="0"/>
+          <a:ext cx="0" cy="0"/>
+          <a:chOff x="0" y="0"/>
+          <a:chExt cx="0" cy="0"/>
+        </a:xfrm>
+      </p:grpSpPr>
+      <p:sp>
+        <p:nvSpPr>
+          <p:cNvPr id="2" name="Slide Image Placeholder 1"/>
+          <p:cNvSpPr>
+            <a:spLocks noGrp="1" noRot="1" noChangeAspect="1"/>
+          </p:cNvSpPr>
+          <p:nvPr>
+            <p:ph type="sldImg"/>
+          </p:nvPr>
+        </p:nvSpPr>
+        <p:spPr/>
+      </p:sp>
+      <p:sp>
+        <p:nvSpPr>
+          <p:cNvPr id="3" name="Notes Placeholder 2"/>
+          <p:cNvSpPr>
+            <a:spLocks noGrp="1"/>
+          </p:cNvSpPr>
+          <p:nvPr>
+            <p:ph type="body" idx="1"/>
+          </p:nvPr>
+        </p:nvSpPr>
+        <p:spPr/>
+        <p:txBody>
+          <a:bodyPr/>
+          <a:lstStyle/>
+          <a:p>
+            <a:r>
+              <a:rPr lang="en-US" dirty="0"/>
+              <a:t/>
+            </a:r>
+            <a:endParaRPr lang="en-US" dirty="0"/>
+          </a:p>
+        </p:txBody>
+      </p:sp>
+      <p:sp>
+        <p:nvSpPr>
+          <p:cNvPr id="4" name="Slide Number Placeholder 3"/>
+          <p:cNvSpPr>
+            <a:spLocks noGrp="1"/>
+          </p:cNvSpPr>
+          <p:nvPr>
+            <p:ph type="sldNum" sz="quarter" idx="10"/>
+          </p:nvPr>
+        </p:nvSpPr>
+        <p:spPr/>
+        <p:txBody>
+          <a:bodyPr/>
+          <a:lstStyle/>
+          <a:p>
+            <a:fld id="{F7021451-1387-4CA6-816F-3879F97B5CBC}" type="slidenum">
+              <a:rPr lang="en-US"/>
+              <a:t>9</a:t>
             </a:fld>
             <a:endParaRPr lang="en-US"/>
           </a:p>
@@ -1613,7 +1702,7 @@
                 <a:ea typeface="Arial" pitchFamily="34" charset="-122"/>
                 <a:cs typeface="Arial" pitchFamily="34" charset="-120"/>
               </a:rPr>
-              <a:t>01 / 08</a:t>
+              <a:t>01 / 09</a:t>
             </a:r>
             <a:endParaRPr lang="en-US" sz="1000" dirty="0"/>
           </a:p>
@@ -2020,7 +2109,7 @@
                 <a:ea typeface="Arial" pitchFamily="34" charset="-122"/>
                 <a:cs typeface="Arial" pitchFamily="34" charset="-120"/>
               </a:rPr>
-              <a:t>02 / 08</a:t>
+              <a:t>02 / 09</a:t>
             </a:r>
             <a:endParaRPr lang="en-US" sz="1000" dirty="0"/>
           </a:p>
@@ -2688,7 +2777,7 @@
                 <a:ea typeface="Arial" pitchFamily="34" charset="-122"/>
                 <a:cs typeface="Arial" pitchFamily="34" charset="-120"/>
               </a:rPr>
-              <a:t>03 / 08</a:t>
+              <a:t>03 / 09</a:t>
             </a:r>
             <a:endParaRPr lang="en-US" sz="1000" dirty="0"/>
           </a:p>
@@ -3395,7 +3484,7 @@
                 <a:ea typeface="Arial" pitchFamily="34" charset="-122"/>
                 <a:cs typeface="Arial" pitchFamily="34" charset="-120"/>
               </a:rPr>
-              <a:t>04 / 08</a:t>
+              <a:t>04 / 09</a:t>
             </a:r>
             <a:endParaRPr lang="en-US" sz="1000" dirty="0"/>
           </a:p>
@@ -3575,7 +3664,7 @@
                 <a:ea typeface="Arial" pitchFamily="34" charset="-122"/>
                 <a:cs typeface="Arial" pitchFamily="34" charset="-120"/>
               </a:rPr>
-              <a:t>05 / 08</a:t>
+              <a:t>05 / 09</a:t>
             </a:r>
             <a:endParaRPr lang="en-US" sz="1000" dirty="0"/>
           </a:p>
@@ -4014,7 +4103,7 @@
                 <a:ea typeface="Arial" pitchFamily="34" charset="-122"/>
                 <a:cs typeface="Arial" pitchFamily="34" charset="-120"/>
               </a:rPr>
-              <a:t>06 // BUSINESS · 15 SEC</a:t>
+              <a:t>05 // MARKET · POSITIONING</a:t>
             </a:r>
             <a:endParaRPr lang="en-US" sz="1200" dirty="0"/>
           </a:p>
@@ -4092,7 +4181,7 @@
                 <a:ea typeface="Arial" pitchFamily="34" charset="-122"/>
                 <a:cs typeface="Arial" pitchFamily="34" charset="-120"/>
               </a:rPr>
-              <a:t>06 / 08</a:t>
+              <a:t>06 / 09</a:t>
             </a:r>
             <a:endParaRPr lang="en-US" sz="1000" dirty="0"/>
           </a:p>
@@ -4106,24 +4195,24 @@
         </p:nvSpPr>
         <p:spPr>
           <a:xfrm>
-            <a:off x="731520" y="1508760"/>
-            <a:ext cx="10698480" cy="1188720"/>
-          </a:xfrm>
-          <a:prstGeom prst="rect">
-            <a:avLst/>
-          </a:prstGeom>
-          <a:noFill/>
-          <a:ln/>
-        </p:spPr>
-        <p:txBody>
-          <a:bodyPr wrap="square" rtlCol="0" anchor="t"/>
-          <a:lstStyle/>
-          <a:p>
-            <a:pPr indent="0" marL="0">
-              <a:buNone/>
-            </a:pPr>
-            <a:r>
-              <a:rPr lang="en-US" sz="4400" b="1" dirty="0">
+            <a:off x="731520" y="1188720"/>
+            <a:ext cx="7315200" cy="822960"/>
+          </a:xfrm>
+          <a:prstGeom prst="rect">
+            <a:avLst/>
+          </a:prstGeom>
+          <a:noFill/>
+          <a:ln/>
+        </p:spPr>
+        <p:txBody>
+          <a:bodyPr wrap="square" rtlCol="0" anchor="ctr"/>
+          <a:lstStyle/>
+          <a:p>
+            <a:pPr indent="0" marL="0">
+              <a:buNone/>
+            </a:pPr>
+            <a:r>
+              <a:rPr lang="en-US" sz="3800" b="1" dirty="0">
                 <a:solidFill>
                   <a:srgbClr val="0F1F1A"/>
                 </a:solidFill>
@@ -4131,9 +4220,9 @@
                 <a:ea typeface="Arial" pitchFamily="34" charset="-122"/>
                 <a:cs typeface="Arial" pitchFamily="34" charset="-120"/>
               </a:rPr>
-              <a:t>Companies pay. Graduates start free.</a:t>
-            </a:r>
-            <a:endParaRPr lang="en-US" sz="4400" dirty="0"/>
+              <a:t>Market &amp; Competitors</a:t>
+            </a:r>
+            <a:endParaRPr lang="en-US" sz="3800" dirty="0"/>
           </a:p>
         </p:txBody>
       </p:sp>
@@ -4145,8 +4234,8 @@
         </p:nvSpPr>
         <p:spPr>
           <a:xfrm>
-            <a:off x="731520" y="2743200"/>
-            <a:ext cx="10725912" cy="0"/>
+            <a:off x="731520" y="2286000"/>
+            <a:ext cx="3108960" cy="0"/>
           </a:xfrm>
           <a:prstGeom prst="line">
             <a:avLst/>
@@ -4162,33 +4251,352 @@
       </p:sp>
       <p:sp>
         <p:nvSpPr>
-          <p:cNvPr id="7" name="Shape 5"/>
-          <p:cNvSpPr/>
-          <p:nvPr/>
-        </p:nvSpPr>
-        <p:spPr>
-          <a:xfrm>
-            <a:off x="731520" y="3017520"/>
-            <a:ext cx="5303520" cy="2926080"/>
+          <p:cNvPr id="7" name="Text 5"/>
+          <p:cNvSpPr/>
+          <p:nvPr/>
+        </p:nvSpPr>
+        <p:spPr>
+          <a:xfrm>
+            <a:off x="731520" y="2377440"/>
+            <a:ext cx="3108960" cy="274320"/>
+          </a:xfrm>
+          <a:prstGeom prst="rect">
+            <a:avLst/>
+          </a:prstGeom>
+          <a:noFill/>
+          <a:ln/>
+        </p:spPr>
+        <p:txBody>
+          <a:bodyPr wrap="square" rtlCol="0" anchor="ctr"/>
+          <a:lstStyle/>
+          <a:p>
+            <a:pPr indent="0" marL="0">
+              <a:buNone/>
+            </a:pPr>
+            <a:r>
+              <a:rPr lang="en-US" sz="1100" b="1" dirty="0">
+                <a:solidFill>
+                  <a:srgbClr val="5F6F68"/>
+                </a:solidFill>
+                <a:latin typeface="Arial" pitchFamily="34" charset="0"/>
+                <a:ea typeface="Arial" pitchFamily="34" charset="-122"/>
+                <a:cs typeface="Arial" pitchFamily="34" charset="-120"/>
+              </a:rPr>
+              <a:t>WHO</a:t>
+            </a:r>
+            <a:endParaRPr lang="en-US" sz="1100" dirty="0"/>
+          </a:p>
+        </p:txBody>
+      </p:sp>
+      <p:sp>
+        <p:nvSpPr>
+          <p:cNvPr id="8" name="Text 6"/>
+          <p:cNvSpPr/>
+          <p:nvPr/>
+        </p:nvSpPr>
+        <p:spPr>
+          <a:xfrm>
+            <a:off x="731520" y="2697480"/>
+            <a:ext cx="3108960" cy="548640"/>
+          </a:xfrm>
+          <a:prstGeom prst="rect">
+            <a:avLst/>
+          </a:prstGeom>
+          <a:noFill/>
+          <a:ln/>
+        </p:spPr>
+        <p:txBody>
+          <a:bodyPr wrap="square" rtlCol="0" anchor="ctr"/>
+          <a:lstStyle/>
+          <a:p>
+            <a:pPr indent="0" marL="0">
+              <a:buNone/>
+            </a:pPr>
+            <a:r>
+              <a:rPr lang="en-US" sz="2000" b="1" dirty="0">
+                <a:solidFill>
+                  <a:srgbClr val="0F1F1A"/>
+                </a:solidFill>
+                <a:latin typeface="Arial" pitchFamily="34" charset="0"/>
+                <a:ea typeface="Arial" pitchFamily="34" charset="-122"/>
+                <a:cs typeface="Arial" pitchFamily="34" charset="-120"/>
+              </a:rPr>
+              <a:t>Fresh IT graduates</a:t>
+            </a:r>
+            <a:endParaRPr lang="en-US" sz="2000" dirty="0"/>
+          </a:p>
+        </p:txBody>
+      </p:sp>
+      <p:sp>
+        <p:nvSpPr>
+          <p:cNvPr id="9" name="Shape 7"/>
+          <p:cNvSpPr/>
+          <p:nvPr/>
+        </p:nvSpPr>
+        <p:spPr>
+          <a:xfrm>
+            <a:off x="731520" y="3520440"/>
+            <a:ext cx="3108960" cy="0"/>
+          </a:xfrm>
+          <a:prstGeom prst="line">
+            <a:avLst/>
+          </a:prstGeom>
+          <a:noFill/>
+          <a:ln w="19050">
+            <a:solidFill>
+              <a:srgbClr val="CBD5D0"/>
+            </a:solidFill>
+            <a:prstDash val="solid"/>
+          </a:ln>
+        </p:spPr>
+      </p:sp>
+      <p:sp>
+        <p:nvSpPr>
+          <p:cNvPr id="10" name="Text 8"/>
+          <p:cNvSpPr/>
+          <p:nvPr/>
+        </p:nvSpPr>
+        <p:spPr>
+          <a:xfrm>
+            <a:off x="731520" y="3611880"/>
+            <a:ext cx="3108960" cy="274320"/>
+          </a:xfrm>
+          <a:prstGeom prst="rect">
+            <a:avLst/>
+          </a:prstGeom>
+          <a:noFill/>
+          <a:ln/>
+        </p:spPr>
+        <p:txBody>
+          <a:bodyPr wrap="square" rtlCol="0" anchor="ctr"/>
+          <a:lstStyle/>
+          <a:p>
+            <a:pPr indent="0" marL="0">
+              <a:buNone/>
+            </a:pPr>
+            <a:r>
+              <a:rPr lang="en-US" sz="1100" b="1" dirty="0">
+                <a:solidFill>
+                  <a:srgbClr val="5F6F68"/>
+                </a:solidFill>
+                <a:latin typeface="Arial" pitchFamily="34" charset="0"/>
+                <a:ea typeface="Arial" pitchFamily="34" charset="-122"/>
+                <a:cs typeface="Arial" pitchFamily="34" charset="-120"/>
+              </a:rPr>
+              <a:t>JORDAN FIRST</a:t>
+            </a:r>
+            <a:endParaRPr lang="en-US" sz="1100" dirty="0"/>
+          </a:p>
+        </p:txBody>
+      </p:sp>
+      <p:sp>
+        <p:nvSpPr>
+          <p:cNvPr id="11" name="Text 9"/>
+          <p:cNvSpPr/>
+          <p:nvPr/>
+        </p:nvSpPr>
+        <p:spPr>
+          <a:xfrm>
+            <a:off x="731520" y="3931920"/>
+            <a:ext cx="3108960" cy="548640"/>
+          </a:xfrm>
+          <a:prstGeom prst="rect">
+            <a:avLst/>
+          </a:prstGeom>
+          <a:noFill/>
+          <a:ln/>
+        </p:spPr>
+        <p:txBody>
+          <a:bodyPr wrap="square" rtlCol="0" anchor="ctr"/>
+          <a:lstStyle/>
+          <a:p>
+            <a:pPr indent="0" marL="0">
+              <a:buNone/>
+            </a:pPr>
+            <a:r>
+              <a:rPr lang="en-US" sz="2000" b="1" dirty="0">
+                <a:solidFill>
+                  <a:srgbClr val="0F9F6E"/>
+                </a:solidFill>
+                <a:latin typeface="Arial" pitchFamily="34" charset="0"/>
+                <a:ea typeface="Arial" pitchFamily="34" charset="-122"/>
+                <a:cs typeface="Arial" pitchFamily="34" charset="-120"/>
+              </a:rPr>
+              <a:t>[# of them in Jordan]</a:t>
+            </a:r>
+            <a:endParaRPr lang="en-US" sz="2000" dirty="0"/>
+          </a:p>
+        </p:txBody>
+      </p:sp>
+      <p:sp>
+        <p:nvSpPr>
+          <p:cNvPr id="12" name="Shape 10"/>
+          <p:cNvSpPr/>
+          <p:nvPr/>
+        </p:nvSpPr>
+        <p:spPr>
+          <a:xfrm>
+            <a:off x="731520" y="4754880"/>
+            <a:ext cx="3108960" cy="0"/>
+          </a:xfrm>
+          <a:prstGeom prst="line">
+            <a:avLst/>
+          </a:prstGeom>
+          <a:noFill/>
+          <a:ln w="19050">
+            <a:solidFill>
+              <a:srgbClr val="CBD5D0"/>
+            </a:solidFill>
+            <a:prstDash val="solid"/>
+          </a:ln>
+        </p:spPr>
+      </p:sp>
+      <p:sp>
+        <p:nvSpPr>
+          <p:cNvPr id="13" name="Text 11"/>
+          <p:cNvSpPr/>
+          <p:nvPr/>
+        </p:nvSpPr>
+        <p:spPr>
+          <a:xfrm>
+            <a:off x="731520" y="4846320"/>
+            <a:ext cx="3108960" cy="274320"/>
+          </a:xfrm>
+          <a:prstGeom prst="rect">
+            <a:avLst/>
+          </a:prstGeom>
+          <a:noFill/>
+          <a:ln/>
+        </p:spPr>
+        <p:txBody>
+          <a:bodyPr wrap="square" rtlCol="0" anchor="ctr"/>
+          <a:lstStyle/>
+          <a:p>
+            <a:pPr indent="0" marL="0">
+              <a:buNone/>
+            </a:pPr>
+            <a:r>
+              <a:rPr lang="en-US" sz="1100" b="1" dirty="0">
+                <a:solidFill>
+                  <a:srgbClr val="5F6F68"/>
+                </a:solidFill>
+                <a:latin typeface="Arial" pitchFamily="34" charset="0"/>
+                <a:ea typeface="Arial" pitchFamily="34" charset="-122"/>
+                <a:cs typeface="Arial" pitchFamily="34" charset="-120"/>
+              </a:rPr>
+              <a:t>MENA NEXT</a:t>
+            </a:r>
+            <a:endParaRPr lang="en-US" sz="1100" dirty="0"/>
+          </a:p>
+        </p:txBody>
+      </p:sp>
+      <p:sp>
+        <p:nvSpPr>
+          <p:cNvPr id="14" name="Text 12"/>
+          <p:cNvSpPr/>
+          <p:nvPr/>
+        </p:nvSpPr>
+        <p:spPr>
+          <a:xfrm>
+            <a:off x="731520" y="5166360"/>
+            <a:ext cx="3108960" cy="548640"/>
+          </a:xfrm>
+          <a:prstGeom prst="rect">
+            <a:avLst/>
+          </a:prstGeom>
+          <a:noFill/>
+          <a:ln/>
+        </p:spPr>
+        <p:txBody>
+          <a:bodyPr wrap="square" rtlCol="0" anchor="ctr"/>
+          <a:lstStyle/>
+          <a:p>
+            <a:pPr indent="0" marL="0">
+              <a:buNone/>
+            </a:pPr>
+            <a:r>
+              <a:rPr lang="en-US" sz="2000" b="1" dirty="0">
+                <a:solidFill>
+                  <a:srgbClr val="0F9F6E"/>
+                </a:solidFill>
+                <a:latin typeface="Arial" pitchFamily="34" charset="0"/>
+                <a:ea typeface="Arial" pitchFamily="34" charset="-122"/>
+                <a:cs typeface="Arial" pitchFamily="34" charset="-120"/>
+              </a:rPr>
+              <a:t>[# of them in MENA]</a:t>
+            </a:r>
+            <a:endParaRPr lang="en-US" sz="2000" dirty="0"/>
+          </a:p>
+        </p:txBody>
+      </p:sp>
+      <p:sp>
+        <p:nvSpPr>
+          <p:cNvPr id="15" name="Text 13"/>
+          <p:cNvSpPr/>
+          <p:nvPr/>
+        </p:nvSpPr>
+        <p:spPr>
+          <a:xfrm>
+            <a:off x="4297680" y="1371600"/>
+            <a:ext cx="7132320" cy="274320"/>
+          </a:xfrm>
+          <a:prstGeom prst="rect">
+            <a:avLst/>
+          </a:prstGeom>
+          <a:noFill/>
+          <a:ln/>
+        </p:spPr>
+        <p:txBody>
+          <a:bodyPr wrap="square" rtlCol="0" anchor="ctr"/>
+          <a:lstStyle/>
+          <a:p>
+            <a:pPr indent="0" marL="0">
+              <a:buNone/>
+            </a:pPr>
+            <a:r>
+              <a:rPr lang="en-US" sz="1000" dirty="0">
+                <a:solidFill>
+                  <a:srgbClr val="5F6F68"/>
+                </a:solidFill>
+                <a:latin typeface="Arial" pitchFamily="34" charset="0"/>
+                <a:ea typeface="Arial" pitchFamily="34" charset="-122"/>
+                <a:cs typeface="Arial" pitchFamily="34" charset="-120"/>
+              </a:rPr>
+              <a:t>↑ CONVERSATIONAL AI ASSESSMENT</a:t>
+            </a:r>
+            <a:endParaRPr lang="en-US" sz="1000" dirty="0"/>
+          </a:p>
+        </p:txBody>
+      </p:sp>
+      <p:sp>
+        <p:nvSpPr>
+          <p:cNvPr id="16" name="Shape 14"/>
+          <p:cNvSpPr/>
+          <p:nvPr/>
+        </p:nvSpPr>
+        <p:spPr>
+          <a:xfrm>
+            <a:off x="4297680" y="1783080"/>
+            <a:ext cx="7159752" cy="4069080"/>
           </a:xfrm>
           <a:prstGeom prst="roundRect">
             <a:avLst>
-              <a:gd name="adj" fmla="val 6250"/>
+              <a:gd name="adj" fmla="val 3371"/>
             </a:avLst>
           </a:prstGeom>
           <a:solidFill>
             <a:srgbClr val="FFFFFF"/>
           </a:solidFill>
-          <a:ln w="12700">
+          <a:ln w="19050">
             <a:solidFill>
-              <a:srgbClr val="E3E9E6"/>
+              <a:srgbClr val="CBD5D0"/>
             </a:solidFill>
             <a:prstDash val="solid"/>
           </a:ln>
           <a:effectLst>
             <a:outerShdw sx="100000" sy="100000" kx="0" ky="0" algn="bl" rotWithShape="0" blurRad="127000" dist="38100" dir="5400000">
               <a:srgbClr val="103020">
-                <a:alpha val="12000"/>
+                <a:alpha val="10000"/>
               </a:srgbClr>
             </a:outerShdw>
           </a:effectLst>
@@ -4196,308 +4604,301 @@
       </p:sp>
       <p:sp>
         <p:nvSpPr>
-          <p:cNvPr id="8" name="Text 6"/>
-          <p:cNvSpPr/>
-          <p:nvPr/>
-        </p:nvSpPr>
-        <p:spPr>
-          <a:xfrm>
-            <a:off x="1005840" y="3246120"/>
-            <a:ext cx="4754880" cy="274320"/>
-          </a:xfrm>
-          <a:prstGeom prst="rect">
-            <a:avLst/>
-          </a:prstGeom>
-          <a:noFill/>
-          <a:ln/>
-        </p:spPr>
-        <p:txBody>
-          <a:bodyPr wrap="square" rtlCol="0" anchor="ctr"/>
-          <a:lstStyle/>
-          <a:p>
-            <a:pPr indent="0" marL="0">
-              <a:buNone/>
-            </a:pPr>
-            <a:r>
-              <a:rPr lang="en-US" sz="1100" b="1" dirty="0">
-                <a:solidFill>
-                  <a:srgbClr val="0F9F6E"/>
-                </a:solidFill>
-                <a:latin typeface="Arial" pitchFamily="34" charset="0"/>
-                <a:ea typeface="Arial" pitchFamily="34" charset="-122"/>
-                <a:cs typeface="Arial" pitchFamily="34" charset="-120"/>
-              </a:rPr>
-              <a:t>BASIC</a:t>
-            </a:r>
-            <a:endParaRPr lang="en-US" sz="1100" dirty="0"/>
-          </a:p>
-        </p:txBody>
-      </p:sp>
-      <p:sp>
-        <p:nvSpPr>
-          <p:cNvPr id="9" name="Text 7"/>
-          <p:cNvSpPr/>
-          <p:nvPr/>
-        </p:nvSpPr>
-        <p:spPr>
-          <a:xfrm>
-            <a:off x="1005840" y="3566160"/>
-            <a:ext cx="4754880" cy="548640"/>
-          </a:xfrm>
-          <a:prstGeom prst="rect">
-            <a:avLst/>
-          </a:prstGeom>
-          <a:noFill/>
-          <a:ln/>
-        </p:spPr>
-        <p:txBody>
-          <a:bodyPr wrap="square" rtlCol="0" anchor="ctr"/>
-          <a:lstStyle/>
-          <a:p>
-            <a:pPr indent="0" marL="0">
-              <a:buNone/>
-            </a:pPr>
-            <a:r>
-              <a:rPr lang="en-US" sz="2400" b="1" dirty="0">
-                <a:solidFill>
-                  <a:srgbClr val="0F1F1A"/>
-                </a:solidFill>
-                <a:latin typeface="Arial" pitchFamily="34" charset="0"/>
-                <a:ea typeface="Arial" pitchFamily="34" charset="-122"/>
-                <a:cs typeface="Arial" pitchFamily="34" charset="-120"/>
-              </a:rPr>
-              <a:t>10 JOD / month</a:t>
-            </a:r>
-            <a:endParaRPr lang="en-US" sz="2400" dirty="0"/>
-          </a:p>
-        </p:txBody>
-      </p:sp>
-      <p:sp>
-        <p:nvSpPr>
-          <p:cNvPr id="10" name="Text 8"/>
-          <p:cNvSpPr/>
-          <p:nvPr/>
-        </p:nvSpPr>
-        <p:spPr>
-          <a:xfrm>
-            <a:off x="1005840" y="4160520"/>
-            <a:ext cx="4754880" cy="1645920"/>
-          </a:xfrm>
-          <a:prstGeom prst="rect">
-            <a:avLst/>
-          </a:prstGeom>
-          <a:noFill/>
-          <a:ln/>
-        </p:spPr>
-        <p:txBody>
-          <a:bodyPr wrap="square" rtlCol="0" anchor="t"/>
-          <a:lstStyle/>
-          <a:p>
-            <a:pPr indent="0" marL="0">
-              <a:buNone/>
-            </a:pPr>
-            <a:r>
-              <a:rPr lang="en-US" sz="1800" dirty="0">
-                <a:solidFill>
-                  <a:srgbClr val="222222"/>
-                </a:solidFill>
-                <a:latin typeface="Arial" pitchFamily="34" charset="0"/>
-                <a:ea typeface="Arial" pitchFamily="34" charset="-122"/>
-                <a:cs typeface="Arial" pitchFamily="34" charset="-120"/>
-              </a:rPr>
-              <a:t>Browse and filter candidates. Limited invites.</a:t>
-            </a:r>
-            <a:endParaRPr lang="en-US" sz="1800" dirty="0"/>
-          </a:p>
-        </p:txBody>
-      </p:sp>
-      <p:sp>
-        <p:nvSpPr>
-          <p:cNvPr id="11" name="Shape 9"/>
-          <p:cNvSpPr/>
-          <p:nvPr/>
-        </p:nvSpPr>
-        <p:spPr>
-          <a:xfrm>
-            <a:off x="6153912" y="3017520"/>
-            <a:ext cx="5303520" cy="2926080"/>
+          <p:cNvPr id="17" name="Shape 15"/>
+          <p:cNvSpPr/>
+          <p:nvPr/>
+        </p:nvSpPr>
+        <p:spPr>
+          <a:xfrm>
+            <a:off x="7877556" y="1783080"/>
+            <a:ext cx="0" cy="4069080"/>
+          </a:xfrm>
+          <a:prstGeom prst="line">
+            <a:avLst/>
+          </a:prstGeom>
+          <a:noFill/>
+          <a:ln w="12700">
+            <a:solidFill>
+              <a:srgbClr val="CBD5D0"/>
+            </a:solidFill>
+            <a:prstDash val="dash"/>
+          </a:ln>
+        </p:spPr>
+      </p:sp>
+      <p:sp>
+        <p:nvSpPr>
+          <p:cNvPr id="18" name="Shape 16"/>
+          <p:cNvSpPr/>
+          <p:nvPr/>
+        </p:nvSpPr>
+        <p:spPr>
+          <a:xfrm>
+            <a:off x="4297680" y="3817620"/>
+            <a:ext cx="7159752" cy="0"/>
+          </a:xfrm>
+          <a:prstGeom prst="line">
+            <a:avLst/>
+          </a:prstGeom>
+          <a:noFill/>
+          <a:ln w="12700">
+            <a:solidFill>
+              <a:srgbClr val="CBD5D0"/>
+            </a:solidFill>
+            <a:prstDash val="dash"/>
+          </a:ln>
+        </p:spPr>
+      </p:sp>
+      <p:sp>
+        <p:nvSpPr>
+          <p:cNvPr id="19" name="Text 17"/>
+          <p:cNvSpPr/>
+          <p:nvPr/>
+        </p:nvSpPr>
+        <p:spPr>
+          <a:xfrm>
+            <a:off x="4937760" y="2468880"/>
+            <a:ext cx="1737360" cy="411480"/>
           </a:xfrm>
           <a:prstGeom prst="roundRect">
             <a:avLst>
-              <a:gd name="adj" fmla="val 6250"/>
+              <a:gd name="adj" fmla="val 26667"/>
             </a:avLst>
           </a:prstGeom>
           <a:solidFill>
-            <a:srgbClr val="FFFFFF"/>
+            <a:srgbClr val="EEF2F0"/>
           </a:solidFill>
-          <a:ln w="25400">
-            <a:solidFill>
-              <a:srgbClr val="0F9F6E"/>
-            </a:solidFill>
-            <a:prstDash val="solid"/>
-          </a:ln>
-          <a:effectLst>
-            <a:outerShdw sx="100000" sy="100000" kx="0" ky="0" algn="bl" rotWithShape="0" blurRad="127000" dist="38100" dir="5400000">
-              <a:srgbClr val="103020">
-                <a:alpha val="12000"/>
-              </a:srgbClr>
-            </a:outerShdw>
-          </a:effectLst>
-        </p:spPr>
-      </p:sp>
-      <p:sp>
-        <p:nvSpPr>
-          <p:cNvPr id="12" name="Text 10"/>
-          <p:cNvSpPr/>
-          <p:nvPr/>
-        </p:nvSpPr>
-        <p:spPr>
-          <a:xfrm>
-            <a:off x="6428232" y="3246120"/>
-            <a:ext cx="4754880" cy="274320"/>
-          </a:xfrm>
-          <a:prstGeom prst="rect">
-            <a:avLst/>
-          </a:prstGeom>
-          <a:noFill/>
-          <a:ln/>
-        </p:spPr>
-        <p:txBody>
-          <a:bodyPr wrap="square" rtlCol="0" anchor="ctr"/>
-          <a:lstStyle/>
-          <a:p>
-            <a:pPr indent="0" marL="0">
+          <a:ln/>
+        </p:spPr>
+        <p:txBody>
+          <a:bodyPr wrap="square" rtlCol="0" anchor="ctr"/>
+          <a:lstStyle/>
+          <a:p>
+            <a:pPr algn="ctr" indent="0" marL="0">
+              <a:buNone/>
+            </a:pPr>
+            <a:r>
+              <a:rPr lang="en-US" sz="1200" b="1" dirty="0">
+                <a:solidFill>
+                  <a:srgbClr val="333333"/>
+                </a:solidFill>
+                <a:latin typeface="Arial" pitchFamily="34" charset="0"/>
+                <a:ea typeface="Arial" pitchFamily="34" charset="-122"/>
+                <a:cs typeface="Arial" pitchFamily="34" charset="-120"/>
+              </a:rPr>
+              <a:t>[COMPETITOR B]</a:t>
+            </a:r>
+            <a:endParaRPr lang="en-US" sz="1200" dirty="0"/>
+          </a:p>
+        </p:txBody>
+      </p:sp>
+      <p:sp>
+        <p:nvSpPr>
+          <p:cNvPr id="20" name="Text 18"/>
+          <p:cNvSpPr/>
+          <p:nvPr/>
+        </p:nvSpPr>
+        <p:spPr>
+          <a:xfrm>
+            <a:off x="9144000" y="2468880"/>
+            <a:ext cx="1737360" cy="411480"/>
+          </a:xfrm>
+          <a:prstGeom prst="roundRect">
+            <a:avLst>
+              <a:gd name="adj" fmla="val 26667"/>
+            </a:avLst>
+          </a:prstGeom>
+          <a:solidFill>
+            <a:srgbClr val="0F9F6E"/>
+          </a:solidFill>
+          <a:ln/>
+        </p:spPr>
+        <p:txBody>
+          <a:bodyPr wrap="square" rtlCol="0" anchor="ctr"/>
+          <a:lstStyle/>
+          <a:p>
+            <a:pPr algn="ctr" indent="0" marL="0">
+              <a:buNone/>
+            </a:pPr>
+            <a:r>
+              <a:rPr lang="en-US" sz="1200" b="1" dirty="0">
+                <a:solidFill>
+                  <a:srgbClr val="FFFFFF"/>
+                </a:solidFill>
+                <a:latin typeface="Arial" pitchFamily="34" charset="0"/>
+                <a:ea typeface="Arial" pitchFamily="34" charset="-122"/>
+                <a:cs typeface="Arial" pitchFamily="34" charset="-120"/>
+              </a:rPr>
+              <a:t>MISH SENIOR</a:t>
+            </a:r>
+            <a:endParaRPr lang="en-US" sz="1200" dirty="0"/>
+          </a:p>
+        </p:txBody>
+      </p:sp>
+      <p:sp>
+        <p:nvSpPr>
+          <p:cNvPr id="21" name="Text 19"/>
+          <p:cNvSpPr/>
+          <p:nvPr/>
+        </p:nvSpPr>
+        <p:spPr>
+          <a:xfrm>
+            <a:off x="4937760" y="4754880"/>
+            <a:ext cx="1737360" cy="411480"/>
+          </a:xfrm>
+          <a:prstGeom prst="roundRect">
+            <a:avLst>
+              <a:gd name="adj" fmla="val 26667"/>
+            </a:avLst>
+          </a:prstGeom>
+          <a:solidFill>
+            <a:srgbClr val="EEF2F0"/>
+          </a:solidFill>
+          <a:ln/>
+        </p:spPr>
+        <p:txBody>
+          <a:bodyPr wrap="square" rtlCol="0" anchor="ctr"/>
+          <a:lstStyle/>
+          <a:p>
+            <a:pPr algn="ctr" indent="0" marL="0">
+              <a:buNone/>
+            </a:pPr>
+            <a:r>
+              <a:rPr lang="en-US" sz="1200" b="1" dirty="0">
+                <a:solidFill>
+                  <a:srgbClr val="333333"/>
+                </a:solidFill>
+                <a:latin typeface="Arial" pitchFamily="34" charset="0"/>
+                <a:ea typeface="Arial" pitchFamily="34" charset="-122"/>
+                <a:cs typeface="Arial" pitchFamily="34" charset="-120"/>
+              </a:rPr>
+              <a:t>TURING</a:t>
+            </a:r>
+            <a:endParaRPr lang="en-US" sz="1200" dirty="0"/>
+          </a:p>
+        </p:txBody>
+      </p:sp>
+      <p:sp>
+        <p:nvSpPr>
+          <p:cNvPr id="22" name="Text 20"/>
+          <p:cNvSpPr/>
+          <p:nvPr/>
+        </p:nvSpPr>
+        <p:spPr>
+          <a:xfrm>
+            <a:off x="9144000" y="4754880"/>
+            <a:ext cx="1737360" cy="411480"/>
+          </a:xfrm>
+          <a:prstGeom prst="roundRect">
+            <a:avLst>
+              <a:gd name="adj" fmla="val 26667"/>
+            </a:avLst>
+          </a:prstGeom>
+          <a:solidFill>
+            <a:srgbClr val="EEF2F0"/>
+          </a:solidFill>
+          <a:ln/>
+        </p:spPr>
+        <p:txBody>
+          <a:bodyPr wrap="square" rtlCol="0" anchor="ctr"/>
+          <a:lstStyle/>
+          <a:p>
+            <a:pPr algn="ctr" indent="0" marL="0">
+              <a:buNone/>
+            </a:pPr>
+            <a:r>
+              <a:rPr lang="en-US" sz="1200" b="1" dirty="0">
+                <a:solidFill>
+                  <a:srgbClr val="333333"/>
+                </a:solidFill>
+                <a:latin typeface="Arial" pitchFamily="34" charset="0"/>
+                <a:ea typeface="Arial" pitchFamily="34" charset="-122"/>
+                <a:cs typeface="Arial" pitchFamily="34" charset="-120"/>
+              </a:rPr>
+              <a:t>[COMPETITOR C]</a:t>
+            </a:r>
+            <a:endParaRPr lang="en-US" sz="1200" dirty="0"/>
+          </a:p>
+        </p:txBody>
+      </p:sp>
+      <p:sp>
+        <p:nvSpPr>
+          <p:cNvPr id="23" name="Text 21"/>
+          <p:cNvSpPr/>
+          <p:nvPr/>
+        </p:nvSpPr>
+        <p:spPr>
+          <a:xfrm>
+            <a:off x="4297680" y="5943600"/>
+            <a:ext cx="7159752" cy="274320"/>
+          </a:xfrm>
+          <a:prstGeom prst="rect">
+            <a:avLst/>
+          </a:prstGeom>
+          <a:noFill/>
+          <a:ln/>
+        </p:spPr>
+        <p:txBody>
+          <a:bodyPr wrap="square" rtlCol="0" anchor="ctr"/>
+          <a:lstStyle/>
+          <a:p>
+            <a:pPr algn="ctr" indent="0" marL="0">
+              <a:buNone/>
+            </a:pPr>
+            <a:r>
+              <a:rPr lang="en-US" sz="1000" dirty="0">
+                <a:solidFill>
+                  <a:srgbClr val="5F6F68"/>
+                </a:solidFill>
+                <a:latin typeface="Arial" pitchFamily="34" charset="0"/>
+                <a:ea typeface="Arial" pitchFamily="34" charset="-122"/>
+                <a:cs typeface="Arial" pitchFamily="34" charset="-120"/>
+              </a:rPr>
+              <a:t>← SENIORS ONLY          FOR FRESH GRADUATES →</a:t>
+            </a:r>
+            <a:endParaRPr lang="en-US" sz="1000" dirty="0"/>
+          </a:p>
+        </p:txBody>
+      </p:sp>
+      <p:sp>
+        <p:nvSpPr>
+          <p:cNvPr id="24" name="Text 22"/>
+          <p:cNvSpPr/>
+          <p:nvPr/>
+        </p:nvSpPr>
+        <p:spPr>
+          <a:xfrm>
+            <a:off x="10332720" y="640080"/>
+            <a:ext cx="1097280" cy="365760"/>
+          </a:xfrm>
+          <a:prstGeom prst="roundRect">
+            <a:avLst>
+              <a:gd name="adj" fmla="val 25000"/>
+            </a:avLst>
+          </a:prstGeom>
+          <a:solidFill>
+            <a:srgbClr val="0F1F1A"/>
+          </a:solidFill>
+          <a:ln/>
+        </p:spPr>
+        <p:txBody>
+          <a:bodyPr wrap="square" rtlCol="0" anchor="ctr"/>
+          <a:lstStyle/>
+          <a:p>
+            <a:pPr algn="ctr" indent="0" marL="0">
               <a:buNone/>
             </a:pPr>
             <a:r>
               <a:rPr lang="en-US" sz="1100" b="1" dirty="0">
                 <a:solidFill>
-                  <a:srgbClr val="0F9F6E"/>
-                </a:solidFill>
-                <a:latin typeface="Arial" pitchFamily="34" charset="0"/>
-                <a:ea typeface="Arial" pitchFamily="34" charset="-122"/>
-                <a:cs typeface="Arial" pitchFamily="34" charset="-120"/>
-              </a:rPr>
-              <a:t>PREMIUM</a:t>
+                  <a:srgbClr val="FFFFFF"/>
+                </a:solidFill>
+                <a:latin typeface="Arial" pitchFamily="34" charset="0"/>
+                <a:ea typeface="Arial" pitchFamily="34" charset="-122"/>
+                <a:cs typeface="Arial" pitchFamily="34" charset="-120"/>
+              </a:rPr>
+              <a:t>15 SEC</a:t>
             </a:r>
             <a:endParaRPr lang="en-US" sz="1100" dirty="0"/>
-          </a:p>
-        </p:txBody>
-      </p:sp>
-      <p:sp>
-        <p:nvSpPr>
-          <p:cNvPr id="13" name="Text 11"/>
-          <p:cNvSpPr/>
-          <p:nvPr/>
-        </p:nvSpPr>
-        <p:spPr>
-          <a:xfrm>
-            <a:off x="6428232" y="3566160"/>
-            <a:ext cx="4754880" cy="548640"/>
-          </a:xfrm>
-          <a:prstGeom prst="rect">
-            <a:avLst/>
-          </a:prstGeom>
-          <a:noFill/>
-          <a:ln/>
-        </p:spPr>
-        <p:txBody>
-          <a:bodyPr wrap="square" rtlCol="0" anchor="ctr"/>
-          <a:lstStyle/>
-          <a:p>
-            <a:pPr indent="0" marL="0">
-              <a:buNone/>
-            </a:pPr>
-            <a:r>
-              <a:rPr lang="en-US" sz="2400" b="1" dirty="0">
-                <a:solidFill>
-                  <a:srgbClr val="0F1F1A"/>
-                </a:solidFill>
-                <a:latin typeface="Arial" pitchFamily="34" charset="0"/>
-                <a:ea typeface="Arial" pitchFamily="34" charset="-122"/>
-                <a:cs typeface="Arial" pitchFamily="34" charset="-120"/>
-              </a:rPr>
-              <a:t>25 JOD / month</a:t>
-            </a:r>
-            <a:endParaRPr lang="en-US" sz="2400" dirty="0"/>
-          </a:p>
-        </p:txBody>
-      </p:sp>
-      <p:sp>
-        <p:nvSpPr>
-          <p:cNvPr id="14" name="Text 12"/>
-          <p:cNvSpPr/>
-          <p:nvPr/>
-        </p:nvSpPr>
-        <p:spPr>
-          <a:xfrm>
-            <a:off x="6428232" y="4160520"/>
-            <a:ext cx="4754880" cy="1645920"/>
-          </a:xfrm>
-          <a:prstGeom prst="rect">
-            <a:avLst/>
-          </a:prstGeom>
-          <a:noFill/>
-          <a:ln/>
-        </p:spPr>
-        <p:txBody>
-          <a:bodyPr wrap="square" rtlCol="0" anchor="t"/>
-          <a:lstStyle/>
-          <a:p>
-            <a:pPr indent="0" marL="0">
-              <a:buNone/>
-            </a:pPr>
-            <a:r>
-              <a:rPr lang="en-US" sz="1800" dirty="0">
-                <a:solidFill>
-                  <a:srgbClr val="222222"/>
-                </a:solidFill>
-                <a:latin typeface="Arial" pitchFamily="34" charset="0"/>
-                <a:ea typeface="Arial" pitchFamily="34" charset="-122"/>
-                <a:cs typeface="Arial" pitchFamily="34" charset="-120"/>
-              </a:rPr>
-              <a:t>Unlimited invites. Priority access to new candidates.</a:t>
-            </a:r>
-            <a:endParaRPr lang="en-US" sz="1800" dirty="0"/>
-          </a:p>
-        </p:txBody>
-      </p:sp>
-      <p:sp>
-        <p:nvSpPr>
-          <p:cNvPr id="15" name="Text 13"/>
-          <p:cNvSpPr/>
-          <p:nvPr/>
-        </p:nvSpPr>
-        <p:spPr>
-          <a:xfrm>
-            <a:off x="731520" y="5989320"/>
-            <a:ext cx="7315200" cy="274320"/>
-          </a:xfrm>
-          <a:prstGeom prst="rect">
-            <a:avLst/>
-          </a:prstGeom>
-          <a:noFill/>
-          <a:ln/>
-        </p:spPr>
-        <p:txBody>
-          <a:bodyPr wrap="square" rtlCol="0" anchor="ctr"/>
-          <a:lstStyle/>
-          <a:p>
-            <a:pPr indent="0" marL="0">
-              <a:buNone/>
-            </a:pPr>
-            <a:r>
-              <a:rPr lang="en-US" sz="1000" dirty="0">
-                <a:solidFill>
-                  <a:srgbClr val="5F6F68"/>
-                </a:solidFill>
-                <a:latin typeface="Arial" pitchFamily="34" charset="0"/>
-                <a:ea typeface="Arial" pitchFamily="34" charset="-122"/>
-                <a:cs typeface="Arial" pitchFamily="34" charset="-120"/>
-              </a:rPr>
-              <a:t>Demo note: payments are simulated.</a:t>
-            </a:r>
-            <a:endParaRPr lang="en-US" sz="1000" dirty="0"/>
           </a:p>
         </p:txBody>
       </p:sp>
@@ -4570,7 +4971,7 @@
                 <a:ea typeface="Arial" pitchFamily="34" charset="-122"/>
                 <a:cs typeface="Arial" pitchFamily="34" charset="-120"/>
               </a:rPr>
-              <a:t>07 // TEAM · 10 SEC</a:t>
+              <a:t>06 // BUSINESS · 15 SEC</a:t>
             </a:r>
             <a:endParaRPr lang="en-US" sz="1200" dirty="0"/>
           </a:p>
@@ -4648,7 +5049,7 @@
                 <a:ea typeface="Arial" pitchFamily="34" charset="-122"/>
                 <a:cs typeface="Arial" pitchFamily="34" charset="-120"/>
               </a:rPr>
-              <a:t>07 / 08</a:t>
+              <a:t>07 / 09</a:t>
             </a:r>
             <a:endParaRPr lang="en-US" sz="1000" dirty="0"/>
           </a:p>
@@ -4687,7 +5088,7 @@
                 <a:ea typeface="Arial" pitchFamily="34" charset="-122"/>
                 <a:cs typeface="Arial" pitchFamily="34" charset="-120"/>
               </a:rPr>
-              <a:t>The team.</a:t>
+              <a:t>Companies pay. Graduates start free.</a:t>
             </a:r>
             <a:endParaRPr lang="en-US" sz="4400" dirty="0"/>
           </a:p>
@@ -4725,11 +5126,11 @@
         <p:spPr>
           <a:xfrm>
             <a:off x="731520" y="3017520"/>
-            <a:ext cx="3383280" cy="2377440"/>
+            <a:ext cx="5303520" cy="2926080"/>
           </a:xfrm>
           <a:prstGeom prst="roundRect">
             <a:avLst>
-              <a:gd name="adj" fmla="val 6923"/>
+              <a:gd name="adj" fmla="val 6250"/>
             </a:avLst>
           </a:prstGeom>
           <a:solidFill>
@@ -4758,8 +5159,8 @@
         </p:nvSpPr>
         <p:spPr>
           <a:xfrm>
-            <a:off x="1005840" y="3200400"/>
-            <a:ext cx="2834640" cy="274320"/>
+            <a:off x="1005840" y="3246120"/>
+            <a:ext cx="4754880" cy="274320"/>
           </a:xfrm>
           <a:prstGeom prst="rect">
             <a:avLst/>
@@ -4783,7 +5184,7 @@
                 <a:ea typeface="Arial" pitchFamily="34" charset="-122"/>
                 <a:cs typeface="Arial" pitchFamily="34" charset="-120"/>
               </a:rPr>
-              <a:t>ROLE</a:t>
+              <a:t>BASIC</a:t>
             </a:r>
             <a:endParaRPr lang="en-US" sz="1100" dirty="0"/>
           </a:p>
@@ -4797,8 +5198,8 @@
         </p:nvSpPr>
         <p:spPr>
           <a:xfrm>
-            <a:off x="1005840" y="3520440"/>
-            <a:ext cx="2834640" cy="548640"/>
+            <a:off x="1005840" y="3566160"/>
+            <a:ext cx="4754880" cy="548640"/>
           </a:xfrm>
           <a:prstGeom prst="rect">
             <a:avLst/>
@@ -4816,13 +5217,13 @@
             <a:r>
               <a:rPr lang="en-US" sz="2400" b="1" dirty="0">
                 <a:solidFill>
-                  <a:srgbClr val="0F9F6E"/>
-                </a:solidFill>
-                <a:latin typeface="Arial" pitchFamily="34" charset="0"/>
-                <a:ea typeface="Arial" pitchFamily="34" charset="-122"/>
-                <a:cs typeface="Arial" pitchFamily="34" charset="-120"/>
-              </a:rPr>
-              <a:t>[Name]</a:t>
+                  <a:srgbClr val="0F1F1A"/>
+                </a:solidFill>
+                <a:latin typeface="Arial" pitchFamily="34" charset="0"/>
+                <a:ea typeface="Arial" pitchFamily="34" charset="-122"/>
+                <a:cs typeface="Arial" pitchFamily="34" charset="-120"/>
+              </a:rPr>
+              <a:t>10 JOD / month</a:t>
             </a:r>
             <a:endParaRPr lang="en-US" sz="2400" dirty="0"/>
           </a:p>
@@ -4836,8 +5237,8 @@
         </p:nvSpPr>
         <p:spPr>
           <a:xfrm>
-            <a:off x="1005840" y="4114800"/>
-            <a:ext cx="2834640" cy="1097280"/>
+            <a:off x="1005840" y="4160520"/>
+            <a:ext cx="4754880" cy="1645920"/>
           </a:xfrm>
           <a:prstGeom prst="rect">
             <a:avLst/>
@@ -4853,17 +5254,17 @@
               <a:buNone/>
             </a:pPr>
             <a:r>
-              <a:rPr lang="en-US" sz="1700" dirty="0">
-                <a:solidFill>
-                  <a:srgbClr val="333333"/>
-                </a:solidFill>
-                <a:latin typeface="Arial" pitchFamily="34" charset="0"/>
-                <a:ea typeface="Arial" pitchFamily="34" charset="-122"/>
-                <a:cs typeface="Arial" pitchFamily="34" charset="-120"/>
-              </a:rPr>
-              <a:t>[Role]</a:t>
-            </a:r>
-            <a:endParaRPr lang="en-US" sz="1700" dirty="0"/>
+              <a:rPr lang="en-US" sz="1800" dirty="0">
+                <a:solidFill>
+                  <a:srgbClr val="222222"/>
+                </a:solidFill>
+                <a:latin typeface="Arial" pitchFamily="34" charset="0"/>
+                <a:ea typeface="Arial" pitchFamily="34" charset="-122"/>
+                <a:cs typeface="Arial" pitchFamily="34" charset="-120"/>
+              </a:rPr>
+              <a:t>Browse and filter candidates. Limited invites.</a:t>
+            </a:r>
+            <a:endParaRPr lang="en-US" sz="1800" dirty="0"/>
           </a:p>
         </p:txBody>
       </p:sp>
@@ -4875,20 +5276,20 @@
         </p:nvSpPr>
         <p:spPr>
           <a:xfrm>
-            <a:off x="4389120" y="3017520"/>
-            <a:ext cx="3383280" cy="2377440"/>
+            <a:off x="6153912" y="3017520"/>
+            <a:ext cx="5303520" cy="2926080"/>
           </a:xfrm>
           <a:prstGeom prst="roundRect">
             <a:avLst>
-              <a:gd name="adj" fmla="val 6923"/>
+              <a:gd name="adj" fmla="val 6250"/>
             </a:avLst>
           </a:prstGeom>
           <a:solidFill>
             <a:srgbClr val="FFFFFF"/>
           </a:solidFill>
-          <a:ln w="12700">
+          <a:ln w="25400">
             <a:solidFill>
-              <a:srgbClr val="E3E9E6"/>
+              <a:srgbClr val="0F9F6E"/>
             </a:solidFill>
             <a:prstDash val="solid"/>
           </a:ln>
@@ -4909,8 +5310,8 @@
         </p:nvSpPr>
         <p:spPr>
           <a:xfrm>
-            <a:off x="4663440" y="3200400"/>
-            <a:ext cx="2834640" cy="274320"/>
+            <a:off x="6428232" y="3246120"/>
+            <a:ext cx="4754880" cy="274320"/>
           </a:xfrm>
           <a:prstGeom prst="rect">
             <a:avLst/>
@@ -4934,7 +5335,7 @@
                 <a:ea typeface="Arial" pitchFamily="34" charset="-122"/>
                 <a:cs typeface="Arial" pitchFamily="34" charset="-120"/>
               </a:rPr>
-              <a:t>ROLE</a:t>
+              <a:t>PREMIUM</a:t>
             </a:r>
             <a:endParaRPr lang="en-US" sz="1100" dirty="0"/>
           </a:p>
@@ -4948,8 +5349,8 @@
         </p:nvSpPr>
         <p:spPr>
           <a:xfrm>
-            <a:off x="4663440" y="3520440"/>
-            <a:ext cx="2834640" cy="548640"/>
+            <a:off x="6428232" y="3566160"/>
+            <a:ext cx="4754880" cy="548640"/>
           </a:xfrm>
           <a:prstGeom prst="rect">
             <a:avLst/>
@@ -4967,13 +5368,13 @@
             <a:r>
               <a:rPr lang="en-US" sz="2400" b="1" dirty="0">
                 <a:solidFill>
-                  <a:srgbClr val="0F9F6E"/>
-                </a:solidFill>
-                <a:latin typeface="Arial" pitchFamily="34" charset="0"/>
-                <a:ea typeface="Arial" pitchFamily="34" charset="-122"/>
-                <a:cs typeface="Arial" pitchFamily="34" charset="-120"/>
-              </a:rPr>
-              <a:t>[Name]</a:t>
+                  <a:srgbClr val="0F1F1A"/>
+                </a:solidFill>
+                <a:latin typeface="Arial" pitchFamily="34" charset="0"/>
+                <a:ea typeface="Arial" pitchFamily="34" charset="-122"/>
+                <a:cs typeface="Arial" pitchFamily="34" charset="-120"/>
+              </a:rPr>
+              <a:t>25 JOD / month</a:t>
             </a:r>
             <a:endParaRPr lang="en-US" sz="2400" dirty="0"/>
           </a:p>
@@ -4987,8 +5388,8 @@
         </p:nvSpPr>
         <p:spPr>
           <a:xfrm>
-            <a:off x="4663440" y="4114800"/>
-            <a:ext cx="2834640" cy="1097280"/>
+            <a:off x="6428232" y="4160520"/>
+            <a:ext cx="4754880" cy="1645920"/>
           </a:xfrm>
           <a:prstGeom prst="rect">
             <a:avLst/>
@@ -5004,168 +5405,56 @@
               <a:buNone/>
             </a:pPr>
             <a:r>
-              <a:rPr lang="en-US" sz="1700" dirty="0">
-                <a:solidFill>
-                  <a:srgbClr val="333333"/>
-                </a:solidFill>
-                <a:latin typeface="Arial" pitchFamily="34" charset="0"/>
-                <a:ea typeface="Arial" pitchFamily="34" charset="-122"/>
-                <a:cs typeface="Arial" pitchFamily="34" charset="-120"/>
-              </a:rPr>
-              <a:t>[Role]</a:t>
-            </a:r>
-            <a:endParaRPr lang="en-US" sz="1700" dirty="0"/>
-          </a:p>
-        </p:txBody>
-      </p:sp>
-      <p:sp>
-        <p:nvSpPr>
-          <p:cNvPr id="15" name="Shape 13"/>
-          <p:cNvSpPr/>
-          <p:nvPr/>
-        </p:nvSpPr>
-        <p:spPr>
-          <a:xfrm>
-            <a:off x="8046720" y="3017520"/>
-            <a:ext cx="3383280" cy="2377440"/>
-          </a:xfrm>
-          <a:prstGeom prst="roundRect">
-            <a:avLst>
-              <a:gd name="adj" fmla="val 6923"/>
-            </a:avLst>
-          </a:prstGeom>
-          <a:solidFill>
-            <a:srgbClr val="FFFFFF"/>
-          </a:solidFill>
-          <a:ln w="12700">
-            <a:solidFill>
-              <a:srgbClr val="E3E9E6"/>
-            </a:solidFill>
-            <a:prstDash val="solid"/>
-          </a:ln>
-          <a:effectLst>
-            <a:outerShdw sx="100000" sy="100000" kx="0" ky="0" algn="bl" rotWithShape="0" blurRad="127000" dist="38100" dir="5400000">
-              <a:srgbClr val="103020">
-                <a:alpha val="12000"/>
-              </a:srgbClr>
-            </a:outerShdw>
-          </a:effectLst>
-        </p:spPr>
-      </p:sp>
-      <p:sp>
-        <p:nvSpPr>
-          <p:cNvPr id="16" name="Text 14"/>
-          <p:cNvSpPr/>
-          <p:nvPr/>
-        </p:nvSpPr>
-        <p:spPr>
-          <a:xfrm>
-            <a:off x="8321040" y="3200400"/>
-            <a:ext cx="2834640" cy="274320"/>
-          </a:xfrm>
-          <a:prstGeom prst="rect">
-            <a:avLst/>
-          </a:prstGeom>
-          <a:noFill/>
-          <a:ln/>
-        </p:spPr>
-        <p:txBody>
-          <a:bodyPr wrap="square" rtlCol="0" anchor="ctr"/>
-          <a:lstStyle/>
-          <a:p>
-            <a:pPr indent="0" marL="0">
-              <a:buNone/>
-            </a:pPr>
-            <a:r>
-              <a:rPr lang="en-US" sz="1100" b="1" dirty="0">
-                <a:solidFill>
-                  <a:srgbClr val="0F9F6E"/>
-                </a:solidFill>
-                <a:latin typeface="Arial" pitchFamily="34" charset="0"/>
-                <a:ea typeface="Arial" pitchFamily="34" charset="-122"/>
-                <a:cs typeface="Arial" pitchFamily="34" charset="-120"/>
-              </a:rPr>
-              <a:t>ROLE</a:t>
-            </a:r>
-            <a:endParaRPr lang="en-US" sz="1100" dirty="0"/>
-          </a:p>
-        </p:txBody>
-      </p:sp>
-      <p:sp>
-        <p:nvSpPr>
-          <p:cNvPr id="17" name="Text 15"/>
-          <p:cNvSpPr/>
-          <p:nvPr/>
-        </p:nvSpPr>
-        <p:spPr>
-          <a:xfrm>
-            <a:off x="8321040" y="3520440"/>
-            <a:ext cx="2834640" cy="548640"/>
-          </a:xfrm>
-          <a:prstGeom prst="rect">
-            <a:avLst/>
-          </a:prstGeom>
-          <a:noFill/>
-          <a:ln/>
-        </p:spPr>
-        <p:txBody>
-          <a:bodyPr wrap="square" rtlCol="0" anchor="ctr"/>
-          <a:lstStyle/>
-          <a:p>
-            <a:pPr indent="0" marL="0">
-              <a:buNone/>
-            </a:pPr>
-            <a:r>
-              <a:rPr lang="en-US" sz="2400" b="1" dirty="0">
-                <a:solidFill>
-                  <a:srgbClr val="0F9F6E"/>
-                </a:solidFill>
-                <a:latin typeface="Arial" pitchFamily="34" charset="0"/>
-                <a:ea typeface="Arial" pitchFamily="34" charset="-122"/>
-                <a:cs typeface="Arial" pitchFamily="34" charset="-120"/>
-              </a:rPr>
-              <a:t>[Name]</a:t>
-            </a:r>
-            <a:endParaRPr lang="en-US" sz="2400" dirty="0"/>
-          </a:p>
-        </p:txBody>
-      </p:sp>
-      <p:sp>
-        <p:nvSpPr>
-          <p:cNvPr id="18" name="Text 16"/>
-          <p:cNvSpPr/>
-          <p:nvPr/>
-        </p:nvSpPr>
-        <p:spPr>
-          <a:xfrm>
-            <a:off x="8321040" y="4114800"/>
-            <a:ext cx="2834640" cy="1097280"/>
-          </a:xfrm>
-          <a:prstGeom prst="rect">
-            <a:avLst/>
-          </a:prstGeom>
-          <a:noFill/>
-          <a:ln/>
-        </p:spPr>
-        <p:txBody>
-          <a:bodyPr wrap="square" rtlCol="0" anchor="t"/>
-          <a:lstStyle/>
-          <a:p>
-            <a:pPr indent="0" marL="0">
-              <a:buNone/>
-            </a:pPr>
-            <a:r>
-              <a:rPr lang="en-US" sz="1700" dirty="0">
-                <a:solidFill>
-                  <a:srgbClr val="333333"/>
-                </a:solidFill>
-                <a:latin typeface="Arial" pitchFamily="34" charset="0"/>
-                <a:ea typeface="Arial" pitchFamily="34" charset="-122"/>
-                <a:cs typeface="Arial" pitchFamily="34" charset="-120"/>
-              </a:rPr>
-              <a:t>[Role]</a:t>
-            </a:r>
-            <a:endParaRPr lang="en-US" sz="1700" dirty="0"/>
+              <a:rPr lang="en-US" sz="1800" dirty="0">
+                <a:solidFill>
+                  <a:srgbClr val="222222"/>
+                </a:solidFill>
+                <a:latin typeface="Arial" pitchFamily="34" charset="0"/>
+                <a:ea typeface="Arial" pitchFamily="34" charset="-122"/>
+                <a:cs typeface="Arial" pitchFamily="34" charset="-120"/>
+              </a:rPr>
+              <a:t>Unlimited invites. Priority access to new candidates.</a:t>
+            </a:r>
+            <a:endParaRPr lang="en-US" sz="1800" dirty="0"/>
+          </a:p>
+        </p:txBody>
+      </p:sp>
+      <p:sp>
+        <p:nvSpPr>
+          <p:cNvPr id="15" name="Text 13"/>
+          <p:cNvSpPr/>
+          <p:nvPr/>
+        </p:nvSpPr>
+        <p:spPr>
+          <a:xfrm>
+            <a:off x="731520" y="5989320"/>
+            <a:ext cx="7315200" cy="274320"/>
+          </a:xfrm>
+          <a:prstGeom prst="rect">
+            <a:avLst/>
+          </a:prstGeom>
+          <a:noFill/>
+          <a:ln/>
+        </p:spPr>
+        <p:txBody>
+          <a:bodyPr wrap="square" rtlCol="0" anchor="ctr"/>
+          <a:lstStyle/>
+          <a:p>
+            <a:pPr indent="0" marL="0">
+              <a:buNone/>
+            </a:pPr>
+            <a:r>
+              <a:rPr lang="en-US" sz="1000" dirty="0">
+                <a:solidFill>
+                  <a:srgbClr val="5F6F68"/>
+                </a:solidFill>
+                <a:latin typeface="Arial" pitchFamily="34" charset="0"/>
+                <a:ea typeface="Arial" pitchFamily="34" charset="-122"/>
+                <a:cs typeface="Arial" pitchFamily="34" charset="-120"/>
+              </a:rPr>
+              <a:t>Demo note: payments are simulated.</a:t>
+            </a:r>
+            <a:endParaRPr lang="en-US" sz="1000" dirty="0"/>
           </a:p>
         </p:txBody>
       </p:sp>
@@ -5238,7 +5527,7 @@
                 <a:ea typeface="Arial" pitchFamily="34" charset="-122"/>
                 <a:cs typeface="Arial" pitchFamily="34" charset="-120"/>
               </a:rPr>
-              <a:t>08 // THE ASK · 15 SEC</a:t>
+              <a:t>07 // TEAM · 10 SEC</a:t>
             </a:r>
             <a:endParaRPr lang="en-US" sz="1200" dirty="0"/>
           </a:p>
@@ -5316,7 +5605,675 @@
                 <a:ea typeface="Arial" pitchFamily="34" charset="-122"/>
                 <a:cs typeface="Arial" pitchFamily="34" charset="-120"/>
               </a:rPr>
-              <a:t>08 / 08</a:t>
+              <a:t>08 / 09</a:t>
+            </a:r>
+            <a:endParaRPr lang="en-US" sz="1000" dirty="0"/>
+          </a:p>
+        </p:txBody>
+      </p:sp>
+      <p:sp>
+        <p:nvSpPr>
+          <p:cNvPr id="5" name="Text 3"/>
+          <p:cNvSpPr/>
+          <p:nvPr/>
+        </p:nvSpPr>
+        <p:spPr>
+          <a:xfrm>
+            <a:off x="731520" y="1508760"/>
+            <a:ext cx="10698480" cy="1188720"/>
+          </a:xfrm>
+          <a:prstGeom prst="rect">
+            <a:avLst/>
+          </a:prstGeom>
+          <a:noFill/>
+          <a:ln/>
+        </p:spPr>
+        <p:txBody>
+          <a:bodyPr wrap="square" rtlCol="0" anchor="t"/>
+          <a:lstStyle/>
+          <a:p>
+            <a:pPr indent="0" marL="0">
+              <a:buNone/>
+            </a:pPr>
+            <a:r>
+              <a:rPr lang="en-US" sz="4400" b="1" dirty="0">
+                <a:solidFill>
+                  <a:srgbClr val="0F1F1A"/>
+                </a:solidFill>
+                <a:latin typeface="Arial" pitchFamily="34" charset="0"/>
+                <a:ea typeface="Arial" pitchFamily="34" charset="-122"/>
+                <a:cs typeface="Arial" pitchFamily="34" charset="-120"/>
+              </a:rPr>
+              <a:t>The team.</a:t>
+            </a:r>
+            <a:endParaRPr lang="en-US" sz="4400" dirty="0"/>
+          </a:p>
+        </p:txBody>
+      </p:sp>
+      <p:sp>
+        <p:nvSpPr>
+          <p:cNvPr id="6" name="Shape 4"/>
+          <p:cNvSpPr/>
+          <p:nvPr/>
+        </p:nvSpPr>
+        <p:spPr>
+          <a:xfrm>
+            <a:off x="731520" y="2743200"/>
+            <a:ext cx="10725912" cy="0"/>
+          </a:xfrm>
+          <a:prstGeom prst="line">
+            <a:avLst/>
+          </a:prstGeom>
+          <a:noFill/>
+          <a:ln w="19050">
+            <a:solidFill>
+              <a:srgbClr val="CBD5D0"/>
+            </a:solidFill>
+            <a:prstDash val="solid"/>
+          </a:ln>
+        </p:spPr>
+      </p:sp>
+      <p:sp>
+        <p:nvSpPr>
+          <p:cNvPr id="7" name="Shape 5"/>
+          <p:cNvSpPr/>
+          <p:nvPr/>
+        </p:nvSpPr>
+        <p:spPr>
+          <a:xfrm>
+            <a:off x="731520" y="3017520"/>
+            <a:ext cx="3383280" cy="2377440"/>
+          </a:xfrm>
+          <a:prstGeom prst="roundRect">
+            <a:avLst>
+              <a:gd name="adj" fmla="val 6923"/>
+            </a:avLst>
+          </a:prstGeom>
+          <a:solidFill>
+            <a:srgbClr val="FFFFFF"/>
+          </a:solidFill>
+          <a:ln w="12700">
+            <a:solidFill>
+              <a:srgbClr val="E3E9E6"/>
+            </a:solidFill>
+            <a:prstDash val="solid"/>
+          </a:ln>
+          <a:effectLst>
+            <a:outerShdw sx="100000" sy="100000" kx="0" ky="0" algn="bl" rotWithShape="0" blurRad="127000" dist="38100" dir="5400000">
+              <a:srgbClr val="103020">
+                <a:alpha val="12000"/>
+              </a:srgbClr>
+            </a:outerShdw>
+          </a:effectLst>
+        </p:spPr>
+      </p:sp>
+      <p:sp>
+        <p:nvSpPr>
+          <p:cNvPr id="8" name="Text 6"/>
+          <p:cNvSpPr/>
+          <p:nvPr/>
+        </p:nvSpPr>
+        <p:spPr>
+          <a:xfrm>
+            <a:off x="1005840" y="3200400"/>
+            <a:ext cx="2834640" cy="274320"/>
+          </a:xfrm>
+          <a:prstGeom prst="rect">
+            <a:avLst/>
+          </a:prstGeom>
+          <a:noFill/>
+          <a:ln/>
+        </p:spPr>
+        <p:txBody>
+          <a:bodyPr wrap="square" rtlCol="0" anchor="ctr"/>
+          <a:lstStyle/>
+          <a:p>
+            <a:pPr indent="0" marL="0">
+              <a:buNone/>
+            </a:pPr>
+            <a:r>
+              <a:rPr lang="en-US" sz="1100" b="1" dirty="0">
+                <a:solidFill>
+                  <a:srgbClr val="0F9F6E"/>
+                </a:solidFill>
+                <a:latin typeface="Arial" pitchFamily="34" charset="0"/>
+                <a:ea typeface="Arial" pitchFamily="34" charset="-122"/>
+                <a:cs typeface="Arial" pitchFamily="34" charset="-120"/>
+              </a:rPr>
+              <a:t>ROLE</a:t>
+            </a:r>
+            <a:endParaRPr lang="en-US" sz="1100" dirty="0"/>
+          </a:p>
+        </p:txBody>
+      </p:sp>
+      <p:sp>
+        <p:nvSpPr>
+          <p:cNvPr id="9" name="Text 7"/>
+          <p:cNvSpPr/>
+          <p:nvPr/>
+        </p:nvSpPr>
+        <p:spPr>
+          <a:xfrm>
+            <a:off x="1005840" y="3520440"/>
+            <a:ext cx="2834640" cy="548640"/>
+          </a:xfrm>
+          <a:prstGeom prst="rect">
+            <a:avLst/>
+          </a:prstGeom>
+          <a:noFill/>
+          <a:ln/>
+        </p:spPr>
+        <p:txBody>
+          <a:bodyPr wrap="square" rtlCol="0" anchor="ctr"/>
+          <a:lstStyle/>
+          <a:p>
+            <a:pPr indent="0" marL="0">
+              <a:buNone/>
+            </a:pPr>
+            <a:r>
+              <a:rPr lang="en-US" sz="2400" b="1" dirty="0">
+                <a:solidFill>
+                  <a:srgbClr val="0F9F6E"/>
+                </a:solidFill>
+                <a:latin typeface="Arial" pitchFamily="34" charset="0"/>
+                <a:ea typeface="Arial" pitchFamily="34" charset="-122"/>
+                <a:cs typeface="Arial" pitchFamily="34" charset="-120"/>
+              </a:rPr>
+              <a:t>[Name]</a:t>
+            </a:r>
+            <a:endParaRPr lang="en-US" sz="2400" dirty="0"/>
+          </a:p>
+        </p:txBody>
+      </p:sp>
+      <p:sp>
+        <p:nvSpPr>
+          <p:cNvPr id="10" name="Text 8"/>
+          <p:cNvSpPr/>
+          <p:nvPr/>
+        </p:nvSpPr>
+        <p:spPr>
+          <a:xfrm>
+            <a:off x="1005840" y="4114800"/>
+            <a:ext cx="2834640" cy="1097280"/>
+          </a:xfrm>
+          <a:prstGeom prst="rect">
+            <a:avLst/>
+          </a:prstGeom>
+          <a:noFill/>
+          <a:ln/>
+        </p:spPr>
+        <p:txBody>
+          <a:bodyPr wrap="square" rtlCol="0" anchor="t"/>
+          <a:lstStyle/>
+          <a:p>
+            <a:pPr indent="0" marL="0">
+              <a:buNone/>
+            </a:pPr>
+            <a:r>
+              <a:rPr lang="en-US" sz="1700" dirty="0">
+                <a:solidFill>
+                  <a:srgbClr val="333333"/>
+                </a:solidFill>
+                <a:latin typeface="Arial" pitchFamily="34" charset="0"/>
+                <a:ea typeface="Arial" pitchFamily="34" charset="-122"/>
+                <a:cs typeface="Arial" pitchFamily="34" charset="-120"/>
+              </a:rPr>
+              <a:t>[Role]</a:t>
+            </a:r>
+            <a:endParaRPr lang="en-US" sz="1700" dirty="0"/>
+          </a:p>
+        </p:txBody>
+      </p:sp>
+      <p:sp>
+        <p:nvSpPr>
+          <p:cNvPr id="11" name="Shape 9"/>
+          <p:cNvSpPr/>
+          <p:nvPr/>
+        </p:nvSpPr>
+        <p:spPr>
+          <a:xfrm>
+            <a:off x="4389120" y="3017520"/>
+            <a:ext cx="3383280" cy="2377440"/>
+          </a:xfrm>
+          <a:prstGeom prst="roundRect">
+            <a:avLst>
+              <a:gd name="adj" fmla="val 6923"/>
+            </a:avLst>
+          </a:prstGeom>
+          <a:solidFill>
+            <a:srgbClr val="FFFFFF"/>
+          </a:solidFill>
+          <a:ln w="12700">
+            <a:solidFill>
+              <a:srgbClr val="E3E9E6"/>
+            </a:solidFill>
+            <a:prstDash val="solid"/>
+          </a:ln>
+          <a:effectLst>
+            <a:outerShdw sx="100000" sy="100000" kx="0" ky="0" algn="bl" rotWithShape="0" blurRad="127000" dist="38100" dir="5400000">
+              <a:srgbClr val="103020">
+                <a:alpha val="12000"/>
+              </a:srgbClr>
+            </a:outerShdw>
+          </a:effectLst>
+        </p:spPr>
+      </p:sp>
+      <p:sp>
+        <p:nvSpPr>
+          <p:cNvPr id="12" name="Text 10"/>
+          <p:cNvSpPr/>
+          <p:nvPr/>
+        </p:nvSpPr>
+        <p:spPr>
+          <a:xfrm>
+            <a:off x="4663440" y="3200400"/>
+            <a:ext cx="2834640" cy="274320"/>
+          </a:xfrm>
+          <a:prstGeom prst="rect">
+            <a:avLst/>
+          </a:prstGeom>
+          <a:noFill/>
+          <a:ln/>
+        </p:spPr>
+        <p:txBody>
+          <a:bodyPr wrap="square" rtlCol="0" anchor="ctr"/>
+          <a:lstStyle/>
+          <a:p>
+            <a:pPr indent="0" marL="0">
+              <a:buNone/>
+            </a:pPr>
+            <a:r>
+              <a:rPr lang="en-US" sz="1100" b="1" dirty="0">
+                <a:solidFill>
+                  <a:srgbClr val="0F9F6E"/>
+                </a:solidFill>
+                <a:latin typeface="Arial" pitchFamily="34" charset="0"/>
+                <a:ea typeface="Arial" pitchFamily="34" charset="-122"/>
+                <a:cs typeface="Arial" pitchFamily="34" charset="-120"/>
+              </a:rPr>
+              <a:t>ROLE</a:t>
+            </a:r>
+            <a:endParaRPr lang="en-US" sz="1100" dirty="0"/>
+          </a:p>
+        </p:txBody>
+      </p:sp>
+      <p:sp>
+        <p:nvSpPr>
+          <p:cNvPr id="13" name="Text 11"/>
+          <p:cNvSpPr/>
+          <p:nvPr/>
+        </p:nvSpPr>
+        <p:spPr>
+          <a:xfrm>
+            <a:off x="4663440" y="3520440"/>
+            <a:ext cx="2834640" cy="548640"/>
+          </a:xfrm>
+          <a:prstGeom prst="rect">
+            <a:avLst/>
+          </a:prstGeom>
+          <a:noFill/>
+          <a:ln/>
+        </p:spPr>
+        <p:txBody>
+          <a:bodyPr wrap="square" rtlCol="0" anchor="ctr"/>
+          <a:lstStyle/>
+          <a:p>
+            <a:pPr indent="0" marL="0">
+              <a:buNone/>
+            </a:pPr>
+            <a:r>
+              <a:rPr lang="en-US" sz="2400" b="1" dirty="0">
+                <a:solidFill>
+                  <a:srgbClr val="0F9F6E"/>
+                </a:solidFill>
+                <a:latin typeface="Arial" pitchFamily="34" charset="0"/>
+                <a:ea typeface="Arial" pitchFamily="34" charset="-122"/>
+                <a:cs typeface="Arial" pitchFamily="34" charset="-120"/>
+              </a:rPr>
+              <a:t>[Name]</a:t>
+            </a:r>
+            <a:endParaRPr lang="en-US" sz="2400" dirty="0"/>
+          </a:p>
+        </p:txBody>
+      </p:sp>
+      <p:sp>
+        <p:nvSpPr>
+          <p:cNvPr id="14" name="Text 12"/>
+          <p:cNvSpPr/>
+          <p:nvPr/>
+        </p:nvSpPr>
+        <p:spPr>
+          <a:xfrm>
+            <a:off x="4663440" y="4114800"/>
+            <a:ext cx="2834640" cy="1097280"/>
+          </a:xfrm>
+          <a:prstGeom prst="rect">
+            <a:avLst/>
+          </a:prstGeom>
+          <a:noFill/>
+          <a:ln/>
+        </p:spPr>
+        <p:txBody>
+          <a:bodyPr wrap="square" rtlCol="0" anchor="t"/>
+          <a:lstStyle/>
+          <a:p>
+            <a:pPr indent="0" marL="0">
+              <a:buNone/>
+            </a:pPr>
+            <a:r>
+              <a:rPr lang="en-US" sz="1700" dirty="0">
+                <a:solidFill>
+                  <a:srgbClr val="333333"/>
+                </a:solidFill>
+                <a:latin typeface="Arial" pitchFamily="34" charset="0"/>
+                <a:ea typeface="Arial" pitchFamily="34" charset="-122"/>
+                <a:cs typeface="Arial" pitchFamily="34" charset="-120"/>
+              </a:rPr>
+              <a:t>[Role]</a:t>
+            </a:r>
+            <a:endParaRPr lang="en-US" sz="1700" dirty="0"/>
+          </a:p>
+        </p:txBody>
+      </p:sp>
+      <p:sp>
+        <p:nvSpPr>
+          <p:cNvPr id="15" name="Shape 13"/>
+          <p:cNvSpPr/>
+          <p:nvPr/>
+        </p:nvSpPr>
+        <p:spPr>
+          <a:xfrm>
+            <a:off x="8046720" y="3017520"/>
+            <a:ext cx="3383280" cy="2377440"/>
+          </a:xfrm>
+          <a:prstGeom prst="roundRect">
+            <a:avLst>
+              <a:gd name="adj" fmla="val 6923"/>
+            </a:avLst>
+          </a:prstGeom>
+          <a:solidFill>
+            <a:srgbClr val="FFFFFF"/>
+          </a:solidFill>
+          <a:ln w="12700">
+            <a:solidFill>
+              <a:srgbClr val="E3E9E6"/>
+            </a:solidFill>
+            <a:prstDash val="solid"/>
+          </a:ln>
+          <a:effectLst>
+            <a:outerShdw sx="100000" sy="100000" kx="0" ky="0" algn="bl" rotWithShape="0" blurRad="127000" dist="38100" dir="5400000">
+              <a:srgbClr val="103020">
+                <a:alpha val="12000"/>
+              </a:srgbClr>
+            </a:outerShdw>
+          </a:effectLst>
+        </p:spPr>
+      </p:sp>
+      <p:sp>
+        <p:nvSpPr>
+          <p:cNvPr id="16" name="Text 14"/>
+          <p:cNvSpPr/>
+          <p:nvPr/>
+        </p:nvSpPr>
+        <p:spPr>
+          <a:xfrm>
+            <a:off x="8321040" y="3200400"/>
+            <a:ext cx="2834640" cy="274320"/>
+          </a:xfrm>
+          <a:prstGeom prst="rect">
+            <a:avLst/>
+          </a:prstGeom>
+          <a:noFill/>
+          <a:ln/>
+        </p:spPr>
+        <p:txBody>
+          <a:bodyPr wrap="square" rtlCol="0" anchor="ctr"/>
+          <a:lstStyle/>
+          <a:p>
+            <a:pPr indent="0" marL="0">
+              <a:buNone/>
+            </a:pPr>
+            <a:r>
+              <a:rPr lang="en-US" sz="1100" b="1" dirty="0">
+                <a:solidFill>
+                  <a:srgbClr val="0F9F6E"/>
+                </a:solidFill>
+                <a:latin typeface="Arial" pitchFamily="34" charset="0"/>
+                <a:ea typeface="Arial" pitchFamily="34" charset="-122"/>
+                <a:cs typeface="Arial" pitchFamily="34" charset="-120"/>
+              </a:rPr>
+              <a:t>ROLE</a:t>
+            </a:r>
+            <a:endParaRPr lang="en-US" sz="1100" dirty="0"/>
+          </a:p>
+        </p:txBody>
+      </p:sp>
+      <p:sp>
+        <p:nvSpPr>
+          <p:cNvPr id="17" name="Text 15"/>
+          <p:cNvSpPr/>
+          <p:nvPr/>
+        </p:nvSpPr>
+        <p:spPr>
+          <a:xfrm>
+            <a:off x="8321040" y="3520440"/>
+            <a:ext cx="2834640" cy="548640"/>
+          </a:xfrm>
+          <a:prstGeom prst="rect">
+            <a:avLst/>
+          </a:prstGeom>
+          <a:noFill/>
+          <a:ln/>
+        </p:spPr>
+        <p:txBody>
+          <a:bodyPr wrap="square" rtlCol="0" anchor="ctr"/>
+          <a:lstStyle/>
+          <a:p>
+            <a:pPr indent="0" marL="0">
+              <a:buNone/>
+            </a:pPr>
+            <a:r>
+              <a:rPr lang="en-US" sz="2400" b="1" dirty="0">
+                <a:solidFill>
+                  <a:srgbClr val="0F9F6E"/>
+                </a:solidFill>
+                <a:latin typeface="Arial" pitchFamily="34" charset="0"/>
+                <a:ea typeface="Arial" pitchFamily="34" charset="-122"/>
+                <a:cs typeface="Arial" pitchFamily="34" charset="-120"/>
+              </a:rPr>
+              <a:t>[Name]</a:t>
+            </a:r>
+            <a:endParaRPr lang="en-US" sz="2400" dirty="0"/>
+          </a:p>
+        </p:txBody>
+      </p:sp>
+      <p:sp>
+        <p:nvSpPr>
+          <p:cNvPr id="18" name="Text 16"/>
+          <p:cNvSpPr/>
+          <p:nvPr/>
+        </p:nvSpPr>
+        <p:spPr>
+          <a:xfrm>
+            <a:off x="8321040" y="4114800"/>
+            <a:ext cx="2834640" cy="1097280"/>
+          </a:xfrm>
+          <a:prstGeom prst="rect">
+            <a:avLst/>
+          </a:prstGeom>
+          <a:noFill/>
+          <a:ln/>
+        </p:spPr>
+        <p:txBody>
+          <a:bodyPr wrap="square" rtlCol="0" anchor="t"/>
+          <a:lstStyle/>
+          <a:p>
+            <a:pPr indent="0" marL="0">
+              <a:buNone/>
+            </a:pPr>
+            <a:r>
+              <a:rPr lang="en-US" sz="1700" dirty="0">
+                <a:solidFill>
+                  <a:srgbClr val="333333"/>
+                </a:solidFill>
+                <a:latin typeface="Arial" pitchFamily="34" charset="0"/>
+                <a:ea typeface="Arial" pitchFamily="34" charset="-122"/>
+                <a:cs typeface="Arial" pitchFamily="34" charset="-120"/>
+              </a:rPr>
+              <a:t>[Role]</a:t>
+            </a:r>
+            <a:endParaRPr lang="en-US" sz="1700" dirty="0"/>
+          </a:p>
+        </p:txBody>
+      </p:sp>
+    </p:spTree>
+  </p:cSld>
+  <p:clrMapOvr>
+    <a:masterClrMapping/>
+  </p:clrMapOvr>
+</p:sld>
+</file>
+
+<file path=ppt/slides/slide9.xml><?xml version="1.0" encoding="utf-8"?>
+<p:sld xmlns:a="http://schemas.openxmlformats.org/drawingml/2006/main" xmlns:r="http://schemas.openxmlformats.org/officeDocument/2006/relationships" xmlns:p="http://schemas.openxmlformats.org/presentationml/2006/main">
+  <p:cSld name="Slide 9">
+    <p:bg>
+      <p:bgPr>
+        <a:solidFill>
+          <a:srgbClr val="F4F7F6"/>
+        </a:solidFill>
+      </p:bgPr>
+    </p:bg>
+    <p:spTree>
+      <p:nvGrpSpPr>
+        <p:cNvPr id="1" name=""/>
+        <p:cNvGrpSpPr/>
+        <p:nvPr/>
+      </p:nvGrpSpPr>
+      <p:grpSpPr>
+        <a:xfrm>
+          <a:off x="0" y="0"/>
+          <a:ext cx="0" cy="0"/>
+          <a:chOff x="0" y="0"/>
+          <a:chExt cx="0" cy="0"/>
+        </a:xfrm>
+      </p:grpSpPr>
+      <p:sp>
+        <p:nvSpPr>
+          <p:cNvPr id="2" name="Text 0"/>
+          <p:cNvSpPr/>
+          <p:nvPr/>
+        </p:nvSpPr>
+        <p:spPr>
+          <a:xfrm>
+            <a:off x="731520" y="640080"/>
+            <a:ext cx="5029200" cy="365760"/>
+          </a:xfrm>
+          <a:prstGeom prst="roundRect">
+            <a:avLst>
+              <a:gd name="adj" fmla="val 50000"/>
+            </a:avLst>
+          </a:prstGeom>
+          <a:solidFill>
+            <a:srgbClr val="E8F7F0"/>
+          </a:solidFill>
+          <a:ln/>
+        </p:spPr>
+        <p:txBody>
+          <a:bodyPr wrap="square" rtlCol="0" anchor="ctr"/>
+          <a:lstStyle/>
+          <a:p>
+            <a:pPr algn="ctr" indent="0" marL="0">
+              <a:buNone/>
+            </a:pPr>
+            <a:r>
+              <a:rPr lang="en-US" sz="1200" b="1" spc="200" kern="0" dirty="0">
+                <a:solidFill>
+                  <a:srgbClr val="0B8A5E"/>
+                </a:solidFill>
+                <a:latin typeface="Arial" pitchFamily="34" charset="0"/>
+                <a:ea typeface="Arial" pitchFamily="34" charset="-122"/>
+                <a:cs typeface="Arial" pitchFamily="34" charset="-120"/>
+              </a:rPr>
+              <a:t>08 // THE ASK · 15 SEC</a:t>
+            </a:r>
+            <a:endParaRPr lang="en-US" sz="1200" dirty="0"/>
+          </a:p>
+        </p:txBody>
+      </p:sp>
+      <p:sp>
+        <p:nvSpPr>
+          <p:cNvPr id="3" name="Text 1"/>
+          <p:cNvSpPr/>
+          <p:nvPr/>
+        </p:nvSpPr>
+        <p:spPr>
+          <a:xfrm>
+            <a:off x="731520" y="6400800"/>
+            <a:ext cx="3657600" cy="274320"/>
+          </a:xfrm>
+          <a:prstGeom prst="rect">
+            <a:avLst/>
+          </a:prstGeom>
+          <a:noFill/>
+          <a:ln/>
+        </p:spPr>
+        <p:txBody>
+          <a:bodyPr wrap="square" rtlCol="0" anchor="ctr"/>
+          <a:lstStyle/>
+          <a:p>
+            <a:pPr indent="0" marL="0">
+              <a:buNone/>
+            </a:pPr>
+            <a:r>
+              <a:rPr lang="en-US" sz="1000" dirty="0">
+                <a:solidFill>
+                  <a:srgbClr val="5F6F68"/>
+                </a:solidFill>
+                <a:latin typeface="Arial" pitchFamily="34" charset="0"/>
+                <a:ea typeface="Arial" pitchFamily="34" charset="-122"/>
+                <a:cs typeface="Arial" pitchFamily="34" charset="-120"/>
+              </a:rPr>
+              <a:t>MISH SENIOR</a:t>
+            </a:r>
+            <a:endParaRPr lang="en-US" sz="1000" dirty="0"/>
+          </a:p>
+        </p:txBody>
+      </p:sp>
+      <p:sp>
+        <p:nvSpPr>
+          <p:cNvPr id="4" name="Text 2"/>
+          <p:cNvSpPr/>
+          <p:nvPr/>
+        </p:nvSpPr>
+        <p:spPr>
+          <a:xfrm>
+            <a:off x="8686800" y="6400800"/>
+            <a:ext cx="2743200" cy="274320"/>
+          </a:xfrm>
+          <a:prstGeom prst="rect">
+            <a:avLst/>
+          </a:prstGeom>
+          <a:noFill/>
+          <a:ln/>
+        </p:spPr>
+        <p:txBody>
+          <a:bodyPr wrap="square" rtlCol="0" anchor="ctr"/>
+          <a:lstStyle/>
+          <a:p>
+            <a:pPr algn="r" indent="0" marL="0">
+              <a:buNone/>
+            </a:pPr>
+            <a:r>
+              <a:rPr lang="en-US" sz="1000" dirty="0">
+                <a:solidFill>
+                  <a:srgbClr val="5F6F68"/>
+                </a:solidFill>
+                <a:latin typeface="Arial" pitchFamily="34" charset="0"/>
+                <a:ea typeface="Arial" pitchFamily="34" charset="-122"/>
+                <a:cs typeface="Arial" pitchFamily="34" charset="-120"/>
+              </a:rPr>
+              <a:t>09 / 09</a:t>
             </a:r>
             <a:endParaRPr lang="en-US" sz="1000" dirty="0"/>
           </a:p>

--- a/presentation/Mish-Senior-Pitch.pptx
+++ b/presentation/Mish-Senior-Pitch.pptx
@@ -4235,7 +4235,7 @@
         <p:spPr>
           <a:xfrm>
             <a:off x="731520" y="2286000"/>
-            <a:ext cx="3108960" cy="0"/>
+            <a:ext cx="3291840" cy="0"/>
           </a:xfrm>
           <a:prstGeom prst="line">
             <a:avLst/>
@@ -4258,7 +4258,7 @@
         <p:spPr>
           <a:xfrm>
             <a:off x="731520" y="2377440"/>
-            <a:ext cx="3108960" cy="274320"/>
+            <a:ext cx="3291840" cy="274320"/>
           </a:xfrm>
           <a:prstGeom prst="rect">
             <a:avLst/>
@@ -4297,23 +4297,23 @@
         <p:spPr>
           <a:xfrm>
             <a:off x="731520" y="2697480"/>
-            <a:ext cx="3108960" cy="548640"/>
-          </a:xfrm>
-          <a:prstGeom prst="rect">
-            <a:avLst/>
-          </a:prstGeom>
-          <a:noFill/>
-          <a:ln/>
-        </p:spPr>
-        <p:txBody>
-          <a:bodyPr wrap="square" rtlCol="0" anchor="ctr"/>
-          <a:lstStyle/>
-          <a:p>
-            <a:pPr indent="0" marL="0">
-              <a:buNone/>
-            </a:pPr>
-            <a:r>
-              <a:rPr lang="en-US" sz="2000" b="1" dirty="0">
+            <a:ext cx="3383280" cy="548640"/>
+          </a:xfrm>
+          <a:prstGeom prst="rect">
+            <a:avLst/>
+          </a:prstGeom>
+          <a:noFill/>
+          <a:ln/>
+        </p:spPr>
+        <p:txBody>
+          <a:bodyPr wrap="square" rtlCol="0" anchor="ctr"/>
+          <a:lstStyle/>
+          <a:p>
+            <a:pPr indent="0" marL="0">
+              <a:buNone/>
+            </a:pPr>
+            <a:r>
+              <a:rPr lang="en-US" sz="1800" b="1" dirty="0">
                 <a:solidFill>
                   <a:srgbClr val="0F1F1A"/>
                 </a:solidFill>
@@ -4323,7 +4323,7 @@
               </a:rPr>
               <a:t>Fresh IT graduates</a:t>
             </a:r>
-            <a:endParaRPr lang="en-US" sz="2000" dirty="0"/>
+            <a:endParaRPr lang="en-US" sz="1800" dirty="0"/>
           </a:p>
         </p:txBody>
       </p:sp>
@@ -4336,7 +4336,7 @@
         <p:spPr>
           <a:xfrm>
             <a:off x="731520" y="3520440"/>
-            <a:ext cx="3108960" cy="0"/>
+            <a:ext cx="3291840" cy="0"/>
           </a:xfrm>
           <a:prstGeom prst="line">
             <a:avLst/>
@@ -4359,7 +4359,7 @@
         <p:spPr>
           <a:xfrm>
             <a:off x="731520" y="3611880"/>
-            <a:ext cx="3108960" cy="274320"/>
+            <a:ext cx="3291840" cy="274320"/>
           </a:xfrm>
           <a:prstGeom prst="rect">
             <a:avLst/>
@@ -4398,23 +4398,23 @@
         <p:spPr>
           <a:xfrm>
             <a:off x="731520" y="3931920"/>
-            <a:ext cx="3108960" cy="548640"/>
-          </a:xfrm>
-          <a:prstGeom prst="rect">
-            <a:avLst/>
-          </a:prstGeom>
-          <a:noFill/>
-          <a:ln/>
-        </p:spPr>
-        <p:txBody>
-          <a:bodyPr wrap="square" rtlCol="0" anchor="ctr"/>
-          <a:lstStyle/>
-          <a:p>
-            <a:pPr indent="0" marL="0">
-              <a:buNone/>
-            </a:pPr>
-            <a:r>
-              <a:rPr lang="en-US" sz="2000" b="1" dirty="0">
+            <a:ext cx="3383280" cy="548640"/>
+          </a:xfrm>
+          <a:prstGeom prst="rect">
+            <a:avLst/>
+          </a:prstGeom>
+          <a:noFill/>
+          <a:ln/>
+        </p:spPr>
+        <p:txBody>
+          <a:bodyPr wrap="square" rtlCol="0" anchor="ctr"/>
+          <a:lstStyle/>
+          <a:p>
+            <a:pPr indent="0" marL="0">
+              <a:buNone/>
+            </a:pPr>
+            <a:r>
+              <a:rPr lang="en-US" sz="2400" b="1" dirty="0">
                 <a:solidFill>
                   <a:srgbClr val="0F9F6E"/>
                 </a:solidFill>
@@ -4422,9 +4422,23 @@
                 <a:ea typeface="Arial" pitchFamily="34" charset="-122"/>
                 <a:cs typeface="Arial" pitchFamily="34" charset="-120"/>
               </a:rPr>
-              <a:t>[# of them in Jordan]</a:t>
-            </a:r>
-            <a:endParaRPr lang="en-US" sz="2000" dirty="0"/>
+              <a:t>4,500+ </a:t>
+            </a:r>
+            <a:pPr indent="0" marL="0">
+              <a:buNone/>
+            </a:pPr>
+            <a:r>
+              <a:rPr lang="en-US" sz="1800" b="1" dirty="0">
+                <a:solidFill>
+                  <a:srgbClr val="0F1F1A"/>
+                </a:solidFill>
+                <a:latin typeface="Arial" pitchFamily="34" charset="0"/>
+                <a:ea typeface="Arial" pitchFamily="34" charset="-122"/>
+                <a:cs typeface="Arial" pitchFamily="34" charset="-120"/>
+              </a:rPr>
+              <a:t>Annual ICT Graduates</a:t>
+            </a:r>
+            <a:endParaRPr lang="en-US" sz="2400" dirty="0"/>
           </a:p>
         </p:txBody>
       </p:sp>
@@ -4437,7 +4451,7 @@
         <p:spPr>
           <a:xfrm>
             <a:off x="731520" y="4754880"/>
-            <a:ext cx="3108960" cy="0"/>
+            <a:ext cx="3291840" cy="0"/>
           </a:xfrm>
           <a:prstGeom prst="line">
             <a:avLst/>
@@ -4460,7 +4474,7 @@
         <p:spPr>
           <a:xfrm>
             <a:off x="731520" y="4846320"/>
-            <a:ext cx="3108960" cy="274320"/>
+            <a:ext cx="3291840" cy="274320"/>
           </a:xfrm>
           <a:prstGeom prst="rect">
             <a:avLst/>
@@ -4499,23 +4513,23 @@
         <p:spPr>
           <a:xfrm>
             <a:off x="731520" y="5166360"/>
-            <a:ext cx="3108960" cy="548640"/>
-          </a:xfrm>
-          <a:prstGeom prst="rect">
-            <a:avLst/>
-          </a:prstGeom>
-          <a:noFill/>
-          <a:ln/>
-        </p:spPr>
-        <p:txBody>
-          <a:bodyPr wrap="square" rtlCol="0" anchor="ctr"/>
-          <a:lstStyle/>
-          <a:p>
-            <a:pPr indent="0" marL="0">
-              <a:buNone/>
-            </a:pPr>
-            <a:r>
-              <a:rPr lang="en-US" sz="2000" b="1" dirty="0">
+            <a:ext cx="3383280" cy="548640"/>
+          </a:xfrm>
+          <a:prstGeom prst="rect">
+            <a:avLst/>
+          </a:prstGeom>
+          <a:noFill/>
+          <a:ln/>
+        </p:spPr>
+        <p:txBody>
+          <a:bodyPr wrap="square" rtlCol="0" anchor="ctr"/>
+          <a:lstStyle/>
+          <a:p>
+            <a:pPr indent="0" marL="0">
+              <a:buNone/>
+            </a:pPr>
+            <a:r>
+              <a:rPr lang="en-US" sz="2400" b="1" dirty="0">
                 <a:solidFill>
                   <a:srgbClr val="0F9F6E"/>
                 </a:solidFill>
@@ -4523,9 +4537,23 @@
                 <a:ea typeface="Arial" pitchFamily="34" charset="-122"/>
                 <a:cs typeface="Arial" pitchFamily="34" charset="-120"/>
               </a:rPr>
-              <a:t>[# of them in MENA]</a:t>
-            </a:r>
-            <a:endParaRPr lang="en-US" sz="2000" dirty="0"/>
+              <a:t>100,000+ </a:t>
+            </a:r>
+            <a:pPr indent="0" marL="0">
+              <a:buNone/>
+            </a:pPr>
+            <a:r>
+              <a:rPr lang="en-US" sz="1800" b="1" dirty="0">
+                <a:solidFill>
+                  <a:srgbClr val="0F1F1A"/>
+                </a:solidFill>
+                <a:latin typeface="Arial" pitchFamily="34" charset="0"/>
+                <a:ea typeface="Arial" pitchFamily="34" charset="-122"/>
+                <a:cs typeface="Arial" pitchFamily="34" charset="-120"/>
+              </a:rPr>
+              <a:t>Annual IT Graduates</a:t>
+            </a:r>
+            <a:endParaRPr lang="en-US" sz="2400" dirty="0"/>
           </a:p>
         </p:txBody>
       </p:sp>
@@ -4685,7 +4713,7 @@
                 <a:ea typeface="Arial" pitchFamily="34" charset="-122"/>
                 <a:cs typeface="Arial" pitchFamily="34" charset="-120"/>
               </a:rPr>
-              <a:t>[COMPETITOR B]</a:t>
+              <a:t>KARAT</a:t>
             </a:r>
             <a:endParaRPr lang="en-US" sz="1200" dirty="0"/>
           </a:p>
@@ -4814,7 +4842,7 @@
                 <a:ea typeface="Arial" pitchFamily="34" charset="-122"/>
                 <a:cs typeface="Arial" pitchFamily="34" charset="-120"/>
               </a:rPr>
-              <a:t>[COMPETITOR C]</a:t>
+              <a:t>HACKERRANK</a:t>
             </a:r>
             <a:endParaRPr lang="en-US" sz="1200" dirty="0"/>
           </a:p>
@@ -4856,49 +4884,6 @@
               <a:t>← SENIORS ONLY          FOR FRESH GRADUATES →</a:t>
             </a:r>
             <a:endParaRPr lang="en-US" sz="1000" dirty="0"/>
-          </a:p>
-        </p:txBody>
-      </p:sp>
-      <p:sp>
-        <p:nvSpPr>
-          <p:cNvPr id="24" name="Text 22"/>
-          <p:cNvSpPr/>
-          <p:nvPr/>
-        </p:nvSpPr>
-        <p:spPr>
-          <a:xfrm>
-            <a:off x="10332720" y="640080"/>
-            <a:ext cx="1097280" cy="365760"/>
-          </a:xfrm>
-          <a:prstGeom prst="roundRect">
-            <a:avLst>
-              <a:gd name="adj" fmla="val 25000"/>
-            </a:avLst>
-          </a:prstGeom>
-          <a:solidFill>
-            <a:srgbClr val="0F1F1A"/>
-          </a:solidFill>
-          <a:ln/>
-        </p:spPr>
-        <p:txBody>
-          <a:bodyPr wrap="square" rtlCol="0" anchor="ctr"/>
-          <a:lstStyle/>
-          <a:p>
-            <a:pPr algn="ctr" indent="0" marL="0">
-              <a:buNone/>
-            </a:pPr>
-            <a:r>
-              <a:rPr lang="en-US" sz="1100" b="1" dirty="0">
-                <a:solidFill>
-                  <a:srgbClr val="FFFFFF"/>
-                </a:solidFill>
-                <a:latin typeface="Arial" pitchFamily="34" charset="0"/>
-                <a:ea typeface="Arial" pitchFamily="34" charset="-122"/>
-                <a:cs typeface="Arial" pitchFamily="34" charset="-120"/>
-              </a:rPr>
-              <a:t>15 SEC</a:t>
-            </a:r>
-            <a:endParaRPr lang="en-US" sz="1100" dirty="0"/>
           </a:p>
         </p:txBody>
       </p:sp>

--- a/presentation/Mish-Senior-Pitch.pptx
+++ b/presentation/Mish-Senior-Pitch.pptx
@@ -5667,11 +5667,11 @@
         <p:spPr>
           <a:xfrm>
             <a:off x="731520" y="3017520"/>
-            <a:ext cx="3383280" cy="2377440"/>
+            <a:ext cx="5303520" cy="2926080"/>
           </a:xfrm>
           <a:prstGeom prst="roundRect">
             <a:avLst>
-              <a:gd name="adj" fmla="val 6923"/>
+              <a:gd name="adj" fmla="val 6250"/>
             </a:avLst>
           </a:prstGeom>
           <a:solidFill>
@@ -5700,8 +5700,8 @@
         </p:nvSpPr>
         <p:spPr>
           <a:xfrm>
-            <a:off x="1005840" y="3200400"/>
-            <a:ext cx="2834640" cy="274320"/>
+            <a:off x="1005840" y="3246120"/>
+            <a:ext cx="4754880" cy="274320"/>
           </a:xfrm>
           <a:prstGeom prst="rect">
             <a:avLst/>
@@ -5725,7 +5725,7 @@
                 <a:ea typeface="Arial" pitchFamily="34" charset="-122"/>
                 <a:cs typeface="Arial" pitchFamily="34" charset="-120"/>
               </a:rPr>
-              <a:t>ROLE</a:t>
+              <a:t>MOBILE APP DEVELOPER</a:t>
             </a:r>
             <a:endParaRPr lang="en-US" sz="1100" dirty="0"/>
           </a:p>
@@ -5739,8 +5739,8 @@
         </p:nvSpPr>
         <p:spPr>
           <a:xfrm>
-            <a:off x="1005840" y="3520440"/>
-            <a:ext cx="2834640" cy="548640"/>
+            <a:off x="1005840" y="3566160"/>
+            <a:ext cx="4754880" cy="548640"/>
           </a:xfrm>
           <a:prstGeom prst="rect">
             <a:avLst/>
@@ -5758,13 +5758,13 @@
             <a:r>
               <a:rPr lang="en-US" sz="2400" b="1" dirty="0">
                 <a:solidFill>
-                  <a:srgbClr val="0F9F6E"/>
-                </a:solidFill>
-                <a:latin typeface="Arial" pitchFamily="34" charset="0"/>
-                <a:ea typeface="Arial" pitchFamily="34" charset="-122"/>
-                <a:cs typeface="Arial" pitchFamily="34" charset="-120"/>
-              </a:rPr>
-              <a:t>[Name]</a:t>
+                  <a:srgbClr val="0F1F1A"/>
+                </a:solidFill>
+                <a:latin typeface="Arial" pitchFamily="34" charset="0"/>
+                <a:ea typeface="Arial" pitchFamily="34" charset="-122"/>
+                <a:cs typeface="Arial" pitchFamily="34" charset="-120"/>
+              </a:rPr>
+              <a:t>Dana Alamm</a:t>
             </a:r>
             <a:endParaRPr lang="en-US" sz="2400" dirty="0"/>
           </a:p>
@@ -5778,8 +5778,8 @@
         </p:nvSpPr>
         <p:spPr>
           <a:xfrm>
-            <a:off x="1005840" y="4114800"/>
-            <a:ext cx="2834640" cy="1097280"/>
+            <a:off x="1005840" y="4160520"/>
+            <a:ext cx="4754880" cy="1645920"/>
           </a:xfrm>
           <a:prstGeom prst="rect">
             <a:avLst/>
@@ -5795,17 +5795,17 @@
               <a:buNone/>
             </a:pPr>
             <a:r>
-              <a:rPr lang="en-US" sz="1700" dirty="0">
-                <a:solidFill>
-                  <a:srgbClr val="333333"/>
-                </a:solidFill>
-                <a:latin typeface="Arial" pitchFamily="34" charset="0"/>
-                <a:ea typeface="Arial" pitchFamily="34" charset="-122"/>
-                <a:cs typeface="Arial" pitchFamily="34" charset="-120"/>
-              </a:rPr>
-              <a:t>[Role]</a:t>
-            </a:r>
-            <a:endParaRPr lang="en-US" sz="1700" dirty="0"/>
+              <a:rPr lang="en-US" sz="1800" dirty="0">
+                <a:solidFill>
+                  <a:srgbClr val="222222"/>
+                </a:solidFill>
+                <a:latin typeface="Arial" pitchFamily="34" charset="0"/>
+                <a:ea typeface="Arial" pitchFamily="34" charset="-122"/>
+                <a:cs typeface="Arial" pitchFamily="34" charset="-120"/>
+              </a:rPr>
+              <a:t>Mobile app developer</a:t>
+            </a:r>
+            <a:endParaRPr lang="en-US" sz="1800" dirty="0"/>
           </a:p>
         </p:txBody>
       </p:sp>
@@ -5817,20 +5817,20 @@
         </p:nvSpPr>
         <p:spPr>
           <a:xfrm>
-            <a:off x="4389120" y="3017520"/>
-            <a:ext cx="3383280" cy="2377440"/>
+            <a:off x="6153912" y="3017520"/>
+            <a:ext cx="5303520" cy="2926080"/>
           </a:xfrm>
           <a:prstGeom prst="roundRect">
             <a:avLst>
-              <a:gd name="adj" fmla="val 6923"/>
+              <a:gd name="adj" fmla="val 6250"/>
             </a:avLst>
           </a:prstGeom>
           <a:solidFill>
             <a:srgbClr val="FFFFFF"/>
           </a:solidFill>
-          <a:ln w="12700">
+          <a:ln w="25400">
             <a:solidFill>
-              <a:srgbClr val="E3E9E6"/>
+              <a:srgbClr val="0F9F6E"/>
             </a:solidFill>
             <a:prstDash val="solid"/>
           </a:ln>
@@ -5851,8 +5851,8 @@
         </p:nvSpPr>
         <p:spPr>
           <a:xfrm>
-            <a:off x="4663440" y="3200400"/>
-            <a:ext cx="2834640" cy="274320"/>
+            <a:off x="6428232" y="3246120"/>
+            <a:ext cx="4754880" cy="274320"/>
           </a:xfrm>
           <a:prstGeom prst="rect">
             <a:avLst/>
@@ -5876,7 +5876,7 @@
                 <a:ea typeface="Arial" pitchFamily="34" charset="-122"/>
                 <a:cs typeface="Arial" pitchFamily="34" charset="-120"/>
               </a:rPr>
-              <a:t>ROLE</a:t>
+              <a:t>MOBILE APP DEVELOPER</a:t>
             </a:r>
             <a:endParaRPr lang="en-US" sz="1100" dirty="0"/>
           </a:p>
@@ -5890,8 +5890,8 @@
         </p:nvSpPr>
         <p:spPr>
           <a:xfrm>
-            <a:off x="4663440" y="3520440"/>
-            <a:ext cx="2834640" cy="548640"/>
+            <a:off x="6428232" y="3566160"/>
+            <a:ext cx="4754880" cy="548640"/>
           </a:xfrm>
           <a:prstGeom prst="rect">
             <a:avLst/>
@@ -5909,13 +5909,13 @@
             <a:r>
               <a:rPr lang="en-US" sz="2400" b="1" dirty="0">
                 <a:solidFill>
-                  <a:srgbClr val="0F9F6E"/>
-                </a:solidFill>
-                <a:latin typeface="Arial" pitchFamily="34" charset="0"/>
-                <a:ea typeface="Arial" pitchFamily="34" charset="-122"/>
-                <a:cs typeface="Arial" pitchFamily="34" charset="-120"/>
-              </a:rPr>
-              <a:t>[Name]</a:t>
+                  <a:srgbClr val="0F1F1A"/>
+                </a:solidFill>
+                <a:latin typeface="Arial" pitchFamily="34" charset="0"/>
+                <a:ea typeface="Arial" pitchFamily="34" charset="-122"/>
+                <a:cs typeface="Arial" pitchFamily="34" charset="-120"/>
+              </a:rPr>
+              <a:t>Alaa Qtishat</a:t>
             </a:r>
             <a:endParaRPr lang="en-US" sz="2400" dirty="0"/>
           </a:p>
@@ -5929,8 +5929,8 @@
         </p:nvSpPr>
         <p:spPr>
           <a:xfrm>
-            <a:off x="4663440" y="4114800"/>
-            <a:ext cx="2834640" cy="1097280"/>
+            <a:off x="6428232" y="4160520"/>
+            <a:ext cx="4754880" cy="1645920"/>
           </a:xfrm>
           <a:prstGeom prst="rect">
             <a:avLst/>
@@ -5946,168 +5946,17 @@
               <a:buNone/>
             </a:pPr>
             <a:r>
-              <a:rPr lang="en-US" sz="1700" dirty="0">
-                <a:solidFill>
-                  <a:srgbClr val="333333"/>
-                </a:solidFill>
-                <a:latin typeface="Arial" pitchFamily="34" charset="0"/>
-                <a:ea typeface="Arial" pitchFamily="34" charset="-122"/>
-                <a:cs typeface="Arial" pitchFamily="34" charset="-120"/>
-              </a:rPr>
-              <a:t>[Role]</a:t>
-            </a:r>
-            <a:endParaRPr lang="en-US" sz="1700" dirty="0"/>
-          </a:p>
-        </p:txBody>
-      </p:sp>
-      <p:sp>
-        <p:nvSpPr>
-          <p:cNvPr id="15" name="Shape 13"/>
-          <p:cNvSpPr/>
-          <p:nvPr/>
-        </p:nvSpPr>
-        <p:spPr>
-          <a:xfrm>
-            <a:off x="8046720" y="3017520"/>
-            <a:ext cx="3383280" cy="2377440"/>
-          </a:xfrm>
-          <a:prstGeom prst="roundRect">
-            <a:avLst>
-              <a:gd name="adj" fmla="val 6923"/>
-            </a:avLst>
-          </a:prstGeom>
-          <a:solidFill>
-            <a:srgbClr val="FFFFFF"/>
-          </a:solidFill>
-          <a:ln w="12700">
-            <a:solidFill>
-              <a:srgbClr val="E3E9E6"/>
-            </a:solidFill>
-            <a:prstDash val="solid"/>
-          </a:ln>
-          <a:effectLst>
-            <a:outerShdw sx="100000" sy="100000" kx="0" ky="0" algn="bl" rotWithShape="0" blurRad="127000" dist="38100" dir="5400000">
-              <a:srgbClr val="103020">
-                <a:alpha val="12000"/>
-              </a:srgbClr>
-            </a:outerShdw>
-          </a:effectLst>
-        </p:spPr>
-      </p:sp>
-      <p:sp>
-        <p:nvSpPr>
-          <p:cNvPr id="16" name="Text 14"/>
-          <p:cNvSpPr/>
-          <p:nvPr/>
-        </p:nvSpPr>
-        <p:spPr>
-          <a:xfrm>
-            <a:off x="8321040" y="3200400"/>
-            <a:ext cx="2834640" cy="274320"/>
-          </a:xfrm>
-          <a:prstGeom prst="rect">
-            <a:avLst/>
-          </a:prstGeom>
-          <a:noFill/>
-          <a:ln/>
-        </p:spPr>
-        <p:txBody>
-          <a:bodyPr wrap="square" rtlCol="0" anchor="ctr"/>
-          <a:lstStyle/>
-          <a:p>
-            <a:pPr indent="0" marL="0">
-              <a:buNone/>
-            </a:pPr>
-            <a:r>
-              <a:rPr lang="en-US" sz="1100" b="1" dirty="0">
-                <a:solidFill>
-                  <a:srgbClr val="0F9F6E"/>
-                </a:solidFill>
-                <a:latin typeface="Arial" pitchFamily="34" charset="0"/>
-                <a:ea typeface="Arial" pitchFamily="34" charset="-122"/>
-                <a:cs typeface="Arial" pitchFamily="34" charset="-120"/>
-              </a:rPr>
-              <a:t>ROLE</a:t>
-            </a:r>
-            <a:endParaRPr lang="en-US" sz="1100" dirty="0"/>
-          </a:p>
-        </p:txBody>
-      </p:sp>
-      <p:sp>
-        <p:nvSpPr>
-          <p:cNvPr id="17" name="Text 15"/>
-          <p:cNvSpPr/>
-          <p:nvPr/>
-        </p:nvSpPr>
-        <p:spPr>
-          <a:xfrm>
-            <a:off x="8321040" y="3520440"/>
-            <a:ext cx="2834640" cy="548640"/>
-          </a:xfrm>
-          <a:prstGeom prst="rect">
-            <a:avLst/>
-          </a:prstGeom>
-          <a:noFill/>
-          <a:ln/>
-        </p:spPr>
-        <p:txBody>
-          <a:bodyPr wrap="square" rtlCol="0" anchor="ctr"/>
-          <a:lstStyle/>
-          <a:p>
-            <a:pPr indent="0" marL="0">
-              <a:buNone/>
-            </a:pPr>
-            <a:r>
-              <a:rPr lang="en-US" sz="2400" b="1" dirty="0">
-                <a:solidFill>
-                  <a:srgbClr val="0F9F6E"/>
-                </a:solidFill>
-                <a:latin typeface="Arial" pitchFamily="34" charset="0"/>
-                <a:ea typeface="Arial" pitchFamily="34" charset="-122"/>
-                <a:cs typeface="Arial" pitchFamily="34" charset="-120"/>
-              </a:rPr>
-              <a:t>[Name]</a:t>
-            </a:r>
-            <a:endParaRPr lang="en-US" sz="2400" dirty="0"/>
-          </a:p>
-        </p:txBody>
-      </p:sp>
-      <p:sp>
-        <p:nvSpPr>
-          <p:cNvPr id="18" name="Text 16"/>
-          <p:cNvSpPr/>
-          <p:nvPr/>
-        </p:nvSpPr>
-        <p:spPr>
-          <a:xfrm>
-            <a:off x="8321040" y="4114800"/>
-            <a:ext cx="2834640" cy="1097280"/>
-          </a:xfrm>
-          <a:prstGeom prst="rect">
-            <a:avLst/>
-          </a:prstGeom>
-          <a:noFill/>
-          <a:ln/>
-        </p:spPr>
-        <p:txBody>
-          <a:bodyPr wrap="square" rtlCol="0" anchor="t"/>
-          <a:lstStyle/>
-          <a:p>
-            <a:pPr indent="0" marL="0">
-              <a:buNone/>
-            </a:pPr>
-            <a:r>
-              <a:rPr lang="en-US" sz="1700" dirty="0">
-                <a:solidFill>
-                  <a:srgbClr val="333333"/>
-                </a:solidFill>
-                <a:latin typeface="Arial" pitchFamily="34" charset="0"/>
-                <a:ea typeface="Arial" pitchFamily="34" charset="-122"/>
-                <a:cs typeface="Arial" pitchFamily="34" charset="-120"/>
-              </a:rPr>
-              <a:t>[Role]</a:t>
-            </a:r>
-            <a:endParaRPr lang="en-US" sz="1700" dirty="0"/>
+              <a:rPr lang="en-US" sz="1800" dirty="0">
+                <a:solidFill>
+                  <a:srgbClr val="222222"/>
+                </a:solidFill>
+                <a:latin typeface="Arial" pitchFamily="34" charset="0"/>
+                <a:ea typeface="Arial" pitchFamily="34" charset="-122"/>
+                <a:cs typeface="Arial" pitchFamily="34" charset="-120"/>
+              </a:rPr>
+              <a:t>Mobile app developer</a:t>
+            </a:r>
+            <a:endParaRPr lang="en-US" sz="1800" dirty="0"/>
           </a:p>
         </p:txBody>
       </p:sp>
